--- a/tests/corpus/pptx/generated/geometry-presets.pptx
+++ b/tests/corpus/pptx/generated/geometry-presets.pptx
@@ -136,7 +136,7 @@
           <p:cNvPr id="2" name="Titel 1">
             <a:extLst>
               <a:ext uri="{FF2B5EF4-FFF2-40B4-BE49-F238E27FC236}">
-                <a16:creationId xmlns:a16="http://schemas.microsoft.com/office/drawing/2014/main" id="{29014123-8A45-6B01-2BB2-22E112E8FE03}"/>
+                <a16:creationId xmlns:a16="http://schemas.microsoft.com/office/drawing/2014/main" id="{E65B54AA-2B65-0051-0816-FE67CFAEDEA4}"/>
               </a:ext>
             </a:extLst>
           </p:cNvPr>
@@ -173,7 +173,7 @@
           <p:cNvPr id="3" name="Untertitel 2">
             <a:extLst>
               <a:ext uri="{FF2B5EF4-FFF2-40B4-BE49-F238E27FC236}">
-                <a16:creationId xmlns:a16="http://schemas.microsoft.com/office/drawing/2014/main" id="{C6AFE139-545F-4B89-7901-5A4B7528425F}"/>
+                <a16:creationId xmlns:a16="http://schemas.microsoft.com/office/drawing/2014/main" id="{06BE8885-77C5-0C81-EE72-32F6D7C5858F}"/>
               </a:ext>
             </a:extLst>
           </p:cNvPr>
@@ -243,7 +243,7 @@
           <p:cNvPr id="4" name="Datumsplatzhalter 3">
             <a:extLst>
               <a:ext uri="{FF2B5EF4-FFF2-40B4-BE49-F238E27FC236}">
-                <a16:creationId xmlns:a16="http://schemas.microsoft.com/office/drawing/2014/main" id="{F684C94F-C374-8C30-6A51-4292D8DD7EF8}"/>
+                <a16:creationId xmlns:a16="http://schemas.microsoft.com/office/drawing/2014/main" id="{FC38C67B-F7A7-C455-AC8B-D9806DFED74F}"/>
               </a:ext>
             </a:extLst>
           </p:cNvPr>
@@ -259,7 +259,7 @@
           <a:bodyPr/>
           <a:lstStyle/>
           <a:p>
-            <a:fld id="{F2B3DCA7-4954-48E9-BB06-E8D867B735F4}" type="datetimeFigureOut">
+            <a:fld id="{1E2958D6-7BA5-43D1-8E71-6918D76CD7C0}" type="datetimeFigureOut">
               <a:rPr lang="de-DE" smtClean="0"/>
               <a:t>08.10.2026</a:t>
             </a:fld>
@@ -272,7 +272,7 @@
           <p:cNvPr id="5" name="Fußzeilenplatzhalter 4">
             <a:extLst>
               <a:ext uri="{FF2B5EF4-FFF2-40B4-BE49-F238E27FC236}">
-                <a16:creationId xmlns:a16="http://schemas.microsoft.com/office/drawing/2014/main" id="{A0233DAA-B441-AF37-EB88-FA883497122F}"/>
+                <a16:creationId xmlns:a16="http://schemas.microsoft.com/office/drawing/2014/main" id="{01539F2D-1975-1B90-85CC-DF9E116BC926}"/>
               </a:ext>
             </a:extLst>
           </p:cNvPr>
@@ -297,7 +297,7 @@
           <p:cNvPr id="6" name="Foliennummernplatzhalter 5">
             <a:extLst>
               <a:ext uri="{FF2B5EF4-FFF2-40B4-BE49-F238E27FC236}">
-                <a16:creationId xmlns:a16="http://schemas.microsoft.com/office/drawing/2014/main" id="{4195FE69-808F-2EFB-D9CB-5BD7BCD2BD63}"/>
+                <a16:creationId xmlns:a16="http://schemas.microsoft.com/office/drawing/2014/main" id="{7F3675D4-6D58-CDB4-07EE-09CE030A45F3}"/>
               </a:ext>
             </a:extLst>
           </p:cNvPr>
@@ -313,7 +313,7 @@
           <a:bodyPr/>
           <a:lstStyle/>
           <a:p>
-            <a:fld id="{7999F909-3697-4CE1-8820-ACCACBBF8410}" type="slidenum">
+            <a:fld id="{2CF23A79-0A54-4736-B307-85B70C860758}" type="slidenum">
               <a:rPr lang="de-DE" smtClean="0"/>
               <a:t>‹Nr.›</a:t>
             </a:fld>
@@ -324,7 +324,7 @@
     </p:spTree>
     <p:extLst>
       <p:ext uri="{BB962C8B-B14F-4D97-AF65-F5344CB8AC3E}">
-        <p14:creationId xmlns:p14="http://schemas.microsoft.com/office/powerpoint/2010/main" val="851681587"/>
+        <p14:creationId xmlns:p14="http://schemas.microsoft.com/office/powerpoint/2010/main" val="1134835269"/>
       </p:ext>
     </p:extLst>
   </p:cSld>
@@ -356,7 +356,7 @@
           <p:cNvPr id="2" name="Titel 1">
             <a:extLst>
               <a:ext uri="{FF2B5EF4-FFF2-40B4-BE49-F238E27FC236}">
-                <a16:creationId xmlns:a16="http://schemas.microsoft.com/office/drawing/2014/main" id="{9C6E577C-DAE3-932A-FC69-2E4BD9392A5D}"/>
+                <a16:creationId xmlns:a16="http://schemas.microsoft.com/office/drawing/2014/main" id="{497CB3DC-5A48-5BFB-1731-4C80D7BA1E41}"/>
               </a:ext>
             </a:extLst>
           </p:cNvPr>
@@ -384,7 +384,7 @@
           <p:cNvPr id="3" name="Vertikaler Textplatzhalter 2">
             <a:extLst>
               <a:ext uri="{FF2B5EF4-FFF2-40B4-BE49-F238E27FC236}">
-                <a16:creationId xmlns:a16="http://schemas.microsoft.com/office/drawing/2014/main" id="{666A9B59-2FBE-DA8D-4313-0F7B9D19CB70}"/>
+                <a16:creationId xmlns:a16="http://schemas.microsoft.com/office/drawing/2014/main" id="{5D8F3457-9D5C-174B-8846-EFC8E09EBD83}"/>
               </a:ext>
             </a:extLst>
           </p:cNvPr>
@@ -441,7 +441,7 @@
           <p:cNvPr id="4" name="Datumsplatzhalter 3">
             <a:extLst>
               <a:ext uri="{FF2B5EF4-FFF2-40B4-BE49-F238E27FC236}">
-                <a16:creationId xmlns:a16="http://schemas.microsoft.com/office/drawing/2014/main" id="{2E1ADB14-161F-AD73-A628-B6BA61D4DF19}"/>
+                <a16:creationId xmlns:a16="http://schemas.microsoft.com/office/drawing/2014/main" id="{474A06C4-B7FE-4742-82F8-4D4E9072FD64}"/>
               </a:ext>
             </a:extLst>
           </p:cNvPr>
@@ -457,7 +457,7 @@
           <a:bodyPr/>
           <a:lstStyle/>
           <a:p>
-            <a:fld id="{F2B3DCA7-4954-48E9-BB06-E8D867B735F4}" type="datetimeFigureOut">
+            <a:fld id="{1E2958D6-7BA5-43D1-8E71-6918D76CD7C0}" type="datetimeFigureOut">
               <a:rPr lang="de-DE" smtClean="0"/>
               <a:t>08.10.2026</a:t>
             </a:fld>
@@ -470,7 +470,7 @@
           <p:cNvPr id="5" name="Fußzeilenplatzhalter 4">
             <a:extLst>
               <a:ext uri="{FF2B5EF4-FFF2-40B4-BE49-F238E27FC236}">
-                <a16:creationId xmlns:a16="http://schemas.microsoft.com/office/drawing/2014/main" id="{DF03A55E-7586-8960-34A7-AFB04B12452A}"/>
+                <a16:creationId xmlns:a16="http://schemas.microsoft.com/office/drawing/2014/main" id="{D7033774-A28D-B572-1CA9-0AE1DF38529F}"/>
               </a:ext>
             </a:extLst>
           </p:cNvPr>
@@ -495,7 +495,7 @@
           <p:cNvPr id="6" name="Foliennummernplatzhalter 5">
             <a:extLst>
               <a:ext uri="{FF2B5EF4-FFF2-40B4-BE49-F238E27FC236}">
-                <a16:creationId xmlns:a16="http://schemas.microsoft.com/office/drawing/2014/main" id="{B7476D66-222C-9566-EDE2-4CD7A2471B0D}"/>
+                <a16:creationId xmlns:a16="http://schemas.microsoft.com/office/drawing/2014/main" id="{F7FCAB99-B804-1BB6-5638-C7277009D2EF}"/>
               </a:ext>
             </a:extLst>
           </p:cNvPr>
@@ -511,7 +511,7 @@
           <a:bodyPr/>
           <a:lstStyle/>
           <a:p>
-            <a:fld id="{7999F909-3697-4CE1-8820-ACCACBBF8410}" type="slidenum">
+            <a:fld id="{2CF23A79-0A54-4736-B307-85B70C860758}" type="slidenum">
               <a:rPr lang="de-DE" smtClean="0"/>
               <a:t>‹Nr.›</a:t>
             </a:fld>
@@ -522,7 +522,7 @@
     </p:spTree>
     <p:extLst>
       <p:ext uri="{BB962C8B-B14F-4D97-AF65-F5344CB8AC3E}">
-        <p14:creationId xmlns:p14="http://schemas.microsoft.com/office/powerpoint/2010/main" val="2838326729"/>
+        <p14:creationId xmlns:p14="http://schemas.microsoft.com/office/powerpoint/2010/main" val="1995405968"/>
       </p:ext>
     </p:extLst>
   </p:cSld>
@@ -554,7 +554,7 @@
           <p:cNvPr id="2" name="Vertikaler Titel 1">
             <a:extLst>
               <a:ext uri="{FF2B5EF4-FFF2-40B4-BE49-F238E27FC236}">
-                <a16:creationId xmlns:a16="http://schemas.microsoft.com/office/drawing/2014/main" id="{5FBF6C2D-2666-5500-724A-5844F9404834}"/>
+                <a16:creationId xmlns:a16="http://schemas.microsoft.com/office/drawing/2014/main" id="{9D5FAA5A-56CE-0993-CA9E-5877BF7E3474}"/>
               </a:ext>
             </a:extLst>
           </p:cNvPr>
@@ -587,7 +587,7 @@
           <p:cNvPr id="3" name="Vertikaler Textplatzhalter 2">
             <a:extLst>
               <a:ext uri="{FF2B5EF4-FFF2-40B4-BE49-F238E27FC236}">
-                <a16:creationId xmlns:a16="http://schemas.microsoft.com/office/drawing/2014/main" id="{36A4964F-BFDF-8E29-3598-C91630D11C37}"/>
+                <a16:creationId xmlns:a16="http://schemas.microsoft.com/office/drawing/2014/main" id="{53F80BAA-CF28-9FF1-0039-6EC38D29EDA8}"/>
               </a:ext>
             </a:extLst>
           </p:cNvPr>
@@ -649,7 +649,7 @@
           <p:cNvPr id="4" name="Datumsplatzhalter 3">
             <a:extLst>
               <a:ext uri="{FF2B5EF4-FFF2-40B4-BE49-F238E27FC236}">
-                <a16:creationId xmlns:a16="http://schemas.microsoft.com/office/drawing/2014/main" id="{B132B5FF-E9F6-04F4-9FB3-23B1FF9FA262}"/>
+                <a16:creationId xmlns:a16="http://schemas.microsoft.com/office/drawing/2014/main" id="{84B10772-A5AC-7D56-9991-574D4959D4E0}"/>
               </a:ext>
             </a:extLst>
           </p:cNvPr>
@@ -665,7 +665,7 @@
           <a:bodyPr/>
           <a:lstStyle/>
           <a:p>
-            <a:fld id="{F2B3DCA7-4954-48E9-BB06-E8D867B735F4}" type="datetimeFigureOut">
+            <a:fld id="{1E2958D6-7BA5-43D1-8E71-6918D76CD7C0}" type="datetimeFigureOut">
               <a:rPr lang="de-DE" smtClean="0"/>
               <a:t>08.10.2026</a:t>
             </a:fld>
@@ -678,7 +678,7 @@
           <p:cNvPr id="5" name="Fußzeilenplatzhalter 4">
             <a:extLst>
               <a:ext uri="{FF2B5EF4-FFF2-40B4-BE49-F238E27FC236}">
-                <a16:creationId xmlns:a16="http://schemas.microsoft.com/office/drawing/2014/main" id="{A12CB3B4-AD07-5095-DC43-F23C9948DCEB}"/>
+                <a16:creationId xmlns:a16="http://schemas.microsoft.com/office/drawing/2014/main" id="{F97F8183-44EE-33EB-1860-FFCBB8B72B14}"/>
               </a:ext>
             </a:extLst>
           </p:cNvPr>
@@ -703,7 +703,7 @@
           <p:cNvPr id="6" name="Foliennummernplatzhalter 5">
             <a:extLst>
               <a:ext uri="{FF2B5EF4-FFF2-40B4-BE49-F238E27FC236}">
-                <a16:creationId xmlns:a16="http://schemas.microsoft.com/office/drawing/2014/main" id="{A7849CED-F56A-D6B6-FBA5-B71085552580}"/>
+                <a16:creationId xmlns:a16="http://schemas.microsoft.com/office/drawing/2014/main" id="{41D878EA-D025-148C-1BA0-5D12249726EB}"/>
               </a:ext>
             </a:extLst>
           </p:cNvPr>
@@ -719,7 +719,7 @@
           <a:bodyPr/>
           <a:lstStyle/>
           <a:p>
-            <a:fld id="{7999F909-3697-4CE1-8820-ACCACBBF8410}" type="slidenum">
+            <a:fld id="{2CF23A79-0A54-4736-B307-85B70C860758}" type="slidenum">
               <a:rPr lang="de-DE" smtClean="0"/>
               <a:t>‹Nr.›</a:t>
             </a:fld>
@@ -730,7 +730,7 @@
     </p:spTree>
     <p:extLst>
       <p:ext uri="{BB962C8B-B14F-4D97-AF65-F5344CB8AC3E}">
-        <p14:creationId xmlns:p14="http://schemas.microsoft.com/office/powerpoint/2010/main" val="59856495"/>
+        <p14:creationId xmlns:p14="http://schemas.microsoft.com/office/powerpoint/2010/main" val="2961823717"/>
       </p:ext>
     </p:extLst>
   </p:cSld>
@@ -762,7 +762,7 @@
           <p:cNvPr id="2" name="Titel 1">
             <a:extLst>
               <a:ext uri="{FF2B5EF4-FFF2-40B4-BE49-F238E27FC236}">
-                <a16:creationId xmlns:a16="http://schemas.microsoft.com/office/drawing/2014/main" id="{03340211-B738-3F14-0568-212750B82DF5}"/>
+                <a16:creationId xmlns:a16="http://schemas.microsoft.com/office/drawing/2014/main" id="{5084FE53-34D3-736E-44A5-BC1726E2AF42}"/>
               </a:ext>
             </a:extLst>
           </p:cNvPr>
@@ -790,7 +790,7 @@
           <p:cNvPr id="3" name="Inhaltsplatzhalter 2">
             <a:extLst>
               <a:ext uri="{FF2B5EF4-FFF2-40B4-BE49-F238E27FC236}">
-                <a16:creationId xmlns:a16="http://schemas.microsoft.com/office/drawing/2014/main" id="{85B36F60-ABAA-0DE5-321D-1E45366A53F6}"/>
+                <a16:creationId xmlns:a16="http://schemas.microsoft.com/office/drawing/2014/main" id="{780CAE8E-8F7C-B030-965A-3E02387D8FCC}"/>
               </a:ext>
             </a:extLst>
           </p:cNvPr>
@@ -847,7 +847,7 @@
           <p:cNvPr id="4" name="Datumsplatzhalter 3">
             <a:extLst>
               <a:ext uri="{FF2B5EF4-FFF2-40B4-BE49-F238E27FC236}">
-                <a16:creationId xmlns:a16="http://schemas.microsoft.com/office/drawing/2014/main" id="{40FF4D80-0BD8-C07E-A1E8-92749F25EF77}"/>
+                <a16:creationId xmlns:a16="http://schemas.microsoft.com/office/drawing/2014/main" id="{FC3244C0-D5F9-3C74-9579-4AF7D24FE041}"/>
               </a:ext>
             </a:extLst>
           </p:cNvPr>
@@ -863,7 +863,7 @@
           <a:bodyPr/>
           <a:lstStyle/>
           <a:p>
-            <a:fld id="{F2B3DCA7-4954-48E9-BB06-E8D867B735F4}" type="datetimeFigureOut">
+            <a:fld id="{1E2958D6-7BA5-43D1-8E71-6918D76CD7C0}" type="datetimeFigureOut">
               <a:rPr lang="de-DE" smtClean="0"/>
               <a:t>08.10.2026</a:t>
             </a:fld>
@@ -876,7 +876,7 @@
           <p:cNvPr id="5" name="Fußzeilenplatzhalter 4">
             <a:extLst>
               <a:ext uri="{FF2B5EF4-FFF2-40B4-BE49-F238E27FC236}">
-                <a16:creationId xmlns:a16="http://schemas.microsoft.com/office/drawing/2014/main" id="{A9AA087B-1535-7BA2-94E1-C1287DD7D1A8}"/>
+                <a16:creationId xmlns:a16="http://schemas.microsoft.com/office/drawing/2014/main" id="{129FA82E-416F-5B13-3C70-964847FB3FD1}"/>
               </a:ext>
             </a:extLst>
           </p:cNvPr>
@@ -901,7 +901,7 @@
           <p:cNvPr id="6" name="Foliennummernplatzhalter 5">
             <a:extLst>
               <a:ext uri="{FF2B5EF4-FFF2-40B4-BE49-F238E27FC236}">
-                <a16:creationId xmlns:a16="http://schemas.microsoft.com/office/drawing/2014/main" id="{E3FBCE7A-FB8B-DECB-F3A1-52DBF7C891D7}"/>
+                <a16:creationId xmlns:a16="http://schemas.microsoft.com/office/drawing/2014/main" id="{E5B2A676-60A5-CF6D-D409-53C4CA6C9517}"/>
               </a:ext>
             </a:extLst>
           </p:cNvPr>
@@ -917,7 +917,7 @@
           <a:bodyPr/>
           <a:lstStyle/>
           <a:p>
-            <a:fld id="{7999F909-3697-4CE1-8820-ACCACBBF8410}" type="slidenum">
+            <a:fld id="{2CF23A79-0A54-4736-B307-85B70C860758}" type="slidenum">
               <a:rPr lang="de-DE" smtClean="0"/>
               <a:t>‹Nr.›</a:t>
             </a:fld>
@@ -928,7 +928,7 @@
     </p:spTree>
     <p:extLst>
       <p:ext uri="{BB962C8B-B14F-4D97-AF65-F5344CB8AC3E}">
-        <p14:creationId xmlns:p14="http://schemas.microsoft.com/office/powerpoint/2010/main" val="1011369210"/>
+        <p14:creationId xmlns:p14="http://schemas.microsoft.com/office/powerpoint/2010/main" val="3224871868"/>
       </p:ext>
     </p:extLst>
   </p:cSld>
@@ -960,7 +960,7 @@
           <p:cNvPr id="2" name="Titel 1">
             <a:extLst>
               <a:ext uri="{FF2B5EF4-FFF2-40B4-BE49-F238E27FC236}">
-                <a16:creationId xmlns:a16="http://schemas.microsoft.com/office/drawing/2014/main" id="{E1335ACE-2055-16E2-3483-141D8B821909}"/>
+                <a16:creationId xmlns:a16="http://schemas.microsoft.com/office/drawing/2014/main" id="{3380B6AF-E782-3F7B-9A55-4A80F0C2F895}"/>
               </a:ext>
             </a:extLst>
           </p:cNvPr>
@@ -997,7 +997,7 @@
           <p:cNvPr id="3" name="Textplatzhalter 2">
             <a:extLst>
               <a:ext uri="{FF2B5EF4-FFF2-40B4-BE49-F238E27FC236}">
-                <a16:creationId xmlns:a16="http://schemas.microsoft.com/office/drawing/2014/main" id="{DAA98258-CE6D-E6F9-A086-B5E512C1E9BD}"/>
+                <a16:creationId xmlns:a16="http://schemas.microsoft.com/office/drawing/2014/main" id="{CD1AF36D-6FF6-C5D5-A97B-7AD1E58D138C}"/>
               </a:ext>
             </a:extLst>
           </p:cNvPr>
@@ -1122,7 +1122,7 @@
           <p:cNvPr id="4" name="Datumsplatzhalter 3">
             <a:extLst>
               <a:ext uri="{FF2B5EF4-FFF2-40B4-BE49-F238E27FC236}">
-                <a16:creationId xmlns:a16="http://schemas.microsoft.com/office/drawing/2014/main" id="{AD8A46F9-F0EE-BD04-E4B8-69CFD22CC472}"/>
+                <a16:creationId xmlns:a16="http://schemas.microsoft.com/office/drawing/2014/main" id="{B6A3F1BC-EE8B-A992-A903-C8948C226F51}"/>
               </a:ext>
             </a:extLst>
           </p:cNvPr>
@@ -1138,7 +1138,7 @@
           <a:bodyPr/>
           <a:lstStyle/>
           <a:p>
-            <a:fld id="{F2B3DCA7-4954-48E9-BB06-E8D867B735F4}" type="datetimeFigureOut">
+            <a:fld id="{1E2958D6-7BA5-43D1-8E71-6918D76CD7C0}" type="datetimeFigureOut">
               <a:rPr lang="de-DE" smtClean="0"/>
               <a:t>08.10.2026</a:t>
             </a:fld>
@@ -1151,7 +1151,7 @@
           <p:cNvPr id="5" name="Fußzeilenplatzhalter 4">
             <a:extLst>
               <a:ext uri="{FF2B5EF4-FFF2-40B4-BE49-F238E27FC236}">
-                <a16:creationId xmlns:a16="http://schemas.microsoft.com/office/drawing/2014/main" id="{8553FE83-9D98-B05C-1772-89CD4F93B3A5}"/>
+                <a16:creationId xmlns:a16="http://schemas.microsoft.com/office/drawing/2014/main" id="{67305A3B-819E-5DB6-1EED-6E60EC01B850}"/>
               </a:ext>
             </a:extLst>
           </p:cNvPr>
@@ -1176,7 +1176,7 @@
           <p:cNvPr id="6" name="Foliennummernplatzhalter 5">
             <a:extLst>
               <a:ext uri="{FF2B5EF4-FFF2-40B4-BE49-F238E27FC236}">
-                <a16:creationId xmlns:a16="http://schemas.microsoft.com/office/drawing/2014/main" id="{B9FD2AF6-12B2-B66E-EB25-9FCB2AD248BC}"/>
+                <a16:creationId xmlns:a16="http://schemas.microsoft.com/office/drawing/2014/main" id="{59C6AF27-2832-1811-6BE6-9BB4260489D7}"/>
               </a:ext>
             </a:extLst>
           </p:cNvPr>
@@ -1192,7 +1192,7 @@
           <a:bodyPr/>
           <a:lstStyle/>
           <a:p>
-            <a:fld id="{7999F909-3697-4CE1-8820-ACCACBBF8410}" type="slidenum">
+            <a:fld id="{2CF23A79-0A54-4736-B307-85B70C860758}" type="slidenum">
               <a:rPr lang="de-DE" smtClean="0"/>
               <a:t>‹Nr.›</a:t>
             </a:fld>
@@ -1203,7 +1203,7 @@
     </p:spTree>
     <p:extLst>
       <p:ext uri="{BB962C8B-B14F-4D97-AF65-F5344CB8AC3E}">
-        <p14:creationId xmlns:p14="http://schemas.microsoft.com/office/powerpoint/2010/main" val="4078034257"/>
+        <p14:creationId xmlns:p14="http://schemas.microsoft.com/office/powerpoint/2010/main" val="2392886534"/>
       </p:ext>
     </p:extLst>
   </p:cSld>
@@ -1235,7 +1235,7 @@
           <p:cNvPr id="2" name="Titel 1">
             <a:extLst>
               <a:ext uri="{FF2B5EF4-FFF2-40B4-BE49-F238E27FC236}">
-                <a16:creationId xmlns:a16="http://schemas.microsoft.com/office/drawing/2014/main" id="{F1BBD358-A318-3722-9315-626162F03DCC}"/>
+                <a16:creationId xmlns:a16="http://schemas.microsoft.com/office/drawing/2014/main" id="{BCDA2D7D-8382-A624-1CEE-021BCC0632C0}"/>
               </a:ext>
             </a:extLst>
           </p:cNvPr>
@@ -1263,7 +1263,7 @@
           <p:cNvPr id="3" name="Inhaltsplatzhalter 2">
             <a:extLst>
               <a:ext uri="{FF2B5EF4-FFF2-40B4-BE49-F238E27FC236}">
-                <a16:creationId xmlns:a16="http://schemas.microsoft.com/office/drawing/2014/main" id="{B93B4337-6F28-3006-BB0A-48A046ABD541}"/>
+                <a16:creationId xmlns:a16="http://schemas.microsoft.com/office/drawing/2014/main" id="{FA2E0F73-55FD-5798-B2B2-3C3204E95220}"/>
               </a:ext>
             </a:extLst>
           </p:cNvPr>
@@ -1325,7 +1325,7 @@
           <p:cNvPr id="4" name="Inhaltsplatzhalter 3">
             <a:extLst>
               <a:ext uri="{FF2B5EF4-FFF2-40B4-BE49-F238E27FC236}">
-                <a16:creationId xmlns:a16="http://schemas.microsoft.com/office/drawing/2014/main" id="{B145F47B-3C07-778E-5E06-1DA45732A637}"/>
+                <a16:creationId xmlns:a16="http://schemas.microsoft.com/office/drawing/2014/main" id="{6C3FC6DA-C8C0-3F46-B77F-D70AC744DDBD}"/>
               </a:ext>
             </a:extLst>
           </p:cNvPr>
@@ -1387,7 +1387,7 @@
           <p:cNvPr id="5" name="Datumsplatzhalter 4">
             <a:extLst>
               <a:ext uri="{FF2B5EF4-FFF2-40B4-BE49-F238E27FC236}">
-                <a16:creationId xmlns:a16="http://schemas.microsoft.com/office/drawing/2014/main" id="{710486E6-070B-3548-1166-4CA872258C2C}"/>
+                <a16:creationId xmlns:a16="http://schemas.microsoft.com/office/drawing/2014/main" id="{C8A93D01-2537-2943-F427-5CEFEA86BDBA}"/>
               </a:ext>
             </a:extLst>
           </p:cNvPr>
@@ -1403,7 +1403,7 @@
           <a:bodyPr/>
           <a:lstStyle/>
           <a:p>
-            <a:fld id="{F2B3DCA7-4954-48E9-BB06-E8D867B735F4}" type="datetimeFigureOut">
+            <a:fld id="{1E2958D6-7BA5-43D1-8E71-6918D76CD7C0}" type="datetimeFigureOut">
               <a:rPr lang="de-DE" smtClean="0"/>
               <a:t>08.10.2026</a:t>
             </a:fld>
@@ -1416,7 +1416,7 @@
           <p:cNvPr id="6" name="Fußzeilenplatzhalter 5">
             <a:extLst>
               <a:ext uri="{FF2B5EF4-FFF2-40B4-BE49-F238E27FC236}">
-                <a16:creationId xmlns:a16="http://schemas.microsoft.com/office/drawing/2014/main" id="{752B7064-02CB-0DFF-317A-5B8654C9372F}"/>
+                <a16:creationId xmlns:a16="http://schemas.microsoft.com/office/drawing/2014/main" id="{00D62BD4-D39F-D954-D0FF-B1836EEEE144}"/>
               </a:ext>
             </a:extLst>
           </p:cNvPr>
@@ -1441,7 +1441,7 @@
           <p:cNvPr id="7" name="Foliennummernplatzhalter 6">
             <a:extLst>
               <a:ext uri="{FF2B5EF4-FFF2-40B4-BE49-F238E27FC236}">
-                <a16:creationId xmlns:a16="http://schemas.microsoft.com/office/drawing/2014/main" id="{F653140C-69EC-5016-265D-55C9CC45632B}"/>
+                <a16:creationId xmlns:a16="http://schemas.microsoft.com/office/drawing/2014/main" id="{C0949ABC-58CD-6F60-E0AF-9A41DF50A949}"/>
               </a:ext>
             </a:extLst>
           </p:cNvPr>
@@ -1457,7 +1457,7 @@
           <a:bodyPr/>
           <a:lstStyle/>
           <a:p>
-            <a:fld id="{7999F909-3697-4CE1-8820-ACCACBBF8410}" type="slidenum">
+            <a:fld id="{2CF23A79-0A54-4736-B307-85B70C860758}" type="slidenum">
               <a:rPr lang="de-DE" smtClean="0"/>
               <a:t>‹Nr.›</a:t>
             </a:fld>
@@ -1468,7 +1468,7 @@
     </p:spTree>
     <p:extLst>
       <p:ext uri="{BB962C8B-B14F-4D97-AF65-F5344CB8AC3E}">
-        <p14:creationId xmlns:p14="http://schemas.microsoft.com/office/powerpoint/2010/main" val="198018628"/>
+        <p14:creationId xmlns:p14="http://schemas.microsoft.com/office/powerpoint/2010/main" val="2444057732"/>
       </p:ext>
     </p:extLst>
   </p:cSld>
@@ -1500,7 +1500,7 @@
           <p:cNvPr id="2" name="Titel 1">
             <a:extLst>
               <a:ext uri="{FF2B5EF4-FFF2-40B4-BE49-F238E27FC236}">
-                <a16:creationId xmlns:a16="http://schemas.microsoft.com/office/drawing/2014/main" id="{D8F334EB-A9F5-C914-27EF-1541A2756A73}"/>
+                <a16:creationId xmlns:a16="http://schemas.microsoft.com/office/drawing/2014/main" id="{46863599-8C3F-80BE-950B-B4DA0AD2C635}"/>
               </a:ext>
             </a:extLst>
           </p:cNvPr>
@@ -1533,7 +1533,7 @@
           <p:cNvPr id="3" name="Textplatzhalter 2">
             <a:extLst>
               <a:ext uri="{FF2B5EF4-FFF2-40B4-BE49-F238E27FC236}">
-                <a16:creationId xmlns:a16="http://schemas.microsoft.com/office/drawing/2014/main" id="{47597C93-4F3C-DD29-7EF4-306F1730B158}"/>
+                <a16:creationId xmlns:a16="http://schemas.microsoft.com/office/drawing/2014/main" id="{5A39CE02-7E2F-E502-23E6-97F3F8F9649D}"/>
               </a:ext>
             </a:extLst>
           </p:cNvPr>
@@ -1604,7 +1604,7 @@
           <p:cNvPr id="4" name="Inhaltsplatzhalter 3">
             <a:extLst>
               <a:ext uri="{FF2B5EF4-FFF2-40B4-BE49-F238E27FC236}">
-                <a16:creationId xmlns:a16="http://schemas.microsoft.com/office/drawing/2014/main" id="{2930CA82-ED51-EFC3-6097-FA328DE26486}"/>
+                <a16:creationId xmlns:a16="http://schemas.microsoft.com/office/drawing/2014/main" id="{29CB4F2A-ED5C-BF2C-5955-80FCFE744D92}"/>
               </a:ext>
             </a:extLst>
           </p:cNvPr>
@@ -1666,7 +1666,7 @@
           <p:cNvPr id="5" name="Textplatzhalter 4">
             <a:extLst>
               <a:ext uri="{FF2B5EF4-FFF2-40B4-BE49-F238E27FC236}">
-                <a16:creationId xmlns:a16="http://schemas.microsoft.com/office/drawing/2014/main" id="{265AAF9D-605C-C0A1-D67A-7A7D4E7E4A5B}"/>
+                <a16:creationId xmlns:a16="http://schemas.microsoft.com/office/drawing/2014/main" id="{02B706AC-743A-FF00-7791-E79F99A94E46}"/>
               </a:ext>
             </a:extLst>
           </p:cNvPr>
@@ -1737,7 +1737,7 @@
           <p:cNvPr id="6" name="Inhaltsplatzhalter 5">
             <a:extLst>
               <a:ext uri="{FF2B5EF4-FFF2-40B4-BE49-F238E27FC236}">
-                <a16:creationId xmlns:a16="http://schemas.microsoft.com/office/drawing/2014/main" id="{8A7489FA-3C26-F27C-144C-9ADD44F54295}"/>
+                <a16:creationId xmlns:a16="http://schemas.microsoft.com/office/drawing/2014/main" id="{BC7010AF-37F8-FA52-3468-9BEE43743099}"/>
               </a:ext>
             </a:extLst>
           </p:cNvPr>
@@ -1799,7 +1799,7 @@
           <p:cNvPr id="7" name="Datumsplatzhalter 6">
             <a:extLst>
               <a:ext uri="{FF2B5EF4-FFF2-40B4-BE49-F238E27FC236}">
-                <a16:creationId xmlns:a16="http://schemas.microsoft.com/office/drawing/2014/main" id="{E09B1621-4BBD-B3E5-8E1D-92D5ADEB8FE2}"/>
+                <a16:creationId xmlns:a16="http://schemas.microsoft.com/office/drawing/2014/main" id="{492A4648-2F22-1871-F4F0-A47D6D185577}"/>
               </a:ext>
             </a:extLst>
           </p:cNvPr>
@@ -1815,7 +1815,7 @@
           <a:bodyPr/>
           <a:lstStyle/>
           <a:p>
-            <a:fld id="{F2B3DCA7-4954-48E9-BB06-E8D867B735F4}" type="datetimeFigureOut">
+            <a:fld id="{1E2958D6-7BA5-43D1-8E71-6918D76CD7C0}" type="datetimeFigureOut">
               <a:rPr lang="de-DE" smtClean="0"/>
               <a:t>08.10.2026</a:t>
             </a:fld>
@@ -1828,7 +1828,7 @@
           <p:cNvPr id="8" name="Fußzeilenplatzhalter 7">
             <a:extLst>
               <a:ext uri="{FF2B5EF4-FFF2-40B4-BE49-F238E27FC236}">
-                <a16:creationId xmlns:a16="http://schemas.microsoft.com/office/drawing/2014/main" id="{F07147C4-E188-DB88-856A-D18946EF25B8}"/>
+                <a16:creationId xmlns:a16="http://schemas.microsoft.com/office/drawing/2014/main" id="{955C6F3A-BB84-DDE0-FCC2-92F77285D11D}"/>
               </a:ext>
             </a:extLst>
           </p:cNvPr>
@@ -1853,7 +1853,7 @@
           <p:cNvPr id="9" name="Foliennummernplatzhalter 8">
             <a:extLst>
               <a:ext uri="{FF2B5EF4-FFF2-40B4-BE49-F238E27FC236}">
-                <a16:creationId xmlns:a16="http://schemas.microsoft.com/office/drawing/2014/main" id="{F24E0046-DB34-009E-2322-8C5BAA2516AC}"/>
+                <a16:creationId xmlns:a16="http://schemas.microsoft.com/office/drawing/2014/main" id="{500B8FE0-E2B6-5C84-CF93-6294BCD2CDB1}"/>
               </a:ext>
             </a:extLst>
           </p:cNvPr>
@@ -1869,7 +1869,7 @@
           <a:bodyPr/>
           <a:lstStyle/>
           <a:p>
-            <a:fld id="{7999F909-3697-4CE1-8820-ACCACBBF8410}" type="slidenum">
+            <a:fld id="{2CF23A79-0A54-4736-B307-85B70C860758}" type="slidenum">
               <a:rPr lang="de-DE" smtClean="0"/>
               <a:t>‹Nr.›</a:t>
             </a:fld>
@@ -1880,7 +1880,7 @@
     </p:spTree>
     <p:extLst>
       <p:ext uri="{BB962C8B-B14F-4D97-AF65-F5344CB8AC3E}">
-        <p14:creationId xmlns:p14="http://schemas.microsoft.com/office/powerpoint/2010/main" val="413091265"/>
+        <p14:creationId xmlns:p14="http://schemas.microsoft.com/office/powerpoint/2010/main" val="1239682948"/>
       </p:ext>
     </p:extLst>
   </p:cSld>
@@ -1912,7 +1912,7 @@
           <p:cNvPr id="2" name="Titel 1">
             <a:extLst>
               <a:ext uri="{FF2B5EF4-FFF2-40B4-BE49-F238E27FC236}">
-                <a16:creationId xmlns:a16="http://schemas.microsoft.com/office/drawing/2014/main" id="{CBD04E45-F84F-D0ED-3244-B8D13CAF0482}"/>
+                <a16:creationId xmlns:a16="http://schemas.microsoft.com/office/drawing/2014/main" id="{C0EE8C4B-3C19-52DA-E1A1-9B278B6A01B3}"/>
               </a:ext>
             </a:extLst>
           </p:cNvPr>
@@ -1940,7 +1940,7 @@
           <p:cNvPr id="3" name="Datumsplatzhalter 2">
             <a:extLst>
               <a:ext uri="{FF2B5EF4-FFF2-40B4-BE49-F238E27FC236}">
-                <a16:creationId xmlns:a16="http://schemas.microsoft.com/office/drawing/2014/main" id="{45289D8D-D334-A215-AFA4-6C24D52C802C}"/>
+                <a16:creationId xmlns:a16="http://schemas.microsoft.com/office/drawing/2014/main" id="{DE5C7E03-3294-6DE5-9A33-57B836CCDB27}"/>
               </a:ext>
             </a:extLst>
           </p:cNvPr>
@@ -1956,7 +1956,7 @@
           <a:bodyPr/>
           <a:lstStyle/>
           <a:p>
-            <a:fld id="{F2B3DCA7-4954-48E9-BB06-E8D867B735F4}" type="datetimeFigureOut">
+            <a:fld id="{1E2958D6-7BA5-43D1-8E71-6918D76CD7C0}" type="datetimeFigureOut">
               <a:rPr lang="de-DE" smtClean="0"/>
               <a:t>08.10.2026</a:t>
             </a:fld>
@@ -1969,7 +1969,7 @@
           <p:cNvPr id="4" name="Fußzeilenplatzhalter 3">
             <a:extLst>
               <a:ext uri="{FF2B5EF4-FFF2-40B4-BE49-F238E27FC236}">
-                <a16:creationId xmlns:a16="http://schemas.microsoft.com/office/drawing/2014/main" id="{B2652533-59D1-C4CE-D646-0110D1A3D124}"/>
+                <a16:creationId xmlns:a16="http://schemas.microsoft.com/office/drawing/2014/main" id="{58E1494C-8AA6-55FF-47F4-97D957B76635}"/>
               </a:ext>
             </a:extLst>
           </p:cNvPr>
@@ -1994,7 +1994,7 @@
           <p:cNvPr id="5" name="Foliennummernplatzhalter 4">
             <a:extLst>
               <a:ext uri="{FF2B5EF4-FFF2-40B4-BE49-F238E27FC236}">
-                <a16:creationId xmlns:a16="http://schemas.microsoft.com/office/drawing/2014/main" id="{5E935AA8-5269-DAC8-E889-9A7269DA4258}"/>
+                <a16:creationId xmlns:a16="http://schemas.microsoft.com/office/drawing/2014/main" id="{0D3A0C1B-D94A-9673-6062-0937756104FC}"/>
               </a:ext>
             </a:extLst>
           </p:cNvPr>
@@ -2010,7 +2010,7 @@
           <a:bodyPr/>
           <a:lstStyle/>
           <a:p>
-            <a:fld id="{7999F909-3697-4CE1-8820-ACCACBBF8410}" type="slidenum">
+            <a:fld id="{2CF23A79-0A54-4736-B307-85B70C860758}" type="slidenum">
               <a:rPr lang="de-DE" smtClean="0"/>
               <a:t>‹Nr.›</a:t>
             </a:fld>
@@ -2021,7 +2021,7 @@
     </p:spTree>
     <p:extLst>
       <p:ext uri="{BB962C8B-B14F-4D97-AF65-F5344CB8AC3E}">
-        <p14:creationId xmlns:p14="http://schemas.microsoft.com/office/powerpoint/2010/main" val="1771133876"/>
+        <p14:creationId xmlns:p14="http://schemas.microsoft.com/office/powerpoint/2010/main" val="1858600872"/>
       </p:ext>
     </p:extLst>
   </p:cSld>
@@ -2053,7 +2053,7 @@
           <p:cNvPr id="2" name="Datumsplatzhalter 1">
             <a:extLst>
               <a:ext uri="{FF2B5EF4-FFF2-40B4-BE49-F238E27FC236}">
-                <a16:creationId xmlns:a16="http://schemas.microsoft.com/office/drawing/2014/main" id="{80A7911A-D911-BC95-5AD2-7EAE44AB3584}"/>
+                <a16:creationId xmlns:a16="http://schemas.microsoft.com/office/drawing/2014/main" id="{A27D37AE-6C55-0E94-B490-55C2621E0F03}"/>
               </a:ext>
             </a:extLst>
           </p:cNvPr>
@@ -2069,7 +2069,7 @@
           <a:bodyPr/>
           <a:lstStyle/>
           <a:p>
-            <a:fld id="{F2B3DCA7-4954-48E9-BB06-E8D867B735F4}" type="datetimeFigureOut">
+            <a:fld id="{1E2958D6-7BA5-43D1-8E71-6918D76CD7C0}" type="datetimeFigureOut">
               <a:rPr lang="de-DE" smtClean="0"/>
               <a:t>08.10.2026</a:t>
             </a:fld>
@@ -2082,7 +2082,7 @@
           <p:cNvPr id="3" name="Fußzeilenplatzhalter 2">
             <a:extLst>
               <a:ext uri="{FF2B5EF4-FFF2-40B4-BE49-F238E27FC236}">
-                <a16:creationId xmlns:a16="http://schemas.microsoft.com/office/drawing/2014/main" id="{D80E5C04-2E31-1E1B-536B-FCE547A06741}"/>
+                <a16:creationId xmlns:a16="http://schemas.microsoft.com/office/drawing/2014/main" id="{AA6D7B72-9343-4B23-F669-C3B140B23361}"/>
               </a:ext>
             </a:extLst>
           </p:cNvPr>
@@ -2107,7 +2107,7 @@
           <p:cNvPr id="4" name="Foliennummernplatzhalter 3">
             <a:extLst>
               <a:ext uri="{FF2B5EF4-FFF2-40B4-BE49-F238E27FC236}">
-                <a16:creationId xmlns:a16="http://schemas.microsoft.com/office/drawing/2014/main" id="{D9C4885C-A567-7DDF-298F-DA6FF92644E7}"/>
+                <a16:creationId xmlns:a16="http://schemas.microsoft.com/office/drawing/2014/main" id="{AAB1D31D-F775-9B05-2BE4-8C7A2E6C68FC}"/>
               </a:ext>
             </a:extLst>
           </p:cNvPr>
@@ -2123,7 +2123,7 @@
           <a:bodyPr/>
           <a:lstStyle/>
           <a:p>
-            <a:fld id="{7999F909-3697-4CE1-8820-ACCACBBF8410}" type="slidenum">
+            <a:fld id="{2CF23A79-0A54-4736-B307-85B70C860758}" type="slidenum">
               <a:rPr lang="de-DE" smtClean="0"/>
               <a:t>‹Nr.›</a:t>
             </a:fld>
@@ -2134,7 +2134,7 @@
     </p:spTree>
     <p:extLst>
       <p:ext uri="{BB962C8B-B14F-4D97-AF65-F5344CB8AC3E}">
-        <p14:creationId xmlns:p14="http://schemas.microsoft.com/office/powerpoint/2010/main" val="2974226121"/>
+        <p14:creationId xmlns:p14="http://schemas.microsoft.com/office/powerpoint/2010/main" val="359194760"/>
       </p:ext>
     </p:extLst>
   </p:cSld>
@@ -2166,7 +2166,7 @@
           <p:cNvPr id="2" name="Titel 1">
             <a:extLst>
               <a:ext uri="{FF2B5EF4-FFF2-40B4-BE49-F238E27FC236}">
-                <a16:creationId xmlns:a16="http://schemas.microsoft.com/office/drawing/2014/main" id="{ADA05646-A69E-0C42-3033-872B9E6EB1F0}"/>
+                <a16:creationId xmlns:a16="http://schemas.microsoft.com/office/drawing/2014/main" id="{C24B95D5-0525-FDAB-2A51-B7DFE617123F}"/>
               </a:ext>
             </a:extLst>
           </p:cNvPr>
@@ -2203,7 +2203,7 @@
           <p:cNvPr id="3" name="Inhaltsplatzhalter 2">
             <a:extLst>
               <a:ext uri="{FF2B5EF4-FFF2-40B4-BE49-F238E27FC236}">
-                <a16:creationId xmlns:a16="http://schemas.microsoft.com/office/drawing/2014/main" id="{717DC611-64BA-E5F1-6520-AB7CBD84F44B}"/>
+                <a16:creationId xmlns:a16="http://schemas.microsoft.com/office/drawing/2014/main" id="{9D659338-9C66-B6BA-ED54-090A731F5402}"/>
               </a:ext>
             </a:extLst>
           </p:cNvPr>
@@ -2293,7 +2293,7 @@
           <p:cNvPr id="4" name="Textplatzhalter 3">
             <a:extLst>
               <a:ext uri="{FF2B5EF4-FFF2-40B4-BE49-F238E27FC236}">
-                <a16:creationId xmlns:a16="http://schemas.microsoft.com/office/drawing/2014/main" id="{3BC4C39B-B6B8-32A5-02C2-866C47EBB174}"/>
+                <a16:creationId xmlns:a16="http://schemas.microsoft.com/office/drawing/2014/main" id="{6853DFBE-A59B-0F5D-BAA9-CDEF3C91D73B}"/>
               </a:ext>
             </a:extLst>
           </p:cNvPr>
@@ -2364,7 +2364,7 @@
           <p:cNvPr id="5" name="Datumsplatzhalter 4">
             <a:extLst>
               <a:ext uri="{FF2B5EF4-FFF2-40B4-BE49-F238E27FC236}">
-                <a16:creationId xmlns:a16="http://schemas.microsoft.com/office/drawing/2014/main" id="{CD357FB4-4078-DBF8-D510-EF809E621424}"/>
+                <a16:creationId xmlns:a16="http://schemas.microsoft.com/office/drawing/2014/main" id="{620917F4-5136-0F7F-7DC0-8CEF55840AF8}"/>
               </a:ext>
             </a:extLst>
           </p:cNvPr>
@@ -2380,7 +2380,7 @@
           <a:bodyPr/>
           <a:lstStyle/>
           <a:p>
-            <a:fld id="{F2B3DCA7-4954-48E9-BB06-E8D867B735F4}" type="datetimeFigureOut">
+            <a:fld id="{1E2958D6-7BA5-43D1-8E71-6918D76CD7C0}" type="datetimeFigureOut">
               <a:rPr lang="de-DE" smtClean="0"/>
               <a:t>08.10.2026</a:t>
             </a:fld>
@@ -2393,7 +2393,7 @@
           <p:cNvPr id="6" name="Fußzeilenplatzhalter 5">
             <a:extLst>
               <a:ext uri="{FF2B5EF4-FFF2-40B4-BE49-F238E27FC236}">
-                <a16:creationId xmlns:a16="http://schemas.microsoft.com/office/drawing/2014/main" id="{5731909E-7392-DD31-28D5-C1481D11B3EE}"/>
+                <a16:creationId xmlns:a16="http://schemas.microsoft.com/office/drawing/2014/main" id="{8A96DEE6-696F-501D-A683-94EE6EEC922B}"/>
               </a:ext>
             </a:extLst>
           </p:cNvPr>
@@ -2418,7 +2418,7 @@
           <p:cNvPr id="7" name="Foliennummernplatzhalter 6">
             <a:extLst>
               <a:ext uri="{FF2B5EF4-FFF2-40B4-BE49-F238E27FC236}">
-                <a16:creationId xmlns:a16="http://schemas.microsoft.com/office/drawing/2014/main" id="{F4132139-9F5B-C5FB-864C-267B50B9EC05}"/>
+                <a16:creationId xmlns:a16="http://schemas.microsoft.com/office/drawing/2014/main" id="{083E9852-73CA-10B4-5CA2-2F07BE52561C}"/>
               </a:ext>
             </a:extLst>
           </p:cNvPr>
@@ -2434,7 +2434,7 @@
           <a:bodyPr/>
           <a:lstStyle/>
           <a:p>
-            <a:fld id="{7999F909-3697-4CE1-8820-ACCACBBF8410}" type="slidenum">
+            <a:fld id="{2CF23A79-0A54-4736-B307-85B70C860758}" type="slidenum">
               <a:rPr lang="de-DE" smtClean="0"/>
               <a:t>‹Nr.›</a:t>
             </a:fld>
@@ -2445,7 +2445,7 @@
     </p:spTree>
     <p:extLst>
       <p:ext uri="{BB962C8B-B14F-4D97-AF65-F5344CB8AC3E}">
-        <p14:creationId xmlns:p14="http://schemas.microsoft.com/office/powerpoint/2010/main" val="3806572837"/>
+        <p14:creationId xmlns:p14="http://schemas.microsoft.com/office/powerpoint/2010/main" val="1098098714"/>
       </p:ext>
     </p:extLst>
   </p:cSld>
@@ -2477,7 +2477,7 @@
           <p:cNvPr id="2" name="Titel 1">
             <a:extLst>
               <a:ext uri="{FF2B5EF4-FFF2-40B4-BE49-F238E27FC236}">
-                <a16:creationId xmlns:a16="http://schemas.microsoft.com/office/drawing/2014/main" id="{F2928842-9A0A-7905-E8BF-6CBD91D5DCAA}"/>
+                <a16:creationId xmlns:a16="http://schemas.microsoft.com/office/drawing/2014/main" id="{52A1EE47-FA1F-2CA0-F938-EC4E3556227B}"/>
               </a:ext>
             </a:extLst>
           </p:cNvPr>
@@ -2514,7 +2514,7 @@
           <p:cNvPr id="3" name="Bildplatzhalter 2">
             <a:extLst>
               <a:ext uri="{FF2B5EF4-FFF2-40B4-BE49-F238E27FC236}">
-                <a16:creationId xmlns:a16="http://schemas.microsoft.com/office/drawing/2014/main" id="{53E07F5E-AB2A-72B2-9F31-23BB02B77442}"/>
+                <a16:creationId xmlns:a16="http://schemas.microsoft.com/office/drawing/2014/main" id="{09612D4B-E964-7C52-00D9-87D45B93AB4C}"/>
               </a:ext>
             </a:extLst>
           </p:cNvPr>
@@ -2581,7 +2581,7 @@
           <p:cNvPr id="4" name="Textplatzhalter 3">
             <a:extLst>
               <a:ext uri="{FF2B5EF4-FFF2-40B4-BE49-F238E27FC236}">
-                <a16:creationId xmlns:a16="http://schemas.microsoft.com/office/drawing/2014/main" id="{C35678F7-193A-D9A2-2CC1-0090DF35A102}"/>
+                <a16:creationId xmlns:a16="http://schemas.microsoft.com/office/drawing/2014/main" id="{7A0C0A4F-1859-630B-6765-3ECAF74C1C0B}"/>
               </a:ext>
             </a:extLst>
           </p:cNvPr>
@@ -2652,7 +2652,7 @@
           <p:cNvPr id="5" name="Datumsplatzhalter 4">
             <a:extLst>
               <a:ext uri="{FF2B5EF4-FFF2-40B4-BE49-F238E27FC236}">
-                <a16:creationId xmlns:a16="http://schemas.microsoft.com/office/drawing/2014/main" id="{A86BD6C9-ED25-EF19-F210-22CBEF243450}"/>
+                <a16:creationId xmlns:a16="http://schemas.microsoft.com/office/drawing/2014/main" id="{1C974C1E-9379-53FF-A251-E048E0C00CCC}"/>
               </a:ext>
             </a:extLst>
           </p:cNvPr>
@@ -2668,7 +2668,7 @@
           <a:bodyPr/>
           <a:lstStyle/>
           <a:p>
-            <a:fld id="{F2B3DCA7-4954-48E9-BB06-E8D867B735F4}" type="datetimeFigureOut">
+            <a:fld id="{1E2958D6-7BA5-43D1-8E71-6918D76CD7C0}" type="datetimeFigureOut">
               <a:rPr lang="de-DE" smtClean="0"/>
               <a:t>08.10.2026</a:t>
             </a:fld>
@@ -2681,7 +2681,7 @@
           <p:cNvPr id="6" name="Fußzeilenplatzhalter 5">
             <a:extLst>
               <a:ext uri="{FF2B5EF4-FFF2-40B4-BE49-F238E27FC236}">
-                <a16:creationId xmlns:a16="http://schemas.microsoft.com/office/drawing/2014/main" id="{093748BF-B771-AE83-3080-F9CBBF47156A}"/>
+                <a16:creationId xmlns:a16="http://schemas.microsoft.com/office/drawing/2014/main" id="{2E3E3B54-A1E8-C119-7B32-F35885A7A4EA}"/>
               </a:ext>
             </a:extLst>
           </p:cNvPr>
@@ -2706,7 +2706,7 @@
           <p:cNvPr id="7" name="Foliennummernplatzhalter 6">
             <a:extLst>
               <a:ext uri="{FF2B5EF4-FFF2-40B4-BE49-F238E27FC236}">
-                <a16:creationId xmlns:a16="http://schemas.microsoft.com/office/drawing/2014/main" id="{7853FBAC-B80A-6B09-BA04-318925D23F4A}"/>
+                <a16:creationId xmlns:a16="http://schemas.microsoft.com/office/drawing/2014/main" id="{75A620C2-4E0C-C037-BFE0-87C0294D48BF}"/>
               </a:ext>
             </a:extLst>
           </p:cNvPr>
@@ -2722,7 +2722,7 @@
           <a:bodyPr/>
           <a:lstStyle/>
           <a:p>
-            <a:fld id="{7999F909-3697-4CE1-8820-ACCACBBF8410}" type="slidenum">
+            <a:fld id="{2CF23A79-0A54-4736-B307-85B70C860758}" type="slidenum">
               <a:rPr lang="de-DE" smtClean="0"/>
               <a:t>‹Nr.›</a:t>
             </a:fld>
@@ -2733,7 +2733,7 @@
     </p:spTree>
     <p:extLst>
       <p:ext uri="{BB962C8B-B14F-4D97-AF65-F5344CB8AC3E}">
-        <p14:creationId xmlns:p14="http://schemas.microsoft.com/office/powerpoint/2010/main" val="3134071877"/>
+        <p14:creationId xmlns:p14="http://schemas.microsoft.com/office/powerpoint/2010/main" val="2026448844"/>
       </p:ext>
     </p:extLst>
   </p:cSld>
@@ -2770,7 +2770,7 @@
           <p:cNvPr id="2" name="Titelplatzhalter 1">
             <a:extLst>
               <a:ext uri="{FF2B5EF4-FFF2-40B4-BE49-F238E27FC236}">
-                <a16:creationId xmlns:a16="http://schemas.microsoft.com/office/drawing/2014/main" id="{56631ED7-764D-2D47-CDA7-461DAA1C73E7}"/>
+                <a16:creationId xmlns:a16="http://schemas.microsoft.com/office/drawing/2014/main" id="{09771F46-07B8-2D44-59D6-4F3BCF7BDA12}"/>
               </a:ext>
             </a:extLst>
           </p:cNvPr>
@@ -2808,7 +2808,7 @@
           <p:cNvPr id="3" name="Textplatzhalter 2">
             <a:extLst>
               <a:ext uri="{FF2B5EF4-FFF2-40B4-BE49-F238E27FC236}">
-                <a16:creationId xmlns:a16="http://schemas.microsoft.com/office/drawing/2014/main" id="{BA7A07E9-9B5A-98C8-0810-82ED7210DFA1}"/>
+                <a16:creationId xmlns:a16="http://schemas.microsoft.com/office/drawing/2014/main" id="{2727C152-1497-473F-2BEF-A44BAD42D6AB}"/>
               </a:ext>
             </a:extLst>
           </p:cNvPr>
@@ -2875,7 +2875,7 @@
           <p:cNvPr id="4" name="Datumsplatzhalter 3">
             <a:extLst>
               <a:ext uri="{FF2B5EF4-FFF2-40B4-BE49-F238E27FC236}">
-                <a16:creationId xmlns:a16="http://schemas.microsoft.com/office/drawing/2014/main" id="{96007FE9-DBFD-FF28-52DC-5FA189C8E69B}"/>
+                <a16:creationId xmlns:a16="http://schemas.microsoft.com/office/drawing/2014/main" id="{DD5EEC77-3F08-DB49-7EA2-F87AFA20921A}"/>
               </a:ext>
             </a:extLst>
           </p:cNvPr>
@@ -2909,7 +2909,7 @@
             </a:lvl1pPr>
           </a:lstStyle>
           <a:p>
-            <a:fld id="{F2B3DCA7-4954-48E9-BB06-E8D867B735F4}" type="datetimeFigureOut">
+            <a:fld id="{1E2958D6-7BA5-43D1-8E71-6918D76CD7C0}" type="datetimeFigureOut">
               <a:rPr lang="de-DE" smtClean="0"/>
               <a:t>08.10.2026</a:t>
             </a:fld>
@@ -2922,7 +2922,7 @@
           <p:cNvPr id="5" name="Fußzeilenplatzhalter 4">
             <a:extLst>
               <a:ext uri="{FF2B5EF4-FFF2-40B4-BE49-F238E27FC236}">
-                <a16:creationId xmlns:a16="http://schemas.microsoft.com/office/drawing/2014/main" id="{E1CEA29F-CBB3-9F31-98EB-B1ED18600335}"/>
+                <a16:creationId xmlns:a16="http://schemas.microsoft.com/office/drawing/2014/main" id="{A0A0CB9A-854D-7E47-6851-596FC7CE4E46}"/>
               </a:ext>
             </a:extLst>
           </p:cNvPr>
@@ -2965,7 +2965,7 @@
           <p:cNvPr id="6" name="Foliennummernplatzhalter 5">
             <a:extLst>
               <a:ext uri="{FF2B5EF4-FFF2-40B4-BE49-F238E27FC236}">
-                <a16:creationId xmlns:a16="http://schemas.microsoft.com/office/drawing/2014/main" id="{9159ECDC-87C3-0240-5B4A-48D38692C1B7}"/>
+                <a16:creationId xmlns:a16="http://schemas.microsoft.com/office/drawing/2014/main" id="{209ECD5C-4C17-FC65-08D1-CA6FE3995CF6}"/>
               </a:ext>
             </a:extLst>
           </p:cNvPr>
@@ -2999,7 +2999,7 @@
             </a:lvl1pPr>
           </a:lstStyle>
           <a:p>
-            <a:fld id="{7999F909-3697-4CE1-8820-ACCACBBF8410}" type="slidenum">
+            <a:fld id="{2CF23A79-0A54-4736-B307-85B70C860758}" type="slidenum">
               <a:rPr lang="de-DE" smtClean="0"/>
               <a:t>‹Nr.›</a:t>
             </a:fld>
@@ -3010,7 +3010,7 @@
     </p:spTree>
     <p:extLst>
       <p:ext uri="{BB962C8B-B14F-4D97-AF65-F5344CB8AC3E}">
-        <p14:creationId xmlns:p14="http://schemas.microsoft.com/office/powerpoint/2010/main" val="3016142959"/>
+        <p14:creationId xmlns:p14="http://schemas.microsoft.com/office/powerpoint/2010/main" val="1088674790"/>
       </p:ext>
     </p:extLst>
   </p:cSld>
@@ -3333,7 +3333,7 @@
           <p:cNvPr id="2" name="AutoShape 1">
             <a:extLst>
               <a:ext uri="{FF2B5EF4-FFF2-40B4-BE49-F238E27FC236}">
-                <a16:creationId xmlns:a16="http://schemas.microsoft.com/office/drawing/2014/main" id="{AD27A153-C146-F4E3-0955-2C6C6F9DB691}"/>
+                <a16:creationId xmlns:a16="http://schemas.microsoft.com/office/drawing/2014/main" id="{E8F32928-D9C7-19C9-9DB2-C7523BEA22A3}"/>
               </a:ext>
             </a:extLst>
           </p:cNvPr>
@@ -3379,7 +3379,7 @@
           <p:cNvPr id="3" name="AutoShape 2">
             <a:extLst>
               <a:ext uri="{FF2B5EF4-FFF2-40B4-BE49-F238E27FC236}">
-                <a16:creationId xmlns:a16="http://schemas.microsoft.com/office/drawing/2014/main" id="{E9B5526E-7D52-F1A9-7D1E-68328BCBF899}"/>
+                <a16:creationId xmlns:a16="http://schemas.microsoft.com/office/drawing/2014/main" id="{0DB7D7EE-B4AE-D85C-1E3D-0B3AE121287C}"/>
               </a:ext>
             </a:extLst>
           </p:cNvPr>
@@ -3425,7 +3425,7 @@
           <p:cNvPr id="4" name="AutoShape 3">
             <a:extLst>
               <a:ext uri="{FF2B5EF4-FFF2-40B4-BE49-F238E27FC236}">
-                <a16:creationId xmlns:a16="http://schemas.microsoft.com/office/drawing/2014/main" id="{4059154D-3029-D04E-8970-9407B1EA3D21}"/>
+                <a16:creationId xmlns:a16="http://schemas.microsoft.com/office/drawing/2014/main" id="{C808513C-713B-D6D3-A901-343DC0376386}"/>
               </a:ext>
             </a:extLst>
           </p:cNvPr>
@@ -3471,7 +3471,7 @@
           <p:cNvPr id="5" name="AutoShape 4">
             <a:extLst>
               <a:ext uri="{FF2B5EF4-FFF2-40B4-BE49-F238E27FC236}">
-                <a16:creationId xmlns:a16="http://schemas.microsoft.com/office/drawing/2014/main" id="{A51A55C3-0D72-F760-C9CD-6453C2BE7D95}"/>
+                <a16:creationId xmlns:a16="http://schemas.microsoft.com/office/drawing/2014/main" id="{6FEA5172-2871-5AD1-75CC-1EC033903EA6}"/>
               </a:ext>
             </a:extLst>
           </p:cNvPr>
@@ -3517,7 +3517,7 @@
           <p:cNvPr id="6" name="AutoShape 5">
             <a:extLst>
               <a:ext uri="{FF2B5EF4-FFF2-40B4-BE49-F238E27FC236}">
-                <a16:creationId xmlns:a16="http://schemas.microsoft.com/office/drawing/2014/main" id="{77CD00F3-1A71-14D0-E2D6-D060A51F8329}"/>
+                <a16:creationId xmlns:a16="http://schemas.microsoft.com/office/drawing/2014/main" id="{DECC41E8-056A-BF7C-1BA4-5E7663F4FDF3}"/>
               </a:ext>
             </a:extLst>
           </p:cNvPr>
@@ -3563,7 +3563,7 @@
           <p:cNvPr id="7" name="AutoShape 6">
             <a:extLst>
               <a:ext uri="{FF2B5EF4-FFF2-40B4-BE49-F238E27FC236}">
-                <a16:creationId xmlns:a16="http://schemas.microsoft.com/office/drawing/2014/main" id="{BC4C8FF3-CF41-6E5E-C8C6-ADDDCD1516D2}"/>
+                <a16:creationId xmlns:a16="http://schemas.microsoft.com/office/drawing/2014/main" id="{4CA438C8-2E6E-141C-AFD1-449487F6AA4D}"/>
               </a:ext>
             </a:extLst>
           </p:cNvPr>
@@ -3609,7 +3609,7 @@
           <p:cNvPr id="8" name="AutoShape 7">
             <a:extLst>
               <a:ext uri="{FF2B5EF4-FFF2-40B4-BE49-F238E27FC236}">
-                <a16:creationId xmlns:a16="http://schemas.microsoft.com/office/drawing/2014/main" id="{8E9136C7-36DA-74AA-8495-B495C8002A0B}"/>
+                <a16:creationId xmlns:a16="http://schemas.microsoft.com/office/drawing/2014/main" id="{D62AB2E4-1A44-4BCB-A9D0-D19E0563C421}"/>
               </a:ext>
             </a:extLst>
           </p:cNvPr>
@@ -3655,7 +3655,7 @@
           <p:cNvPr id="9" name="AutoShape 8">
             <a:extLst>
               <a:ext uri="{FF2B5EF4-FFF2-40B4-BE49-F238E27FC236}">
-                <a16:creationId xmlns:a16="http://schemas.microsoft.com/office/drawing/2014/main" id="{394B3190-1FB6-16CF-89CB-70D222AF145E}"/>
+                <a16:creationId xmlns:a16="http://schemas.microsoft.com/office/drawing/2014/main" id="{1EA5F686-7211-194A-945A-B11A00060FCE}"/>
               </a:ext>
             </a:extLst>
           </p:cNvPr>
@@ -3701,7 +3701,7 @@
           <p:cNvPr id="10" name="AutoShape 9">
             <a:extLst>
               <a:ext uri="{FF2B5EF4-FFF2-40B4-BE49-F238E27FC236}">
-                <a16:creationId xmlns:a16="http://schemas.microsoft.com/office/drawing/2014/main" id="{3D8E798A-49DC-AB42-965A-55F22E50E143}"/>
+                <a16:creationId xmlns:a16="http://schemas.microsoft.com/office/drawing/2014/main" id="{CD1950B5-8DF6-EAE3-1A4A-899D51828A5E}"/>
               </a:ext>
             </a:extLst>
           </p:cNvPr>
@@ -3747,7 +3747,7 @@
           <p:cNvPr id="11" name="AutoShape 10">
             <a:extLst>
               <a:ext uri="{FF2B5EF4-FFF2-40B4-BE49-F238E27FC236}">
-                <a16:creationId xmlns:a16="http://schemas.microsoft.com/office/drawing/2014/main" id="{AF3E019E-D7C5-8C6E-1118-53FFC1B3BA6F}"/>
+                <a16:creationId xmlns:a16="http://schemas.microsoft.com/office/drawing/2014/main" id="{30527369-DBC7-5AF8-1A65-1A0127A6584E}"/>
               </a:ext>
             </a:extLst>
           </p:cNvPr>
@@ -3793,7 +3793,7 @@
           <p:cNvPr id="12" name="AutoShape 11">
             <a:extLst>
               <a:ext uri="{FF2B5EF4-FFF2-40B4-BE49-F238E27FC236}">
-                <a16:creationId xmlns:a16="http://schemas.microsoft.com/office/drawing/2014/main" id="{A6631881-4319-1858-748E-209E1E332C90}"/>
+                <a16:creationId xmlns:a16="http://schemas.microsoft.com/office/drawing/2014/main" id="{3C376D08-4B28-5DA3-E3E7-A5A7728DCFE9}"/>
               </a:ext>
             </a:extLst>
           </p:cNvPr>
@@ -3839,7 +3839,7 @@
           <p:cNvPr id="13" name="AutoShape 12">
             <a:extLst>
               <a:ext uri="{FF2B5EF4-FFF2-40B4-BE49-F238E27FC236}">
-                <a16:creationId xmlns:a16="http://schemas.microsoft.com/office/drawing/2014/main" id="{38E2C772-D1A2-4C19-3D3A-632043D12D7B}"/>
+                <a16:creationId xmlns:a16="http://schemas.microsoft.com/office/drawing/2014/main" id="{133D85D6-E4B3-E886-C0C7-C00288E5F059}"/>
               </a:ext>
             </a:extLst>
           </p:cNvPr>
@@ -3885,7 +3885,7 @@
           <p:cNvPr id="14" name="AutoShape 13">
             <a:extLst>
               <a:ext uri="{FF2B5EF4-FFF2-40B4-BE49-F238E27FC236}">
-                <a16:creationId xmlns:a16="http://schemas.microsoft.com/office/drawing/2014/main" id="{142DDB9D-2C17-F82F-B825-DB4F797F28D1}"/>
+                <a16:creationId xmlns:a16="http://schemas.microsoft.com/office/drawing/2014/main" id="{CD2C25B9-34B9-F036-AF48-CBA8B4DC4A3C}"/>
               </a:ext>
             </a:extLst>
           </p:cNvPr>
@@ -3931,7 +3931,7 @@
           <p:cNvPr id="15" name="AutoShape 14">
             <a:extLst>
               <a:ext uri="{FF2B5EF4-FFF2-40B4-BE49-F238E27FC236}">
-                <a16:creationId xmlns:a16="http://schemas.microsoft.com/office/drawing/2014/main" id="{402D5DB2-6738-D374-477A-B2CF2B8906F6}"/>
+                <a16:creationId xmlns:a16="http://schemas.microsoft.com/office/drawing/2014/main" id="{A8D5A656-07DF-9878-ECF0-288FFE98E520}"/>
               </a:ext>
             </a:extLst>
           </p:cNvPr>
@@ -3977,7 +3977,7 @@
           <p:cNvPr id="16" name="AutoShape 15">
             <a:extLst>
               <a:ext uri="{FF2B5EF4-FFF2-40B4-BE49-F238E27FC236}">
-                <a16:creationId xmlns:a16="http://schemas.microsoft.com/office/drawing/2014/main" id="{683E7F48-8910-94A8-874A-C11F33470164}"/>
+                <a16:creationId xmlns:a16="http://schemas.microsoft.com/office/drawing/2014/main" id="{E92AE14A-7916-003F-4910-A8DFEF621B8F}"/>
               </a:ext>
             </a:extLst>
           </p:cNvPr>
@@ -4023,7 +4023,7 @@
           <p:cNvPr id="17" name="AutoShape 16">
             <a:extLst>
               <a:ext uri="{FF2B5EF4-FFF2-40B4-BE49-F238E27FC236}">
-                <a16:creationId xmlns:a16="http://schemas.microsoft.com/office/drawing/2014/main" id="{163C1198-E1D1-B279-AF18-0796EBF975B9}"/>
+                <a16:creationId xmlns:a16="http://schemas.microsoft.com/office/drawing/2014/main" id="{FCA22959-5425-6AB2-A909-5D4E9F21B786}"/>
               </a:ext>
             </a:extLst>
           </p:cNvPr>
@@ -4069,7 +4069,7 @@
           <p:cNvPr id="18" name="AutoShape 17">
             <a:extLst>
               <a:ext uri="{FF2B5EF4-FFF2-40B4-BE49-F238E27FC236}">
-                <a16:creationId xmlns:a16="http://schemas.microsoft.com/office/drawing/2014/main" id="{334239BD-03D1-2F12-9BD7-FF0F8EE5E230}"/>
+                <a16:creationId xmlns:a16="http://schemas.microsoft.com/office/drawing/2014/main" id="{5CC13BEF-5282-9CB4-F978-2823CA9FE238}"/>
               </a:ext>
             </a:extLst>
           </p:cNvPr>
@@ -4115,7 +4115,7 @@
           <p:cNvPr id="19" name="AutoShape 18">
             <a:extLst>
               <a:ext uri="{FF2B5EF4-FFF2-40B4-BE49-F238E27FC236}">
-                <a16:creationId xmlns:a16="http://schemas.microsoft.com/office/drawing/2014/main" id="{3F1542BD-0094-B9CB-3FB3-6D8DE8B2C635}"/>
+                <a16:creationId xmlns:a16="http://schemas.microsoft.com/office/drawing/2014/main" id="{F200B89C-0CC0-2B3C-2507-125EF3498A9F}"/>
               </a:ext>
             </a:extLst>
           </p:cNvPr>
@@ -4165,7 +4165,7 @@
           <p:cNvPr id="20" name="AutoShape 19">
             <a:extLst>
               <a:ext uri="{FF2B5EF4-FFF2-40B4-BE49-F238E27FC236}">
-                <a16:creationId xmlns:a16="http://schemas.microsoft.com/office/drawing/2014/main" id="{817ADCE3-F59D-6F31-AF75-11D76E95BA4D}"/>
+                <a16:creationId xmlns:a16="http://schemas.microsoft.com/office/drawing/2014/main" id="{B20EFC8F-9C5C-4D8E-7C0A-B4669BCE663B}"/>
               </a:ext>
             </a:extLst>
           </p:cNvPr>
@@ -4215,7 +4215,7 @@
           <p:cNvPr id="21" name="AutoShape 20">
             <a:extLst>
               <a:ext uri="{FF2B5EF4-FFF2-40B4-BE49-F238E27FC236}">
-                <a16:creationId xmlns:a16="http://schemas.microsoft.com/office/drawing/2014/main" id="{47635448-A377-DF86-0FF4-5566111DAAE7}"/>
+                <a16:creationId xmlns:a16="http://schemas.microsoft.com/office/drawing/2014/main" id="{9D79A289-1EFF-43C4-B94C-A819A90709CC}"/>
               </a:ext>
             </a:extLst>
           </p:cNvPr>
@@ -4265,7 +4265,7 @@
           <p:cNvPr id="22" name="AutoShape 21">
             <a:extLst>
               <a:ext uri="{FF2B5EF4-FFF2-40B4-BE49-F238E27FC236}">
-                <a16:creationId xmlns:a16="http://schemas.microsoft.com/office/drawing/2014/main" id="{D04DA4AF-2C5F-5F83-BDF3-5390F23A726F}"/>
+                <a16:creationId xmlns:a16="http://schemas.microsoft.com/office/drawing/2014/main" id="{7540AB1E-E8FD-E3C1-F9FC-12799B49FAEB}"/>
               </a:ext>
             </a:extLst>
           </p:cNvPr>
@@ -4311,7 +4311,7 @@
           <p:cNvPr id="23" name="AutoShape 22">
             <a:extLst>
               <a:ext uri="{FF2B5EF4-FFF2-40B4-BE49-F238E27FC236}">
-                <a16:creationId xmlns:a16="http://schemas.microsoft.com/office/drawing/2014/main" id="{7435A67E-2CBD-4F23-68A4-254311939626}"/>
+                <a16:creationId xmlns:a16="http://schemas.microsoft.com/office/drawing/2014/main" id="{9494D6F4-B73C-9A4F-4AB8-119753ABBDF1}"/>
               </a:ext>
             </a:extLst>
           </p:cNvPr>
@@ -4357,7 +4357,7 @@
           <p:cNvPr id="24" name="AutoShape 23">
             <a:extLst>
               <a:ext uri="{FF2B5EF4-FFF2-40B4-BE49-F238E27FC236}">
-                <a16:creationId xmlns:a16="http://schemas.microsoft.com/office/drawing/2014/main" id="{7A78C81B-8FBC-F06F-2877-CE7C0E5478AF}"/>
+                <a16:creationId xmlns:a16="http://schemas.microsoft.com/office/drawing/2014/main" id="{CFAFBF13-1766-1FB0-B9D1-F17B515B48A4}"/>
               </a:ext>
             </a:extLst>
           </p:cNvPr>
@@ -4403,7 +4403,7 @@
           <p:cNvPr id="25" name="AutoShape 24">
             <a:extLst>
               <a:ext uri="{FF2B5EF4-FFF2-40B4-BE49-F238E27FC236}">
-                <a16:creationId xmlns:a16="http://schemas.microsoft.com/office/drawing/2014/main" id="{2500F941-7840-9B6E-84E6-6A1024E23885}"/>
+                <a16:creationId xmlns:a16="http://schemas.microsoft.com/office/drawing/2014/main" id="{C4C9FD00-F9E8-C075-F0CA-087B44AB2EDD}"/>
               </a:ext>
             </a:extLst>
           </p:cNvPr>
@@ -4447,7 +4447,7 @@
     </p:spTree>
     <p:extLst>
       <p:ext uri="{BB962C8B-B14F-4D97-AF65-F5344CB8AC3E}">
-        <p14:creationId xmlns:p14="http://schemas.microsoft.com/office/powerpoint/2010/main" val="2024555619"/>
+        <p14:creationId xmlns:p14="http://schemas.microsoft.com/office/powerpoint/2010/main" val="2944771926"/>
       </p:ext>
     </p:extLst>
   </p:cSld>
@@ -4479,7 +4479,7 @@
           <p:cNvPr id="2" name="AutoShape 25">
             <a:extLst>
               <a:ext uri="{FF2B5EF4-FFF2-40B4-BE49-F238E27FC236}">
-                <a16:creationId xmlns:a16="http://schemas.microsoft.com/office/drawing/2014/main" id="{83428C10-479D-E863-583B-3AE8167A88A6}"/>
+                <a16:creationId xmlns:a16="http://schemas.microsoft.com/office/drawing/2014/main" id="{3E924CCA-7B9D-9A45-3C11-33639118B999}"/>
               </a:ext>
             </a:extLst>
           </p:cNvPr>
@@ -4523,7 +4523,7 @@
           <p:cNvPr id="3" name="AutoShape 26">
             <a:extLst>
               <a:ext uri="{FF2B5EF4-FFF2-40B4-BE49-F238E27FC236}">
-                <a16:creationId xmlns:a16="http://schemas.microsoft.com/office/drawing/2014/main" id="{EA3A04D7-750C-4B38-18DF-BC3CC8187F8F}"/>
+                <a16:creationId xmlns:a16="http://schemas.microsoft.com/office/drawing/2014/main" id="{784ACB6A-CA5B-BB10-52A9-83642010C7DD}"/>
               </a:ext>
             </a:extLst>
           </p:cNvPr>
@@ -4567,7 +4567,7 @@
           <p:cNvPr id="4" name="AutoShape 27">
             <a:extLst>
               <a:ext uri="{FF2B5EF4-FFF2-40B4-BE49-F238E27FC236}">
-                <a16:creationId xmlns:a16="http://schemas.microsoft.com/office/drawing/2014/main" id="{4DBB3162-40CA-8785-AFF0-1BAEF143FA48}"/>
+                <a16:creationId xmlns:a16="http://schemas.microsoft.com/office/drawing/2014/main" id="{35BBD2FD-FB89-1E85-FF6C-DDA3D8A873C0}"/>
               </a:ext>
             </a:extLst>
           </p:cNvPr>
@@ -4611,7 +4611,7 @@
           <p:cNvPr id="5" name="AutoShape 28">
             <a:extLst>
               <a:ext uri="{FF2B5EF4-FFF2-40B4-BE49-F238E27FC236}">
-                <a16:creationId xmlns:a16="http://schemas.microsoft.com/office/drawing/2014/main" id="{FCA90FBC-E563-835A-BA0F-84CC2BB5E2BB}"/>
+                <a16:creationId xmlns:a16="http://schemas.microsoft.com/office/drawing/2014/main" id="{A3EE71E5-8B12-4125-1149-45D649BFB618}"/>
               </a:ext>
             </a:extLst>
           </p:cNvPr>
@@ -4657,7 +4657,7 @@
           <p:cNvPr id="6" name="AutoShape 29">
             <a:extLst>
               <a:ext uri="{FF2B5EF4-FFF2-40B4-BE49-F238E27FC236}">
-                <a16:creationId xmlns:a16="http://schemas.microsoft.com/office/drawing/2014/main" id="{18F47E02-8F5A-F7AE-4000-5D0831D58703}"/>
+                <a16:creationId xmlns:a16="http://schemas.microsoft.com/office/drawing/2014/main" id="{916E8109-94D2-B9B3-A1FF-F8429EF40A3E}"/>
               </a:ext>
             </a:extLst>
           </p:cNvPr>
@@ -4701,7 +4701,7 @@
           <p:cNvPr id="7" name="AutoShape 30">
             <a:extLst>
               <a:ext uri="{FF2B5EF4-FFF2-40B4-BE49-F238E27FC236}">
-                <a16:creationId xmlns:a16="http://schemas.microsoft.com/office/drawing/2014/main" id="{49BAA3DA-2A99-CB41-1E1E-994905C5A675}"/>
+                <a16:creationId xmlns:a16="http://schemas.microsoft.com/office/drawing/2014/main" id="{3A92834C-35C7-EDB9-7BBD-0D860EE7947B}"/>
               </a:ext>
             </a:extLst>
           </p:cNvPr>
@@ -4745,7 +4745,7 @@
           <p:cNvPr id="8" name="AutoShape 31">
             <a:extLst>
               <a:ext uri="{FF2B5EF4-FFF2-40B4-BE49-F238E27FC236}">
-                <a16:creationId xmlns:a16="http://schemas.microsoft.com/office/drawing/2014/main" id="{1A9E7E68-3303-C050-3B51-1197EECDE88D}"/>
+                <a16:creationId xmlns:a16="http://schemas.microsoft.com/office/drawing/2014/main" id="{684A7A20-CB83-FEFA-7C9C-E0C59BFF7AAB}"/>
               </a:ext>
             </a:extLst>
           </p:cNvPr>
@@ -4789,7 +4789,7 @@
           <p:cNvPr id="9" name="AutoShape 32">
             <a:extLst>
               <a:ext uri="{FF2B5EF4-FFF2-40B4-BE49-F238E27FC236}">
-                <a16:creationId xmlns:a16="http://schemas.microsoft.com/office/drawing/2014/main" id="{E8E146EE-FB6B-8028-8A15-59AA913FFB02}"/>
+                <a16:creationId xmlns:a16="http://schemas.microsoft.com/office/drawing/2014/main" id="{892E38DD-2B5E-7DB5-DD51-C14442DC26A9}"/>
               </a:ext>
             </a:extLst>
           </p:cNvPr>
@@ -4833,7 +4833,7 @@
           <p:cNvPr id="10" name="AutoShape 33">
             <a:extLst>
               <a:ext uri="{FF2B5EF4-FFF2-40B4-BE49-F238E27FC236}">
-                <a16:creationId xmlns:a16="http://schemas.microsoft.com/office/drawing/2014/main" id="{ADBDED41-A571-70DA-E413-40F6FC7FDF32}"/>
+                <a16:creationId xmlns:a16="http://schemas.microsoft.com/office/drawing/2014/main" id="{E29ABCC8-06DC-93C2-52CD-36FCCF631D55}"/>
               </a:ext>
             </a:extLst>
           </p:cNvPr>
@@ -4879,7 +4879,7 @@
           <p:cNvPr id="11" name="AutoShape 34">
             <a:extLst>
               <a:ext uri="{FF2B5EF4-FFF2-40B4-BE49-F238E27FC236}">
-                <a16:creationId xmlns:a16="http://schemas.microsoft.com/office/drawing/2014/main" id="{5E51264A-0AE2-0F63-61E2-704DDEEFCF46}"/>
+                <a16:creationId xmlns:a16="http://schemas.microsoft.com/office/drawing/2014/main" id="{156A86B3-01EA-D374-7170-D8ADD7022186}"/>
               </a:ext>
             </a:extLst>
           </p:cNvPr>
@@ -4925,7 +4925,7 @@
           <p:cNvPr id="12" name="AutoShape 35">
             <a:extLst>
               <a:ext uri="{FF2B5EF4-FFF2-40B4-BE49-F238E27FC236}">
-                <a16:creationId xmlns:a16="http://schemas.microsoft.com/office/drawing/2014/main" id="{74E29E4F-3843-270F-A423-359C518C1371}"/>
+                <a16:creationId xmlns:a16="http://schemas.microsoft.com/office/drawing/2014/main" id="{96E574F2-6E8F-4A4A-D6E7-062887835BE2}"/>
               </a:ext>
             </a:extLst>
           </p:cNvPr>
@@ -4971,7 +4971,7 @@
           <p:cNvPr id="13" name="AutoShape 36">
             <a:extLst>
               <a:ext uri="{FF2B5EF4-FFF2-40B4-BE49-F238E27FC236}">
-                <a16:creationId xmlns:a16="http://schemas.microsoft.com/office/drawing/2014/main" id="{1CCEA532-28F3-4133-629B-2EE5DB643220}"/>
+                <a16:creationId xmlns:a16="http://schemas.microsoft.com/office/drawing/2014/main" id="{711236C9-8868-E732-5CB1-F57089D1D158}"/>
               </a:ext>
             </a:extLst>
           </p:cNvPr>
@@ -5017,7 +5017,7 @@
           <p:cNvPr id="14" name="AutoShape 37">
             <a:extLst>
               <a:ext uri="{FF2B5EF4-FFF2-40B4-BE49-F238E27FC236}">
-                <a16:creationId xmlns:a16="http://schemas.microsoft.com/office/drawing/2014/main" id="{2BADD779-676F-20F3-8C09-E3EA43E816A4}"/>
+                <a16:creationId xmlns:a16="http://schemas.microsoft.com/office/drawing/2014/main" id="{BAC8A13D-D555-EC1D-51BC-066FE6DACA26}"/>
               </a:ext>
             </a:extLst>
           </p:cNvPr>
@@ -5063,7 +5063,7 @@
           <p:cNvPr id="15" name="AutoShape 38">
             <a:extLst>
               <a:ext uri="{FF2B5EF4-FFF2-40B4-BE49-F238E27FC236}">
-                <a16:creationId xmlns:a16="http://schemas.microsoft.com/office/drawing/2014/main" id="{78D81500-0991-DF83-C581-22F8FDF1AAB3}"/>
+                <a16:creationId xmlns:a16="http://schemas.microsoft.com/office/drawing/2014/main" id="{A3C92F99-DA91-B5C0-5FFB-8D51DF869FE9}"/>
               </a:ext>
             </a:extLst>
           </p:cNvPr>
@@ -5109,7 +5109,7 @@
           <p:cNvPr id="16" name="AutoShape 39">
             <a:extLst>
               <a:ext uri="{FF2B5EF4-FFF2-40B4-BE49-F238E27FC236}">
-                <a16:creationId xmlns:a16="http://schemas.microsoft.com/office/drawing/2014/main" id="{DC2D0B3B-764E-F31D-28FF-6AB19EFA02A1}"/>
+                <a16:creationId xmlns:a16="http://schemas.microsoft.com/office/drawing/2014/main" id="{222059D8-A436-09D5-26F4-42A4EE24B9A4}"/>
               </a:ext>
             </a:extLst>
           </p:cNvPr>
@@ -5155,7 +5155,7 @@
           <p:cNvPr id="17" name="AutoShape 40">
             <a:extLst>
               <a:ext uri="{FF2B5EF4-FFF2-40B4-BE49-F238E27FC236}">
-                <a16:creationId xmlns:a16="http://schemas.microsoft.com/office/drawing/2014/main" id="{EDE9F087-4C78-F435-C5BA-59EE512B7CB2}"/>
+                <a16:creationId xmlns:a16="http://schemas.microsoft.com/office/drawing/2014/main" id="{572DBCA0-4F6F-C4BC-8FB9-2A3505D0CA5A}"/>
               </a:ext>
             </a:extLst>
           </p:cNvPr>
@@ -5201,7 +5201,7 @@
           <p:cNvPr id="18" name="AutoShape 41">
             <a:extLst>
               <a:ext uri="{FF2B5EF4-FFF2-40B4-BE49-F238E27FC236}">
-                <a16:creationId xmlns:a16="http://schemas.microsoft.com/office/drawing/2014/main" id="{EE372107-A933-DC35-37FA-78D75C2DA1F8}"/>
+                <a16:creationId xmlns:a16="http://schemas.microsoft.com/office/drawing/2014/main" id="{54B35D7F-36C0-172E-EFB4-D5EE41661DA9}"/>
               </a:ext>
             </a:extLst>
           </p:cNvPr>
@@ -5251,7 +5251,7 @@
           <p:cNvPr id="19" name="AutoShape 42">
             <a:extLst>
               <a:ext uri="{FF2B5EF4-FFF2-40B4-BE49-F238E27FC236}">
-                <a16:creationId xmlns:a16="http://schemas.microsoft.com/office/drawing/2014/main" id="{BEE3592E-BFA0-4D3A-ECBD-DB1152D64D1F}"/>
+                <a16:creationId xmlns:a16="http://schemas.microsoft.com/office/drawing/2014/main" id="{311F6116-1D33-CE4C-788B-67ED236EE2E7}"/>
               </a:ext>
             </a:extLst>
           </p:cNvPr>
@@ -5301,7 +5301,7 @@
           <p:cNvPr id="20" name="AutoShape 43">
             <a:extLst>
               <a:ext uri="{FF2B5EF4-FFF2-40B4-BE49-F238E27FC236}">
-                <a16:creationId xmlns:a16="http://schemas.microsoft.com/office/drawing/2014/main" id="{7F0E8F59-C21D-A7F7-DE55-74150FC48A6B}"/>
+                <a16:creationId xmlns:a16="http://schemas.microsoft.com/office/drawing/2014/main" id="{99D9280F-3831-546C-DEA4-D9510261F224}"/>
               </a:ext>
             </a:extLst>
           </p:cNvPr>
@@ -5347,7 +5347,7 @@
           <p:cNvPr id="21" name="AutoShape 44">
             <a:extLst>
               <a:ext uri="{FF2B5EF4-FFF2-40B4-BE49-F238E27FC236}">
-                <a16:creationId xmlns:a16="http://schemas.microsoft.com/office/drawing/2014/main" id="{2CC6E31D-E924-8F40-269D-4D455E6FD3F3}"/>
+                <a16:creationId xmlns:a16="http://schemas.microsoft.com/office/drawing/2014/main" id="{2815680C-D21E-022F-7711-AEB58EADB6BA}"/>
               </a:ext>
             </a:extLst>
           </p:cNvPr>
@@ -5393,7 +5393,7 @@
           <p:cNvPr id="22" name="AutoShape 45">
             <a:extLst>
               <a:ext uri="{FF2B5EF4-FFF2-40B4-BE49-F238E27FC236}">
-                <a16:creationId xmlns:a16="http://schemas.microsoft.com/office/drawing/2014/main" id="{CF1201B4-61EB-210E-E4C3-D71D8668C895}"/>
+                <a16:creationId xmlns:a16="http://schemas.microsoft.com/office/drawing/2014/main" id="{594CD296-A087-7913-E4C5-870E1CAE205C}"/>
               </a:ext>
             </a:extLst>
           </p:cNvPr>
@@ -5443,7 +5443,7 @@
           <p:cNvPr id="23" name="AutoShape 46">
             <a:extLst>
               <a:ext uri="{FF2B5EF4-FFF2-40B4-BE49-F238E27FC236}">
-                <a16:creationId xmlns:a16="http://schemas.microsoft.com/office/drawing/2014/main" id="{F4827821-A1B8-EDF8-37B6-6C735C414E53}"/>
+                <a16:creationId xmlns:a16="http://schemas.microsoft.com/office/drawing/2014/main" id="{D458C331-3F28-BC83-B567-3241B45EE906}"/>
               </a:ext>
             </a:extLst>
           </p:cNvPr>
@@ -5493,7 +5493,7 @@
           <p:cNvPr id="24" name="AutoShape 47">
             <a:extLst>
               <a:ext uri="{FF2B5EF4-FFF2-40B4-BE49-F238E27FC236}">
-                <a16:creationId xmlns:a16="http://schemas.microsoft.com/office/drawing/2014/main" id="{4F021092-54CC-55B6-7CA1-033E08ECB7F1}"/>
+                <a16:creationId xmlns:a16="http://schemas.microsoft.com/office/drawing/2014/main" id="{EF8BDB83-C38F-46AB-DDCB-407BD92D4632}"/>
               </a:ext>
             </a:extLst>
           </p:cNvPr>
@@ -5543,7 +5543,7 @@
           <p:cNvPr id="25" name="AutoShape 48">
             <a:extLst>
               <a:ext uri="{FF2B5EF4-FFF2-40B4-BE49-F238E27FC236}">
-                <a16:creationId xmlns:a16="http://schemas.microsoft.com/office/drawing/2014/main" id="{0832DC57-D5B9-090C-D1B9-64514FE3412E}"/>
+                <a16:creationId xmlns:a16="http://schemas.microsoft.com/office/drawing/2014/main" id="{53FB7322-37D0-200B-3C73-454981ED632E}"/>
               </a:ext>
             </a:extLst>
           </p:cNvPr>
@@ -5591,7 +5591,7 @@
     </p:spTree>
     <p:extLst>
       <p:ext uri="{BB962C8B-B14F-4D97-AF65-F5344CB8AC3E}">
-        <p14:creationId xmlns:p14="http://schemas.microsoft.com/office/powerpoint/2010/main" val="1552884172"/>
+        <p14:creationId xmlns:p14="http://schemas.microsoft.com/office/powerpoint/2010/main" val="2162941640"/>
       </p:ext>
     </p:extLst>
   </p:cSld>
@@ -5623,7 +5623,7 @@
           <p:cNvPr id="2" name="AutoShape 49">
             <a:extLst>
               <a:ext uri="{FF2B5EF4-FFF2-40B4-BE49-F238E27FC236}">
-                <a16:creationId xmlns:a16="http://schemas.microsoft.com/office/drawing/2014/main" id="{DD220FF9-8AC4-76AB-1CB0-A146C2E9BDE8}"/>
+                <a16:creationId xmlns:a16="http://schemas.microsoft.com/office/drawing/2014/main" id="{A3BD508B-323F-FA2A-DAAC-556E6088290B}"/>
               </a:ext>
             </a:extLst>
           </p:cNvPr>
@@ -5669,7 +5669,7 @@
           <p:cNvPr id="3" name="AutoShape 50">
             <a:extLst>
               <a:ext uri="{FF2B5EF4-FFF2-40B4-BE49-F238E27FC236}">
-                <a16:creationId xmlns:a16="http://schemas.microsoft.com/office/drawing/2014/main" id="{D6BE1BCD-1057-48A4-EA0E-0CEF6B02686C}"/>
+                <a16:creationId xmlns:a16="http://schemas.microsoft.com/office/drawing/2014/main" id="{35A7BBC1-9E9D-68A2-C1A2-55ABF0E8A053}"/>
               </a:ext>
             </a:extLst>
           </p:cNvPr>
@@ -5715,7 +5715,7 @@
           <p:cNvPr id="4" name="AutoShape 51">
             <a:extLst>
               <a:ext uri="{FF2B5EF4-FFF2-40B4-BE49-F238E27FC236}">
-                <a16:creationId xmlns:a16="http://schemas.microsoft.com/office/drawing/2014/main" id="{664FD47A-9A71-57C4-6335-824A0464A6A3}"/>
+                <a16:creationId xmlns:a16="http://schemas.microsoft.com/office/drawing/2014/main" id="{D9259258-4780-1DE5-C8F7-28D53431E272}"/>
               </a:ext>
             </a:extLst>
           </p:cNvPr>
@@ -5761,7 +5761,7 @@
           <p:cNvPr id="5" name="AutoShape 52">
             <a:extLst>
               <a:ext uri="{FF2B5EF4-FFF2-40B4-BE49-F238E27FC236}">
-                <a16:creationId xmlns:a16="http://schemas.microsoft.com/office/drawing/2014/main" id="{379155C7-A6F3-D41F-69DF-18C8A9B0D95D}"/>
+                <a16:creationId xmlns:a16="http://schemas.microsoft.com/office/drawing/2014/main" id="{B3355461-C133-8572-F808-89D27565A77E}"/>
               </a:ext>
             </a:extLst>
           </p:cNvPr>
@@ -5811,7 +5811,7 @@
           <p:cNvPr id="6" name="AutoShape 53">
             <a:extLst>
               <a:ext uri="{FF2B5EF4-FFF2-40B4-BE49-F238E27FC236}">
-                <a16:creationId xmlns:a16="http://schemas.microsoft.com/office/drawing/2014/main" id="{3A3D76B6-D4DD-9C3E-0C7C-5F14181FDA32}"/>
+                <a16:creationId xmlns:a16="http://schemas.microsoft.com/office/drawing/2014/main" id="{A21F7924-566F-AFA1-3963-568B83092940}"/>
               </a:ext>
             </a:extLst>
           </p:cNvPr>
@@ -5857,7 +5857,7 @@
           <p:cNvPr id="7" name="AutoShape 54">
             <a:extLst>
               <a:ext uri="{FF2B5EF4-FFF2-40B4-BE49-F238E27FC236}">
-                <a16:creationId xmlns:a16="http://schemas.microsoft.com/office/drawing/2014/main" id="{FFCB00FF-B88E-C311-4758-9071B10BB201}"/>
+                <a16:creationId xmlns:a16="http://schemas.microsoft.com/office/drawing/2014/main" id="{75F80B68-FE42-398F-C906-392F91E92E05}"/>
               </a:ext>
             </a:extLst>
           </p:cNvPr>
@@ -5903,7 +5903,7 @@
           <p:cNvPr id="8" name="AutoShape 55">
             <a:extLst>
               <a:ext uri="{FF2B5EF4-FFF2-40B4-BE49-F238E27FC236}">
-                <a16:creationId xmlns:a16="http://schemas.microsoft.com/office/drawing/2014/main" id="{850D9810-781E-44E0-CCA5-E0D635622CD6}"/>
+                <a16:creationId xmlns:a16="http://schemas.microsoft.com/office/drawing/2014/main" id="{86A362E4-5849-03E8-5055-FDB99B9F0E0A}"/>
               </a:ext>
             </a:extLst>
           </p:cNvPr>
@@ -5949,7 +5949,7 @@
           <p:cNvPr id="9" name="AutoShape 56">
             <a:extLst>
               <a:ext uri="{FF2B5EF4-FFF2-40B4-BE49-F238E27FC236}">
-                <a16:creationId xmlns:a16="http://schemas.microsoft.com/office/drawing/2014/main" id="{AB051905-6BDA-4BB9-9ED6-33F0EDECD4CC}"/>
+                <a16:creationId xmlns:a16="http://schemas.microsoft.com/office/drawing/2014/main" id="{CCAEB632-829A-875F-1228-C73D639ADDDD}"/>
               </a:ext>
             </a:extLst>
           </p:cNvPr>
@@ -5995,7 +5995,7 @@
           <p:cNvPr id="10" name="AutoShape 57">
             <a:extLst>
               <a:ext uri="{FF2B5EF4-FFF2-40B4-BE49-F238E27FC236}">
-                <a16:creationId xmlns:a16="http://schemas.microsoft.com/office/drawing/2014/main" id="{5FBD4247-147F-4EEA-634A-3F65FDB7C4BF}"/>
+                <a16:creationId xmlns:a16="http://schemas.microsoft.com/office/drawing/2014/main" id="{E7BF52B6-D23C-83F9-5A85-1F137EB52A5C}"/>
               </a:ext>
             </a:extLst>
           </p:cNvPr>
@@ -6041,7 +6041,7 @@
           <p:cNvPr id="11" name="AutoShape 58">
             <a:extLst>
               <a:ext uri="{FF2B5EF4-FFF2-40B4-BE49-F238E27FC236}">
-                <a16:creationId xmlns:a16="http://schemas.microsoft.com/office/drawing/2014/main" id="{2137ED0B-54D1-211B-BC54-B9F3AFCD7EA7}"/>
+                <a16:creationId xmlns:a16="http://schemas.microsoft.com/office/drawing/2014/main" id="{A5102469-CF74-9F9F-EDA2-C1920E53376C}"/>
               </a:ext>
             </a:extLst>
           </p:cNvPr>
@@ -6087,7 +6087,7 @@
           <p:cNvPr id="12" name="AutoShape 59">
             <a:extLst>
               <a:ext uri="{FF2B5EF4-FFF2-40B4-BE49-F238E27FC236}">
-                <a16:creationId xmlns:a16="http://schemas.microsoft.com/office/drawing/2014/main" id="{326458FD-3ADF-2F21-ADE9-910FBB6880AC}"/>
+                <a16:creationId xmlns:a16="http://schemas.microsoft.com/office/drawing/2014/main" id="{7DD264ED-B478-BA31-2E1B-5E353373D1F9}"/>
               </a:ext>
             </a:extLst>
           </p:cNvPr>
@@ -6133,7 +6133,7 @@
           <p:cNvPr id="13" name="AutoShape 60">
             <a:extLst>
               <a:ext uri="{FF2B5EF4-FFF2-40B4-BE49-F238E27FC236}">
-                <a16:creationId xmlns:a16="http://schemas.microsoft.com/office/drawing/2014/main" id="{3491976F-9619-D805-A13A-A37CAE29C3C5}"/>
+                <a16:creationId xmlns:a16="http://schemas.microsoft.com/office/drawing/2014/main" id="{99BF5CCE-85B9-E25A-5A3C-1A72AD1CCBEB}"/>
               </a:ext>
             </a:extLst>
           </p:cNvPr>
@@ -6183,7 +6183,7 @@
           <p:cNvPr id="14" name="AutoShape 61">
             <a:extLst>
               <a:ext uri="{FF2B5EF4-FFF2-40B4-BE49-F238E27FC236}">
-                <a16:creationId xmlns:a16="http://schemas.microsoft.com/office/drawing/2014/main" id="{90076C50-BE9F-52D3-9A68-6C582A959B11}"/>
+                <a16:creationId xmlns:a16="http://schemas.microsoft.com/office/drawing/2014/main" id="{17A4A930-7EB7-F812-7C0F-5CC35F039143}"/>
               </a:ext>
             </a:extLst>
           </p:cNvPr>
@@ -6229,7 +6229,7 @@
           <p:cNvPr id="15" name="AutoShape 62">
             <a:extLst>
               <a:ext uri="{FF2B5EF4-FFF2-40B4-BE49-F238E27FC236}">
-                <a16:creationId xmlns:a16="http://schemas.microsoft.com/office/drawing/2014/main" id="{8C0BFCA3-124A-5434-3B85-5496DDE32B4E}"/>
+                <a16:creationId xmlns:a16="http://schemas.microsoft.com/office/drawing/2014/main" id="{B6656289-56D7-A485-D8F6-D51917701638}"/>
               </a:ext>
             </a:extLst>
           </p:cNvPr>
@@ -6275,7 +6275,7 @@
           <p:cNvPr id="16" name="AutoShape 63">
             <a:extLst>
               <a:ext uri="{FF2B5EF4-FFF2-40B4-BE49-F238E27FC236}">
-                <a16:creationId xmlns:a16="http://schemas.microsoft.com/office/drawing/2014/main" id="{52C7C7B3-197A-6134-C0AC-9BA1B0426C10}"/>
+                <a16:creationId xmlns:a16="http://schemas.microsoft.com/office/drawing/2014/main" id="{CA19F9D6-9ACB-BA62-53D3-2E062933E07B}"/>
               </a:ext>
             </a:extLst>
           </p:cNvPr>
@@ -6321,7 +6321,7 @@
           <p:cNvPr id="17" name="AutoShape 64">
             <a:extLst>
               <a:ext uri="{FF2B5EF4-FFF2-40B4-BE49-F238E27FC236}">
-                <a16:creationId xmlns:a16="http://schemas.microsoft.com/office/drawing/2014/main" id="{7859CD3C-B584-3D34-B088-F5BF9CF30A3B}"/>
+                <a16:creationId xmlns:a16="http://schemas.microsoft.com/office/drawing/2014/main" id="{775E7C7F-F4F4-753B-3069-FB9CE4FBCCC8}"/>
               </a:ext>
             </a:extLst>
           </p:cNvPr>
@@ -6367,7 +6367,7 @@
           <p:cNvPr id="18" name="AutoShape 65">
             <a:extLst>
               <a:ext uri="{FF2B5EF4-FFF2-40B4-BE49-F238E27FC236}">
-                <a16:creationId xmlns:a16="http://schemas.microsoft.com/office/drawing/2014/main" id="{AE7C0CCE-B8D6-16B5-B446-F825849DE49B}"/>
+                <a16:creationId xmlns:a16="http://schemas.microsoft.com/office/drawing/2014/main" id="{C9EF479E-75EF-8A21-1342-38E0EE28C2CC}"/>
               </a:ext>
             </a:extLst>
           </p:cNvPr>
@@ -6413,7 +6413,7 @@
           <p:cNvPr id="19" name="AutoShape 66">
             <a:extLst>
               <a:ext uri="{FF2B5EF4-FFF2-40B4-BE49-F238E27FC236}">
-                <a16:creationId xmlns:a16="http://schemas.microsoft.com/office/drawing/2014/main" id="{F81522B1-95BB-6786-5795-99BDBDA382AD}"/>
+                <a16:creationId xmlns:a16="http://schemas.microsoft.com/office/drawing/2014/main" id="{B573A009-53BB-DA57-C03C-170CDE26243A}"/>
               </a:ext>
             </a:extLst>
           </p:cNvPr>
@@ -6459,7 +6459,7 @@
           <p:cNvPr id="20" name="AutoShape 67">
             <a:extLst>
               <a:ext uri="{FF2B5EF4-FFF2-40B4-BE49-F238E27FC236}">
-                <a16:creationId xmlns:a16="http://schemas.microsoft.com/office/drawing/2014/main" id="{BF94DEC1-AB6A-DFD6-822B-1F4D7722DEA8}"/>
+                <a16:creationId xmlns:a16="http://schemas.microsoft.com/office/drawing/2014/main" id="{73AA71AC-7CDC-18C2-FC67-C5F9DFE24B99}"/>
               </a:ext>
             </a:extLst>
           </p:cNvPr>
@@ -6505,7 +6505,7 @@
           <p:cNvPr id="21" name="AutoShape 68">
             <a:extLst>
               <a:ext uri="{FF2B5EF4-FFF2-40B4-BE49-F238E27FC236}">
-                <a16:creationId xmlns:a16="http://schemas.microsoft.com/office/drawing/2014/main" id="{A13C87D6-EECD-AA55-84D0-8881ABDECDB8}"/>
+                <a16:creationId xmlns:a16="http://schemas.microsoft.com/office/drawing/2014/main" id="{232E2D97-E5F9-D36A-E2DA-097E71AADF36}"/>
               </a:ext>
             </a:extLst>
           </p:cNvPr>
@@ -6551,7 +6551,7 @@
           <p:cNvPr id="22" name="AutoShape 69">
             <a:extLst>
               <a:ext uri="{FF2B5EF4-FFF2-40B4-BE49-F238E27FC236}">
-                <a16:creationId xmlns:a16="http://schemas.microsoft.com/office/drawing/2014/main" id="{9C9E734D-FD8A-1250-64BA-181D8C815D2E}"/>
+                <a16:creationId xmlns:a16="http://schemas.microsoft.com/office/drawing/2014/main" id="{C2DD0405-5E8A-BA67-5C29-76F6C0B75DF4}"/>
               </a:ext>
             </a:extLst>
           </p:cNvPr>
@@ -6597,7 +6597,7 @@
           <p:cNvPr id="23" name="AutoShape 70">
             <a:extLst>
               <a:ext uri="{FF2B5EF4-FFF2-40B4-BE49-F238E27FC236}">
-                <a16:creationId xmlns:a16="http://schemas.microsoft.com/office/drawing/2014/main" id="{642A0350-A53D-B2C7-801C-6A860615179F}"/>
+                <a16:creationId xmlns:a16="http://schemas.microsoft.com/office/drawing/2014/main" id="{82DFA49B-5070-5648-9FAD-995A4115C50A}"/>
               </a:ext>
             </a:extLst>
           </p:cNvPr>
@@ -6643,7 +6643,7 @@
           <p:cNvPr id="24" name="AutoShape 71">
             <a:extLst>
               <a:ext uri="{FF2B5EF4-FFF2-40B4-BE49-F238E27FC236}">
-                <a16:creationId xmlns:a16="http://schemas.microsoft.com/office/drawing/2014/main" id="{DE79E948-F15F-9E53-3A99-BFBCCB12D83C}"/>
+                <a16:creationId xmlns:a16="http://schemas.microsoft.com/office/drawing/2014/main" id="{48013A98-3D62-70E6-5DC9-87498BFAA34E}"/>
               </a:ext>
             </a:extLst>
           </p:cNvPr>
@@ -6689,7 +6689,7 @@
           <p:cNvPr id="25" name="AutoShape 72">
             <a:extLst>
               <a:ext uri="{FF2B5EF4-FFF2-40B4-BE49-F238E27FC236}">
-                <a16:creationId xmlns:a16="http://schemas.microsoft.com/office/drawing/2014/main" id="{A3D97BBE-E5E2-29B9-53E5-A5FB0379D966}"/>
+                <a16:creationId xmlns:a16="http://schemas.microsoft.com/office/drawing/2014/main" id="{6F64420A-90AB-8D3A-2038-DF43DDF84892}"/>
               </a:ext>
             </a:extLst>
           </p:cNvPr>
@@ -6733,7 +6733,7 @@
     </p:spTree>
     <p:extLst>
       <p:ext uri="{BB962C8B-B14F-4D97-AF65-F5344CB8AC3E}">
-        <p14:creationId xmlns:p14="http://schemas.microsoft.com/office/powerpoint/2010/main" val="884448460"/>
+        <p14:creationId xmlns:p14="http://schemas.microsoft.com/office/powerpoint/2010/main" val="209627045"/>
       </p:ext>
     </p:extLst>
   </p:cSld>
@@ -6765,7 +6765,7 @@
           <p:cNvPr id="2" name="AutoShape 73">
             <a:extLst>
               <a:ext uri="{FF2B5EF4-FFF2-40B4-BE49-F238E27FC236}">
-                <a16:creationId xmlns:a16="http://schemas.microsoft.com/office/drawing/2014/main" id="{99EA0749-EE67-BCD4-EDEC-C4A3F213E4A9}"/>
+                <a16:creationId xmlns:a16="http://schemas.microsoft.com/office/drawing/2014/main" id="{217B8E2E-BD56-A917-65A8-F2BEE84EB59E}"/>
               </a:ext>
             </a:extLst>
           </p:cNvPr>
@@ -6811,7 +6811,7 @@
           <p:cNvPr id="3" name="AutoShape 74">
             <a:extLst>
               <a:ext uri="{FF2B5EF4-FFF2-40B4-BE49-F238E27FC236}">
-                <a16:creationId xmlns:a16="http://schemas.microsoft.com/office/drawing/2014/main" id="{D61EB4CF-F854-9E53-5476-AD4370AAE127}"/>
+                <a16:creationId xmlns:a16="http://schemas.microsoft.com/office/drawing/2014/main" id="{3C0DE089-E52D-43B3-4B1B-E7335BE32750}"/>
               </a:ext>
             </a:extLst>
           </p:cNvPr>
@@ -6857,7 +6857,7 @@
           <p:cNvPr id="4" name="AutoShape 75">
             <a:extLst>
               <a:ext uri="{FF2B5EF4-FFF2-40B4-BE49-F238E27FC236}">
-                <a16:creationId xmlns:a16="http://schemas.microsoft.com/office/drawing/2014/main" id="{F86505E5-A620-E303-8BEA-716536640BD0}"/>
+                <a16:creationId xmlns:a16="http://schemas.microsoft.com/office/drawing/2014/main" id="{77BEA797-7C32-10B9-5B98-CBC4E255C5F1}"/>
               </a:ext>
             </a:extLst>
           </p:cNvPr>
@@ -6903,7 +6903,7 @@
           <p:cNvPr id="5" name="AutoShape 76">
             <a:extLst>
               <a:ext uri="{FF2B5EF4-FFF2-40B4-BE49-F238E27FC236}">
-                <a16:creationId xmlns:a16="http://schemas.microsoft.com/office/drawing/2014/main" id="{B3C0D2BC-E839-3288-1CB7-C41DE49D5C2E}"/>
+                <a16:creationId xmlns:a16="http://schemas.microsoft.com/office/drawing/2014/main" id="{57C6A0BF-2A52-091E-23B0-E7CD516D0625}"/>
               </a:ext>
             </a:extLst>
           </p:cNvPr>
@@ -6949,7 +6949,7 @@
           <p:cNvPr id="6" name="AutoShape 77">
             <a:extLst>
               <a:ext uri="{FF2B5EF4-FFF2-40B4-BE49-F238E27FC236}">
-                <a16:creationId xmlns:a16="http://schemas.microsoft.com/office/drawing/2014/main" id="{F3AE30C3-47EA-7BF3-FD07-B8AD27BE7F03}"/>
+                <a16:creationId xmlns:a16="http://schemas.microsoft.com/office/drawing/2014/main" id="{DC14A1CC-BF14-460E-9A54-E6237E8189DD}"/>
               </a:ext>
             </a:extLst>
           </p:cNvPr>
@@ -6995,7 +6995,7 @@
           <p:cNvPr id="7" name="AutoShape 78">
             <a:extLst>
               <a:ext uri="{FF2B5EF4-FFF2-40B4-BE49-F238E27FC236}">
-                <a16:creationId xmlns:a16="http://schemas.microsoft.com/office/drawing/2014/main" id="{53160383-7510-E945-1973-473371EB6C2E}"/>
+                <a16:creationId xmlns:a16="http://schemas.microsoft.com/office/drawing/2014/main" id="{38909683-D6FA-D634-3F10-53C5D5B3A121}"/>
               </a:ext>
             </a:extLst>
           </p:cNvPr>
@@ -7041,7 +7041,7 @@
           <p:cNvPr id="8" name="AutoShape 79">
             <a:extLst>
               <a:ext uri="{FF2B5EF4-FFF2-40B4-BE49-F238E27FC236}">
-                <a16:creationId xmlns:a16="http://schemas.microsoft.com/office/drawing/2014/main" id="{4CCB0FFC-510E-68FF-4EAB-F19A515825EC}"/>
+                <a16:creationId xmlns:a16="http://schemas.microsoft.com/office/drawing/2014/main" id="{0AD05796-6465-D353-6097-AAE74B18355D}"/>
               </a:ext>
             </a:extLst>
           </p:cNvPr>
@@ -7091,7 +7091,7 @@
           <p:cNvPr id="9" name="AutoShape 80">
             <a:extLst>
               <a:ext uri="{FF2B5EF4-FFF2-40B4-BE49-F238E27FC236}">
-                <a16:creationId xmlns:a16="http://schemas.microsoft.com/office/drawing/2014/main" id="{547E7CFD-6C78-DF0C-7B2D-1E9B4AFB85A7}"/>
+                <a16:creationId xmlns:a16="http://schemas.microsoft.com/office/drawing/2014/main" id="{3A9867BC-DBAD-9FB0-4FB0-DBFC5F5E7841}"/>
               </a:ext>
             </a:extLst>
           </p:cNvPr>
@@ -7137,7 +7137,7 @@
           <p:cNvPr id="10" name="AutoShape 81">
             <a:extLst>
               <a:ext uri="{FF2B5EF4-FFF2-40B4-BE49-F238E27FC236}">
-                <a16:creationId xmlns:a16="http://schemas.microsoft.com/office/drawing/2014/main" id="{77BC841A-C6C9-A735-28C3-74A627B1CAFE}"/>
+                <a16:creationId xmlns:a16="http://schemas.microsoft.com/office/drawing/2014/main" id="{81A3BC2E-4116-02E8-C61A-B4BCBDEED298}"/>
               </a:ext>
             </a:extLst>
           </p:cNvPr>
@@ -7183,7 +7183,7 @@
           <p:cNvPr id="11" name="AutoShape 82">
             <a:extLst>
               <a:ext uri="{FF2B5EF4-FFF2-40B4-BE49-F238E27FC236}">
-                <a16:creationId xmlns:a16="http://schemas.microsoft.com/office/drawing/2014/main" id="{0B80C19D-CAC6-9334-DBA9-7DDB6020EAD0}"/>
+                <a16:creationId xmlns:a16="http://schemas.microsoft.com/office/drawing/2014/main" id="{10C09368-F029-3F38-F714-0BE30E54B9AD}"/>
               </a:ext>
             </a:extLst>
           </p:cNvPr>
@@ -7229,7 +7229,7 @@
           <p:cNvPr id="12" name="AutoShape 83">
             <a:extLst>
               <a:ext uri="{FF2B5EF4-FFF2-40B4-BE49-F238E27FC236}">
-                <a16:creationId xmlns:a16="http://schemas.microsoft.com/office/drawing/2014/main" id="{0AC62F22-ED54-3E26-1151-0B5A29BF10A8}"/>
+                <a16:creationId xmlns:a16="http://schemas.microsoft.com/office/drawing/2014/main" id="{3AAA8A7D-CC3B-5738-F0C5-B0BDDFE6B34D}"/>
               </a:ext>
             </a:extLst>
           </p:cNvPr>
@@ -7275,7 +7275,7 @@
           <p:cNvPr id="13" name="AutoShape 84">
             <a:extLst>
               <a:ext uri="{FF2B5EF4-FFF2-40B4-BE49-F238E27FC236}">
-                <a16:creationId xmlns:a16="http://schemas.microsoft.com/office/drawing/2014/main" id="{7893AF44-9A90-7725-0C19-5ABEF9F2EEEF}"/>
+                <a16:creationId xmlns:a16="http://schemas.microsoft.com/office/drawing/2014/main" id="{FF9062BA-413F-243D-3423-32ABE777D817}"/>
               </a:ext>
             </a:extLst>
           </p:cNvPr>
@@ -7321,7 +7321,7 @@
           <p:cNvPr id="14" name="AutoShape 85">
             <a:extLst>
               <a:ext uri="{FF2B5EF4-FFF2-40B4-BE49-F238E27FC236}">
-                <a16:creationId xmlns:a16="http://schemas.microsoft.com/office/drawing/2014/main" id="{5EB611B4-F8AE-10D8-8065-677D2177F46E}"/>
+                <a16:creationId xmlns:a16="http://schemas.microsoft.com/office/drawing/2014/main" id="{8D29C739-E08F-F95E-4208-53D4A6A00D48}"/>
               </a:ext>
             </a:extLst>
           </p:cNvPr>
@@ -7367,7 +7367,7 @@
           <p:cNvPr id="15" name="AutoShape 86">
             <a:extLst>
               <a:ext uri="{FF2B5EF4-FFF2-40B4-BE49-F238E27FC236}">
-                <a16:creationId xmlns:a16="http://schemas.microsoft.com/office/drawing/2014/main" id="{83169978-C12E-BF29-78E9-BDF8CD12A56B}"/>
+                <a16:creationId xmlns:a16="http://schemas.microsoft.com/office/drawing/2014/main" id="{71EDCB9A-B0B1-1F50-47D2-08AFA0DDA624}"/>
               </a:ext>
             </a:extLst>
           </p:cNvPr>
@@ -7413,7 +7413,7 @@
           <p:cNvPr id="16" name="AutoShape 87">
             <a:extLst>
               <a:ext uri="{FF2B5EF4-FFF2-40B4-BE49-F238E27FC236}">
-                <a16:creationId xmlns:a16="http://schemas.microsoft.com/office/drawing/2014/main" id="{9A6B012D-E19F-463C-9DA6-F1A92B4BEFF3}"/>
+                <a16:creationId xmlns:a16="http://schemas.microsoft.com/office/drawing/2014/main" id="{68E04FBF-1F73-EA37-02D9-83B9945DB947}"/>
               </a:ext>
             </a:extLst>
           </p:cNvPr>
@@ -7459,7 +7459,7 @@
           <p:cNvPr id="17" name="AutoShape 88">
             <a:extLst>
               <a:ext uri="{FF2B5EF4-FFF2-40B4-BE49-F238E27FC236}">
-                <a16:creationId xmlns:a16="http://schemas.microsoft.com/office/drawing/2014/main" id="{329DD0A8-4FE5-1FA4-02FF-B701C47D9534}"/>
+                <a16:creationId xmlns:a16="http://schemas.microsoft.com/office/drawing/2014/main" id="{DE327137-886E-B7F4-B801-AE1781980E76}"/>
               </a:ext>
             </a:extLst>
           </p:cNvPr>
@@ -7505,7 +7505,7 @@
           <p:cNvPr id="18" name="AutoShape 89">
             <a:extLst>
               <a:ext uri="{FF2B5EF4-FFF2-40B4-BE49-F238E27FC236}">
-                <a16:creationId xmlns:a16="http://schemas.microsoft.com/office/drawing/2014/main" id="{37E2F2E0-442C-6918-0CFB-FA23B0E2A7FE}"/>
+                <a16:creationId xmlns:a16="http://schemas.microsoft.com/office/drawing/2014/main" id="{9974985A-90F4-CDE0-FAF6-F0BFB142E2AF}"/>
               </a:ext>
             </a:extLst>
           </p:cNvPr>
@@ -7551,7 +7551,7 @@
           <p:cNvPr id="19" name="AutoShape 90">
             <a:extLst>
               <a:ext uri="{FF2B5EF4-FFF2-40B4-BE49-F238E27FC236}">
-                <a16:creationId xmlns:a16="http://schemas.microsoft.com/office/drawing/2014/main" id="{1A6CAA5D-0313-5EA9-7F22-EC50F09CC191}"/>
+                <a16:creationId xmlns:a16="http://schemas.microsoft.com/office/drawing/2014/main" id="{5FC720C1-DB3A-2681-0A09-B47BA70A073E}"/>
               </a:ext>
             </a:extLst>
           </p:cNvPr>
@@ -7597,7 +7597,7 @@
           <p:cNvPr id="20" name="AutoShape 91">
             <a:extLst>
               <a:ext uri="{FF2B5EF4-FFF2-40B4-BE49-F238E27FC236}">
-                <a16:creationId xmlns:a16="http://schemas.microsoft.com/office/drawing/2014/main" id="{F083986D-0A4A-E2FE-8CAE-6FF8DE095D98}"/>
+                <a16:creationId xmlns:a16="http://schemas.microsoft.com/office/drawing/2014/main" id="{4AC26122-95F2-7D41-BA2E-C2FA81E83E6F}"/>
               </a:ext>
             </a:extLst>
           </p:cNvPr>
@@ -7643,7 +7643,7 @@
           <p:cNvPr id="21" name="AutoShape 92">
             <a:extLst>
               <a:ext uri="{FF2B5EF4-FFF2-40B4-BE49-F238E27FC236}">
-                <a16:creationId xmlns:a16="http://schemas.microsoft.com/office/drawing/2014/main" id="{D56DCBCD-9EA6-20A6-208B-3FFEF6039405}"/>
+                <a16:creationId xmlns:a16="http://schemas.microsoft.com/office/drawing/2014/main" id="{E9E16572-67C1-1CCA-5AA0-96EE4CF12446}"/>
               </a:ext>
             </a:extLst>
           </p:cNvPr>
@@ -7689,7 +7689,7 @@
           <p:cNvPr id="22" name="AutoShape 93">
             <a:extLst>
               <a:ext uri="{FF2B5EF4-FFF2-40B4-BE49-F238E27FC236}">
-                <a16:creationId xmlns:a16="http://schemas.microsoft.com/office/drawing/2014/main" id="{37B00E74-E25A-4D27-7CCD-720D070D9438}"/>
+                <a16:creationId xmlns:a16="http://schemas.microsoft.com/office/drawing/2014/main" id="{86D7697B-3F6C-344A-E88B-5EE3D9267752}"/>
               </a:ext>
             </a:extLst>
           </p:cNvPr>
@@ -7735,7 +7735,7 @@
           <p:cNvPr id="23" name="AutoShape 94">
             <a:extLst>
               <a:ext uri="{FF2B5EF4-FFF2-40B4-BE49-F238E27FC236}">
-                <a16:creationId xmlns:a16="http://schemas.microsoft.com/office/drawing/2014/main" id="{2ABD7A5D-44C1-7CD6-1A94-B645029660D7}"/>
+                <a16:creationId xmlns:a16="http://schemas.microsoft.com/office/drawing/2014/main" id="{C91B3F42-C914-B005-2E5E-F33E064CA432}"/>
               </a:ext>
             </a:extLst>
           </p:cNvPr>
@@ -7781,7 +7781,7 @@
           <p:cNvPr id="24" name="AutoShape 95">
             <a:extLst>
               <a:ext uri="{FF2B5EF4-FFF2-40B4-BE49-F238E27FC236}">
-                <a16:creationId xmlns:a16="http://schemas.microsoft.com/office/drawing/2014/main" id="{7DBF6FAE-ABAE-B850-C794-F3F9DF111148}"/>
+                <a16:creationId xmlns:a16="http://schemas.microsoft.com/office/drawing/2014/main" id="{BCC53842-6AF8-532E-82A0-EC4179FC8E39}"/>
               </a:ext>
             </a:extLst>
           </p:cNvPr>
@@ -7827,7 +7827,7 @@
           <p:cNvPr id="25" name="AutoShape 96">
             <a:extLst>
               <a:ext uri="{FF2B5EF4-FFF2-40B4-BE49-F238E27FC236}">
-                <a16:creationId xmlns:a16="http://schemas.microsoft.com/office/drawing/2014/main" id="{101CA51B-64B8-2BB5-7AF4-52D899DE5EB4}"/>
+                <a16:creationId xmlns:a16="http://schemas.microsoft.com/office/drawing/2014/main" id="{8394C634-5742-FFD0-4C8D-85974DB995F7}"/>
               </a:ext>
             </a:extLst>
           </p:cNvPr>
@@ -7871,7 +7871,7 @@
     </p:spTree>
     <p:extLst>
       <p:ext uri="{BB962C8B-B14F-4D97-AF65-F5344CB8AC3E}">
-        <p14:creationId xmlns:p14="http://schemas.microsoft.com/office/powerpoint/2010/main" val="2641115238"/>
+        <p14:creationId xmlns:p14="http://schemas.microsoft.com/office/powerpoint/2010/main" val="2056289696"/>
       </p:ext>
     </p:extLst>
   </p:cSld>
@@ -7903,7 +7903,7 @@
           <p:cNvPr id="2" name="AutoShape 97">
             <a:extLst>
               <a:ext uri="{FF2B5EF4-FFF2-40B4-BE49-F238E27FC236}">
-                <a16:creationId xmlns:a16="http://schemas.microsoft.com/office/drawing/2014/main" id="{22076A29-6B15-0C0F-4F5F-3B2E3C299F5C}"/>
+                <a16:creationId xmlns:a16="http://schemas.microsoft.com/office/drawing/2014/main" id="{1C845B49-03D2-662B-B85C-EA5A0351BB30}"/>
               </a:ext>
             </a:extLst>
           </p:cNvPr>
@@ -7949,7 +7949,7 @@
           <p:cNvPr id="3" name="AutoShape 98">
             <a:extLst>
               <a:ext uri="{FF2B5EF4-FFF2-40B4-BE49-F238E27FC236}">
-                <a16:creationId xmlns:a16="http://schemas.microsoft.com/office/drawing/2014/main" id="{03C5861D-C63F-0C25-F46D-83A529C57357}"/>
+                <a16:creationId xmlns:a16="http://schemas.microsoft.com/office/drawing/2014/main" id="{72382E56-E2A5-7CB2-8FF4-B048BAA84782}"/>
               </a:ext>
             </a:extLst>
           </p:cNvPr>
@@ -7995,7 +7995,7 @@
           <p:cNvPr id="4" name="AutoShape 99">
             <a:extLst>
               <a:ext uri="{FF2B5EF4-FFF2-40B4-BE49-F238E27FC236}">
-                <a16:creationId xmlns:a16="http://schemas.microsoft.com/office/drawing/2014/main" id="{E1708339-ECB9-8023-5CF9-B9C37B482E21}"/>
+                <a16:creationId xmlns:a16="http://schemas.microsoft.com/office/drawing/2014/main" id="{4E68646C-DC40-8952-6946-D5C7A461573E}"/>
               </a:ext>
             </a:extLst>
           </p:cNvPr>
@@ -8041,7 +8041,7 @@
           <p:cNvPr id="5" name="AutoShape 100">
             <a:extLst>
               <a:ext uri="{FF2B5EF4-FFF2-40B4-BE49-F238E27FC236}">
-                <a16:creationId xmlns:a16="http://schemas.microsoft.com/office/drawing/2014/main" id="{A97A8EA2-9A6E-A985-B77F-6EE1DE607D33}"/>
+                <a16:creationId xmlns:a16="http://schemas.microsoft.com/office/drawing/2014/main" id="{B7C6F1C5-4F14-475F-7A24-2225F6FC2783}"/>
               </a:ext>
             </a:extLst>
           </p:cNvPr>
@@ -8087,7 +8087,7 @@
           <p:cNvPr id="6" name="AutoShape 101">
             <a:extLst>
               <a:ext uri="{FF2B5EF4-FFF2-40B4-BE49-F238E27FC236}">
-                <a16:creationId xmlns:a16="http://schemas.microsoft.com/office/drawing/2014/main" id="{9EE8BC44-2AC8-DFEA-96EB-7E099A9D2D8B}"/>
+                <a16:creationId xmlns:a16="http://schemas.microsoft.com/office/drawing/2014/main" id="{ED09BE50-380C-C47A-E6DC-E80CBDA2B095}"/>
               </a:ext>
             </a:extLst>
           </p:cNvPr>
@@ -8133,7 +8133,7 @@
           <p:cNvPr id="7" name="AutoShape 102">
             <a:extLst>
               <a:ext uri="{FF2B5EF4-FFF2-40B4-BE49-F238E27FC236}">
-                <a16:creationId xmlns:a16="http://schemas.microsoft.com/office/drawing/2014/main" id="{8CFACEC7-CEB7-3732-8126-C7E07146B040}"/>
+                <a16:creationId xmlns:a16="http://schemas.microsoft.com/office/drawing/2014/main" id="{1A755BCF-1CD1-6B24-2FE9-AF2612BA0B49}"/>
               </a:ext>
             </a:extLst>
           </p:cNvPr>
@@ -8179,7 +8179,7 @@
           <p:cNvPr id="8" name="AutoShape 103">
             <a:extLst>
               <a:ext uri="{FF2B5EF4-FFF2-40B4-BE49-F238E27FC236}">
-                <a16:creationId xmlns:a16="http://schemas.microsoft.com/office/drawing/2014/main" id="{2488ADA8-DD99-15FC-6F0D-13F78C627592}"/>
+                <a16:creationId xmlns:a16="http://schemas.microsoft.com/office/drawing/2014/main" id="{402FF60A-6846-FA31-B448-D4DAA711AA1D}"/>
               </a:ext>
             </a:extLst>
           </p:cNvPr>
@@ -8225,7 +8225,7 @@
           <p:cNvPr id="9" name="AutoShape 104">
             <a:extLst>
               <a:ext uri="{FF2B5EF4-FFF2-40B4-BE49-F238E27FC236}">
-                <a16:creationId xmlns:a16="http://schemas.microsoft.com/office/drawing/2014/main" id="{24BBB738-444B-38AC-22A3-845D64FD99B0}"/>
+                <a16:creationId xmlns:a16="http://schemas.microsoft.com/office/drawing/2014/main" id="{4DD6F35C-1B02-4BF8-035D-F074EFF3A995}"/>
               </a:ext>
             </a:extLst>
           </p:cNvPr>
@@ -8271,7 +8271,7 @@
           <p:cNvPr id="10" name="AutoShape 105">
             <a:extLst>
               <a:ext uri="{FF2B5EF4-FFF2-40B4-BE49-F238E27FC236}">
-                <a16:creationId xmlns:a16="http://schemas.microsoft.com/office/drawing/2014/main" id="{11912639-AA9D-D1C3-95AC-2FAC7D78B125}"/>
+                <a16:creationId xmlns:a16="http://schemas.microsoft.com/office/drawing/2014/main" id="{7B5D793E-8A8A-ACE2-9830-82B4E1ED37B2}"/>
               </a:ext>
             </a:extLst>
           </p:cNvPr>
@@ -8317,7 +8317,7 @@
           <p:cNvPr id="11" name="AutoShape 106">
             <a:extLst>
               <a:ext uri="{FF2B5EF4-FFF2-40B4-BE49-F238E27FC236}">
-                <a16:creationId xmlns:a16="http://schemas.microsoft.com/office/drawing/2014/main" id="{60A0017A-1937-2255-7966-46E702E2846C}"/>
+                <a16:creationId xmlns:a16="http://schemas.microsoft.com/office/drawing/2014/main" id="{299CEFFF-5BF7-316B-5A86-6471846F67ED}"/>
               </a:ext>
             </a:extLst>
           </p:cNvPr>
@@ -8363,7 +8363,7 @@
           <p:cNvPr id="12" name="AutoShape 107">
             <a:extLst>
               <a:ext uri="{FF2B5EF4-FFF2-40B4-BE49-F238E27FC236}">
-                <a16:creationId xmlns:a16="http://schemas.microsoft.com/office/drawing/2014/main" id="{EDD23D32-7540-6482-9EAF-B77B3E303BCB}"/>
+                <a16:creationId xmlns:a16="http://schemas.microsoft.com/office/drawing/2014/main" id="{0DA7EAEA-D9F0-CFCE-1C38-9C4FE8A37F81}"/>
               </a:ext>
             </a:extLst>
           </p:cNvPr>
@@ -8409,7 +8409,7 @@
           <p:cNvPr id="13" name="AutoShape 108">
             <a:extLst>
               <a:ext uri="{FF2B5EF4-FFF2-40B4-BE49-F238E27FC236}">
-                <a16:creationId xmlns:a16="http://schemas.microsoft.com/office/drawing/2014/main" id="{33C2C458-C2AA-BA12-7D4C-3C54493152FD}"/>
+                <a16:creationId xmlns:a16="http://schemas.microsoft.com/office/drawing/2014/main" id="{8D0D5B53-09E7-691D-AFD1-7DC6A8C0F2E4}"/>
               </a:ext>
             </a:extLst>
           </p:cNvPr>
@@ -8455,7 +8455,7 @@
           <p:cNvPr id="14" name="AutoShape 109">
             <a:extLst>
               <a:ext uri="{FF2B5EF4-FFF2-40B4-BE49-F238E27FC236}">
-                <a16:creationId xmlns:a16="http://schemas.microsoft.com/office/drawing/2014/main" id="{51DAC559-CC40-F463-8F8C-76EC3144423E}"/>
+                <a16:creationId xmlns:a16="http://schemas.microsoft.com/office/drawing/2014/main" id="{55807DFA-2927-EE8A-EDFF-FA201FBABFE4}"/>
               </a:ext>
             </a:extLst>
           </p:cNvPr>
@@ -8501,7 +8501,7 @@
           <p:cNvPr id="15" name="AutoShape 110">
             <a:extLst>
               <a:ext uri="{FF2B5EF4-FFF2-40B4-BE49-F238E27FC236}">
-                <a16:creationId xmlns:a16="http://schemas.microsoft.com/office/drawing/2014/main" id="{90479C51-EA78-4301-B6FC-9854214B34D5}"/>
+                <a16:creationId xmlns:a16="http://schemas.microsoft.com/office/drawing/2014/main" id="{0076D044-14F8-4F23-E310-88C2A959223A}"/>
               </a:ext>
             </a:extLst>
           </p:cNvPr>
@@ -8547,7 +8547,7 @@
           <p:cNvPr id="16" name="AutoShape 111">
             <a:extLst>
               <a:ext uri="{FF2B5EF4-FFF2-40B4-BE49-F238E27FC236}">
-                <a16:creationId xmlns:a16="http://schemas.microsoft.com/office/drawing/2014/main" id="{FE81AB21-E1F6-E57A-2BB6-CC99521362A5}"/>
+                <a16:creationId xmlns:a16="http://schemas.microsoft.com/office/drawing/2014/main" id="{80516221-224E-C0F3-8B24-52DF575C2A1C}"/>
               </a:ext>
             </a:extLst>
           </p:cNvPr>
@@ -8593,7 +8593,7 @@
           <p:cNvPr id="17" name="AutoShape 112">
             <a:extLst>
               <a:ext uri="{FF2B5EF4-FFF2-40B4-BE49-F238E27FC236}">
-                <a16:creationId xmlns:a16="http://schemas.microsoft.com/office/drawing/2014/main" id="{F7D90733-D436-464B-C34E-043825EFADDF}"/>
+                <a16:creationId xmlns:a16="http://schemas.microsoft.com/office/drawing/2014/main" id="{87A78112-AE5E-7E47-B131-B2E88E2FD9C4}"/>
               </a:ext>
             </a:extLst>
           </p:cNvPr>
@@ -8639,7 +8639,7 @@
           <p:cNvPr id="18" name="AutoShape 113">
             <a:extLst>
               <a:ext uri="{FF2B5EF4-FFF2-40B4-BE49-F238E27FC236}">
-                <a16:creationId xmlns:a16="http://schemas.microsoft.com/office/drawing/2014/main" id="{477B6B5F-EFD0-051F-A413-BE23853B1D20}"/>
+                <a16:creationId xmlns:a16="http://schemas.microsoft.com/office/drawing/2014/main" id="{E814C23A-4BD2-D751-D1DB-0FDCE1BE7F1B}"/>
               </a:ext>
             </a:extLst>
           </p:cNvPr>
@@ -8685,7 +8685,7 @@
           <p:cNvPr id="19" name="AutoShape 114">
             <a:extLst>
               <a:ext uri="{FF2B5EF4-FFF2-40B4-BE49-F238E27FC236}">
-                <a16:creationId xmlns:a16="http://schemas.microsoft.com/office/drawing/2014/main" id="{CCD54E9B-75A8-99CA-7B99-7EA1BFD9D18E}"/>
+                <a16:creationId xmlns:a16="http://schemas.microsoft.com/office/drawing/2014/main" id="{C3567B12-DC96-9F6A-DCE6-700D0F51F0C1}"/>
               </a:ext>
             </a:extLst>
           </p:cNvPr>
@@ -8731,7 +8731,7 @@
           <p:cNvPr id="20" name="AutoShape 115">
             <a:extLst>
               <a:ext uri="{FF2B5EF4-FFF2-40B4-BE49-F238E27FC236}">
-                <a16:creationId xmlns:a16="http://schemas.microsoft.com/office/drawing/2014/main" id="{9E482AD7-0B02-715F-B07C-635FBE8C0FAF}"/>
+                <a16:creationId xmlns:a16="http://schemas.microsoft.com/office/drawing/2014/main" id="{468D1832-4946-D922-F95B-A5C5981DFE6C}"/>
               </a:ext>
             </a:extLst>
           </p:cNvPr>
@@ -8777,7 +8777,7 @@
           <p:cNvPr id="21" name="AutoShape 116">
             <a:extLst>
               <a:ext uri="{FF2B5EF4-FFF2-40B4-BE49-F238E27FC236}">
-                <a16:creationId xmlns:a16="http://schemas.microsoft.com/office/drawing/2014/main" id="{85F8BCBB-B0B5-9DA2-2F84-CAFBC8F4E759}"/>
+                <a16:creationId xmlns:a16="http://schemas.microsoft.com/office/drawing/2014/main" id="{C12968CC-C0DF-3B75-1602-3B4820C97B6E}"/>
               </a:ext>
             </a:extLst>
           </p:cNvPr>
@@ -8823,7 +8823,7 @@
           <p:cNvPr id="22" name="AutoShape 117">
             <a:extLst>
               <a:ext uri="{FF2B5EF4-FFF2-40B4-BE49-F238E27FC236}">
-                <a16:creationId xmlns:a16="http://schemas.microsoft.com/office/drawing/2014/main" id="{22AEB4BF-2C74-5393-B5AB-69EB6BE368D5}"/>
+                <a16:creationId xmlns:a16="http://schemas.microsoft.com/office/drawing/2014/main" id="{A07EA0C3-5C77-FFAE-AD76-37FC134B44F1}"/>
               </a:ext>
             </a:extLst>
           </p:cNvPr>
@@ -8869,7 +8869,7 @@
           <p:cNvPr id="23" name="AutoShape 118">
             <a:extLst>
               <a:ext uri="{FF2B5EF4-FFF2-40B4-BE49-F238E27FC236}">
-                <a16:creationId xmlns:a16="http://schemas.microsoft.com/office/drawing/2014/main" id="{87D3D2A2-AACF-F3D0-EE24-F1B896D9F378}"/>
+                <a16:creationId xmlns:a16="http://schemas.microsoft.com/office/drawing/2014/main" id="{E80F000C-0F16-A42B-E251-DAD0578A4DE1}"/>
               </a:ext>
             </a:extLst>
           </p:cNvPr>
@@ -8915,7 +8915,7 @@
           <p:cNvPr id="24" name="AutoShape 119">
             <a:extLst>
               <a:ext uri="{FF2B5EF4-FFF2-40B4-BE49-F238E27FC236}">
-                <a16:creationId xmlns:a16="http://schemas.microsoft.com/office/drawing/2014/main" id="{5E82BC34-0369-0599-CF04-17F937EA2D8D}"/>
+                <a16:creationId xmlns:a16="http://schemas.microsoft.com/office/drawing/2014/main" id="{5DEA4961-8D96-A7B5-5631-E72009EE6935}"/>
               </a:ext>
             </a:extLst>
           </p:cNvPr>
@@ -8961,7 +8961,7 @@
           <p:cNvPr id="25" name="AutoShape 120">
             <a:extLst>
               <a:ext uri="{FF2B5EF4-FFF2-40B4-BE49-F238E27FC236}">
-                <a16:creationId xmlns:a16="http://schemas.microsoft.com/office/drawing/2014/main" id="{5CB0ADFE-86F5-8614-DAC5-B15D411D3B3E}"/>
+                <a16:creationId xmlns:a16="http://schemas.microsoft.com/office/drawing/2014/main" id="{3059D0EE-4F68-EE09-8E60-4D57775078D9}"/>
               </a:ext>
             </a:extLst>
           </p:cNvPr>
@@ -9005,7 +9005,7 @@
     </p:spTree>
     <p:extLst>
       <p:ext uri="{BB962C8B-B14F-4D97-AF65-F5344CB8AC3E}">
-        <p14:creationId xmlns:p14="http://schemas.microsoft.com/office/powerpoint/2010/main" val="4012928545"/>
+        <p14:creationId xmlns:p14="http://schemas.microsoft.com/office/powerpoint/2010/main" val="678273618"/>
       </p:ext>
     </p:extLst>
   </p:cSld>
@@ -9037,7 +9037,7 @@
           <p:cNvPr id="2" name="AutoShape 121">
             <a:extLst>
               <a:ext uri="{FF2B5EF4-FFF2-40B4-BE49-F238E27FC236}">
-                <a16:creationId xmlns:a16="http://schemas.microsoft.com/office/drawing/2014/main" id="{D0C42839-C3D4-104A-EF2D-CD6AF6962E76}"/>
+                <a16:creationId xmlns:a16="http://schemas.microsoft.com/office/drawing/2014/main" id="{01502256-3362-456E-4843-C6CD5048BE2F}"/>
               </a:ext>
             </a:extLst>
           </p:cNvPr>
@@ -9083,7 +9083,7 @@
           <p:cNvPr id="3" name="AutoShape 122">
             <a:extLst>
               <a:ext uri="{FF2B5EF4-FFF2-40B4-BE49-F238E27FC236}">
-                <a16:creationId xmlns:a16="http://schemas.microsoft.com/office/drawing/2014/main" id="{9C3FD070-6E8A-5825-4050-1C40280977CE}"/>
+                <a16:creationId xmlns:a16="http://schemas.microsoft.com/office/drawing/2014/main" id="{55EEBA8A-6066-4339-3455-A79643CB3629}"/>
               </a:ext>
             </a:extLst>
           </p:cNvPr>
@@ -9129,7 +9129,7 @@
           <p:cNvPr id="4" name="AutoShape 123">
             <a:extLst>
               <a:ext uri="{FF2B5EF4-FFF2-40B4-BE49-F238E27FC236}">
-                <a16:creationId xmlns:a16="http://schemas.microsoft.com/office/drawing/2014/main" id="{31B2EE46-E444-8B29-EC6A-D0598C20FBAB}"/>
+                <a16:creationId xmlns:a16="http://schemas.microsoft.com/office/drawing/2014/main" id="{23108513-0934-4A2A-A7BD-886EDE93F7C5}"/>
               </a:ext>
             </a:extLst>
           </p:cNvPr>
@@ -9175,7 +9175,7 @@
           <p:cNvPr id="5" name="AutoShape 124">
             <a:extLst>
               <a:ext uri="{FF2B5EF4-FFF2-40B4-BE49-F238E27FC236}">
-                <a16:creationId xmlns:a16="http://schemas.microsoft.com/office/drawing/2014/main" id="{D248D615-ACDE-AC2C-71AC-A8BE8590E02E}"/>
+                <a16:creationId xmlns:a16="http://schemas.microsoft.com/office/drawing/2014/main" id="{CDC45992-A5F7-6FE1-9D68-1F9CB9F2BF05}"/>
               </a:ext>
             </a:extLst>
           </p:cNvPr>
@@ -9221,7 +9221,7 @@
           <p:cNvPr id="6" name="AutoShape 125">
             <a:extLst>
               <a:ext uri="{FF2B5EF4-FFF2-40B4-BE49-F238E27FC236}">
-                <a16:creationId xmlns:a16="http://schemas.microsoft.com/office/drawing/2014/main" id="{C094F790-D307-FDC0-C08A-43C6FF2BEF6B}"/>
+                <a16:creationId xmlns:a16="http://schemas.microsoft.com/office/drawing/2014/main" id="{20FCAE48-EB66-7617-F4B1-21E8D3D5D11F}"/>
               </a:ext>
             </a:extLst>
           </p:cNvPr>
@@ -9267,7 +9267,7 @@
           <p:cNvPr id="7" name="AutoShape 126">
             <a:extLst>
               <a:ext uri="{FF2B5EF4-FFF2-40B4-BE49-F238E27FC236}">
-                <a16:creationId xmlns:a16="http://schemas.microsoft.com/office/drawing/2014/main" id="{706B23E4-03C1-A919-67ED-CFBAE9FE929D}"/>
+                <a16:creationId xmlns:a16="http://schemas.microsoft.com/office/drawing/2014/main" id="{155C6FB0-4214-CB36-CEB5-88E247C9CB1C}"/>
               </a:ext>
             </a:extLst>
           </p:cNvPr>
@@ -9313,7 +9313,7 @@
           <p:cNvPr id="8" name="AutoShape 127">
             <a:extLst>
               <a:ext uri="{FF2B5EF4-FFF2-40B4-BE49-F238E27FC236}">
-                <a16:creationId xmlns:a16="http://schemas.microsoft.com/office/drawing/2014/main" id="{AABCCFA9-1F6A-234F-A21B-2BC94194B736}"/>
+                <a16:creationId xmlns:a16="http://schemas.microsoft.com/office/drawing/2014/main" id="{9300E69E-88B1-4238-3153-B2810AE29964}"/>
               </a:ext>
             </a:extLst>
           </p:cNvPr>
@@ -9359,7 +9359,7 @@
           <p:cNvPr id="9" name="AutoShape 128">
             <a:extLst>
               <a:ext uri="{FF2B5EF4-FFF2-40B4-BE49-F238E27FC236}">
-                <a16:creationId xmlns:a16="http://schemas.microsoft.com/office/drawing/2014/main" id="{B90C99B3-CB6C-A854-B059-8B1949F91795}"/>
+                <a16:creationId xmlns:a16="http://schemas.microsoft.com/office/drawing/2014/main" id="{60CA7DAF-931B-F0D4-87A3-8F35F1DC51F5}"/>
               </a:ext>
             </a:extLst>
           </p:cNvPr>
@@ -9405,7 +9405,7 @@
           <p:cNvPr id="10" name="AutoShape 129">
             <a:extLst>
               <a:ext uri="{FF2B5EF4-FFF2-40B4-BE49-F238E27FC236}">
-                <a16:creationId xmlns:a16="http://schemas.microsoft.com/office/drawing/2014/main" id="{AC616121-176D-E6E6-548C-BF9BDE346A24}"/>
+                <a16:creationId xmlns:a16="http://schemas.microsoft.com/office/drawing/2014/main" id="{A0AB98EB-CD95-E84C-C50E-45EC088FDDEC}"/>
               </a:ext>
             </a:extLst>
           </p:cNvPr>
@@ -9451,7 +9451,7 @@
           <p:cNvPr id="11" name="AutoShape 130">
             <a:extLst>
               <a:ext uri="{FF2B5EF4-FFF2-40B4-BE49-F238E27FC236}">
-                <a16:creationId xmlns:a16="http://schemas.microsoft.com/office/drawing/2014/main" id="{4DFCF986-63CC-13D9-10EF-EF20A8F25589}"/>
+                <a16:creationId xmlns:a16="http://schemas.microsoft.com/office/drawing/2014/main" id="{A16B952E-3EFE-1BE2-80C1-472B7B397DCF}"/>
               </a:ext>
             </a:extLst>
           </p:cNvPr>
@@ -9497,7 +9497,7 @@
           <p:cNvPr id="12" name="AutoShape 131">
             <a:extLst>
               <a:ext uri="{FF2B5EF4-FFF2-40B4-BE49-F238E27FC236}">
-                <a16:creationId xmlns:a16="http://schemas.microsoft.com/office/drawing/2014/main" id="{DBB30D68-05C3-9B5D-8481-E721625F1D80}"/>
+                <a16:creationId xmlns:a16="http://schemas.microsoft.com/office/drawing/2014/main" id="{368AF8E4-C908-C8E4-2E69-C136EE8263BD}"/>
               </a:ext>
             </a:extLst>
           </p:cNvPr>
@@ -9543,7 +9543,7 @@
           <p:cNvPr id="13" name="AutoShape 132">
             <a:extLst>
               <a:ext uri="{FF2B5EF4-FFF2-40B4-BE49-F238E27FC236}">
-                <a16:creationId xmlns:a16="http://schemas.microsoft.com/office/drawing/2014/main" id="{8ED5B6C8-E252-5A7D-C0EF-AAA5BDBF53E5}"/>
+                <a16:creationId xmlns:a16="http://schemas.microsoft.com/office/drawing/2014/main" id="{404ED2A2-D483-A12D-62D7-083F3EE4646D}"/>
               </a:ext>
             </a:extLst>
           </p:cNvPr>
@@ -9589,7 +9589,7 @@
           <p:cNvPr id="14" name="AutoShape 133">
             <a:extLst>
               <a:ext uri="{FF2B5EF4-FFF2-40B4-BE49-F238E27FC236}">
-                <a16:creationId xmlns:a16="http://schemas.microsoft.com/office/drawing/2014/main" id="{AEEAD01C-6414-231A-E47C-7AD11DF0C1BF}"/>
+                <a16:creationId xmlns:a16="http://schemas.microsoft.com/office/drawing/2014/main" id="{5C0FDF7A-96EB-AE79-0CCE-891FB1F834E3}"/>
               </a:ext>
             </a:extLst>
           </p:cNvPr>
@@ -9635,7 +9635,7 @@
           <p:cNvPr id="15" name="AutoShape 134">
             <a:extLst>
               <a:ext uri="{FF2B5EF4-FFF2-40B4-BE49-F238E27FC236}">
-                <a16:creationId xmlns:a16="http://schemas.microsoft.com/office/drawing/2014/main" id="{AAB11F1A-1ECE-A82D-637D-27BC67C1110D}"/>
+                <a16:creationId xmlns:a16="http://schemas.microsoft.com/office/drawing/2014/main" id="{F573AF83-A039-A085-80AC-DFEEE4C2B9B9}"/>
               </a:ext>
             </a:extLst>
           </p:cNvPr>
@@ -9681,7 +9681,7 @@
           <p:cNvPr id="16" name="AutoShape 135">
             <a:extLst>
               <a:ext uri="{FF2B5EF4-FFF2-40B4-BE49-F238E27FC236}">
-                <a16:creationId xmlns:a16="http://schemas.microsoft.com/office/drawing/2014/main" id="{AFACBDBC-DE61-8051-F5B8-C8D439665E16}"/>
+                <a16:creationId xmlns:a16="http://schemas.microsoft.com/office/drawing/2014/main" id="{7873E5C3-2546-4E4B-6DF2-27C224983252}"/>
               </a:ext>
             </a:extLst>
           </p:cNvPr>
@@ -9727,7 +9727,7 @@
           <p:cNvPr id="17" name="AutoShape 136">
             <a:extLst>
               <a:ext uri="{FF2B5EF4-FFF2-40B4-BE49-F238E27FC236}">
-                <a16:creationId xmlns:a16="http://schemas.microsoft.com/office/drawing/2014/main" id="{9948BBF3-6139-C5A4-3016-2346DB47D184}"/>
+                <a16:creationId xmlns:a16="http://schemas.microsoft.com/office/drawing/2014/main" id="{00C0261F-D428-9A43-6809-F31B3AAB40C4}"/>
               </a:ext>
             </a:extLst>
           </p:cNvPr>
@@ -9773,7 +9773,7 @@
           <p:cNvPr id="18" name="AutoShape 137">
             <a:extLst>
               <a:ext uri="{FF2B5EF4-FFF2-40B4-BE49-F238E27FC236}">
-                <a16:creationId xmlns:a16="http://schemas.microsoft.com/office/drawing/2014/main" id="{9E0F0425-0259-98C7-9BDC-FF7F53817586}"/>
+                <a16:creationId xmlns:a16="http://schemas.microsoft.com/office/drawing/2014/main" id="{AE89F737-11F5-D6EB-4C6F-C49DE0D79A11}"/>
               </a:ext>
             </a:extLst>
           </p:cNvPr>
@@ -9819,7 +9819,7 @@
           <p:cNvPr id="19" name="AutoShape 139">
             <a:extLst>
               <a:ext uri="{FF2B5EF4-FFF2-40B4-BE49-F238E27FC236}">
-                <a16:creationId xmlns:a16="http://schemas.microsoft.com/office/drawing/2014/main" id="{4092AFEA-2F37-16B4-D8AE-B1C168E0A990}"/>
+                <a16:creationId xmlns:a16="http://schemas.microsoft.com/office/drawing/2014/main" id="{355782E2-9799-7C89-8DD9-EB87E03F5E3C}"/>
               </a:ext>
             </a:extLst>
           </p:cNvPr>
@@ -9865,7 +9865,7 @@
           <p:cNvPr id="20" name="AutoShape 140">
             <a:extLst>
               <a:ext uri="{FF2B5EF4-FFF2-40B4-BE49-F238E27FC236}">
-                <a16:creationId xmlns:a16="http://schemas.microsoft.com/office/drawing/2014/main" id="{343C5D3C-F9B3-FFAF-64A9-6E8FEF5B9618}"/>
+                <a16:creationId xmlns:a16="http://schemas.microsoft.com/office/drawing/2014/main" id="{95CB8580-C014-850A-24D2-0063BA311A29}"/>
               </a:ext>
             </a:extLst>
           </p:cNvPr>
@@ -9911,7 +9911,7 @@
           <p:cNvPr id="21" name="AutoShape 141">
             <a:extLst>
               <a:ext uri="{FF2B5EF4-FFF2-40B4-BE49-F238E27FC236}">
-                <a16:creationId xmlns:a16="http://schemas.microsoft.com/office/drawing/2014/main" id="{98B05640-B623-CB57-6551-3022BA3A01CC}"/>
+                <a16:creationId xmlns:a16="http://schemas.microsoft.com/office/drawing/2014/main" id="{39FF508F-9116-E6B0-B543-54F15853A8CE}"/>
               </a:ext>
             </a:extLst>
           </p:cNvPr>
@@ -9961,7 +9961,7 @@
           <p:cNvPr id="22" name="AutoShape 142">
             <a:extLst>
               <a:ext uri="{FF2B5EF4-FFF2-40B4-BE49-F238E27FC236}">
-                <a16:creationId xmlns:a16="http://schemas.microsoft.com/office/drawing/2014/main" id="{69FC3A30-9EAB-F63C-5CCB-59AC1AA12D46}"/>
+                <a16:creationId xmlns:a16="http://schemas.microsoft.com/office/drawing/2014/main" id="{E4D17C37-1357-E3CB-DCD2-79EDECD6410A}"/>
               </a:ext>
             </a:extLst>
           </p:cNvPr>
@@ -10011,7 +10011,7 @@
           <p:cNvPr id="23" name="AutoShape 143">
             <a:extLst>
               <a:ext uri="{FF2B5EF4-FFF2-40B4-BE49-F238E27FC236}">
-                <a16:creationId xmlns:a16="http://schemas.microsoft.com/office/drawing/2014/main" id="{7A7574B7-2D8A-620B-607D-84487626090B}"/>
+                <a16:creationId xmlns:a16="http://schemas.microsoft.com/office/drawing/2014/main" id="{00B71682-53FE-2263-449E-939E8F22846E}"/>
               </a:ext>
             </a:extLst>
           </p:cNvPr>
@@ -10057,7 +10057,7 @@
           <p:cNvPr id="24" name="AutoShape 144">
             <a:extLst>
               <a:ext uri="{FF2B5EF4-FFF2-40B4-BE49-F238E27FC236}">
-                <a16:creationId xmlns:a16="http://schemas.microsoft.com/office/drawing/2014/main" id="{C1B8D038-40C6-B41D-ECE7-A59E9BF22746}"/>
+                <a16:creationId xmlns:a16="http://schemas.microsoft.com/office/drawing/2014/main" id="{9F5266E8-697B-9A1B-8F0D-34FC28F228AD}"/>
               </a:ext>
             </a:extLst>
           </p:cNvPr>
@@ -10103,7 +10103,7 @@
           <p:cNvPr id="25" name="AutoShape 145">
             <a:extLst>
               <a:ext uri="{FF2B5EF4-FFF2-40B4-BE49-F238E27FC236}">
-                <a16:creationId xmlns:a16="http://schemas.microsoft.com/office/drawing/2014/main" id="{F53EC40A-F747-093B-D233-7C950834C3C6}"/>
+                <a16:creationId xmlns:a16="http://schemas.microsoft.com/office/drawing/2014/main" id="{961D3244-F1C1-DC70-8895-65559FC9D174}"/>
               </a:ext>
             </a:extLst>
           </p:cNvPr>
@@ -10147,7 +10147,7 @@
     </p:spTree>
     <p:extLst>
       <p:ext uri="{BB962C8B-B14F-4D97-AF65-F5344CB8AC3E}">
-        <p14:creationId xmlns:p14="http://schemas.microsoft.com/office/powerpoint/2010/main" val="1188730120"/>
+        <p14:creationId xmlns:p14="http://schemas.microsoft.com/office/powerpoint/2010/main" val="202178005"/>
       </p:ext>
     </p:extLst>
   </p:cSld>
@@ -10179,7 +10179,7 @@
           <p:cNvPr id="2" name="AutoShape 146">
             <a:extLst>
               <a:ext uri="{FF2B5EF4-FFF2-40B4-BE49-F238E27FC236}">
-                <a16:creationId xmlns:a16="http://schemas.microsoft.com/office/drawing/2014/main" id="{6E040AAC-00C1-B5A8-A5FC-93267B52E725}"/>
+                <a16:creationId xmlns:a16="http://schemas.microsoft.com/office/drawing/2014/main" id="{D16011B8-3AF5-502E-6D92-12738464C147}"/>
               </a:ext>
             </a:extLst>
           </p:cNvPr>
@@ -10225,7 +10225,7 @@
           <p:cNvPr id="3" name="AutoShape 147">
             <a:extLst>
               <a:ext uri="{FF2B5EF4-FFF2-40B4-BE49-F238E27FC236}">
-                <a16:creationId xmlns:a16="http://schemas.microsoft.com/office/drawing/2014/main" id="{B4158DCC-AA1C-F7D5-4470-9B728FB1685F}"/>
+                <a16:creationId xmlns:a16="http://schemas.microsoft.com/office/drawing/2014/main" id="{84393AB3-4975-F5FB-9ABD-38F936CD4046}"/>
               </a:ext>
             </a:extLst>
           </p:cNvPr>
@@ -10271,7 +10271,7 @@
           <p:cNvPr id="4" name="AutoShape 148">
             <a:extLst>
               <a:ext uri="{FF2B5EF4-FFF2-40B4-BE49-F238E27FC236}">
-                <a16:creationId xmlns:a16="http://schemas.microsoft.com/office/drawing/2014/main" id="{1CFE83CE-72B9-C123-6251-BF41806331A2}"/>
+                <a16:creationId xmlns:a16="http://schemas.microsoft.com/office/drawing/2014/main" id="{404C4435-A6AE-E2D0-8059-A52059F676AD}"/>
               </a:ext>
             </a:extLst>
           </p:cNvPr>
@@ -10317,7 +10317,7 @@
           <p:cNvPr id="5" name="AutoShape 149">
             <a:extLst>
               <a:ext uri="{FF2B5EF4-FFF2-40B4-BE49-F238E27FC236}">
-                <a16:creationId xmlns:a16="http://schemas.microsoft.com/office/drawing/2014/main" id="{24DBBEA3-FCE0-F247-534C-F97162B234B6}"/>
+                <a16:creationId xmlns:a16="http://schemas.microsoft.com/office/drawing/2014/main" id="{855A648E-84D1-6EF8-13D3-6DE07631CCFF}"/>
               </a:ext>
             </a:extLst>
           </p:cNvPr>
@@ -10363,7 +10363,7 @@
           <p:cNvPr id="6" name="AutoShape 150">
             <a:extLst>
               <a:ext uri="{FF2B5EF4-FFF2-40B4-BE49-F238E27FC236}">
-                <a16:creationId xmlns:a16="http://schemas.microsoft.com/office/drawing/2014/main" id="{4964F558-A10E-3DD8-AEFB-9469C42E9FFB}"/>
+                <a16:creationId xmlns:a16="http://schemas.microsoft.com/office/drawing/2014/main" id="{F8740F3C-CCD2-50D9-01DF-66FC2788BE72}"/>
               </a:ext>
             </a:extLst>
           </p:cNvPr>
@@ -10409,7 +10409,7 @@
           <p:cNvPr id="7" name="AutoShape 151">
             <a:extLst>
               <a:ext uri="{FF2B5EF4-FFF2-40B4-BE49-F238E27FC236}">
-                <a16:creationId xmlns:a16="http://schemas.microsoft.com/office/drawing/2014/main" id="{38C047AC-4AEC-BAA7-B47E-72959C796CB2}"/>
+                <a16:creationId xmlns:a16="http://schemas.microsoft.com/office/drawing/2014/main" id="{5C66E934-4424-CDB8-95C2-192E0DD208FE}"/>
               </a:ext>
             </a:extLst>
           </p:cNvPr>
@@ -10455,7 +10455,7 @@
           <p:cNvPr id="8" name="AutoShape 152">
             <a:extLst>
               <a:ext uri="{FF2B5EF4-FFF2-40B4-BE49-F238E27FC236}">
-                <a16:creationId xmlns:a16="http://schemas.microsoft.com/office/drawing/2014/main" id="{D8FF19A0-B000-C18B-1C14-121DFB82575C}"/>
+                <a16:creationId xmlns:a16="http://schemas.microsoft.com/office/drawing/2014/main" id="{34E0A2DE-17D3-AADE-0FB9-0E7AD538125C}"/>
               </a:ext>
             </a:extLst>
           </p:cNvPr>
@@ -10501,7 +10501,7 @@
           <p:cNvPr id="9" name="AutoShape 153">
             <a:extLst>
               <a:ext uri="{FF2B5EF4-FFF2-40B4-BE49-F238E27FC236}">
-                <a16:creationId xmlns:a16="http://schemas.microsoft.com/office/drawing/2014/main" id="{8904D015-D3F8-0C15-A51F-76689FB7F9F2}"/>
+                <a16:creationId xmlns:a16="http://schemas.microsoft.com/office/drawing/2014/main" id="{C90CB17E-E8BC-3D23-30D0-E152ADBC1E27}"/>
               </a:ext>
             </a:extLst>
           </p:cNvPr>
@@ -10547,7 +10547,7 @@
           <p:cNvPr id="10" name="AutoShape 154">
             <a:extLst>
               <a:ext uri="{FF2B5EF4-FFF2-40B4-BE49-F238E27FC236}">
-                <a16:creationId xmlns:a16="http://schemas.microsoft.com/office/drawing/2014/main" id="{681B9DB9-B3BC-6BBE-3810-A6DBB4F512AA}"/>
+                <a16:creationId xmlns:a16="http://schemas.microsoft.com/office/drawing/2014/main" id="{41A5F76D-1520-1B7D-23CA-9F71A7782DA0}"/>
               </a:ext>
             </a:extLst>
           </p:cNvPr>
@@ -10593,7 +10593,7 @@
           <p:cNvPr id="11" name="AutoShape 155">
             <a:extLst>
               <a:ext uri="{FF2B5EF4-FFF2-40B4-BE49-F238E27FC236}">
-                <a16:creationId xmlns:a16="http://schemas.microsoft.com/office/drawing/2014/main" id="{56AF7E07-6C41-6789-88AC-84438A3BC315}"/>
+                <a16:creationId xmlns:a16="http://schemas.microsoft.com/office/drawing/2014/main" id="{6E43AB41-168C-989C-3DD3-5479ECBD5B9A}"/>
               </a:ext>
             </a:extLst>
           </p:cNvPr>
@@ -10639,7 +10639,7 @@
           <p:cNvPr id="12" name="AutoShape 156">
             <a:extLst>
               <a:ext uri="{FF2B5EF4-FFF2-40B4-BE49-F238E27FC236}">
-                <a16:creationId xmlns:a16="http://schemas.microsoft.com/office/drawing/2014/main" id="{BC535C7C-D9DF-0990-3622-F83CAB9B687C}"/>
+                <a16:creationId xmlns:a16="http://schemas.microsoft.com/office/drawing/2014/main" id="{D6CE515C-A686-030A-98D5-F0C9A6F27138}"/>
               </a:ext>
             </a:extLst>
           </p:cNvPr>
@@ -10685,7 +10685,7 @@
           <p:cNvPr id="13" name="AutoShape 157">
             <a:extLst>
               <a:ext uri="{FF2B5EF4-FFF2-40B4-BE49-F238E27FC236}">
-                <a16:creationId xmlns:a16="http://schemas.microsoft.com/office/drawing/2014/main" id="{0F2FEAC4-28C1-BF77-F608-4027830E05FB}"/>
+                <a16:creationId xmlns:a16="http://schemas.microsoft.com/office/drawing/2014/main" id="{1B295598-38E6-43CD-74BB-D3ECDBC5905C}"/>
               </a:ext>
             </a:extLst>
           </p:cNvPr>
@@ -10731,7 +10731,7 @@
           <p:cNvPr id="14" name="AutoShape 158">
             <a:extLst>
               <a:ext uri="{FF2B5EF4-FFF2-40B4-BE49-F238E27FC236}">
-                <a16:creationId xmlns:a16="http://schemas.microsoft.com/office/drawing/2014/main" id="{0ADFA7A7-E81B-185E-E2EA-F6F2AAAFCB90}"/>
+                <a16:creationId xmlns:a16="http://schemas.microsoft.com/office/drawing/2014/main" id="{36C3FC63-DF5A-C441-883B-2183FABAC60A}"/>
               </a:ext>
             </a:extLst>
           </p:cNvPr>
@@ -10781,7 +10781,7 @@
           <p:cNvPr id="15" name="AutoShape 159">
             <a:extLst>
               <a:ext uri="{FF2B5EF4-FFF2-40B4-BE49-F238E27FC236}">
-                <a16:creationId xmlns:a16="http://schemas.microsoft.com/office/drawing/2014/main" id="{2333B376-EEF7-47D6-A7C4-88AAF24A2A7B}"/>
+                <a16:creationId xmlns:a16="http://schemas.microsoft.com/office/drawing/2014/main" id="{70F75D78-40E3-00C8-78F7-246CE769A4E0}"/>
               </a:ext>
             </a:extLst>
           </p:cNvPr>
@@ -10831,7 +10831,7 @@
           <p:cNvPr id="16" name="AutoShape 160">
             <a:extLst>
               <a:ext uri="{FF2B5EF4-FFF2-40B4-BE49-F238E27FC236}">
-                <a16:creationId xmlns:a16="http://schemas.microsoft.com/office/drawing/2014/main" id="{7C1150BD-B289-15B4-D6B4-70DA691F4B1B}"/>
+                <a16:creationId xmlns:a16="http://schemas.microsoft.com/office/drawing/2014/main" id="{0C18E8C6-A4A1-FDE6-E24B-421FACD82416}"/>
               </a:ext>
             </a:extLst>
           </p:cNvPr>
@@ -10877,7 +10877,7 @@
           <p:cNvPr id="17" name="AutoShape 161">
             <a:extLst>
               <a:ext uri="{FF2B5EF4-FFF2-40B4-BE49-F238E27FC236}">
-                <a16:creationId xmlns:a16="http://schemas.microsoft.com/office/drawing/2014/main" id="{77AC5A10-BE6F-5E08-0DD4-5E994E1EB8D4}"/>
+                <a16:creationId xmlns:a16="http://schemas.microsoft.com/office/drawing/2014/main" id="{F07572C5-5AC1-4C8F-5777-810E1FD436BC}"/>
               </a:ext>
             </a:extLst>
           </p:cNvPr>
@@ -10923,7 +10923,7 @@
           <p:cNvPr id="18" name="AutoShape 162">
             <a:extLst>
               <a:ext uri="{FF2B5EF4-FFF2-40B4-BE49-F238E27FC236}">
-                <a16:creationId xmlns:a16="http://schemas.microsoft.com/office/drawing/2014/main" id="{F5784F2E-E9CF-243C-9B5C-AB753B5DC122}"/>
+                <a16:creationId xmlns:a16="http://schemas.microsoft.com/office/drawing/2014/main" id="{C65C2459-B4F1-CB09-2BF0-45466DA5D75B}"/>
               </a:ext>
             </a:extLst>
           </p:cNvPr>
@@ -10969,7 +10969,7 @@
           <p:cNvPr id="19" name="AutoShape 163">
             <a:extLst>
               <a:ext uri="{FF2B5EF4-FFF2-40B4-BE49-F238E27FC236}">
-                <a16:creationId xmlns:a16="http://schemas.microsoft.com/office/drawing/2014/main" id="{A16B63C0-FEFA-39EB-E8ED-555A6BD76949}"/>
+                <a16:creationId xmlns:a16="http://schemas.microsoft.com/office/drawing/2014/main" id="{7AA7E7A4-3BC5-4D10-FB4A-D17E4C4F169E}"/>
               </a:ext>
             </a:extLst>
           </p:cNvPr>
@@ -11015,7 +11015,7 @@
           <p:cNvPr id="20" name="AutoShape 164">
             <a:extLst>
               <a:ext uri="{FF2B5EF4-FFF2-40B4-BE49-F238E27FC236}">
-                <a16:creationId xmlns:a16="http://schemas.microsoft.com/office/drawing/2014/main" id="{83CAAC80-077C-12DD-81C9-8004910E23FC}"/>
+                <a16:creationId xmlns:a16="http://schemas.microsoft.com/office/drawing/2014/main" id="{7BE1AAB1-D147-8B67-3804-0F0E5D847805}"/>
               </a:ext>
             </a:extLst>
           </p:cNvPr>
@@ -11061,7 +11061,7 @@
           <p:cNvPr id="21" name="AutoShape 165">
             <a:extLst>
               <a:ext uri="{FF2B5EF4-FFF2-40B4-BE49-F238E27FC236}">
-                <a16:creationId xmlns:a16="http://schemas.microsoft.com/office/drawing/2014/main" id="{04F87306-73F3-89D3-A02F-20E9948D13D7}"/>
+                <a16:creationId xmlns:a16="http://schemas.microsoft.com/office/drawing/2014/main" id="{B7116B05-BF0E-684E-4195-723417776A12}"/>
               </a:ext>
             </a:extLst>
           </p:cNvPr>
@@ -11107,7 +11107,7 @@
           <p:cNvPr id="22" name="AutoShape 166">
             <a:extLst>
               <a:ext uri="{FF2B5EF4-FFF2-40B4-BE49-F238E27FC236}">
-                <a16:creationId xmlns:a16="http://schemas.microsoft.com/office/drawing/2014/main" id="{1750F7F6-AFAF-47B1-2CB5-2FA0A4B8E07E}"/>
+                <a16:creationId xmlns:a16="http://schemas.microsoft.com/office/drawing/2014/main" id="{A6906F9D-85A2-228A-5B23-D18EB781CFA6}"/>
               </a:ext>
             </a:extLst>
           </p:cNvPr>
@@ -11153,7 +11153,7 @@
           <p:cNvPr id="23" name="AutoShape 167">
             <a:extLst>
               <a:ext uri="{FF2B5EF4-FFF2-40B4-BE49-F238E27FC236}">
-                <a16:creationId xmlns:a16="http://schemas.microsoft.com/office/drawing/2014/main" id="{6A6A199C-2837-12F9-2E4A-FF62C408F4CA}"/>
+                <a16:creationId xmlns:a16="http://schemas.microsoft.com/office/drawing/2014/main" id="{78992F95-CBCC-9632-B590-D8B36E151649}"/>
               </a:ext>
             </a:extLst>
           </p:cNvPr>
@@ -11203,7 +11203,7 @@
           <p:cNvPr id="24" name="AutoShape 168">
             <a:extLst>
               <a:ext uri="{FF2B5EF4-FFF2-40B4-BE49-F238E27FC236}">
-                <a16:creationId xmlns:a16="http://schemas.microsoft.com/office/drawing/2014/main" id="{1844D7EC-7EE5-2138-D6A5-C6AF5B688E4D}"/>
+                <a16:creationId xmlns:a16="http://schemas.microsoft.com/office/drawing/2014/main" id="{BF38B3B3-CD95-0D58-12B8-EEE247C6322B}"/>
               </a:ext>
             </a:extLst>
           </p:cNvPr>
@@ -11253,7 +11253,7 @@
           <p:cNvPr id="25" name="AutoShape 169">
             <a:extLst>
               <a:ext uri="{FF2B5EF4-FFF2-40B4-BE49-F238E27FC236}">
-                <a16:creationId xmlns:a16="http://schemas.microsoft.com/office/drawing/2014/main" id="{216FA9A5-E2CA-96E4-9B99-EBBAA5D830DE}"/>
+                <a16:creationId xmlns:a16="http://schemas.microsoft.com/office/drawing/2014/main" id="{75B1FD41-5104-B409-561B-8B0681D6C286}"/>
               </a:ext>
             </a:extLst>
           </p:cNvPr>
@@ -11301,7 +11301,7 @@
     </p:spTree>
     <p:extLst>
       <p:ext uri="{BB962C8B-B14F-4D97-AF65-F5344CB8AC3E}">
-        <p14:creationId xmlns:p14="http://schemas.microsoft.com/office/powerpoint/2010/main" val="1678219063"/>
+        <p14:creationId xmlns:p14="http://schemas.microsoft.com/office/powerpoint/2010/main" val="4164501446"/>
       </p:ext>
     </p:extLst>
   </p:cSld>
@@ -11333,7 +11333,7 @@
           <p:cNvPr id="2" name="AutoShape 170">
             <a:extLst>
               <a:ext uri="{FF2B5EF4-FFF2-40B4-BE49-F238E27FC236}">
-                <a16:creationId xmlns:a16="http://schemas.microsoft.com/office/drawing/2014/main" id="{62E119D6-C2D4-4DAF-99B8-EA844411A5FB}"/>
+                <a16:creationId xmlns:a16="http://schemas.microsoft.com/office/drawing/2014/main" id="{94C1E75D-7DDF-8DB7-64CF-208B16044AFE}"/>
               </a:ext>
             </a:extLst>
           </p:cNvPr>
@@ -11383,7 +11383,7 @@
           <p:cNvPr id="3" name="AutoShape 171">
             <a:extLst>
               <a:ext uri="{FF2B5EF4-FFF2-40B4-BE49-F238E27FC236}">
-                <a16:creationId xmlns:a16="http://schemas.microsoft.com/office/drawing/2014/main" id="{05420347-B6D7-434D-A253-7D3EA8B84E5A}"/>
+                <a16:creationId xmlns:a16="http://schemas.microsoft.com/office/drawing/2014/main" id="{BDC14929-F0C7-C8FB-6365-0AD1476C0530}"/>
               </a:ext>
             </a:extLst>
           </p:cNvPr>
@@ -11433,7 +11433,7 @@
           <p:cNvPr id="4" name="AutoShape 172">
             <a:extLst>
               <a:ext uri="{FF2B5EF4-FFF2-40B4-BE49-F238E27FC236}">
-                <a16:creationId xmlns:a16="http://schemas.microsoft.com/office/drawing/2014/main" id="{0EB77CA0-F408-6019-85EB-265A8344831E}"/>
+                <a16:creationId xmlns:a16="http://schemas.microsoft.com/office/drawing/2014/main" id="{D479F61E-C307-F8F6-FE38-7364943C0398}"/>
               </a:ext>
             </a:extLst>
           </p:cNvPr>
@@ -11479,7 +11479,7 @@
           <p:cNvPr id="5" name="AutoShape 173">
             <a:extLst>
               <a:ext uri="{FF2B5EF4-FFF2-40B4-BE49-F238E27FC236}">
-                <a16:creationId xmlns:a16="http://schemas.microsoft.com/office/drawing/2014/main" id="{BDB78637-585B-D7BC-3774-C25CA2AB6A70}"/>
+                <a16:creationId xmlns:a16="http://schemas.microsoft.com/office/drawing/2014/main" id="{D36225BD-5E30-23AE-5E3D-7778C5A1C973}"/>
               </a:ext>
             </a:extLst>
           </p:cNvPr>
@@ -11525,7 +11525,7 @@
           <p:cNvPr id="6" name="AutoShape 174">
             <a:extLst>
               <a:ext uri="{FF2B5EF4-FFF2-40B4-BE49-F238E27FC236}">
-                <a16:creationId xmlns:a16="http://schemas.microsoft.com/office/drawing/2014/main" id="{58DCCA25-694B-3436-F15F-043F46F79054}"/>
+                <a16:creationId xmlns:a16="http://schemas.microsoft.com/office/drawing/2014/main" id="{C64E9610-FF45-13B9-2225-3D451406CE19}"/>
               </a:ext>
             </a:extLst>
           </p:cNvPr>
@@ -11571,7 +11571,7 @@
           <p:cNvPr id="7" name="AutoShape 175">
             <a:extLst>
               <a:ext uri="{FF2B5EF4-FFF2-40B4-BE49-F238E27FC236}">
-                <a16:creationId xmlns:a16="http://schemas.microsoft.com/office/drawing/2014/main" id="{F482423B-4C2D-C4F0-62C2-19074C67C39F}"/>
+                <a16:creationId xmlns:a16="http://schemas.microsoft.com/office/drawing/2014/main" id="{AFB2B3AA-97F2-2CD6-C9B5-73ABF1D01541}"/>
               </a:ext>
             </a:extLst>
           </p:cNvPr>
@@ -11617,7 +11617,7 @@
           <p:cNvPr id="8" name="AutoShape 176">
             <a:extLst>
               <a:ext uri="{FF2B5EF4-FFF2-40B4-BE49-F238E27FC236}">
-                <a16:creationId xmlns:a16="http://schemas.microsoft.com/office/drawing/2014/main" id="{95EBD7E0-37E9-6970-C36B-5C302396592C}"/>
+                <a16:creationId xmlns:a16="http://schemas.microsoft.com/office/drawing/2014/main" id="{464B6267-F99B-B95F-AD23-0E3F82687304}"/>
               </a:ext>
             </a:extLst>
           </p:cNvPr>
@@ -11667,7 +11667,7 @@
           <p:cNvPr id="9" name="AutoShape 177">
             <a:extLst>
               <a:ext uri="{FF2B5EF4-FFF2-40B4-BE49-F238E27FC236}">
-                <a16:creationId xmlns:a16="http://schemas.microsoft.com/office/drawing/2014/main" id="{92B42260-7096-D86B-EC6B-FA856E79084E}"/>
+                <a16:creationId xmlns:a16="http://schemas.microsoft.com/office/drawing/2014/main" id="{F98E3A67-D453-7F31-5D01-648CEA1E9636}"/>
               </a:ext>
             </a:extLst>
           </p:cNvPr>
@@ -11717,7 +11717,7 @@
           <p:cNvPr id="10" name="AutoShape 178">
             <a:extLst>
               <a:ext uri="{FF2B5EF4-FFF2-40B4-BE49-F238E27FC236}">
-                <a16:creationId xmlns:a16="http://schemas.microsoft.com/office/drawing/2014/main" id="{A163172B-9DCC-D96F-273A-DE7B7A32469D}"/>
+                <a16:creationId xmlns:a16="http://schemas.microsoft.com/office/drawing/2014/main" id="{F286B8E9-5DEC-A391-A964-192CF9C2AC4E}"/>
               </a:ext>
             </a:extLst>
           </p:cNvPr>
@@ -11767,7 +11767,7 @@
           <p:cNvPr id="11" name="AutoShape 179">
             <a:extLst>
               <a:ext uri="{FF2B5EF4-FFF2-40B4-BE49-F238E27FC236}">
-                <a16:creationId xmlns:a16="http://schemas.microsoft.com/office/drawing/2014/main" id="{452852C6-D908-B8A8-678C-F46205894527}"/>
+                <a16:creationId xmlns:a16="http://schemas.microsoft.com/office/drawing/2014/main" id="{C5737512-CA2B-A9D8-18C5-2774D8442A30}"/>
               </a:ext>
             </a:extLst>
           </p:cNvPr>
@@ -11813,7 +11813,7 @@
           <p:cNvPr id="12" name="AutoShape 180">
             <a:extLst>
               <a:ext uri="{FF2B5EF4-FFF2-40B4-BE49-F238E27FC236}">
-                <a16:creationId xmlns:a16="http://schemas.microsoft.com/office/drawing/2014/main" id="{FEBDB4C3-DB0F-C46A-B931-6A310C57C987}"/>
+                <a16:creationId xmlns:a16="http://schemas.microsoft.com/office/drawing/2014/main" id="{56AE900D-DF71-1AEC-6F25-1D07EEDF6EB3}"/>
               </a:ext>
             </a:extLst>
           </p:cNvPr>
@@ -11859,7 +11859,7 @@
           <p:cNvPr id="13" name="AutoShape 181">
             <a:extLst>
               <a:ext uri="{FF2B5EF4-FFF2-40B4-BE49-F238E27FC236}">
-                <a16:creationId xmlns:a16="http://schemas.microsoft.com/office/drawing/2014/main" id="{152DD3DE-47C2-707B-5FD0-DA6780E226E8}"/>
+                <a16:creationId xmlns:a16="http://schemas.microsoft.com/office/drawing/2014/main" id="{3614900B-A348-92B3-7C53-CC7542DE5369}"/>
               </a:ext>
             </a:extLst>
           </p:cNvPr>
@@ -11905,7 +11905,7 @@
           <p:cNvPr id="14" name="AutoShape 182">
             <a:extLst>
               <a:ext uri="{FF2B5EF4-FFF2-40B4-BE49-F238E27FC236}">
-                <a16:creationId xmlns:a16="http://schemas.microsoft.com/office/drawing/2014/main" id="{AC406217-4EF5-8FF8-0089-552DDD4655D7}"/>
+                <a16:creationId xmlns:a16="http://schemas.microsoft.com/office/drawing/2014/main" id="{31BC22E4-C38A-090D-B6BC-9814A60217CD}"/>
               </a:ext>
             </a:extLst>
           </p:cNvPr>
@@ -11951,7 +11951,7 @@
           <p:cNvPr id="15" name="AutoShape 183">
             <a:extLst>
               <a:ext uri="{FF2B5EF4-FFF2-40B4-BE49-F238E27FC236}">
-                <a16:creationId xmlns:a16="http://schemas.microsoft.com/office/drawing/2014/main" id="{892077E4-E95D-B0B3-766E-4025950756BC}"/>
+                <a16:creationId xmlns:a16="http://schemas.microsoft.com/office/drawing/2014/main" id="{55034728-3CB3-638B-6F45-E2E6B022274C}"/>
               </a:ext>
             </a:extLst>
           </p:cNvPr>
@@ -11993,7 +11993,7 @@
     </p:spTree>
     <p:extLst>
       <p:ext uri="{BB962C8B-B14F-4D97-AF65-F5344CB8AC3E}">
-        <p14:creationId xmlns:p14="http://schemas.microsoft.com/office/powerpoint/2010/main" val="3337954"/>
+        <p14:creationId xmlns:p14="http://schemas.microsoft.com/office/powerpoint/2010/main" val="2348186699"/>
       </p:ext>
     </p:extLst>
   </p:cSld>

--- a/tests/corpus/pptx/generated/geometry-presets.pptx
+++ b/tests/corpus/pptx/generated/geometry-presets.pptx
@@ -136,7 +136,7 @@
           <p:cNvPr id="2" name="Titel 1">
             <a:extLst>
               <a:ext uri="{FF2B5EF4-FFF2-40B4-BE49-F238E27FC236}">
-                <a16:creationId xmlns:a16="http://schemas.microsoft.com/office/drawing/2014/main" id="{E65B54AA-2B65-0051-0816-FE67CFAEDEA4}"/>
+                <a16:creationId xmlns:a16="http://schemas.microsoft.com/office/drawing/2014/main" id="{5CD2AF6F-72CA-BBC5-4507-182E2A984AC4}"/>
               </a:ext>
             </a:extLst>
           </p:cNvPr>
@@ -173,7 +173,7 @@
           <p:cNvPr id="3" name="Untertitel 2">
             <a:extLst>
               <a:ext uri="{FF2B5EF4-FFF2-40B4-BE49-F238E27FC236}">
-                <a16:creationId xmlns:a16="http://schemas.microsoft.com/office/drawing/2014/main" id="{06BE8885-77C5-0C81-EE72-32F6D7C5858F}"/>
+                <a16:creationId xmlns:a16="http://schemas.microsoft.com/office/drawing/2014/main" id="{430C5C92-9BED-DF2A-E2BC-8AA2648BE22C}"/>
               </a:ext>
             </a:extLst>
           </p:cNvPr>
@@ -243,7 +243,7 @@
           <p:cNvPr id="4" name="Datumsplatzhalter 3">
             <a:extLst>
               <a:ext uri="{FF2B5EF4-FFF2-40B4-BE49-F238E27FC236}">
-                <a16:creationId xmlns:a16="http://schemas.microsoft.com/office/drawing/2014/main" id="{FC38C67B-F7A7-C455-AC8B-D9806DFED74F}"/>
+                <a16:creationId xmlns:a16="http://schemas.microsoft.com/office/drawing/2014/main" id="{29566B3C-2AB1-90AA-BD7D-E41AEDF2256F}"/>
               </a:ext>
             </a:extLst>
           </p:cNvPr>
@@ -259,7 +259,7 @@
           <a:bodyPr/>
           <a:lstStyle/>
           <a:p>
-            <a:fld id="{1E2958D6-7BA5-43D1-8E71-6918D76CD7C0}" type="datetimeFigureOut">
+            <a:fld id="{DCE360E9-0FB8-400D-AC15-8242C30AE4EE}" type="datetimeFigureOut">
               <a:rPr lang="de-DE" smtClean="0"/>
               <a:t>08.10.2026</a:t>
             </a:fld>
@@ -272,7 +272,7 @@
           <p:cNvPr id="5" name="Fußzeilenplatzhalter 4">
             <a:extLst>
               <a:ext uri="{FF2B5EF4-FFF2-40B4-BE49-F238E27FC236}">
-                <a16:creationId xmlns:a16="http://schemas.microsoft.com/office/drawing/2014/main" id="{01539F2D-1975-1B90-85CC-DF9E116BC926}"/>
+                <a16:creationId xmlns:a16="http://schemas.microsoft.com/office/drawing/2014/main" id="{A65489BD-1076-4E94-E836-85330CCCC023}"/>
               </a:ext>
             </a:extLst>
           </p:cNvPr>
@@ -297,7 +297,7 @@
           <p:cNvPr id="6" name="Foliennummernplatzhalter 5">
             <a:extLst>
               <a:ext uri="{FF2B5EF4-FFF2-40B4-BE49-F238E27FC236}">
-                <a16:creationId xmlns:a16="http://schemas.microsoft.com/office/drawing/2014/main" id="{7F3675D4-6D58-CDB4-07EE-09CE030A45F3}"/>
+                <a16:creationId xmlns:a16="http://schemas.microsoft.com/office/drawing/2014/main" id="{376BB11C-78ED-9091-6E3D-E9296CBAF0EA}"/>
               </a:ext>
             </a:extLst>
           </p:cNvPr>
@@ -313,7 +313,7 @@
           <a:bodyPr/>
           <a:lstStyle/>
           <a:p>
-            <a:fld id="{2CF23A79-0A54-4736-B307-85B70C860758}" type="slidenum">
+            <a:fld id="{BD06C979-E34A-47C6-BB4C-39A0B120C4F2}" type="slidenum">
               <a:rPr lang="de-DE" smtClean="0"/>
               <a:t>‹Nr.›</a:t>
             </a:fld>
@@ -324,7 +324,7 @@
     </p:spTree>
     <p:extLst>
       <p:ext uri="{BB962C8B-B14F-4D97-AF65-F5344CB8AC3E}">
-        <p14:creationId xmlns:p14="http://schemas.microsoft.com/office/powerpoint/2010/main" val="1134835269"/>
+        <p14:creationId xmlns:p14="http://schemas.microsoft.com/office/powerpoint/2010/main" val="1168732269"/>
       </p:ext>
     </p:extLst>
   </p:cSld>
@@ -356,7 +356,7 @@
           <p:cNvPr id="2" name="Titel 1">
             <a:extLst>
               <a:ext uri="{FF2B5EF4-FFF2-40B4-BE49-F238E27FC236}">
-                <a16:creationId xmlns:a16="http://schemas.microsoft.com/office/drawing/2014/main" id="{497CB3DC-5A48-5BFB-1731-4C80D7BA1E41}"/>
+                <a16:creationId xmlns:a16="http://schemas.microsoft.com/office/drawing/2014/main" id="{A9998FD2-5004-366F-C708-C11E235BBFB7}"/>
               </a:ext>
             </a:extLst>
           </p:cNvPr>
@@ -384,7 +384,7 @@
           <p:cNvPr id="3" name="Vertikaler Textplatzhalter 2">
             <a:extLst>
               <a:ext uri="{FF2B5EF4-FFF2-40B4-BE49-F238E27FC236}">
-                <a16:creationId xmlns:a16="http://schemas.microsoft.com/office/drawing/2014/main" id="{5D8F3457-9D5C-174B-8846-EFC8E09EBD83}"/>
+                <a16:creationId xmlns:a16="http://schemas.microsoft.com/office/drawing/2014/main" id="{5E688A67-6748-7145-190C-6188096B7AE1}"/>
               </a:ext>
             </a:extLst>
           </p:cNvPr>
@@ -441,7 +441,7 @@
           <p:cNvPr id="4" name="Datumsplatzhalter 3">
             <a:extLst>
               <a:ext uri="{FF2B5EF4-FFF2-40B4-BE49-F238E27FC236}">
-                <a16:creationId xmlns:a16="http://schemas.microsoft.com/office/drawing/2014/main" id="{474A06C4-B7FE-4742-82F8-4D4E9072FD64}"/>
+                <a16:creationId xmlns:a16="http://schemas.microsoft.com/office/drawing/2014/main" id="{B8ADAB25-4ED9-25A5-B653-5B96415E447F}"/>
               </a:ext>
             </a:extLst>
           </p:cNvPr>
@@ -457,7 +457,7 @@
           <a:bodyPr/>
           <a:lstStyle/>
           <a:p>
-            <a:fld id="{1E2958D6-7BA5-43D1-8E71-6918D76CD7C0}" type="datetimeFigureOut">
+            <a:fld id="{DCE360E9-0FB8-400D-AC15-8242C30AE4EE}" type="datetimeFigureOut">
               <a:rPr lang="de-DE" smtClean="0"/>
               <a:t>08.10.2026</a:t>
             </a:fld>
@@ -470,7 +470,7 @@
           <p:cNvPr id="5" name="Fußzeilenplatzhalter 4">
             <a:extLst>
               <a:ext uri="{FF2B5EF4-FFF2-40B4-BE49-F238E27FC236}">
-                <a16:creationId xmlns:a16="http://schemas.microsoft.com/office/drawing/2014/main" id="{D7033774-A28D-B572-1CA9-0AE1DF38529F}"/>
+                <a16:creationId xmlns:a16="http://schemas.microsoft.com/office/drawing/2014/main" id="{67B2FECC-8BF0-B402-E3AE-A7672760A020}"/>
               </a:ext>
             </a:extLst>
           </p:cNvPr>
@@ -495,7 +495,7 @@
           <p:cNvPr id="6" name="Foliennummernplatzhalter 5">
             <a:extLst>
               <a:ext uri="{FF2B5EF4-FFF2-40B4-BE49-F238E27FC236}">
-                <a16:creationId xmlns:a16="http://schemas.microsoft.com/office/drawing/2014/main" id="{F7FCAB99-B804-1BB6-5638-C7277009D2EF}"/>
+                <a16:creationId xmlns:a16="http://schemas.microsoft.com/office/drawing/2014/main" id="{D800A22C-3277-2B03-D9E8-DC97A0A997C9}"/>
               </a:ext>
             </a:extLst>
           </p:cNvPr>
@@ -511,7 +511,7 @@
           <a:bodyPr/>
           <a:lstStyle/>
           <a:p>
-            <a:fld id="{2CF23A79-0A54-4736-B307-85B70C860758}" type="slidenum">
+            <a:fld id="{BD06C979-E34A-47C6-BB4C-39A0B120C4F2}" type="slidenum">
               <a:rPr lang="de-DE" smtClean="0"/>
               <a:t>‹Nr.›</a:t>
             </a:fld>
@@ -522,7 +522,7 @@
     </p:spTree>
     <p:extLst>
       <p:ext uri="{BB962C8B-B14F-4D97-AF65-F5344CB8AC3E}">
-        <p14:creationId xmlns:p14="http://schemas.microsoft.com/office/powerpoint/2010/main" val="1995405968"/>
+        <p14:creationId xmlns:p14="http://schemas.microsoft.com/office/powerpoint/2010/main" val="879353443"/>
       </p:ext>
     </p:extLst>
   </p:cSld>
@@ -554,7 +554,7 @@
           <p:cNvPr id="2" name="Vertikaler Titel 1">
             <a:extLst>
               <a:ext uri="{FF2B5EF4-FFF2-40B4-BE49-F238E27FC236}">
-                <a16:creationId xmlns:a16="http://schemas.microsoft.com/office/drawing/2014/main" id="{9D5FAA5A-56CE-0993-CA9E-5877BF7E3474}"/>
+                <a16:creationId xmlns:a16="http://schemas.microsoft.com/office/drawing/2014/main" id="{635D9D09-2305-8F61-123A-820548D7D302}"/>
               </a:ext>
             </a:extLst>
           </p:cNvPr>
@@ -587,7 +587,7 @@
           <p:cNvPr id="3" name="Vertikaler Textplatzhalter 2">
             <a:extLst>
               <a:ext uri="{FF2B5EF4-FFF2-40B4-BE49-F238E27FC236}">
-                <a16:creationId xmlns:a16="http://schemas.microsoft.com/office/drawing/2014/main" id="{53F80BAA-CF28-9FF1-0039-6EC38D29EDA8}"/>
+                <a16:creationId xmlns:a16="http://schemas.microsoft.com/office/drawing/2014/main" id="{99B0EAC9-B242-16A5-EC43-B0E3F9F9DE5C}"/>
               </a:ext>
             </a:extLst>
           </p:cNvPr>
@@ -649,7 +649,7 @@
           <p:cNvPr id="4" name="Datumsplatzhalter 3">
             <a:extLst>
               <a:ext uri="{FF2B5EF4-FFF2-40B4-BE49-F238E27FC236}">
-                <a16:creationId xmlns:a16="http://schemas.microsoft.com/office/drawing/2014/main" id="{84B10772-A5AC-7D56-9991-574D4959D4E0}"/>
+                <a16:creationId xmlns:a16="http://schemas.microsoft.com/office/drawing/2014/main" id="{F1BAD412-3958-6FF3-BF8A-7FD9158ED0E0}"/>
               </a:ext>
             </a:extLst>
           </p:cNvPr>
@@ -665,7 +665,7 @@
           <a:bodyPr/>
           <a:lstStyle/>
           <a:p>
-            <a:fld id="{1E2958D6-7BA5-43D1-8E71-6918D76CD7C0}" type="datetimeFigureOut">
+            <a:fld id="{DCE360E9-0FB8-400D-AC15-8242C30AE4EE}" type="datetimeFigureOut">
               <a:rPr lang="de-DE" smtClean="0"/>
               <a:t>08.10.2026</a:t>
             </a:fld>
@@ -678,7 +678,7 @@
           <p:cNvPr id="5" name="Fußzeilenplatzhalter 4">
             <a:extLst>
               <a:ext uri="{FF2B5EF4-FFF2-40B4-BE49-F238E27FC236}">
-                <a16:creationId xmlns:a16="http://schemas.microsoft.com/office/drawing/2014/main" id="{F97F8183-44EE-33EB-1860-FFCBB8B72B14}"/>
+                <a16:creationId xmlns:a16="http://schemas.microsoft.com/office/drawing/2014/main" id="{7DCE3D6C-9574-5173-96DD-D49D28B99B84}"/>
               </a:ext>
             </a:extLst>
           </p:cNvPr>
@@ -703,7 +703,7 @@
           <p:cNvPr id="6" name="Foliennummernplatzhalter 5">
             <a:extLst>
               <a:ext uri="{FF2B5EF4-FFF2-40B4-BE49-F238E27FC236}">
-                <a16:creationId xmlns:a16="http://schemas.microsoft.com/office/drawing/2014/main" id="{41D878EA-D025-148C-1BA0-5D12249726EB}"/>
+                <a16:creationId xmlns:a16="http://schemas.microsoft.com/office/drawing/2014/main" id="{EAF5EED2-7614-AF53-E582-6FE07339F6F2}"/>
               </a:ext>
             </a:extLst>
           </p:cNvPr>
@@ -719,7 +719,7 @@
           <a:bodyPr/>
           <a:lstStyle/>
           <a:p>
-            <a:fld id="{2CF23A79-0A54-4736-B307-85B70C860758}" type="slidenum">
+            <a:fld id="{BD06C979-E34A-47C6-BB4C-39A0B120C4F2}" type="slidenum">
               <a:rPr lang="de-DE" smtClean="0"/>
               <a:t>‹Nr.›</a:t>
             </a:fld>
@@ -730,7 +730,7 @@
     </p:spTree>
     <p:extLst>
       <p:ext uri="{BB962C8B-B14F-4D97-AF65-F5344CB8AC3E}">
-        <p14:creationId xmlns:p14="http://schemas.microsoft.com/office/powerpoint/2010/main" val="2961823717"/>
+        <p14:creationId xmlns:p14="http://schemas.microsoft.com/office/powerpoint/2010/main" val="2005603752"/>
       </p:ext>
     </p:extLst>
   </p:cSld>
@@ -762,7 +762,7 @@
           <p:cNvPr id="2" name="Titel 1">
             <a:extLst>
               <a:ext uri="{FF2B5EF4-FFF2-40B4-BE49-F238E27FC236}">
-                <a16:creationId xmlns:a16="http://schemas.microsoft.com/office/drawing/2014/main" id="{5084FE53-34D3-736E-44A5-BC1726E2AF42}"/>
+                <a16:creationId xmlns:a16="http://schemas.microsoft.com/office/drawing/2014/main" id="{5A9FE337-1543-45E9-2A30-A703F7CC1C71}"/>
               </a:ext>
             </a:extLst>
           </p:cNvPr>
@@ -790,7 +790,7 @@
           <p:cNvPr id="3" name="Inhaltsplatzhalter 2">
             <a:extLst>
               <a:ext uri="{FF2B5EF4-FFF2-40B4-BE49-F238E27FC236}">
-                <a16:creationId xmlns:a16="http://schemas.microsoft.com/office/drawing/2014/main" id="{780CAE8E-8F7C-B030-965A-3E02387D8FCC}"/>
+                <a16:creationId xmlns:a16="http://schemas.microsoft.com/office/drawing/2014/main" id="{538BE321-A629-7971-7D85-BAEA2582D52D}"/>
               </a:ext>
             </a:extLst>
           </p:cNvPr>
@@ -847,7 +847,7 @@
           <p:cNvPr id="4" name="Datumsplatzhalter 3">
             <a:extLst>
               <a:ext uri="{FF2B5EF4-FFF2-40B4-BE49-F238E27FC236}">
-                <a16:creationId xmlns:a16="http://schemas.microsoft.com/office/drawing/2014/main" id="{FC3244C0-D5F9-3C74-9579-4AF7D24FE041}"/>
+                <a16:creationId xmlns:a16="http://schemas.microsoft.com/office/drawing/2014/main" id="{0BDB749A-3B60-0C86-3AFB-FF5142BEA94E}"/>
               </a:ext>
             </a:extLst>
           </p:cNvPr>
@@ -863,7 +863,7 @@
           <a:bodyPr/>
           <a:lstStyle/>
           <a:p>
-            <a:fld id="{1E2958D6-7BA5-43D1-8E71-6918D76CD7C0}" type="datetimeFigureOut">
+            <a:fld id="{DCE360E9-0FB8-400D-AC15-8242C30AE4EE}" type="datetimeFigureOut">
               <a:rPr lang="de-DE" smtClean="0"/>
               <a:t>08.10.2026</a:t>
             </a:fld>
@@ -876,7 +876,7 @@
           <p:cNvPr id="5" name="Fußzeilenplatzhalter 4">
             <a:extLst>
               <a:ext uri="{FF2B5EF4-FFF2-40B4-BE49-F238E27FC236}">
-                <a16:creationId xmlns:a16="http://schemas.microsoft.com/office/drawing/2014/main" id="{129FA82E-416F-5B13-3C70-964847FB3FD1}"/>
+                <a16:creationId xmlns:a16="http://schemas.microsoft.com/office/drawing/2014/main" id="{6B66FF72-F58D-2154-7748-6C549854E7E6}"/>
               </a:ext>
             </a:extLst>
           </p:cNvPr>
@@ -901,7 +901,7 @@
           <p:cNvPr id="6" name="Foliennummernplatzhalter 5">
             <a:extLst>
               <a:ext uri="{FF2B5EF4-FFF2-40B4-BE49-F238E27FC236}">
-                <a16:creationId xmlns:a16="http://schemas.microsoft.com/office/drawing/2014/main" id="{E5B2A676-60A5-CF6D-D409-53C4CA6C9517}"/>
+                <a16:creationId xmlns:a16="http://schemas.microsoft.com/office/drawing/2014/main" id="{BB2695C9-8E00-A83E-39A6-0197C3C6BB71}"/>
               </a:ext>
             </a:extLst>
           </p:cNvPr>
@@ -917,7 +917,7 @@
           <a:bodyPr/>
           <a:lstStyle/>
           <a:p>
-            <a:fld id="{2CF23A79-0A54-4736-B307-85B70C860758}" type="slidenum">
+            <a:fld id="{BD06C979-E34A-47C6-BB4C-39A0B120C4F2}" type="slidenum">
               <a:rPr lang="de-DE" smtClean="0"/>
               <a:t>‹Nr.›</a:t>
             </a:fld>
@@ -928,7 +928,7 @@
     </p:spTree>
     <p:extLst>
       <p:ext uri="{BB962C8B-B14F-4D97-AF65-F5344CB8AC3E}">
-        <p14:creationId xmlns:p14="http://schemas.microsoft.com/office/powerpoint/2010/main" val="3224871868"/>
+        <p14:creationId xmlns:p14="http://schemas.microsoft.com/office/powerpoint/2010/main" val="4289787747"/>
       </p:ext>
     </p:extLst>
   </p:cSld>
@@ -960,7 +960,7 @@
           <p:cNvPr id="2" name="Titel 1">
             <a:extLst>
               <a:ext uri="{FF2B5EF4-FFF2-40B4-BE49-F238E27FC236}">
-                <a16:creationId xmlns:a16="http://schemas.microsoft.com/office/drawing/2014/main" id="{3380B6AF-E782-3F7B-9A55-4A80F0C2F895}"/>
+                <a16:creationId xmlns:a16="http://schemas.microsoft.com/office/drawing/2014/main" id="{C02F56B3-0993-1A79-0E75-A080D933F46B}"/>
               </a:ext>
             </a:extLst>
           </p:cNvPr>
@@ -997,7 +997,7 @@
           <p:cNvPr id="3" name="Textplatzhalter 2">
             <a:extLst>
               <a:ext uri="{FF2B5EF4-FFF2-40B4-BE49-F238E27FC236}">
-                <a16:creationId xmlns:a16="http://schemas.microsoft.com/office/drawing/2014/main" id="{CD1AF36D-6FF6-C5D5-A97B-7AD1E58D138C}"/>
+                <a16:creationId xmlns:a16="http://schemas.microsoft.com/office/drawing/2014/main" id="{73972478-261C-3ED4-06F7-AC0047F71E13}"/>
               </a:ext>
             </a:extLst>
           </p:cNvPr>
@@ -1122,7 +1122,7 @@
           <p:cNvPr id="4" name="Datumsplatzhalter 3">
             <a:extLst>
               <a:ext uri="{FF2B5EF4-FFF2-40B4-BE49-F238E27FC236}">
-                <a16:creationId xmlns:a16="http://schemas.microsoft.com/office/drawing/2014/main" id="{B6A3F1BC-EE8B-A992-A903-C8948C226F51}"/>
+                <a16:creationId xmlns:a16="http://schemas.microsoft.com/office/drawing/2014/main" id="{4BC924A1-F8F6-EA85-A01E-C05E02651FB2}"/>
               </a:ext>
             </a:extLst>
           </p:cNvPr>
@@ -1138,7 +1138,7 @@
           <a:bodyPr/>
           <a:lstStyle/>
           <a:p>
-            <a:fld id="{1E2958D6-7BA5-43D1-8E71-6918D76CD7C0}" type="datetimeFigureOut">
+            <a:fld id="{DCE360E9-0FB8-400D-AC15-8242C30AE4EE}" type="datetimeFigureOut">
               <a:rPr lang="de-DE" smtClean="0"/>
               <a:t>08.10.2026</a:t>
             </a:fld>
@@ -1151,7 +1151,7 @@
           <p:cNvPr id="5" name="Fußzeilenplatzhalter 4">
             <a:extLst>
               <a:ext uri="{FF2B5EF4-FFF2-40B4-BE49-F238E27FC236}">
-                <a16:creationId xmlns:a16="http://schemas.microsoft.com/office/drawing/2014/main" id="{67305A3B-819E-5DB6-1EED-6E60EC01B850}"/>
+                <a16:creationId xmlns:a16="http://schemas.microsoft.com/office/drawing/2014/main" id="{F2B109AA-0544-EE3E-B3DB-04B943D43B09}"/>
               </a:ext>
             </a:extLst>
           </p:cNvPr>
@@ -1176,7 +1176,7 @@
           <p:cNvPr id="6" name="Foliennummernplatzhalter 5">
             <a:extLst>
               <a:ext uri="{FF2B5EF4-FFF2-40B4-BE49-F238E27FC236}">
-                <a16:creationId xmlns:a16="http://schemas.microsoft.com/office/drawing/2014/main" id="{59C6AF27-2832-1811-6BE6-9BB4260489D7}"/>
+                <a16:creationId xmlns:a16="http://schemas.microsoft.com/office/drawing/2014/main" id="{3AEF0AF4-3B32-F38A-FF8E-52670D08F0CE}"/>
               </a:ext>
             </a:extLst>
           </p:cNvPr>
@@ -1192,7 +1192,7 @@
           <a:bodyPr/>
           <a:lstStyle/>
           <a:p>
-            <a:fld id="{2CF23A79-0A54-4736-B307-85B70C860758}" type="slidenum">
+            <a:fld id="{BD06C979-E34A-47C6-BB4C-39A0B120C4F2}" type="slidenum">
               <a:rPr lang="de-DE" smtClean="0"/>
               <a:t>‹Nr.›</a:t>
             </a:fld>
@@ -1203,7 +1203,7 @@
     </p:spTree>
     <p:extLst>
       <p:ext uri="{BB962C8B-B14F-4D97-AF65-F5344CB8AC3E}">
-        <p14:creationId xmlns:p14="http://schemas.microsoft.com/office/powerpoint/2010/main" val="2392886534"/>
+        <p14:creationId xmlns:p14="http://schemas.microsoft.com/office/powerpoint/2010/main" val="3756014891"/>
       </p:ext>
     </p:extLst>
   </p:cSld>
@@ -1235,7 +1235,7 @@
           <p:cNvPr id="2" name="Titel 1">
             <a:extLst>
               <a:ext uri="{FF2B5EF4-FFF2-40B4-BE49-F238E27FC236}">
-                <a16:creationId xmlns:a16="http://schemas.microsoft.com/office/drawing/2014/main" id="{BCDA2D7D-8382-A624-1CEE-021BCC0632C0}"/>
+                <a16:creationId xmlns:a16="http://schemas.microsoft.com/office/drawing/2014/main" id="{EB7852FA-92AC-F316-8E86-A24A40CA5D3C}"/>
               </a:ext>
             </a:extLst>
           </p:cNvPr>
@@ -1263,7 +1263,7 @@
           <p:cNvPr id="3" name="Inhaltsplatzhalter 2">
             <a:extLst>
               <a:ext uri="{FF2B5EF4-FFF2-40B4-BE49-F238E27FC236}">
-                <a16:creationId xmlns:a16="http://schemas.microsoft.com/office/drawing/2014/main" id="{FA2E0F73-55FD-5798-B2B2-3C3204E95220}"/>
+                <a16:creationId xmlns:a16="http://schemas.microsoft.com/office/drawing/2014/main" id="{41B0AE6A-EDFE-A42A-2E95-E34902E7BF4D}"/>
               </a:ext>
             </a:extLst>
           </p:cNvPr>
@@ -1325,7 +1325,7 @@
           <p:cNvPr id="4" name="Inhaltsplatzhalter 3">
             <a:extLst>
               <a:ext uri="{FF2B5EF4-FFF2-40B4-BE49-F238E27FC236}">
-                <a16:creationId xmlns:a16="http://schemas.microsoft.com/office/drawing/2014/main" id="{6C3FC6DA-C8C0-3F46-B77F-D70AC744DDBD}"/>
+                <a16:creationId xmlns:a16="http://schemas.microsoft.com/office/drawing/2014/main" id="{CB108109-1C44-64E6-2A5C-13E6FD061D4D}"/>
               </a:ext>
             </a:extLst>
           </p:cNvPr>
@@ -1387,7 +1387,7 @@
           <p:cNvPr id="5" name="Datumsplatzhalter 4">
             <a:extLst>
               <a:ext uri="{FF2B5EF4-FFF2-40B4-BE49-F238E27FC236}">
-                <a16:creationId xmlns:a16="http://schemas.microsoft.com/office/drawing/2014/main" id="{C8A93D01-2537-2943-F427-5CEFEA86BDBA}"/>
+                <a16:creationId xmlns:a16="http://schemas.microsoft.com/office/drawing/2014/main" id="{9A0F7D7C-6F3F-5121-FF93-C521A3B73DC3}"/>
               </a:ext>
             </a:extLst>
           </p:cNvPr>
@@ -1403,7 +1403,7 @@
           <a:bodyPr/>
           <a:lstStyle/>
           <a:p>
-            <a:fld id="{1E2958D6-7BA5-43D1-8E71-6918D76CD7C0}" type="datetimeFigureOut">
+            <a:fld id="{DCE360E9-0FB8-400D-AC15-8242C30AE4EE}" type="datetimeFigureOut">
               <a:rPr lang="de-DE" smtClean="0"/>
               <a:t>08.10.2026</a:t>
             </a:fld>
@@ -1416,7 +1416,7 @@
           <p:cNvPr id="6" name="Fußzeilenplatzhalter 5">
             <a:extLst>
               <a:ext uri="{FF2B5EF4-FFF2-40B4-BE49-F238E27FC236}">
-                <a16:creationId xmlns:a16="http://schemas.microsoft.com/office/drawing/2014/main" id="{00D62BD4-D39F-D954-D0FF-B1836EEEE144}"/>
+                <a16:creationId xmlns:a16="http://schemas.microsoft.com/office/drawing/2014/main" id="{C86A9923-47CF-EEF9-C267-83CB18EF7C2F}"/>
               </a:ext>
             </a:extLst>
           </p:cNvPr>
@@ -1441,7 +1441,7 @@
           <p:cNvPr id="7" name="Foliennummernplatzhalter 6">
             <a:extLst>
               <a:ext uri="{FF2B5EF4-FFF2-40B4-BE49-F238E27FC236}">
-                <a16:creationId xmlns:a16="http://schemas.microsoft.com/office/drawing/2014/main" id="{C0949ABC-58CD-6F60-E0AF-9A41DF50A949}"/>
+                <a16:creationId xmlns:a16="http://schemas.microsoft.com/office/drawing/2014/main" id="{A8759221-29A0-C01E-7F67-46AB2C3CD3A9}"/>
               </a:ext>
             </a:extLst>
           </p:cNvPr>
@@ -1457,7 +1457,7 @@
           <a:bodyPr/>
           <a:lstStyle/>
           <a:p>
-            <a:fld id="{2CF23A79-0A54-4736-B307-85B70C860758}" type="slidenum">
+            <a:fld id="{BD06C979-E34A-47C6-BB4C-39A0B120C4F2}" type="slidenum">
               <a:rPr lang="de-DE" smtClean="0"/>
               <a:t>‹Nr.›</a:t>
             </a:fld>
@@ -1468,7 +1468,7 @@
     </p:spTree>
     <p:extLst>
       <p:ext uri="{BB962C8B-B14F-4D97-AF65-F5344CB8AC3E}">
-        <p14:creationId xmlns:p14="http://schemas.microsoft.com/office/powerpoint/2010/main" val="2444057732"/>
+        <p14:creationId xmlns:p14="http://schemas.microsoft.com/office/powerpoint/2010/main" val="2568584122"/>
       </p:ext>
     </p:extLst>
   </p:cSld>
@@ -1500,7 +1500,7 @@
           <p:cNvPr id="2" name="Titel 1">
             <a:extLst>
               <a:ext uri="{FF2B5EF4-FFF2-40B4-BE49-F238E27FC236}">
-                <a16:creationId xmlns:a16="http://schemas.microsoft.com/office/drawing/2014/main" id="{46863599-8C3F-80BE-950B-B4DA0AD2C635}"/>
+                <a16:creationId xmlns:a16="http://schemas.microsoft.com/office/drawing/2014/main" id="{B9D1E7EB-5432-3FAE-2174-904FB89ADF86}"/>
               </a:ext>
             </a:extLst>
           </p:cNvPr>
@@ -1533,7 +1533,7 @@
           <p:cNvPr id="3" name="Textplatzhalter 2">
             <a:extLst>
               <a:ext uri="{FF2B5EF4-FFF2-40B4-BE49-F238E27FC236}">
-                <a16:creationId xmlns:a16="http://schemas.microsoft.com/office/drawing/2014/main" id="{5A39CE02-7E2F-E502-23E6-97F3F8F9649D}"/>
+                <a16:creationId xmlns:a16="http://schemas.microsoft.com/office/drawing/2014/main" id="{C2F06E25-261F-E36E-E1C6-E1314163BF32}"/>
               </a:ext>
             </a:extLst>
           </p:cNvPr>
@@ -1604,7 +1604,7 @@
           <p:cNvPr id="4" name="Inhaltsplatzhalter 3">
             <a:extLst>
               <a:ext uri="{FF2B5EF4-FFF2-40B4-BE49-F238E27FC236}">
-                <a16:creationId xmlns:a16="http://schemas.microsoft.com/office/drawing/2014/main" id="{29CB4F2A-ED5C-BF2C-5955-80FCFE744D92}"/>
+                <a16:creationId xmlns:a16="http://schemas.microsoft.com/office/drawing/2014/main" id="{B5DFB099-B244-B99D-4A5F-AF9DC9845D0C}"/>
               </a:ext>
             </a:extLst>
           </p:cNvPr>
@@ -1666,7 +1666,7 @@
           <p:cNvPr id="5" name="Textplatzhalter 4">
             <a:extLst>
               <a:ext uri="{FF2B5EF4-FFF2-40B4-BE49-F238E27FC236}">
-                <a16:creationId xmlns:a16="http://schemas.microsoft.com/office/drawing/2014/main" id="{02B706AC-743A-FF00-7791-E79F99A94E46}"/>
+                <a16:creationId xmlns:a16="http://schemas.microsoft.com/office/drawing/2014/main" id="{94002002-EFC7-4653-3B80-C2AEF62D1921}"/>
               </a:ext>
             </a:extLst>
           </p:cNvPr>
@@ -1737,7 +1737,7 @@
           <p:cNvPr id="6" name="Inhaltsplatzhalter 5">
             <a:extLst>
               <a:ext uri="{FF2B5EF4-FFF2-40B4-BE49-F238E27FC236}">
-                <a16:creationId xmlns:a16="http://schemas.microsoft.com/office/drawing/2014/main" id="{BC7010AF-37F8-FA52-3468-9BEE43743099}"/>
+                <a16:creationId xmlns:a16="http://schemas.microsoft.com/office/drawing/2014/main" id="{83164BEC-5582-52D3-A8FE-912DCE14E510}"/>
               </a:ext>
             </a:extLst>
           </p:cNvPr>
@@ -1799,7 +1799,7 @@
           <p:cNvPr id="7" name="Datumsplatzhalter 6">
             <a:extLst>
               <a:ext uri="{FF2B5EF4-FFF2-40B4-BE49-F238E27FC236}">
-                <a16:creationId xmlns:a16="http://schemas.microsoft.com/office/drawing/2014/main" id="{492A4648-2F22-1871-F4F0-A47D6D185577}"/>
+                <a16:creationId xmlns:a16="http://schemas.microsoft.com/office/drawing/2014/main" id="{F1A3BED8-81F8-3B65-375C-A589C9D56663}"/>
               </a:ext>
             </a:extLst>
           </p:cNvPr>
@@ -1815,7 +1815,7 @@
           <a:bodyPr/>
           <a:lstStyle/>
           <a:p>
-            <a:fld id="{1E2958D6-7BA5-43D1-8E71-6918D76CD7C0}" type="datetimeFigureOut">
+            <a:fld id="{DCE360E9-0FB8-400D-AC15-8242C30AE4EE}" type="datetimeFigureOut">
               <a:rPr lang="de-DE" smtClean="0"/>
               <a:t>08.10.2026</a:t>
             </a:fld>
@@ -1828,7 +1828,7 @@
           <p:cNvPr id="8" name="Fußzeilenplatzhalter 7">
             <a:extLst>
               <a:ext uri="{FF2B5EF4-FFF2-40B4-BE49-F238E27FC236}">
-                <a16:creationId xmlns:a16="http://schemas.microsoft.com/office/drawing/2014/main" id="{955C6F3A-BB84-DDE0-FCC2-92F77285D11D}"/>
+                <a16:creationId xmlns:a16="http://schemas.microsoft.com/office/drawing/2014/main" id="{30243EFA-D728-9CB8-6C91-896C4F834E82}"/>
               </a:ext>
             </a:extLst>
           </p:cNvPr>
@@ -1853,7 +1853,7 @@
           <p:cNvPr id="9" name="Foliennummernplatzhalter 8">
             <a:extLst>
               <a:ext uri="{FF2B5EF4-FFF2-40B4-BE49-F238E27FC236}">
-                <a16:creationId xmlns:a16="http://schemas.microsoft.com/office/drawing/2014/main" id="{500B8FE0-E2B6-5C84-CF93-6294BCD2CDB1}"/>
+                <a16:creationId xmlns:a16="http://schemas.microsoft.com/office/drawing/2014/main" id="{701B8414-BF67-7648-C58E-866DE8C7C3DC}"/>
               </a:ext>
             </a:extLst>
           </p:cNvPr>
@@ -1869,7 +1869,7 @@
           <a:bodyPr/>
           <a:lstStyle/>
           <a:p>
-            <a:fld id="{2CF23A79-0A54-4736-B307-85B70C860758}" type="slidenum">
+            <a:fld id="{BD06C979-E34A-47C6-BB4C-39A0B120C4F2}" type="slidenum">
               <a:rPr lang="de-DE" smtClean="0"/>
               <a:t>‹Nr.›</a:t>
             </a:fld>
@@ -1880,7 +1880,7 @@
     </p:spTree>
     <p:extLst>
       <p:ext uri="{BB962C8B-B14F-4D97-AF65-F5344CB8AC3E}">
-        <p14:creationId xmlns:p14="http://schemas.microsoft.com/office/powerpoint/2010/main" val="1239682948"/>
+        <p14:creationId xmlns:p14="http://schemas.microsoft.com/office/powerpoint/2010/main" val="289897917"/>
       </p:ext>
     </p:extLst>
   </p:cSld>
@@ -1912,7 +1912,7 @@
           <p:cNvPr id="2" name="Titel 1">
             <a:extLst>
               <a:ext uri="{FF2B5EF4-FFF2-40B4-BE49-F238E27FC236}">
-                <a16:creationId xmlns:a16="http://schemas.microsoft.com/office/drawing/2014/main" id="{C0EE8C4B-3C19-52DA-E1A1-9B278B6A01B3}"/>
+                <a16:creationId xmlns:a16="http://schemas.microsoft.com/office/drawing/2014/main" id="{51AD5E8F-00EC-B0E4-65D4-A8C8D30E46A2}"/>
               </a:ext>
             </a:extLst>
           </p:cNvPr>
@@ -1940,7 +1940,7 @@
           <p:cNvPr id="3" name="Datumsplatzhalter 2">
             <a:extLst>
               <a:ext uri="{FF2B5EF4-FFF2-40B4-BE49-F238E27FC236}">
-                <a16:creationId xmlns:a16="http://schemas.microsoft.com/office/drawing/2014/main" id="{DE5C7E03-3294-6DE5-9A33-57B836CCDB27}"/>
+                <a16:creationId xmlns:a16="http://schemas.microsoft.com/office/drawing/2014/main" id="{3EA5B620-0DE3-E680-3537-49C1633F667B}"/>
               </a:ext>
             </a:extLst>
           </p:cNvPr>
@@ -1956,7 +1956,7 @@
           <a:bodyPr/>
           <a:lstStyle/>
           <a:p>
-            <a:fld id="{1E2958D6-7BA5-43D1-8E71-6918D76CD7C0}" type="datetimeFigureOut">
+            <a:fld id="{DCE360E9-0FB8-400D-AC15-8242C30AE4EE}" type="datetimeFigureOut">
               <a:rPr lang="de-DE" smtClean="0"/>
               <a:t>08.10.2026</a:t>
             </a:fld>
@@ -1969,7 +1969,7 @@
           <p:cNvPr id="4" name="Fußzeilenplatzhalter 3">
             <a:extLst>
               <a:ext uri="{FF2B5EF4-FFF2-40B4-BE49-F238E27FC236}">
-                <a16:creationId xmlns:a16="http://schemas.microsoft.com/office/drawing/2014/main" id="{58E1494C-8AA6-55FF-47F4-97D957B76635}"/>
+                <a16:creationId xmlns:a16="http://schemas.microsoft.com/office/drawing/2014/main" id="{75501F5D-9BE4-B7F5-8995-9A04EB37F910}"/>
               </a:ext>
             </a:extLst>
           </p:cNvPr>
@@ -1994,7 +1994,7 @@
           <p:cNvPr id="5" name="Foliennummernplatzhalter 4">
             <a:extLst>
               <a:ext uri="{FF2B5EF4-FFF2-40B4-BE49-F238E27FC236}">
-                <a16:creationId xmlns:a16="http://schemas.microsoft.com/office/drawing/2014/main" id="{0D3A0C1B-D94A-9673-6062-0937756104FC}"/>
+                <a16:creationId xmlns:a16="http://schemas.microsoft.com/office/drawing/2014/main" id="{B87165B3-FE6B-6FC2-96B5-F28337A70CF7}"/>
               </a:ext>
             </a:extLst>
           </p:cNvPr>
@@ -2010,7 +2010,7 @@
           <a:bodyPr/>
           <a:lstStyle/>
           <a:p>
-            <a:fld id="{2CF23A79-0A54-4736-B307-85B70C860758}" type="slidenum">
+            <a:fld id="{BD06C979-E34A-47C6-BB4C-39A0B120C4F2}" type="slidenum">
               <a:rPr lang="de-DE" smtClean="0"/>
               <a:t>‹Nr.›</a:t>
             </a:fld>
@@ -2021,7 +2021,7 @@
     </p:spTree>
     <p:extLst>
       <p:ext uri="{BB962C8B-B14F-4D97-AF65-F5344CB8AC3E}">
-        <p14:creationId xmlns:p14="http://schemas.microsoft.com/office/powerpoint/2010/main" val="1858600872"/>
+        <p14:creationId xmlns:p14="http://schemas.microsoft.com/office/powerpoint/2010/main" val="3036679918"/>
       </p:ext>
     </p:extLst>
   </p:cSld>
@@ -2053,7 +2053,7 @@
           <p:cNvPr id="2" name="Datumsplatzhalter 1">
             <a:extLst>
               <a:ext uri="{FF2B5EF4-FFF2-40B4-BE49-F238E27FC236}">
-                <a16:creationId xmlns:a16="http://schemas.microsoft.com/office/drawing/2014/main" id="{A27D37AE-6C55-0E94-B490-55C2621E0F03}"/>
+                <a16:creationId xmlns:a16="http://schemas.microsoft.com/office/drawing/2014/main" id="{70D9B5FD-F07A-AD09-A534-FCACBAC27E67}"/>
               </a:ext>
             </a:extLst>
           </p:cNvPr>
@@ -2069,7 +2069,7 @@
           <a:bodyPr/>
           <a:lstStyle/>
           <a:p>
-            <a:fld id="{1E2958D6-7BA5-43D1-8E71-6918D76CD7C0}" type="datetimeFigureOut">
+            <a:fld id="{DCE360E9-0FB8-400D-AC15-8242C30AE4EE}" type="datetimeFigureOut">
               <a:rPr lang="de-DE" smtClean="0"/>
               <a:t>08.10.2026</a:t>
             </a:fld>
@@ -2082,7 +2082,7 @@
           <p:cNvPr id="3" name="Fußzeilenplatzhalter 2">
             <a:extLst>
               <a:ext uri="{FF2B5EF4-FFF2-40B4-BE49-F238E27FC236}">
-                <a16:creationId xmlns:a16="http://schemas.microsoft.com/office/drawing/2014/main" id="{AA6D7B72-9343-4B23-F669-C3B140B23361}"/>
+                <a16:creationId xmlns:a16="http://schemas.microsoft.com/office/drawing/2014/main" id="{71F983E8-DB43-71D7-F8CC-BC9A00DB7126}"/>
               </a:ext>
             </a:extLst>
           </p:cNvPr>
@@ -2107,7 +2107,7 @@
           <p:cNvPr id="4" name="Foliennummernplatzhalter 3">
             <a:extLst>
               <a:ext uri="{FF2B5EF4-FFF2-40B4-BE49-F238E27FC236}">
-                <a16:creationId xmlns:a16="http://schemas.microsoft.com/office/drawing/2014/main" id="{AAB1D31D-F775-9B05-2BE4-8C7A2E6C68FC}"/>
+                <a16:creationId xmlns:a16="http://schemas.microsoft.com/office/drawing/2014/main" id="{4EFDBC0B-04A1-2771-4FDE-729A07FEE949}"/>
               </a:ext>
             </a:extLst>
           </p:cNvPr>
@@ -2123,7 +2123,7 @@
           <a:bodyPr/>
           <a:lstStyle/>
           <a:p>
-            <a:fld id="{2CF23A79-0A54-4736-B307-85B70C860758}" type="slidenum">
+            <a:fld id="{BD06C979-E34A-47C6-BB4C-39A0B120C4F2}" type="slidenum">
               <a:rPr lang="de-DE" smtClean="0"/>
               <a:t>‹Nr.›</a:t>
             </a:fld>
@@ -2134,7 +2134,7 @@
     </p:spTree>
     <p:extLst>
       <p:ext uri="{BB962C8B-B14F-4D97-AF65-F5344CB8AC3E}">
-        <p14:creationId xmlns:p14="http://schemas.microsoft.com/office/powerpoint/2010/main" val="359194760"/>
+        <p14:creationId xmlns:p14="http://schemas.microsoft.com/office/powerpoint/2010/main" val="3728670547"/>
       </p:ext>
     </p:extLst>
   </p:cSld>
@@ -2166,7 +2166,7 @@
           <p:cNvPr id="2" name="Titel 1">
             <a:extLst>
               <a:ext uri="{FF2B5EF4-FFF2-40B4-BE49-F238E27FC236}">
-                <a16:creationId xmlns:a16="http://schemas.microsoft.com/office/drawing/2014/main" id="{C24B95D5-0525-FDAB-2A51-B7DFE617123F}"/>
+                <a16:creationId xmlns:a16="http://schemas.microsoft.com/office/drawing/2014/main" id="{4AAAFF21-B16C-BCD4-BB16-673A1E5EEAA5}"/>
               </a:ext>
             </a:extLst>
           </p:cNvPr>
@@ -2203,7 +2203,7 @@
           <p:cNvPr id="3" name="Inhaltsplatzhalter 2">
             <a:extLst>
               <a:ext uri="{FF2B5EF4-FFF2-40B4-BE49-F238E27FC236}">
-                <a16:creationId xmlns:a16="http://schemas.microsoft.com/office/drawing/2014/main" id="{9D659338-9C66-B6BA-ED54-090A731F5402}"/>
+                <a16:creationId xmlns:a16="http://schemas.microsoft.com/office/drawing/2014/main" id="{85582968-38B0-DF5D-FCF8-20B70A81075B}"/>
               </a:ext>
             </a:extLst>
           </p:cNvPr>
@@ -2293,7 +2293,7 @@
           <p:cNvPr id="4" name="Textplatzhalter 3">
             <a:extLst>
               <a:ext uri="{FF2B5EF4-FFF2-40B4-BE49-F238E27FC236}">
-                <a16:creationId xmlns:a16="http://schemas.microsoft.com/office/drawing/2014/main" id="{6853DFBE-A59B-0F5D-BAA9-CDEF3C91D73B}"/>
+                <a16:creationId xmlns:a16="http://schemas.microsoft.com/office/drawing/2014/main" id="{DB811100-324B-C4BE-1E01-1421BE2640CC}"/>
               </a:ext>
             </a:extLst>
           </p:cNvPr>
@@ -2364,7 +2364,7 @@
           <p:cNvPr id="5" name="Datumsplatzhalter 4">
             <a:extLst>
               <a:ext uri="{FF2B5EF4-FFF2-40B4-BE49-F238E27FC236}">
-                <a16:creationId xmlns:a16="http://schemas.microsoft.com/office/drawing/2014/main" id="{620917F4-5136-0F7F-7DC0-8CEF55840AF8}"/>
+                <a16:creationId xmlns:a16="http://schemas.microsoft.com/office/drawing/2014/main" id="{255EBF4C-AFF8-2429-F5C6-0A4E7CB2A333}"/>
               </a:ext>
             </a:extLst>
           </p:cNvPr>
@@ -2380,7 +2380,7 @@
           <a:bodyPr/>
           <a:lstStyle/>
           <a:p>
-            <a:fld id="{1E2958D6-7BA5-43D1-8E71-6918D76CD7C0}" type="datetimeFigureOut">
+            <a:fld id="{DCE360E9-0FB8-400D-AC15-8242C30AE4EE}" type="datetimeFigureOut">
               <a:rPr lang="de-DE" smtClean="0"/>
               <a:t>08.10.2026</a:t>
             </a:fld>
@@ -2393,7 +2393,7 @@
           <p:cNvPr id="6" name="Fußzeilenplatzhalter 5">
             <a:extLst>
               <a:ext uri="{FF2B5EF4-FFF2-40B4-BE49-F238E27FC236}">
-                <a16:creationId xmlns:a16="http://schemas.microsoft.com/office/drawing/2014/main" id="{8A96DEE6-696F-501D-A683-94EE6EEC922B}"/>
+                <a16:creationId xmlns:a16="http://schemas.microsoft.com/office/drawing/2014/main" id="{2B81A7F2-B65B-A487-78B9-5A63BD5AAF4C}"/>
               </a:ext>
             </a:extLst>
           </p:cNvPr>
@@ -2418,7 +2418,7 @@
           <p:cNvPr id="7" name="Foliennummernplatzhalter 6">
             <a:extLst>
               <a:ext uri="{FF2B5EF4-FFF2-40B4-BE49-F238E27FC236}">
-                <a16:creationId xmlns:a16="http://schemas.microsoft.com/office/drawing/2014/main" id="{083E9852-73CA-10B4-5CA2-2F07BE52561C}"/>
+                <a16:creationId xmlns:a16="http://schemas.microsoft.com/office/drawing/2014/main" id="{F837510E-8E18-E7A6-745E-14B48F2D9A2B}"/>
               </a:ext>
             </a:extLst>
           </p:cNvPr>
@@ -2434,7 +2434,7 @@
           <a:bodyPr/>
           <a:lstStyle/>
           <a:p>
-            <a:fld id="{2CF23A79-0A54-4736-B307-85B70C860758}" type="slidenum">
+            <a:fld id="{BD06C979-E34A-47C6-BB4C-39A0B120C4F2}" type="slidenum">
               <a:rPr lang="de-DE" smtClean="0"/>
               <a:t>‹Nr.›</a:t>
             </a:fld>
@@ -2445,7 +2445,7 @@
     </p:spTree>
     <p:extLst>
       <p:ext uri="{BB962C8B-B14F-4D97-AF65-F5344CB8AC3E}">
-        <p14:creationId xmlns:p14="http://schemas.microsoft.com/office/powerpoint/2010/main" val="1098098714"/>
+        <p14:creationId xmlns:p14="http://schemas.microsoft.com/office/powerpoint/2010/main" val="142176752"/>
       </p:ext>
     </p:extLst>
   </p:cSld>
@@ -2477,7 +2477,7 @@
           <p:cNvPr id="2" name="Titel 1">
             <a:extLst>
               <a:ext uri="{FF2B5EF4-FFF2-40B4-BE49-F238E27FC236}">
-                <a16:creationId xmlns:a16="http://schemas.microsoft.com/office/drawing/2014/main" id="{52A1EE47-FA1F-2CA0-F938-EC4E3556227B}"/>
+                <a16:creationId xmlns:a16="http://schemas.microsoft.com/office/drawing/2014/main" id="{25EB82A6-BE17-B296-D17D-B66A06520981}"/>
               </a:ext>
             </a:extLst>
           </p:cNvPr>
@@ -2514,7 +2514,7 @@
           <p:cNvPr id="3" name="Bildplatzhalter 2">
             <a:extLst>
               <a:ext uri="{FF2B5EF4-FFF2-40B4-BE49-F238E27FC236}">
-                <a16:creationId xmlns:a16="http://schemas.microsoft.com/office/drawing/2014/main" id="{09612D4B-E964-7C52-00D9-87D45B93AB4C}"/>
+                <a16:creationId xmlns:a16="http://schemas.microsoft.com/office/drawing/2014/main" id="{2F591E62-24A6-963E-6804-A111028C17C0}"/>
               </a:ext>
             </a:extLst>
           </p:cNvPr>
@@ -2581,7 +2581,7 @@
           <p:cNvPr id="4" name="Textplatzhalter 3">
             <a:extLst>
               <a:ext uri="{FF2B5EF4-FFF2-40B4-BE49-F238E27FC236}">
-                <a16:creationId xmlns:a16="http://schemas.microsoft.com/office/drawing/2014/main" id="{7A0C0A4F-1859-630B-6765-3ECAF74C1C0B}"/>
+                <a16:creationId xmlns:a16="http://schemas.microsoft.com/office/drawing/2014/main" id="{C5A19A89-5A59-3217-E551-E55D7637D86D}"/>
               </a:ext>
             </a:extLst>
           </p:cNvPr>
@@ -2652,7 +2652,7 @@
           <p:cNvPr id="5" name="Datumsplatzhalter 4">
             <a:extLst>
               <a:ext uri="{FF2B5EF4-FFF2-40B4-BE49-F238E27FC236}">
-                <a16:creationId xmlns:a16="http://schemas.microsoft.com/office/drawing/2014/main" id="{1C974C1E-9379-53FF-A251-E048E0C00CCC}"/>
+                <a16:creationId xmlns:a16="http://schemas.microsoft.com/office/drawing/2014/main" id="{32ED56A2-5D7B-15EE-118C-C2892FDC7A38}"/>
               </a:ext>
             </a:extLst>
           </p:cNvPr>
@@ -2668,7 +2668,7 @@
           <a:bodyPr/>
           <a:lstStyle/>
           <a:p>
-            <a:fld id="{1E2958D6-7BA5-43D1-8E71-6918D76CD7C0}" type="datetimeFigureOut">
+            <a:fld id="{DCE360E9-0FB8-400D-AC15-8242C30AE4EE}" type="datetimeFigureOut">
               <a:rPr lang="de-DE" smtClean="0"/>
               <a:t>08.10.2026</a:t>
             </a:fld>
@@ -2681,7 +2681,7 @@
           <p:cNvPr id="6" name="Fußzeilenplatzhalter 5">
             <a:extLst>
               <a:ext uri="{FF2B5EF4-FFF2-40B4-BE49-F238E27FC236}">
-                <a16:creationId xmlns:a16="http://schemas.microsoft.com/office/drawing/2014/main" id="{2E3E3B54-A1E8-C119-7B32-F35885A7A4EA}"/>
+                <a16:creationId xmlns:a16="http://schemas.microsoft.com/office/drawing/2014/main" id="{B488970A-6270-6982-1DC2-F2F340FC49AC}"/>
               </a:ext>
             </a:extLst>
           </p:cNvPr>
@@ -2706,7 +2706,7 @@
           <p:cNvPr id="7" name="Foliennummernplatzhalter 6">
             <a:extLst>
               <a:ext uri="{FF2B5EF4-FFF2-40B4-BE49-F238E27FC236}">
-                <a16:creationId xmlns:a16="http://schemas.microsoft.com/office/drawing/2014/main" id="{75A620C2-4E0C-C037-BFE0-87C0294D48BF}"/>
+                <a16:creationId xmlns:a16="http://schemas.microsoft.com/office/drawing/2014/main" id="{14CB5EA9-51F8-C560-3DC7-CC464585301A}"/>
               </a:ext>
             </a:extLst>
           </p:cNvPr>
@@ -2722,7 +2722,7 @@
           <a:bodyPr/>
           <a:lstStyle/>
           <a:p>
-            <a:fld id="{2CF23A79-0A54-4736-B307-85B70C860758}" type="slidenum">
+            <a:fld id="{BD06C979-E34A-47C6-BB4C-39A0B120C4F2}" type="slidenum">
               <a:rPr lang="de-DE" smtClean="0"/>
               <a:t>‹Nr.›</a:t>
             </a:fld>
@@ -2733,7 +2733,7 @@
     </p:spTree>
     <p:extLst>
       <p:ext uri="{BB962C8B-B14F-4D97-AF65-F5344CB8AC3E}">
-        <p14:creationId xmlns:p14="http://schemas.microsoft.com/office/powerpoint/2010/main" val="2026448844"/>
+        <p14:creationId xmlns:p14="http://schemas.microsoft.com/office/powerpoint/2010/main" val="2975917273"/>
       </p:ext>
     </p:extLst>
   </p:cSld>
@@ -2770,7 +2770,7 @@
           <p:cNvPr id="2" name="Titelplatzhalter 1">
             <a:extLst>
               <a:ext uri="{FF2B5EF4-FFF2-40B4-BE49-F238E27FC236}">
-                <a16:creationId xmlns:a16="http://schemas.microsoft.com/office/drawing/2014/main" id="{09771F46-07B8-2D44-59D6-4F3BCF7BDA12}"/>
+                <a16:creationId xmlns:a16="http://schemas.microsoft.com/office/drawing/2014/main" id="{565DE672-ECC3-7705-8D96-3989A22A9C04}"/>
               </a:ext>
             </a:extLst>
           </p:cNvPr>
@@ -2808,7 +2808,7 @@
           <p:cNvPr id="3" name="Textplatzhalter 2">
             <a:extLst>
               <a:ext uri="{FF2B5EF4-FFF2-40B4-BE49-F238E27FC236}">
-                <a16:creationId xmlns:a16="http://schemas.microsoft.com/office/drawing/2014/main" id="{2727C152-1497-473F-2BEF-A44BAD42D6AB}"/>
+                <a16:creationId xmlns:a16="http://schemas.microsoft.com/office/drawing/2014/main" id="{B93A9834-6DA0-42CC-99CC-6F63BBC3BF8F}"/>
               </a:ext>
             </a:extLst>
           </p:cNvPr>
@@ -2875,7 +2875,7 @@
           <p:cNvPr id="4" name="Datumsplatzhalter 3">
             <a:extLst>
               <a:ext uri="{FF2B5EF4-FFF2-40B4-BE49-F238E27FC236}">
-                <a16:creationId xmlns:a16="http://schemas.microsoft.com/office/drawing/2014/main" id="{DD5EEC77-3F08-DB49-7EA2-F87AFA20921A}"/>
+                <a16:creationId xmlns:a16="http://schemas.microsoft.com/office/drawing/2014/main" id="{7EF473A6-13F8-3A12-B979-0D88F0BAB131}"/>
               </a:ext>
             </a:extLst>
           </p:cNvPr>
@@ -2909,7 +2909,7 @@
             </a:lvl1pPr>
           </a:lstStyle>
           <a:p>
-            <a:fld id="{1E2958D6-7BA5-43D1-8E71-6918D76CD7C0}" type="datetimeFigureOut">
+            <a:fld id="{DCE360E9-0FB8-400D-AC15-8242C30AE4EE}" type="datetimeFigureOut">
               <a:rPr lang="de-DE" smtClean="0"/>
               <a:t>08.10.2026</a:t>
             </a:fld>
@@ -2922,7 +2922,7 @@
           <p:cNvPr id="5" name="Fußzeilenplatzhalter 4">
             <a:extLst>
               <a:ext uri="{FF2B5EF4-FFF2-40B4-BE49-F238E27FC236}">
-                <a16:creationId xmlns:a16="http://schemas.microsoft.com/office/drawing/2014/main" id="{A0A0CB9A-854D-7E47-6851-596FC7CE4E46}"/>
+                <a16:creationId xmlns:a16="http://schemas.microsoft.com/office/drawing/2014/main" id="{9F2BD7CE-FF2C-0ABA-AAB6-427B0A32A614}"/>
               </a:ext>
             </a:extLst>
           </p:cNvPr>
@@ -2965,7 +2965,7 @@
           <p:cNvPr id="6" name="Foliennummernplatzhalter 5">
             <a:extLst>
               <a:ext uri="{FF2B5EF4-FFF2-40B4-BE49-F238E27FC236}">
-                <a16:creationId xmlns:a16="http://schemas.microsoft.com/office/drawing/2014/main" id="{209ECD5C-4C17-FC65-08D1-CA6FE3995CF6}"/>
+                <a16:creationId xmlns:a16="http://schemas.microsoft.com/office/drawing/2014/main" id="{8A9DCD82-E145-FF98-E567-B3A525833D38}"/>
               </a:ext>
             </a:extLst>
           </p:cNvPr>
@@ -2999,7 +2999,7 @@
             </a:lvl1pPr>
           </a:lstStyle>
           <a:p>
-            <a:fld id="{2CF23A79-0A54-4736-B307-85B70C860758}" type="slidenum">
+            <a:fld id="{BD06C979-E34A-47C6-BB4C-39A0B120C4F2}" type="slidenum">
               <a:rPr lang="de-DE" smtClean="0"/>
               <a:t>‹Nr.›</a:t>
             </a:fld>
@@ -3010,7 +3010,7 @@
     </p:spTree>
     <p:extLst>
       <p:ext uri="{BB962C8B-B14F-4D97-AF65-F5344CB8AC3E}">
-        <p14:creationId xmlns:p14="http://schemas.microsoft.com/office/powerpoint/2010/main" val="1088674790"/>
+        <p14:creationId xmlns:p14="http://schemas.microsoft.com/office/powerpoint/2010/main" val="3321312344"/>
       </p:ext>
     </p:extLst>
   </p:cSld>
@@ -3333,7 +3333,7 @@
           <p:cNvPr id="2" name="AutoShape 1">
             <a:extLst>
               <a:ext uri="{FF2B5EF4-FFF2-40B4-BE49-F238E27FC236}">
-                <a16:creationId xmlns:a16="http://schemas.microsoft.com/office/drawing/2014/main" id="{E8F32928-D9C7-19C9-9DB2-C7523BEA22A3}"/>
+                <a16:creationId xmlns:a16="http://schemas.microsoft.com/office/drawing/2014/main" id="{64F2E390-9FD5-A23C-4A16-F8CC5FF88E5A}"/>
               </a:ext>
             </a:extLst>
           </p:cNvPr>
@@ -3379,7 +3379,7 @@
           <p:cNvPr id="3" name="AutoShape 2">
             <a:extLst>
               <a:ext uri="{FF2B5EF4-FFF2-40B4-BE49-F238E27FC236}">
-                <a16:creationId xmlns:a16="http://schemas.microsoft.com/office/drawing/2014/main" id="{0DB7D7EE-B4AE-D85C-1E3D-0B3AE121287C}"/>
+                <a16:creationId xmlns:a16="http://schemas.microsoft.com/office/drawing/2014/main" id="{56F3FAFE-5ACC-3161-24C3-E9E8A618979D}"/>
               </a:ext>
             </a:extLst>
           </p:cNvPr>
@@ -3425,7 +3425,7 @@
           <p:cNvPr id="4" name="AutoShape 3">
             <a:extLst>
               <a:ext uri="{FF2B5EF4-FFF2-40B4-BE49-F238E27FC236}">
-                <a16:creationId xmlns:a16="http://schemas.microsoft.com/office/drawing/2014/main" id="{C808513C-713B-D6D3-A901-343DC0376386}"/>
+                <a16:creationId xmlns:a16="http://schemas.microsoft.com/office/drawing/2014/main" id="{9FE8384B-ED33-24A6-3077-42A762AD1A3C}"/>
               </a:ext>
             </a:extLst>
           </p:cNvPr>
@@ -3471,7 +3471,7 @@
           <p:cNvPr id="5" name="AutoShape 4">
             <a:extLst>
               <a:ext uri="{FF2B5EF4-FFF2-40B4-BE49-F238E27FC236}">
-                <a16:creationId xmlns:a16="http://schemas.microsoft.com/office/drawing/2014/main" id="{6FEA5172-2871-5AD1-75CC-1EC033903EA6}"/>
+                <a16:creationId xmlns:a16="http://schemas.microsoft.com/office/drawing/2014/main" id="{84E0BF67-B93F-90A6-85BF-A2A818563BB6}"/>
               </a:ext>
             </a:extLst>
           </p:cNvPr>
@@ -3517,7 +3517,7 @@
           <p:cNvPr id="6" name="AutoShape 5">
             <a:extLst>
               <a:ext uri="{FF2B5EF4-FFF2-40B4-BE49-F238E27FC236}">
-                <a16:creationId xmlns:a16="http://schemas.microsoft.com/office/drawing/2014/main" id="{DECC41E8-056A-BF7C-1BA4-5E7663F4FDF3}"/>
+                <a16:creationId xmlns:a16="http://schemas.microsoft.com/office/drawing/2014/main" id="{26B8CA52-6179-D7D6-E73A-22A05465A39B}"/>
               </a:ext>
             </a:extLst>
           </p:cNvPr>
@@ -3563,7 +3563,7 @@
           <p:cNvPr id="7" name="AutoShape 6">
             <a:extLst>
               <a:ext uri="{FF2B5EF4-FFF2-40B4-BE49-F238E27FC236}">
-                <a16:creationId xmlns:a16="http://schemas.microsoft.com/office/drawing/2014/main" id="{4CA438C8-2E6E-141C-AFD1-449487F6AA4D}"/>
+                <a16:creationId xmlns:a16="http://schemas.microsoft.com/office/drawing/2014/main" id="{15BB5CCC-5E52-C9C8-63CF-79258A478CFB}"/>
               </a:ext>
             </a:extLst>
           </p:cNvPr>
@@ -3609,7 +3609,7 @@
           <p:cNvPr id="8" name="AutoShape 7">
             <a:extLst>
               <a:ext uri="{FF2B5EF4-FFF2-40B4-BE49-F238E27FC236}">
-                <a16:creationId xmlns:a16="http://schemas.microsoft.com/office/drawing/2014/main" id="{D62AB2E4-1A44-4BCB-A9D0-D19E0563C421}"/>
+                <a16:creationId xmlns:a16="http://schemas.microsoft.com/office/drawing/2014/main" id="{C4AB30C2-7D7B-9073-3D01-7B3D5F5BF65F}"/>
               </a:ext>
             </a:extLst>
           </p:cNvPr>
@@ -3655,7 +3655,7 @@
           <p:cNvPr id="9" name="AutoShape 8">
             <a:extLst>
               <a:ext uri="{FF2B5EF4-FFF2-40B4-BE49-F238E27FC236}">
-                <a16:creationId xmlns:a16="http://schemas.microsoft.com/office/drawing/2014/main" id="{1EA5F686-7211-194A-945A-B11A00060FCE}"/>
+                <a16:creationId xmlns:a16="http://schemas.microsoft.com/office/drawing/2014/main" id="{7474B19D-1956-99BB-C94A-AEDCE55BA404}"/>
               </a:ext>
             </a:extLst>
           </p:cNvPr>
@@ -3701,7 +3701,7 @@
           <p:cNvPr id="10" name="AutoShape 9">
             <a:extLst>
               <a:ext uri="{FF2B5EF4-FFF2-40B4-BE49-F238E27FC236}">
-                <a16:creationId xmlns:a16="http://schemas.microsoft.com/office/drawing/2014/main" id="{CD1950B5-8DF6-EAE3-1A4A-899D51828A5E}"/>
+                <a16:creationId xmlns:a16="http://schemas.microsoft.com/office/drawing/2014/main" id="{AA44B350-84FD-91C0-B5F9-B82D671C434D}"/>
               </a:ext>
             </a:extLst>
           </p:cNvPr>
@@ -3747,7 +3747,7 @@
           <p:cNvPr id="11" name="AutoShape 10">
             <a:extLst>
               <a:ext uri="{FF2B5EF4-FFF2-40B4-BE49-F238E27FC236}">
-                <a16:creationId xmlns:a16="http://schemas.microsoft.com/office/drawing/2014/main" id="{30527369-DBC7-5AF8-1A65-1A0127A6584E}"/>
+                <a16:creationId xmlns:a16="http://schemas.microsoft.com/office/drawing/2014/main" id="{6230A0FF-855B-D33C-CE76-4D907A4D034F}"/>
               </a:ext>
             </a:extLst>
           </p:cNvPr>
@@ -3793,7 +3793,7 @@
           <p:cNvPr id="12" name="AutoShape 11">
             <a:extLst>
               <a:ext uri="{FF2B5EF4-FFF2-40B4-BE49-F238E27FC236}">
-                <a16:creationId xmlns:a16="http://schemas.microsoft.com/office/drawing/2014/main" id="{3C376D08-4B28-5DA3-E3E7-A5A7728DCFE9}"/>
+                <a16:creationId xmlns:a16="http://schemas.microsoft.com/office/drawing/2014/main" id="{6099B6A5-2257-612D-D8A6-18526484E4C4}"/>
               </a:ext>
             </a:extLst>
           </p:cNvPr>
@@ -3839,7 +3839,7 @@
           <p:cNvPr id="13" name="AutoShape 12">
             <a:extLst>
               <a:ext uri="{FF2B5EF4-FFF2-40B4-BE49-F238E27FC236}">
-                <a16:creationId xmlns:a16="http://schemas.microsoft.com/office/drawing/2014/main" id="{133D85D6-E4B3-E886-C0C7-C00288E5F059}"/>
+                <a16:creationId xmlns:a16="http://schemas.microsoft.com/office/drawing/2014/main" id="{8D060044-4A47-1985-42C4-37EEFA602E20}"/>
               </a:ext>
             </a:extLst>
           </p:cNvPr>
@@ -3885,7 +3885,7 @@
           <p:cNvPr id="14" name="AutoShape 13">
             <a:extLst>
               <a:ext uri="{FF2B5EF4-FFF2-40B4-BE49-F238E27FC236}">
-                <a16:creationId xmlns:a16="http://schemas.microsoft.com/office/drawing/2014/main" id="{CD2C25B9-34B9-F036-AF48-CBA8B4DC4A3C}"/>
+                <a16:creationId xmlns:a16="http://schemas.microsoft.com/office/drawing/2014/main" id="{772A3B33-8E5E-8998-2681-C7E978AAA5DE}"/>
               </a:ext>
             </a:extLst>
           </p:cNvPr>
@@ -3931,7 +3931,7 @@
           <p:cNvPr id="15" name="AutoShape 14">
             <a:extLst>
               <a:ext uri="{FF2B5EF4-FFF2-40B4-BE49-F238E27FC236}">
-                <a16:creationId xmlns:a16="http://schemas.microsoft.com/office/drawing/2014/main" id="{A8D5A656-07DF-9878-ECF0-288FFE98E520}"/>
+                <a16:creationId xmlns:a16="http://schemas.microsoft.com/office/drawing/2014/main" id="{EA13E90B-03F1-FFFF-9064-35C5914B783E}"/>
               </a:ext>
             </a:extLst>
           </p:cNvPr>
@@ -3977,7 +3977,7 @@
           <p:cNvPr id="16" name="AutoShape 15">
             <a:extLst>
               <a:ext uri="{FF2B5EF4-FFF2-40B4-BE49-F238E27FC236}">
-                <a16:creationId xmlns:a16="http://schemas.microsoft.com/office/drawing/2014/main" id="{E92AE14A-7916-003F-4910-A8DFEF621B8F}"/>
+                <a16:creationId xmlns:a16="http://schemas.microsoft.com/office/drawing/2014/main" id="{1780AC1F-AF91-CFA2-658D-F66E2850E084}"/>
               </a:ext>
             </a:extLst>
           </p:cNvPr>
@@ -4023,7 +4023,7 @@
           <p:cNvPr id="17" name="AutoShape 16">
             <a:extLst>
               <a:ext uri="{FF2B5EF4-FFF2-40B4-BE49-F238E27FC236}">
-                <a16:creationId xmlns:a16="http://schemas.microsoft.com/office/drawing/2014/main" id="{FCA22959-5425-6AB2-A909-5D4E9F21B786}"/>
+                <a16:creationId xmlns:a16="http://schemas.microsoft.com/office/drawing/2014/main" id="{C610B5CB-55E5-B7CF-BCAC-5FE00F24E012}"/>
               </a:ext>
             </a:extLst>
           </p:cNvPr>
@@ -4069,7 +4069,7 @@
           <p:cNvPr id="18" name="AutoShape 17">
             <a:extLst>
               <a:ext uri="{FF2B5EF4-FFF2-40B4-BE49-F238E27FC236}">
-                <a16:creationId xmlns:a16="http://schemas.microsoft.com/office/drawing/2014/main" id="{5CC13BEF-5282-9CB4-F978-2823CA9FE238}"/>
+                <a16:creationId xmlns:a16="http://schemas.microsoft.com/office/drawing/2014/main" id="{F2603E68-7703-6F33-B873-43F5771FE039}"/>
               </a:ext>
             </a:extLst>
           </p:cNvPr>
@@ -4115,7 +4115,7 @@
           <p:cNvPr id="19" name="AutoShape 18">
             <a:extLst>
               <a:ext uri="{FF2B5EF4-FFF2-40B4-BE49-F238E27FC236}">
-                <a16:creationId xmlns:a16="http://schemas.microsoft.com/office/drawing/2014/main" id="{F200B89C-0CC0-2B3C-2507-125EF3498A9F}"/>
+                <a16:creationId xmlns:a16="http://schemas.microsoft.com/office/drawing/2014/main" id="{F6E922F2-8832-8681-F4E7-9FC52615A45A}"/>
               </a:ext>
             </a:extLst>
           </p:cNvPr>
@@ -4165,7 +4165,7 @@
           <p:cNvPr id="20" name="AutoShape 19">
             <a:extLst>
               <a:ext uri="{FF2B5EF4-FFF2-40B4-BE49-F238E27FC236}">
-                <a16:creationId xmlns:a16="http://schemas.microsoft.com/office/drawing/2014/main" id="{B20EFC8F-9C5C-4D8E-7C0A-B4669BCE663B}"/>
+                <a16:creationId xmlns:a16="http://schemas.microsoft.com/office/drawing/2014/main" id="{0AB46984-CC89-A521-8AEE-D14AC0D6E1D0}"/>
               </a:ext>
             </a:extLst>
           </p:cNvPr>
@@ -4215,7 +4215,7 @@
           <p:cNvPr id="21" name="AutoShape 20">
             <a:extLst>
               <a:ext uri="{FF2B5EF4-FFF2-40B4-BE49-F238E27FC236}">
-                <a16:creationId xmlns:a16="http://schemas.microsoft.com/office/drawing/2014/main" id="{9D79A289-1EFF-43C4-B94C-A819A90709CC}"/>
+                <a16:creationId xmlns:a16="http://schemas.microsoft.com/office/drawing/2014/main" id="{BB13A4D7-290A-428E-3BE0-3F499B3D0B54}"/>
               </a:ext>
             </a:extLst>
           </p:cNvPr>
@@ -4265,7 +4265,7 @@
           <p:cNvPr id="22" name="AutoShape 21">
             <a:extLst>
               <a:ext uri="{FF2B5EF4-FFF2-40B4-BE49-F238E27FC236}">
-                <a16:creationId xmlns:a16="http://schemas.microsoft.com/office/drawing/2014/main" id="{7540AB1E-E8FD-E3C1-F9FC-12799B49FAEB}"/>
+                <a16:creationId xmlns:a16="http://schemas.microsoft.com/office/drawing/2014/main" id="{4AE10CDF-36F0-A193-CB38-9A97DE1CD857}"/>
               </a:ext>
             </a:extLst>
           </p:cNvPr>
@@ -4311,7 +4311,7 @@
           <p:cNvPr id="23" name="AutoShape 22">
             <a:extLst>
               <a:ext uri="{FF2B5EF4-FFF2-40B4-BE49-F238E27FC236}">
-                <a16:creationId xmlns:a16="http://schemas.microsoft.com/office/drawing/2014/main" id="{9494D6F4-B73C-9A4F-4AB8-119753ABBDF1}"/>
+                <a16:creationId xmlns:a16="http://schemas.microsoft.com/office/drawing/2014/main" id="{0B03667C-826F-5ADF-1558-62DAB57EB154}"/>
               </a:ext>
             </a:extLst>
           </p:cNvPr>
@@ -4357,7 +4357,7 @@
           <p:cNvPr id="24" name="AutoShape 23">
             <a:extLst>
               <a:ext uri="{FF2B5EF4-FFF2-40B4-BE49-F238E27FC236}">
-                <a16:creationId xmlns:a16="http://schemas.microsoft.com/office/drawing/2014/main" id="{CFAFBF13-1766-1FB0-B9D1-F17B515B48A4}"/>
+                <a16:creationId xmlns:a16="http://schemas.microsoft.com/office/drawing/2014/main" id="{5BBE64B8-187F-5184-E168-51160C6A954B}"/>
               </a:ext>
             </a:extLst>
           </p:cNvPr>
@@ -4403,7 +4403,7 @@
           <p:cNvPr id="25" name="AutoShape 24">
             <a:extLst>
               <a:ext uri="{FF2B5EF4-FFF2-40B4-BE49-F238E27FC236}">
-                <a16:creationId xmlns:a16="http://schemas.microsoft.com/office/drawing/2014/main" id="{C4C9FD00-F9E8-C075-F0CA-087B44AB2EDD}"/>
+                <a16:creationId xmlns:a16="http://schemas.microsoft.com/office/drawing/2014/main" id="{8E23B5EF-B2FC-6538-73C3-E46AF5B6B513}"/>
               </a:ext>
             </a:extLst>
           </p:cNvPr>
@@ -4447,7 +4447,7 @@
     </p:spTree>
     <p:extLst>
       <p:ext uri="{BB962C8B-B14F-4D97-AF65-F5344CB8AC3E}">
-        <p14:creationId xmlns:p14="http://schemas.microsoft.com/office/powerpoint/2010/main" val="2944771926"/>
+        <p14:creationId xmlns:p14="http://schemas.microsoft.com/office/powerpoint/2010/main" val="2929749332"/>
       </p:ext>
     </p:extLst>
   </p:cSld>
@@ -4479,7 +4479,7 @@
           <p:cNvPr id="2" name="AutoShape 25">
             <a:extLst>
               <a:ext uri="{FF2B5EF4-FFF2-40B4-BE49-F238E27FC236}">
-                <a16:creationId xmlns:a16="http://schemas.microsoft.com/office/drawing/2014/main" id="{3E924CCA-7B9D-9A45-3C11-33639118B999}"/>
+                <a16:creationId xmlns:a16="http://schemas.microsoft.com/office/drawing/2014/main" id="{D2D6F60F-A395-B03A-391C-EC59A3FF4F39}"/>
               </a:ext>
             </a:extLst>
           </p:cNvPr>
@@ -4523,7 +4523,7 @@
           <p:cNvPr id="3" name="AutoShape 26">
             <a:extLst>
               <a:ext uri="{FF2B5EF4-FFF2-40B4-BE49-F238E27FC236}">
-                <a16:creationId xmlns:a16="http://schemas.microsoft.com/office/drawing/2014/main" id="{784ACB6A-CA5B-BB10-52A9-83642010C7DD}"/>
+                <a16:creationId xmlns:a16="http://schemas.microsoft.com/office/drawing/2014/main" id="{D3AFF78F-7019-4894-1CBE-3116F149AB3D}"/>
               </a:ext>
             </a:extLst>
           </p:cNvPr>
@@ -4567,7 +4567,7 @@
           <p:cNvPr id="4" name="AutoShape 27">
             <a:extLst>
               <a:ext uri="{FF2B5EF4-FFF2-40B4-BE49-F238E27FC236}">
-                <a16:creationId xmlns:a16="http://schemas.microsoft.com/office/drawing/2014/main" id="{35BBD2FD-FB89-1E85-FF6C-DDA3D8A873C0}"/>
+                <a16:creationId xmlns:a16="http://schemas.microsoft.com/office/drawing/2014/main" id="{5C83CD38-631E-C274-B9F9-69A5230BD329}"/>
               </a:ext>
             </a:extLst>
           </p:cNvPr>
@@ -4611,7 +4611,7 @@
           <p:cNvPr id="5" name="AutoShape 28">
             <a:extLst>
               <a:ext uri="{FF2B5EF4-FFF2-40B4-BE49-F238E27FC236}">
-                <a16:creationId xmlns:a16="http://schemas.microsoft.com/office/drawing/2014/main" id="{A3EE71E5-8B12-4125-1149-45D649BFB618}"/>
+                <a16:creationId xmlns:a16="http://schemas.microsoft.com/office/drawing/2014/main" id="{AE509D71-064E-6B97-165B-AB80E5A70C96}"/>
               </a:ext>
             </a:extLst>
           </p:cNvPr>
@@ -4657,7 +4657,7 @@
           <p:cNvPr id="6" name="AutoShape 29">
             <a:extLst>
               <a:ext uri="{FF2B5EF4-FFF2-40B4-BE49-F238E27FC236}">
-                <a16:creationId xmlns:a16="http://schemas.microsoft.com/office/drawing/2014/main" id="{916E8109-94D2-B9B3-A1FF-F8429EF40A3E}"/>
+                <a16:creationId xmlns:a16="http://schemas.microsoft.com/office/drawing/2014/main" id="{80004EAF-D73C-51B1-0B21-8CC656E2E14E}"/>
               </a:ext>
             </a:extLst>
           </p:cNvPr>
@@ -4701,7 +4701,7 @@
           <p:cNvPr id="7" name="AutoShape 30">
             <a:extLst>
               <a:ext uri="{FF2B5EF4-FFF2-40B4-BE49-F238E27FC236}">
-                <a16:creationId xmlns:a16="http://schemas.microsoft.com/office/drawing/2014/main" id="{3A92834C-35C7-EDB9-7BBD-0D860EE7947B}"/>
+                <a16:creationId xmlns:a16="http://schemas.microsoft.com/office/drawing/2014/main" id="{1E5EA771-079E-6466-F9F2-640FC16724E2}"/>
               </a:ext>
             </a:extLst>
           </p:cNvPr>
@@ -4745,7 +4745,7 @@
           <p:cNvPr id="8" name="AutoShape 31">
             <a:extLst>
               <a:ext uri="{FF2B5EF4-FFF2-40B4-BE49-F238E27FC236}">
-                <a16:creationId xmlns:a16="http://schemas.microsoft.com/office/drawing/2014/main" id="{684A7A20-CB83-FEFA-7C9C-E0C59BFF7AAB}"/>
+                <a16:creationId xmlns:a16="http://schemas.microsoft.com/office/drawing/2014/main" id="{180BAB83-3DE5-98B9-BF2A-C5253CFFCA41}"/>
               </a:ext>
             </a:extLst>
           </p:cNvPr>
@@ -4789,7 +4789,7 @@
           <p:cNvPr id="9" name="AutoShape 32">
             <a:extLst>
               <a:ext uri="{FF2B5EF4-FFF2-40B4-BE49-F238E27FC236}">
-                <a16:creationId xmlns:a16="http://schemas.microsoft.com/office/drawing/2014/main" id="{892E38DD-2B5E-7DB5-DD51-C14442DC26A9}"/>
+                <a16:creationId xmlns:a16="http://schemas.microsoft.com/office/drawing/2014/main" id="{3F0AF136-2919-B504-1306-9D1C2FE38376}"/>
               </a:ext>
             </a:extLst>
           </p:cNvPr>
@@ -4833,7 +4833,7 @@
           <p:cNvPr id="10" name="AutoShape 33">
             <a:extLst>
               <a:ext uri="{FF2B5EF4-FFF2-40B4-BE49-F238E27FC236}">
-                <a16:creationId xmlns:a16="http://schemas.microsoft.com/office/drawing/2014/main" id="{E29ABCC8-06DC-93C2-52CD-36FCCF631D55}"/>
+                <a16:creationId xmlns:a16="http://schemas.microsoft.com/office/drawing/2014/main" id="{D38049FE-9510-EE8E-D941-83B255A90BF7}"/>
               </a:ext>
             </a:extLst>
           </p:cNvPr>
@@ -4879,7 +4879,7 @@
           <p:cNvPr id="11" name="AutoShape 34">
             <a:extLst>
               <a:ext uri="{FF2B5EF4-FFF2-40B4-BE49-F238E27FC236}">
-                <a16:creationId xmlns:a16="http://schemas.microsoft.com/office/drawing/2014/main" id="{156A86B3-01EA-D374-7170-D8ADD7022186}"/>
+                <a16:creationId xmlns:a16="http://schemas.microsoft.com/office/drawing/2014/main" id="{46F5CCE1-9EE0-FA3A-6227-649271239F69}"/>
               </a:ext>
             </a:extLst>
           </p:cNvPr>
@@ -4925,7 +4925,7 @@
           <p:cNvPr id="12" name="AutoShape 35">
             <a:extLst>
               <a:ext uri="{FF2B5EF4-FFF2-40B4-BE49-F238E27FC236}">
-                <a16:creationId xmlns:a16="http://schemas.microsoft.com/office/drawing/2014/main" id="{96E574F2-6E8F-4A4A-D6E7-062887835BE2}"/>
+                <a16:creationId xmlns:a16="http://schemas.microsoft.com/office/drawing/2014/main" id="{D4BF68B2-6E14-7765-2009-22F42BAD34AE}"/>
               </a:ext>
             </a:extLst>
           </p:cNvPr>
@@ -4971,7 +4971,7 @@
           <p:cNvPr id="13" name="AutoShape 36">
             <a:extLst>
               <a:ext uri="{FF2B5EF4-FFF2-40B4-BE49-F238E27FC236}">
-                <a16:creationId xmlns:a16="http://schemas.microsoft.com/office/drawing/2014/main" id="{711236C9-8868-E732-5CB1-F57089D1D158}"/>
+                <a16:creationId xmlns:a16="http://schemas.microsoft.com/office/drawing/2014/main" id="{E68352DA-73B1-226C-692F-E8A48E291AC6}"/>
               </a:ext>
             </a:extLst>
           </p:cNvPr>
@@ -5017,7 +5017,7 @@
           <p:cNvPr id="14" name="AutoShape 37">
             <a:extLst>
               <a:ext uri="{FF2B5EF4-FFF2-40B4-BE49-F238E27FC236}">
-                <a16:creationId xmlns:a16="http://schemas.microsoft.com/office/drawing/2014/main" id="{BAC8A13D-D555-EC1D-51BC-066FE6DACA26}"/>
+                <a16:creationId xmlns:a16="http://schemas.microsoft.com/office/drawing/2014/main" id="{7CA467E2-9296-4E9D-1D36-6CF41638CF89}"/>
               </a:ext>
             </a:extLst>
           </p:cNvPr>
@@ -5063,7 +5063,7 @@
           <p:cNvPr id="15" name="AutoShape 38">
             <a:extLst>
               <a:ext uri="{FF2B5EF4-FFF2-40B4-BE49-F238E27FC236}">
-                <a16:creationId xmlns:a16="http://schemas.microsoft.com/office/drawing/2014/main" id="{A3C92F99-DA91-B5C0-5FFB-8D51DF869FE9}"/>
+                <a16:creationId xmlns:a16="http://schemas.microsoft.com/office/drawing/2014/main" id="{CC699235-1CDE-BE5C-4D94-863CE1B720C6}"/>
               </a:ext>
             </a:extLst>
           </p:cNvPr>
@@ -5109,7 +5109,7 @@
           <p:cNvPr id="16" name="AutoShape 39">
             <a:extLst>
               <a:ext uri="{FF2B5EF4-FFF2-40B4-BE49-F238E27FC236}">
-                <a16:creationId xmlns:a16="http://schemas.microsoft.com/office/drawing/2014/main" id="{222059D8-A436-09D5-26F4-42A4EE24B9A4}"/>
+                <a16:creationId xmlns:a16="http://schemas.microsoft.com/office/drawing/2014/main" id="{0E5A4523-A681-7343-47BD-3F945AD58650}"/>
               </a:ext>
             </a:extLst>
           </p:cNvPr>
@@ -5155,7 +5155,7 @@
           <p:cNvPr id="17" name="AutoShape 40">
             <a:extLst>
               <a:ext uri="{FF2B5EF4-FFF2-40B4-BE49-F238E27FC236}">
-                <a16:creationId xmlns:a16="http://schemas.microsoft.com/office/drawing/2014/main" id="{572DBCA0-4F6F-C4BC-8FB9-2A3505D0CA5A}"/>
+                <a16:creationId xmlns:a16="http://schemas.microsoft.com/office/drawing/2014/main" id="{05C27D09-8380-6F1D-5141-751CF0B92058}"/>
               </a:ext>
             </a:extLst>
           </p:cNvPr>
@@ -5201,7 +5201,7 @@
           <p:cNvPr id="18" name="AutoShape 41">
             <a:extLst>
               <a:ext uri="{FF2B5EF4-FFF2-40B4-BE49-F238E27FC236}">
-                <a16:creationId xmlns:a16="http://schemas.microsoft.com/office/drawing/2014/main" id="{54B35D7F-36C0-172E-EFB4-D5EE41661DA9}"/>
+                <a16:creationId xmlns:a16="http://schemas.microsoft.com/office/drawing/2014/main" id="{75F8F940-4181-6B7F-BC8A-615D2786281D}"/>
               </a:ext>
             </a:extLst>
           </p:cNvPr>
@@ -5251,7 +5251,7 @@
           <p:cNvPr id="19" name="AutoShape 42">
             <a:extLst>
               <a:ext uri="{FF2B5EF4-FFF2-40B4-BE49-F238E27FC236}">
-                <a16:creationId xmlns:a16="http://schemas.microsoft.com/office/drawing/2014/main" id="{311F6116-1D33-CE4C-788B-67ED236EE2E7}"/>
+                <a16:creationId xmlns:a16="http://schemas.microsoft.com/office/drawing/2014/main" id="{095B1A7D-21C2-0CC3-1BD5-DE0E3679CC5D}"/>
               </a:ext>
             </a:extLst>
           </p:cNvPr>
@@ -5301,7 +5301,7 @@
           <p:cNvPr id="20" name="AutoShape 43">
             <a:extLst>
               <a:ext uri="{FF2B5EF4-FFF2-40B4-BE49-F238E27FC236}">
-                <a16:creationId xmlns:a16="http://schemas.microsoft.com/office/drawing/2014/main" id="{99D9280F-3831-546C-DEA4-D9510261F224}"/>
+                <a16:creationId xmlns:a16="http://schemas.microsoft.com/office/drawing/2014/main" id="{2A3669B7-5919-CABE-378E-AF4D76A882F0}"/>
               </a:ext>
             </a:extLst>
           </p:cNvPr>
@@ -5347,7 +5347,7 @@
           <p:cNvPr id="21" name="AutoShape 44">
             <a:extLst>
               <a:ext uri="{FF2B5EF4-FFF2-40B4-BE49-F238E27FC236}">
-                <a16:creationId xmlns:a16="http://schemas.microsoft.com/office/drawing/2014/main" id="{2815680C-D21E-022F-7711-AEB58EADB6BA}"/>
+                <a16:creationId xmlns:a16="http://schemas.microsoft.com/office/drawing/2014/main" id="{F86215B6-96F6-8552-B564-F90127486CA9}"/>
               </a:ext>
             </a:extLst>
           </p:cNvPr>
@@ -5393,7 +5393,7 @@
           <p:cNvPr id="22" name="AutoShape 45">
             <a:extLst>
               <a:ext uri="{FF2B5EF4-FFF2-40B4-BE49-F238E27FC236}">
-                <a16:creationId xmlns:a16="http://schemas.microsoft.com/office/drawing/2014/main" id="{594CD296-A087-7913-E4C5-870E1CAE205C}"/>
+                <a16:creationId xmlns:a16="http://schemas.microsoft.com/office/drawing/2014/main" id="{805F18D7-2354-9115-DC39-68A4AC305217}"/>
               </a:ext>
             </a:extLst>
           </p:cNvPr>
@@ -5443,7 +5443,7 @@
           <p:cNvPr id="23" name="AutoShape 46">
             <a:extLst>
               <a:ext uri="{FF2B5EF4-FFF2-40B4-BE49-F238E27FC236}">
-                <a16:creationId xmlns:a16="http://schemas.microsoft.com/office/drawing/2014/main" id="{D458C331-3F28-BC83-B567-3241B45EE906}"/>
+                <a16:creationId xmlns:a16="http://schemas.microsoft.com/office/drawing/2014/main" id="{1DE62878-4C5D-4805-C7C6-79F32C091F61}"/>
               </a:ext>
             </a:extLst>
           </p:cNvPr>
@@ -5493,7 +5493,7 @@
           <p:cNvPr id="24" name="AutoShape 47">
             <a:extLst>
               <a:ext uri="{FF2B5EF4-FFF2-40B4-BE49-F238E27FC236}">
-                <a16:creationId xmlns:a16="http://schemas.microsoft.com/office/drawing/2014/main" id="{EF8BDB83-C38F-46AB-DDCB-407BD92D4632}"/>
+                <a16:creationId xmlns:a16="http://schemas.microsoft.com/office/drawing/2014/main" id="{03AD0767-5268-E57F-E8F3-CFBD1D6350C9}"/>
               </a:ext>
             </a:extLst>
           </p:cNvPr>
@@ -5543,7 +5543,7 @@
           <p:cNvPr id="25" name="AutoShape 48">
             <a:extLst>
               <a:ext uri="{FF2B5EF4-FFF2-40B4-BE49-F238E27FC236}">
-                <a16:creationId xmlns:a16="http://schemas.microsoft.com/office/drawing/2014/main" id="{53FB7322-37D0-200B-3C73-454981ED632E}"/>
+                <a16:creationId xmlns:a16="http://schemas.microsoft.com/office/drawing/2014/main" id="{90858AB3-D0A9-A587-1768-1FA4CCF4B9DB}"/>
               </a:ext>
             </a:extLst>
           </p:cNvPr>
@@ -5591,7 +5591,7 @@
     </p:spTree>
     <p:extLst>
       <p:ext uri="{BB962C8B-B14F-4D97-AF65-F5344CB8AC3E}">
-        <p14:creationId xmlns:p14="http://schemas.microsoft.com/office/powerpoint/2010/main" val="2162941640"/>
+        <p14:creationId xmlns:p14="http://schemas.microsoft.com/office/powerpoint/2010/main" val="210300146"/>
       </p:ext>
     </p:extLst>
   </p:cSld>
@@ -5623,7 +5623,7 @@
           <p:cNvPr id="2" name="AutoShape 49">
             <a:extLst>
               <a:ext uri="{FF2B5EF4-FFF2-40B4-BE49-F238E27FC236}">
-                <a16:creationId xmlns:a16="http://schemas.microsoft.com/office/drawing/2014/main" id="{A3BD508B-323F-FA2A-DAAC-556E6088290B}"/>
+                <a16:creationId xmlns:a16="http://schemas.microsoft.com/office/drawing/2014/main" id="{ACFF41A3-2EA3-92A6-E3C3-887AD30AFF2A}"/>
               </a:ext>
             </a:extLst>
           </p:cNvPr>
@@ -5669,7 +5669,7 @@
           <p:cNvPr id="3" name="AutoShape 50">
             <a:extLst>
               <a:ext uri="{FF2B5EF4-FFF2-40B4-BE49-F238E27FC236}">
-                <a16:creationId xmlns:a16="http://schemas.microsoft.com/office/drawing/2014/main" id="{35A7BBC1-9E9D-68A2-C1A2-55ABF0E8A053}"/>
+                <a16:creationId xmlns:a16="http://schemas.microsoft.com/office/drawing/2014/main" id="{5D472124-1256-F79D-6FD9-558FCD0056B3}"/>
               </a:ext>
             </a:extLst>
           </p:cNvPr>
@@ -5715,7 +5715,7 @@
           <p:cNvPr id="4" name="AutoShape 51">
             <a:extLst>
               <a:ext uri="{FF2B5EF4-FFF2-40B4-BE49-F238E27FC236}">
-                <a16:creationId xmlns:a16="http://schemas.microsoft.com/office/drawing/2014/main" id="{D9259258-4780-1DE5-C8F7-28D53431E272}"/>
+                <a16:creationId xmlns:a16="http://schemas.microsoft.com/office/drawing/2014/main" id="{82269C92-5BFD-BA3D-636D-4359B122F1B7}"/>
               </a:ext>
             </a:extLst>
           </p:cNvPr>
@@ -5761,7 +5761,7 @@
           <p:cNvPr id="5" name="AutoShape 52">
             <a:extLst>
               <a:ext uri="{FF2B5EF4-FFF2-40B4-BE49-F238E27FC236}">
-                <a16:creationId xmlns:a16="http://schemas.microsoft.com/office/drawing/2014/main" id="{B3355461-C133-8572-F808-89D27565A77E}"/>
+                <a16:creationId xmlns:a16="http://schemas.microsoft.com/office/drawing/2014/main" id="{D77333A6-B47E-5DC6-182C-0148C81C9AE6}"/>
               </a:ext>
             </a:extLst>
           </p:cNvPr>
@@ -5811,7 +5811,7 @@
           <p:cNvPr id="6" name="AutoShape 53">
             <a:extLst>
               <a:ext uri="{FF2B5EF4-FFF2-40B4-BE49-F238E27FC236}">
-                <a16:creationId xmlns:a16="http://schemas.microsoft.com/office/drawing/2014/main" id="{A21F7924-566F-AFA1-3963-568B83092940}"/>
+                <a16:creationId xmlns:a16="http://schemas.microsoft.com/office/drawing/2014/main" id="{BF7E663D-BDEE-A139-3531-73D95866C3C5}"/>
               </a:ext>
             </a:extLst>
           </p:cNvPr>
@@ -5857,7 +5857,7 @@
           <p:cNvPr id="7" name="AutoShape 54">
             <a:extLst>
               <a:ext uri="{FF2B5EF4-FFF2-40B4-BE49-F238E27FC236}">
-                <a16:creationId xmlns:a16="http://schemas.microsoft.com/office/drawing/2014/main" id="{75F80B68-FE42-398F-C906-392F91E92E05}"/>
+                <a16:creationId xmlns:a16="http://schemas.microsoft.com/office/drawing/2014/main" id="{8ABD8B61-EC89-8085-3973-C86103D94D19}"/>
               </a:ext>
             </a:extLst>
           </p:cNvPr>
@@ -5903,7 +5903,7 @@
           <p:cNvPr id="8" name="AutoShape 55">
             <a:extLst>
               <a:ext uri="{FF2B5EF4-FFF2-40B4-BE49-F238E27FC236}">
-                <a16:creationId xmlns:a16="http://schemas.microsoft.com/office/drawing/2014/main" id="{86A362E4-5849-03E8-5055-FDB99B9F0E0A}"/>
+                <a16:creationId xmlns:a16="http://schemas.microsoft.com/office/drawing/2014/main" id="{08867E80-98D2-2F7B-7916-77A01FF6A304}"/>
               </a:ext>
             </a:extLst>
           </p:cNvPr>
@@ -5949,7 +5949,7 @@
           <p:cNvPr id="9" name="AutoShape 56">
             <a:extLst>
               <a:ext uri="{FF2B5EF4-FFF2-40B4-BE49-F238E27FC236}">
-                <a16:creationId xmlns:a16="http://schemas.microsoft.com/office/drawing/2014/main" id="{CCAEB632-829A-875F-1228-C73D639ADDDD}"/>
+                <a16:creationId xmlns:a16="http://schemas.microsoft.com/office/drawing/2014/main" id="{11C65C62-D1B8-A1B4-3830-B945ABCC26F7}"/>
               </a:ext>
             </a:extLst>
           </p:cNvPr>
@@ -5995,7 +5995,7 @@
           <p:cNvPr id="10" name="AutoShape 57">
             <a:extLst>
               <a:ext uri="{FF2B5EF4-FFF2-40B4-BE49-F238E27FC236}">
-                <a16:creationId xmlns:a16="http://schemas.microsoft.com/office/drawing/2014/main" id="{E7BF52B6-D23C-83F9-5A85-1F137EB52A5C}"/>
+                <a16:creationId xmlns:a16="http://schemas.microsoft.com/office/drawing/2014/main" id="{E8F4D873-0089-89A9-203E-6E7DD560D681}"/>
               </a:ext>
             </a:extLst>
           </p:cNvPr>
@@ -6041,7 +6041,7 @@
           <p:cNvPr id="11" name="AutoShape 58">
             <a:extLst>
               <a:ext uri="{FF2B5EF4-FFF2-40B4-BE49-F238E27FC236}">
-                <a16:creationId xmlns:a16="http://schemas.microsoft.com/office/drawing/2014/main" id="{A5102469-CF74-9F9F-EDA2-C1920E53376C}"/>
+                <a16:creationId xmlns:a16="http://schemas.microsoft.com/office/drawing/2014/main" id="{A1202AC1-B057-16B9-C45E-3F24B8AC8007}"/>
               </a:ext>
             </a:extLst>
           </p:cNvPr>
@@ -6087,7 +6087,7 @@
           <p:cNvPr id="12" name="AutoShape 59">
             <a:extLst>
               <a:ext uri="{FF2B5EF4-FFF2-40B4-BE49-F238E27FC236}">
-                <a16:creationId xmlns:a16="http://schemas.microsoft.com/office/drawing/2014/main" id="{7DD264ED-B478-BA31-2E1B-5E353373D1F9}"/>
+                <a16:creationId xmlns:a16="http://schemas.microsoft.com/office/drawing/2014/main" id="{05C0D6BC-1128-9043-21FC-0AAAB760E3DF}"/>
               </a:ext>
             </a:extLst>
           </p:cNvPr>
@@ -6133,7 +6133,7 @@
           <p:cNvPr id="13" name="AutoShape 60">
             <a:extLst>
               <a:ext uri="{FF2B5EF4-FFF2-40B4-BE49-F238E27FC236}">
-                <a16:creationId xmlns:a16="http://schemas.microsoft.com/office/drawing/2014/main" id="{99BF5CCE-85B9-E25A-5A3C-1A72AD1CCBEB}"/>
+                <a16:creationId xmlns:a16="http://schemas.microsoft.com/office/drawing/2014/main" id="{504166E5-9304-71B2-8F38-29DD9E3856F5}"/>
               </a:ext>
             </a:extLst>
           </p:cNvPr>
@@ -6183,7 +6183,7 @@
           <p:cNvPr id="14" name="AutoShape 61">
             <a:extLst>
               <a:ext uri="{FF2B5EF4-FFF2-40B4-BE49-F238E27FC236}">
-                <a16:creationId xmlns:a16="http://schemas.microsoft.com/office/drawing/2014/main" id="{17A4A930-7EB7-F812-7C0F-5CC35F039143}"/>
+                <a16:creationId xmlns:a16="http://schemas.microsoft.com/office/drawing/2014/main" id="{39C4EB3B-4459-9C27-0D68-BEC7586DF8C0}"/>
               </a:ext>
             </a:extLst>
           </p:cNvPr>
@@ -6229,7 +6229,7 @@
           <p:cNvPr id="15" name="AutoShape 62">
             <a:extLst>
               <a:ext uri="{FF2B5EF4-FFF2-40B4-BE49-F238E27FC236}">
-                <a16:creationId xmlns:a16="http://schemas.microsoft.com/office/drawing/2014/main" id="{B6656289-56D7-A485-D8F6-D51917701638}"/>
+                <a16:creationId xmlns:a16="http://schemas.microsoft.com/office/drawing/2014/main" id="{836E5DB6-A9A0-1BE0-42CB-C8C9582E6F61}"/>
               </a:ext>
             </a:extLst>
           </p:cNvPr>
@@ -6275,7 +6275,7 @@
           <p:cNvPr id="16" name="AutoShape 63">
             <a:extLst>
               <a:ext uri="{FF2B5EF4-FFF2-40B4-BE49-F238E27FC236}">
-                <a16:creationId xmlns:a16="http://schemas.microsoft.com/office/drawing/2014/main" id="{CA19F9D6-9ACB-BA62-53D3-2E062933E07B}"/>
+                <a16:creationId xmlns:a16="http://schemas.microsoft.com/office/drawing/2014/main" id="{54594C66-4B27-0A9F-B92E-6D6C52F82EE1}"/>
               </a:ext>
             </a:extLst>
           </p:cNvPr>
@@ -6321,7 +6321,7 @@
           <p:cNvPr id="17" name="AutoShape 64">
             <a:extLst>
               <a:ext uri="{FF2B5EF4-FFF2-40B4-BE49-F238E27FC236}">
-                <a16:creationId xmlns:a16="http://schemas.microsoft.com/office/drawing/2014/main" id="{775E7C7F-F4F4-753B-3069-FB9CE4FBCCC8}"/>
+                <a16:creationId xmlns:a16="http://schemas.microsoft.com/office/drawing/2014/main" id="{4EDE6895-9A2B-67C5-F88D-52853FA75DDE}"/>
               </a:ext>
             </a:extLst>
           </p:cNvPr>
@@ -6367,7 +6367,7 @@
           <p:cNvPr id="18" name="AutoShape 65">
             <a:extLst>
               <a:ext uri="{FF2B5EF4-FFF2-40B4-BE49-F238E27FC236}">
-                <a16:creationId xmlns:a16="http://schemas.microsoft.com/office/drawing/2014/main" id="{C9EF479E-75EF-8A21-1342-38E0EE28C2CC}"/>
+                <a16:creationId xmlns:a16="http://schemas.microsoft.com/office/drawing/2014/main" id="{08B4E920-83FF-5DCB-97BD-8C65AE7C3263}"/>
               </a:ext>
             </a:extLst>
           </p:cNvPr>
@@ -6413,7 +6413,7 @@
           <p:cNvPr id="19" name="AutoShape 66">
             <a:extLst>
               <a:ext uri="{FF2B5EF4-FFF2-40B4-BE49-F238E27FC236}">
-                <a16:creationId xmlns:a16="http://schemas.microsoft.com/office/drawing/2014/main" id="{B573A009-53BB-DA57-C03C-170CDE26243A}"/>
+                <a16:creationId xmlns:a16="http://schemas.microsoft.com/office/drawing/2014/main" id="{1291BF8F-21F6-5C6E-805A-B3490027E133}"/>
               </a:ext>
             </a:extLst>
           </p:cNvPr>
@@ -6459,7 +6459,7 @@
           <p:cNvPr id="20" name="AutoShape 67">
             <a:extLst>
               <a:ext uri="{FF2B5EF4-FFF2-40B4-BE49-F238E27FC236}">
-                <a16:creationId xmlns:a16="http://schemas.microsoft.com/office/drawing/2014/main" id="{73AA71AC-7CDC-18C2-FC67-C5F9DFE24B99}"/>
+                <a16:creationId xmlns:a16="http://schemas.microsoft.com/office/drawing/2014/main" id="{FCB8FB89-4646-3FBF-5CB3-67342429AFB9}"/>
               </a:ext>
             </a:extLst>
           </p:cNvPr>
@@ -6505,7 +6505,7 @@
           <p:cNvPr id="21" name="AutoShape 68">
             <a:extLst>
               <a:ext uri="{FF2B5EF4-FFF2-40B4-BE49-F238E27FC236}">
-                <a16:creationId xmlns:a16="http://schemas.microsoft.com/office/drawing/2014/main" id="{232E2D97-E5F9-D36A-E2DA-097E71AADF36}"/>
+                <a16:creationId xmlns:a16="http://schemas.microsoft.com/office/drawing/2014/main" id="{A02C900B-B6BA-F0C4-09F9-BDEF50E09ABD}"/>
               </a:ext>
             </a:extLst>
           </p:cNvPr>
@@ -6551,7 +6551,7 @@
           <p:cNvPr id="22" name="AutoShape 69">
             <a:extLst>
               <a:ext uri="{FF2B5EF4-FFF2-40B4-BE49-F238E27FC236}">
-                <a16:creationId xmlns:a16="http://schemas.microsoft.com/office/drawing/2014/main" id="{C2DD0405-5E8A-BA67-5C29-76F6C0B75DF4}"/>
+                <a16:creationId xmlns:a16="http://schemas.microsoft.com/office/drawing/2014/main" id="{EC8A3920-3126-AAB9-3285-E83923E0D523}"/>
               </a:ext>
             </a:extLst>
           </p:cNvPr>
@@ -6597,7 +6597,7 @@
           <p:cNvPr id="23" name="AutoShape 70">
             <a:extLst>
               <a:ext uri="{FF2B5EF4-FFF2-40B4-BE49-F238E27FC236}">
-                <a16:creationId xmlns:a16="http://schemas.microsoft.com/office/drawing/2014/main" id="{82DFA49B-5070-5648-9FAD-995A4115C50A}"/>
+                <a16:creationId xmlns:a16="http://schemas.microsoft.com/office/drawing/2014/main" id="{07D9C6CC-0606-6C86-E49B-7566107B1D70}"/>
               </a:ext>
             </a:extLst>
           </p:cNvPr>
@@ -6643,7 +6643,7 @@
           <p:cNvPr id="24" name="AutoShape 71">
             <a:extLst>
               <a:ext uri="{FF2B5EF4-FFF2-40B4-BE49-F238E27FC236}">
-                <a16:creationId xmlns:a16="http://schemas.microsoft.com/office/drawing/2014/main" id="{48013A98-3D62-70E6-5DC9-87498BFAA34E}"/>
+                <a16:creationId xmlns:a16="http://schemas.microsoft.com/office/drawing/2014/main" id="{DDCB6E11-050D-9822-3308-14C7E5079205}"/>
               </a:ext>
             </a:extLst>
           </p:cNvPr>
@@ -6689,7 +6689,7 @@
           <p:cNvPr id="25" name="AutoShape 72">
             <a:extLst>
               <a:ext uri="{FF2B5EF4-FFF2-40B4-BE49-F238E27FC236}">
-                <a16:creationId xmlns:a16="http://schemas.microsoft.com/office/drawing/2014/main" id="{6F64420A-90AB-8D3A-2038-DF43DDF84892}"/>
+                <a16:creationId xmlns:a16="http://schemas.microsoft.com/office/drawing/2014/main" id="{FC46E78E-EA12-28B6-A7D0-F96E357372C4}"/>
               </a:ext>
             </a:extLst>
           </p:cNvPr>
@@ -6733,7 +6733,7 @@
     </p:spTree>
     <p:extLst>
       <p:ext uri="{BB962C8B-B14F-4D97-AF65-F5344CB8AC3E}">
-        <p14:creationId xmlns:p14="http://schemas.microsoft.com/office/powerpoint/2010/main" val="209627045"/>
+        <p14:creationId xmlns:p14="http://schemas.microsoft.com/office/powerpoint/2010/main" val="3948170795"/>
       </p:ext>
     </p:extLst>
   </p:cSld>
@@ -6765,7 +6765,7 @@
           <p:cNvPr id="2" name="AutoShape 73">
             <a:extLst>
               <a:ext uri="{FF2B5EF4-FFF2-40B4-BE49-F238E27FC236}">
-                <a16:creationId xmlns:a16="http://schemas.microsoft.com/office/drawing/2014/main" id="{217B8E2E-BD56-A917-65A8-F2BEE84EB59E}"/>
+                <a16:creationId xmlns:a16="http://schemas.microsoft.com/office/drawing/2014/main" id="{3B7796FB-8531-1C1F-7CF1-C964522100C3}"/>
               </a:ext>
             </a:extLst>
           </p:cNvPr>
@@ -6811,7 +6811,7 @@
           <p:cNvPr id="3" name="AutoShape 74">
             <a:extLst>
               <a:ext uri="{FF2B5EF4-FFF2-40B4-BE49-F238E27FC236}">
-                <a16:creationId xmlns:a16="http://schemas.microsoft.com/office/drawing/2014/main" id="{3C0DE089-E52D-43B3-4B1B-E7335BE32750}"/>
+                <a16:creationId xmlns:a16="http://schemas.microsoft.com/office/drawing/2014/main" id="{815AE784-E4A8-BCC1-1752-1BA0A3D406C5}"/>
               </a:ext>
             </a:extLst>
           </p:cNvPr>
@@ -6857,7 +6857,7 @@
           <p:cNvPr id="4" name="AutoShape 75">
             <a:extLst>
               <a:ext uri="{FF2B5EF4-FFF2-40B4-BE49-F238E27FC236}">
-                <a16:creationId xmlns:a16="http://schemas.microsoft.com/office/drawing/2014/main" id="{77BEA797-7C32-10B9-5B98-CBC4E255C5F1}"/>
+                <a16:creationId xmlns:a16="http://schemas.microsoft.com/office/drawing/2014/main" id="{FB04173D-F668-C4AB-67BB-E1FDF1D863D4}"/>
               </a:ext>
             </a:extLst>
           </p:cNvPr>
@@ -6903,7 +6903,7 @@
           <p:cNvPr id="5" name="AutoShape 76">
             <a:extLst>
               <a:ext uri="{FF2B5EF4-FFF2-40B4-BE49-F238E27FC236}">
-                <a16:creationId xmlns:a16="http://schemas.microsoft.com/office/drawing/2014/main" id="{57C6A0BF-2A52-091E-23B0-E7CD516D0625}"/>
+                <a16:creationId xmlns:a16="http://schemas.microsoft.com/office/drawing/2014/main" id="{DFA8DBD3-75C7-31BB-FE5C-D33FD4D979CD}"/>
               </a:ext>
             </a:extLst>
           </p:cNvPr>
@@ -6949,7 +6949,7 @@
           <p:cNvPr id="6" name="AutoShape 77">
             <a:extLst>
               <a:ext uri="{FF2B5EF4-FFF2-40B4-BE49-F238E27FC236}">
-                <a16:creationId xmlns:a16="http://schemas.microsoft.com/office/drawing/2014/main" id="{DC14A1CC-BF14-460E-9A54-E6237E8189DD}"/>
+                <a16:creationId xmlns:a16="http://schemas.microsoft.com/office/drawing/2014/main" id="{D3CDFC66-C2D6-B01D-D88E-DC7E623F2527}"/>
               </a:ext>
             </a:extLst>
           </p:cNvPr>
@@ -6995,7 +6995,7 @@
           <p:cNvPr id="7" name="AutoShape 78">
             <a:extLst>
               <a:ext uri="{FF2B5EF4-FFF2-40B4-BE49-F238E27FC236}">
-                <a16:creationId xmlns:a16="http://schemas.microsoft.com/office/drawing/2014/main" id="{38909683-D6FA-D634-3F10-53C5D5B3A121}"/>
+                <a16:creationId xmlns:a16="http://schemas.microsoft.com/office/drawing/2014/main" id="{CDC765BC-EDA7-627D-B5FC-0DCCD31FC5BC}"/>
               </a:ext>
             </a:extLst>
           </p:cNvPr>
@@ -7041,7 +7041,7 @@
           <p:cNvPr id="8" name="AutoShape 79">
             <a:extLst>
               <a:ext uri="{FF2B5EF4-FFF2-40B4-BE49-F238E27FC236}">
-                <a16:creationId xmlns:a16="http://schemas.microsoft.com/office/drawing/2014/main" id="{0AD05796-6465-D353-6097-AAE74B18355D}"/>
+                <a16:creationId xmlns:a16="http://schemas.microsoft.com/office/drawing/2014/main" id="{56C4DBB5-3527-AD09-53BC-226FCFBD44F7}"/>
               </a:ext>
             </a:extLst>
           </p:cNvPr>
@@ -7091,7 +7091,7 @@
           <p:cNvPr id="9" name="AutoShape 80">
             <a:extLst>
               <a:ext uri="{FF2B5EF4-FFF2-40B4-BE49-F238E27FC236}">
-                <a16:creationId xmlns:a16="http://schemas.microsoft.com/office/drawing/2014/main" id="{3A9867BC-DBAD-9FB0-4FB0-DBFC5F5E7841}"/>
+                <a16:creationId xmlns:a16="http://schemas.microsoft.com/office/drawing/2014/main" id="{A4C8DFE7-C163-ADF7-B587-82D3FD1C7E18}"/>
               </a:ext>
             </a:extLst>
           </p:cNvPr>
@@ -7137,7 +7137,7 @@
           <p:cNvPr id="10" name="AutoShape 81">
             <a:extLst>
               <a:ext uri="{FF2B5EF4-FFF2-40B4-BE49-F238E27FC236}">
-                <a16:creationId xmlns:a16="http://schemas.microsoft.com/office/drawing/2014/main" id="{81A3BC2E-4116-02E8-C61A-B4BCBDEED298}"/>
+                <a16:creationId xmlns:a16="http://schemas.microsoft.com/office/drawing/2014/main" id="{C14CA6CB-78E7-FFEC-C6C1-78AEF2E2CE85}"/>
               </a:ext>
             </a:extLst>
           </p:cNvPr>
@@ -7183,7 +7183,7 @@
           <p:cNvPr id="11" name="AutoShape 82">
             <a:extLst>
               <a:ext uri="{FF2B5EF4-FFF2-40B4-BE49-F238E27FC236}">
-                <a16:creationId xmlns:a16="http://schemas.microsoft.com/office/drawing/2014/main" id="{10C09368-F029-3F38-F714-0BE30E54B9AD}"/>
+                <a16:creationId xmlns:a16="http://schemas.microsoft.com/office/drawing/2014/main" id="{87049EFE-928F-A424-1BCC-CD7B60509869}"/>
               </a:ext>
             </a:extLst>
           </p:cNvPr>
@@ -7229,7 +7229,7 @@
           <p:cNvPr id="12" name="AutoShape 83">
             <a:extLst>
               <a:ext uri="{FF2B5EF4-FFF2-40B4-BE49-F238E27FC236}">
-                <a16:creationId xmlns:a16="http://schemas.microsoft.com/office/drawing/2014/main" id="{3AAA8A7D-CC3B-5738-F0C5-B0BDDFE6B34D}"/>
+                <a16:creationId xmlns:a16="http://schemas.microsoft.com/office/drawing/2014/main" id="{D0FB5C84-46A8-5D91-C37B-B254CC89F642}"/>
               </a:ext>
             </a:extLst>
           </p:cNvPr>
@@ -7275,7 +7275,7 @@
           <p:cNvPr id="13" name="AutoShape 84">
             <a:extLst>
               <a:ext uri="{FF2B5EF4-FFF2-40B4-BE49-F238E27FC236}">
-                <a16:creationId xmlns:a16="http://schemas.microsoft.com/office/drawing/2014/main" id="{FF9062BA-413F-243D-3423-32ABE777D817}"/>
+                <a16:creationId xmlns:a16="http://schemas.microsoft.com/office/drawing/2014/main" id="{869757FF-1060-21EC-66F4-4C9D82903A07}"/>
               </a:ext>
             </a:extLst>
           </p:cNvPr>
@@ -7321,7 +7321,7 @@
           <p:cNvPr id="14" name="AutoShape 85">
             <a:extLst>
               <a:ext uri="{FF2B5EF4-FFF2-40B4-BE49-F238E27FC236}">
-                <a16:creationId xmlns:a16="http://schemas.microsoft.com/office/drawing/2014/main" id="{8D29C739-E08F-F95E-4208-53D4A6A00D48}"/>
+                <a16:creationId xmlns:a16="http://schemas.microsoft.com/office/drawing/2014/main" id="{E6D1A1F4-FA84-9391-0D9C-16595671CB28}"/>
               </a:ext>
             </a:extLst>
           </p:cNvPr>
@@ -7367,7 +7367,7 @@
           <p:cNvPr id="15" name="AutoShape 86">
             <a:extLst>
               <a:ext uri="{FF2B5EF4-FFF2-40B4-BE49-F238E27FC236}">
-                <a16:creationId xmlns:a16="http://schemas.microsoft.com/office/drawing/2014/main" id="{71EDCB9A-B0B1-1F50-47D2-08AFA0DDA624}"/>
+                <a16:creationId xmlns:a16="http://schemas.microsoft.com/office/drawing/2014/main" id="{4F55357B-3A76-FFA2-E8B5-7D00CA5B2D27}"/>
               </a:ext>
             </a:extLst>
           </p:cNvPr>
@@ -7413,7 +7413,7 @@
           <p:cNvPr id="16" name="AutoShape 87">
             <a:extLst>
               <a:ext uri="{FF2B5EF4-FFF2-40B4-BE49-F238E27FC236}">
-                <a16:creationId xmlns:a16="http://schemas.microsoft.com/office/drawing/2014/main" id="{68E04FBF-1F73-EA37-02D9-83B9945DB947}"/>
+                <a16:creationId xmlns:a16="http://schemas.microsoft.com/office/drawing/2014/main" id="{C1F6BDEE-F579-209A-777E-B7646F9DAC84}"/>
               </a:ext>
             </a:extLst>
           </p:cNvPr>
@@ -7459,7 +7459,7 @@
           <p:cNvPr id="17" name="AutoShape 88">
             <a:extLst>
               <a:ext uri="{FF2B5EF4-FFF2-40B4-BE49-F238E27FC236}">
-                <a16:creationId xmlns:a16="http://schemas.microsoft.com/office/drawing/2014/main" id="{DE327137-886E-B7F4-B801-AE1781980E76}"/>
+                <a16:creationId xmlns:a16="http://schemas.microsoft.com/office/drawing/2014/main" id="{276148B9-93D6-D3D4-869E-FCA28823E65C}"/>
               </a:ext>
             </a:extLst>
           </p:cNvPr>
@@ -7505,7 +7505,7 @@
           <p:cNvPr id="18" name="AutoShape 89">
             <a:extLst>
               <a:ext uri="{FF2B5EF4-FFF2-40B4-BE49-F238E27FC236}">
-                <a16:creationId xmlns:a16="http://schemas.microsoft.com/office/drawing/2014/main" id="{9974985A-90F4-CDE0-FAF6-F0BFB142E2AF}"/>
+                <a16:creationId xmlns:a16="http://schemas.microsoft.com/office/drawing/2014/main" id="{27273CBB-A809-75F0-1DA8-2CF1003C8FBC}"/>
               </a:ext>
             </a:extLst>
           </p:cNvPr>
@@ -7551,7 +7551,7 @@
           <p:cNvPr id="19" name="AutoShape 90">
             <a:extLst>
               <a:ext uri="{FF2B5EF4-FFF2-40B4-BE49-F238E27FC236}">
-                <a16:creationId xmlns:a16="http://schemas.microsoft.com/office/drawing/2014/main" id="{5FC720C1-DB3A-2681-0A09-B47BA70A073E}"/>
+                <a16:creationId xmlns:a16="http://schemas.microsoft.com/office/drawing/2014/main" id="{BB468E46-DCF5-AF72-B75D-7436A7ABDB4A}"/>
               </a:ext>
             </a:extLst>
           </p:cNvPr>
@@ -7597,7 +7597,7 @@
           <p:cNvPr id="20" name="AutoShape 91">
             <a:extLst>
               <a:ext uri="{FF2B5EF4-FFF2-40B4-BE49-F238E27FC236}">
-                <a16:creationId xmlns:a16="http://schemas.microsoft.com/office/drawing/2014/main" id="{4AC26122-95F2-7D41-BA2E-C2FA81E83E6F}"/>
+                <a16:creationId xmlns:a16="http://schemas.microsoft.com/office/drawing/2014/main" id="{D56E595B-F506-7865-66B0-0796F1D15B56}"/>
               </a:ext>
             </a:extLst>
           </p:cNvPr>
@@ -7643,7 +7643,7 @@
           <p:cNvPr id="21" name="AutoShape 92">
             <a:extLst>
               <a:ext uri="{FF2B5EF4-FFF2-40B4-BE49-F238E27FC236}">
-                <a16:creationId xmlns:a16="http://schemas.microsoft.com/office/drawing/2014/main" id="{E9E16572-67C1-1CCA-5AA0-96EE4CF12446}"/>
+                <a16:creationId xmlns:a16="http://schemas.microsoft.com/office/drawing/2014/main" id="{D38CC3D2-9A30-D939-BA7A-84279AA4ACEF}"/>
               </a:ext>
             </a:extLst>
           </p:cNvPr>
@@ -7689,7 +7689,7 @@
           <p:cNvPr id="22" name="AutoShape 93">
             <a:extLst>
               <a:ext uri="{FF2B5EF4-FFF2-40B4-BE49-F238E27FC236}">
-                <a16:creationId xmlns:a16="http://schemas.microsoft.com/office/drawing/2014/main" id="{86D7697B-3F6C-344A-E88B-5EE3D9267752}"/>
+                <a16:creationId xmlns:a16="http://schemas.microsoft.com/office/drawing/2014/main" id="{65575887-16DE-6283-7F45-E007030FE368}"/>
               </a:ext>
             </a:extLst>
           </p:cNvPr>
@@ -7735,7 +7735,7 @@
           <p:cNvPr id="23" name="AutoShape 94">
             <a:extLst>
               <a:ext uri="{FF2B5EF4-FFF2-40B4-BE49-F238E27FC236}">
-                <a16:creationId xmlns:a16="http://schemas.microsoft.com/office/drawing/2014/main" id="{C91B3F42-C914-B005-2E5E-F33E064CA432}"/>
+                <a16:creationId xmlns:a16="http://schemas.microsoft.com/office/drawing/2014/main" id="{F892B977-9244-62CA-EB92-C8C19F791452}"/>
               </a:ext>
             </a:extLst>
           </p:cNvPr>
@@ -7781,7 +7781,7 @@
           <p:cNvPr id="24" name="AutoShape 95">
             <a:extLst>
               <a:ext uri="{FF2B5EF4-FFF2-40B4-BE49-F238E27FC236}">
-                <a16:creationId xmlns:a16="http://schemas.microsoft.com/office/drawing/2014/main" id="{BCC53842-6AF8-532E-82A0-EC4179FC8E39}"/>
+                <a16:creationId xmlns:a16="http://schemas.microsoft.com/office/drawing/2014/main" id="{591E346F-9193-36C8-6A9C-2CDAE6B0F72A}"/>
               </a:ext>
             </a:extLst>
           </p:cNvPr>
@@ -7827,7 +7827,7 @@
           <p:cNvPr id="25" name="AutoShape 96">
             <a:extLst>
               <a:ext uri="{FF2B5EF4-FFF2-40B4-BE49-F238E27FC236}">
-                <a16:creationId xmlns:a16="http://schemas.microsoft.com/office/drawing/2014/main" id="{8394C634-5742-FFD0-4C8D-85974DB995F7}"/>
+                <a16:creationId xmlns:a16="http://schemas.microsoft.com/office/drawing/2014/main" id="{7FA24E8F-682B-ED9B-ECB9-DC626275EFB9}"/>
               </a:ext>
             </a:extLst>
           </p:cNvPr>
@@ -7871,7 +7871,7 @@
     </p:spTree>
     <p:extLst>
       <p:ext uri="{BB962C8B-B14F-4D97-AF65-F5344CB8AC3E}">
-        <p14:creationId xmlns:p14="http://schemas.microsoft.com/office/powerpoint/2010/main" val="2056289696"/>
+        <p14:creationId xmlns:p14="http://schemas.microsoft.com/office/powerpoint/2010/main" val="1494305380"/>
       </p:ext>
     </p:extLst>
   </p:cSld>
@@ -7903,7 +7903,7 @@
           <p:cNvPr id="2" name="AutoShape 97">
             <a:extLst>
               <a:ext uri="{FF2B5EF4-FFF2-40B4-BE49-F238E27FC236}">
-                <a16:creationId xmlns:a16="http://schemas.microsoft.com/office/drawing/2014/main" id="{1C845B49-03D2-662B-B85C-EA5A0351BB30}"/>
+                <a16:creationId xmlns:a16="http://schemas.microsoft.com/office/drawing/2014/main" id="{E569FA3A-6ACF-4786-A2DF-B536371B8CE6}"/>
               </a:ext>
             </a:extLst>
           </p:cNvPr>
@@ -7949,7 +7949,7 @@
           <p:cNvPr id="3" name="AutoShape 98">
             <a:extLst>
               <a:ext uri="{FF2B5EF4-FFF2-40B4-BE49-F238E27FC236}">
-                <a16:creationId xmlns:a16="http://schemas.microsoft.com/office/drawing/2014/main" id="{72382E56-E2A5-7CB2-8FF4-B048BAA84782}"/>
+                <a16:creationId xmlns:a16="http://schemas.microsoft.com/office/drawing/2014/main" id="{31DB1B68-93EE-6D83-0E9F-4D87E0243C63}"/>
               </a:ext>
             </a:extLst>
           </p:cNvPr>
@@ -7995,7 +7995,7 @@
           <p:cNvPr id="4" name="AutoShape 99">
             <a:extLst>
               <a:ext uri="{FF2B5EF4-FFF2-40B4-BE49-F238E27FC236}">
-                <a16:creationId xmlns:a16="http://schemas.microsoft.com/office/drawing/2014/main" id="{4E68646C-DC40-8952-6946-D5C7A461573E}"/>
+                <a16:creationId xmlns:a16="http://schemas.microsoft.com/office/drawing/2014/main" id="{B3CDDFDC-DEBE-A3FC-76D5-371F75DE8C1F}"/>
               </a:ext>
             </a:extLst>
           </p:cNvPr>
@@ -8041,7 +8041,7 @@
           <p:cNvPr id="5" name="AutoShape 100">
             <a:extLst>
               <a:ext uri="{FF2B5EF4-FFF2-40B4-BE49-F238E27FC236}">
-                <a16:creationId xmlns:a16="http://schemas.microsoft.com/office/drawing/2014/main" id="{B7C6F1C5-4F14-475F-7A24-2225F6FC2783}"/>
+                <a16:creationId xmlns:a16="http://schemas.microsoft.com/office/drawing/2014/main" id="{9364E2CA-5792-5DF0-2E95-38B5E9F7E651}"/>
               </a:ext>
             </a:extLst>
           </p:cNvPr>
@@ -8087,7 +8087,7 @@
           <p:cNvPr id="6" name="AutoShape 101">
             <a:extLst>
               <a:ext uri="{FF2B5EF4-FFF2-40B4-BE49-F238E27FC236}">
-                <a16:creationId xmlns:a16="http://schemas.microsoft.com/office/drawing/2014/main" id="{ED09BE50-380C-C47A-E6DC-E80CBDA2B095}"/>
+                <a16:creationId xmlns:a16="http://schemas.microsoft.com/office/drawing/2014/main" id="{C07AD75F-5666-2F45-8E5B-E5312CB62AFF}"/>
               </a:ext>
             </a:extLst>
           </p:cNvPr>
@@ -8133,7 +8133,7 @@
           <p:cNvPr id="7" name="AutoShape 102">
             <a:extLst>
               <a:ext uri="{FF2B5EF4-FFF2-40B4-BE49-F238E27FC236}">
-                <a16:creationId xmlns:a16="http://schemas.microsoft.com/office/drawing/2014/main" id="{1A755BCF-1CD1-6B24-2FE9-AF2612BA0B49}"/>
+                <a16:creationId xmlns:a16="http://schemas.microsoft.com/office/drawing/2014/main" id="{66384FC1-32E2-C4FF-271D-C87FEC699009}"/>
               </a:ext>
             </a:extLst>
           </p:cNvPr>
@@ -8179,7 +8179,7 @@
           <p:cNvPr id="8" name="AutoShape 103">
             <a:extLst>
               <a:ext uri="{FF2B5EF4-FFF2-40B4-BE49-F238E27FC236}">
-                <a16:creationId xmlns:a16="http://schemas.microsoft.com/office/drawing/2014/main" id="{402FF60A-6846-FA31-B448-D4DAA711AA1D}"/>
+                <a16:creationId xmlns:a16="http://schemas.microsoft.com/office/drawing/2014/main" id="{CCEDF2D7-E418-3E97-7918-AE61E7E5B7FF}"/>
               </a:ext>
             </a:extLst>
           </p:cNvPr>
@@ -8225,7 +8225,7 @@
           <p:cNvPr id="9" name="AutoShape 104">
             <a:extLst>
               <a:ext uri="{FF2B5EF4-FFF2-40B4-BE49-F238E27FC236}">
-                <a16:creationId xmlns:a16="http://schemas.microsoft.com/office/drawing/2014/main" id="{4DD6F35C-1B02-4BF8-035D-F074EFF3A995}"/>
+                <a16:creationId xmlns:a16="http://schemas.microsoft.com/office/drawing/2014/main" id="{B8D2A149-5149-716F-E96E-BE61C67A00AB}"/>
               </a:ext>
             </a:extLst>
           </p:cNvPr>
@@ -8271,7 +8271,7 @@
           <p:cNvPr id="10" name="AutoShape 105">
             <a:extLst>
               <a:ext uri="{FF2B5EF4-FFF2-40B4-BE49-F238E27FC236}">
-                <a16:creationId xmlns:a16="http://schemas.microsoft.com/office/drawing/2014/main" id="{7B5D793E-8A8A-ACE2-9830-82B4E1ED37B2}"/>
+                <a16:creationId xmlns:a16="http://schemas.microsoft.com/office/drawing/2014/main" id="{352A49F3-7B40-81BA-F12C-970DBA6EC8C6}"/>
               </a:ext>
             </a:extLst>
           </p:cNvPr>
@@ -8317,7 +8317,7 @@
           <p:cNvPr id="11" name="AutoShape 106">
             <a:extLst>
               <a:ext uri="{FF2B5EF4-FFF2-40B4-BE49-F238E27FC236}">
-                <a16:creationId xmlns:a16="http://schemas.microsoft.com/office/drawing/2014/main" id="{299CEFFF-5BF7-316B-5A86-6471846F67ED}"/>
+                <a16:creationId xmlns:a16="http://schemas.microsoft.com/office/drawing/2014/main" id="{93D63663-422A-AEB6-9451-6C8F80DA44E5}"/>
               </a:ext>
             </a:extLst>
           </p:cNvPr>
@@ -8363,7 +8363,7 @@
           <p:cNvPr id="12" name="AutoShape 107">
             <a:extLst>
               <a:ext uri="{FF2B5EF4-FFF2-40B4-BE49-F238E27FC236}">
-                <a16:creationId xmlns:a16="http://schemas.microsoft.com/office/drawing/2014/main" id="{0DA7EAEA-D9F0-CFCE-1C38-9C4FE8A37F81}"/>
+                <a16:creationId xmlns:a16="http://schemas.microsoft.com/office/drawing/2014/main" id="{B2E81583-9560-6053-EAE7-78566DE03329}"/>
               </a:ext>
             </a:extLst>
           </p:cNvPr>
@@ -8409,7 +8409,7 @@
           <p:cNvPr id="13" name="AutoShape 108">
             <a:extLst>
               <a:ext uri="{FF2B5EF4-FFF2-40B4-BE49-F238E27FC236}">
-                <a16:creationId xmlns:a16="http://schemas.microsoft.com/office/drawing/2014/main" id="{8D0D5B53-09E7-691D-AFD1-7DC6A8C0F2E4}"/>
+                <a16:creationId xmlns:a16="http://schemas.microsoft.com/office/drawing/2014/main" id="{764AEDAF-2C5B-5D94-65CE-7A2AE9F5B26A}"/>
               </a:ext>
             </a:extLst>
           </p:cNvPr>
@@ -8455,7 +8455,7 @@
           <p:cNvPr id="14" name="AutoShape 109">
             <a:extLst>
               <a:ext uri="{FF2B5EF4-FFF2-40B4-BE49-F238E27FC236}">
-                <a16:creationId xmlns:a16="http://schemas.microsoft.com/office/drawing/2014/main" id="{55807DFA-2927-EE8A-EDFF-FA201FBABFE4}"/>
+                <a16:creationId xmlns:a16="http://schemas.microsoft.com/office/drawing/2014/main" id="{84403E13-3720-345C-D436-FA62A7FA2D54}"/>
               </a:ext>
             </a:extLst>
           </p:cNvPr>
@@ -8501,7 +8501,7 @@
           <p:cNvPr id="15" name="AutoShape 110">
             <a:extLst>
               <a:ext uri="{FF2B5EF4-FFF2-40B4-BE49-F238E27FC236}">
-                <a16:creationId xmlns:a16="http://schemas.microsoft.com/office/drawing/2014/main" id="{0076D044-14F8-4F23-E310-88C2A959223A}"/>
+                <a16:creationId xmlns:a16="http://schemas.microsoft.com/office/drawing/2014/main" id="{94D07C10-A7AE-1F3E-5DD8-E955E4097A4A}"/>
               </a:ext>
             </a:extLst>
           </p:cNvPr>
@@ -8547,7 +8547,7 @@
           <p:cNvPr id="16" name="AutoShape 111">
             <a:extLst>
               <a:ext uri="{FF2B5EF4-FFF2-40B4-BE49-F238E27FC236}">
-                <a16:creationId xmlns:a16="http://schemas.microsoft.com/office/drawing/2014/main" id="{80516221-224E-C0F3-8B24-52DF575C2A1C}"/>
+                <a16:creationId xmlns:a16="http://schemas.microsoft.com/office/drawing/2014/main" id="{675C0CED-3D61-E1CE-0F2E-62A5D6397262}"/>
               </a:ext>
             </a:extLst>
           </p:cNvPr>
@@ -8593,7 +8593,7 @@
           <p:cNvPr id="17" name="AutoShape 112">
             <a:extLst>
               <a:ext uri="{FF2B5EF4-FFF2-40B4-BE49-F238E27FC236}">
-                <a16:creationId xmlns:a16="http://schemas.microsoft.com/office/drawing/2014/main" id="{87A78112-AE5E-7E47-B131-B2E88E2FD9C4}"/>
+                <a16:creationId xmlns:a16="http://schemas.microsoft.com/office/drawing/2014/main" id="{E782FAEA-C98B-AF07-D1D1-D31BECDE1DA5}"/>
               </a:ext>
             </a:extLst>
           </p:cNvPr>
@@ -8639,7 +8639,7 @@
           <p:cNvPr id="18" name="AutoShape 113">
             <a:extLst>
               <a:ext uri="{FF2B5EF4-FFF2-40B4-BE49-F238E27FC236}">
-                <a16:creationId xmlns:a16="http://schemas.microsoft.com/office/drawing/2014/main" id="{E814C23A-4BD2-D751-D1DB-0FDCE1BE7F1B}"/>
+                <a16:creationId xmlns:a16="http://schemas.microsoft.com/office/drawing/2014/main" id="{13A35000-5AD1-BD46-8EEB-88BA0B2B6079}"/>
               </a:ext>
             </a:extLst>
           </p:cNvPr>
@@ -8685,7 +8685,7 @@
           <p:cNvPr id="19" name="AutoShape 114">
             <a:extLst>
               <a:ext uri="{FF2B5EF4-FFF2-40B4-BE49-F238E27FC236}">
-                <a16:creationId xmlns:a16="http://schemas.microsoft.com/office/drawing/2014/main" id="{C3567B12-DC96-9F6A-DCE6-700D0F51F0C1}"/>
+                <a16:creationId xmlns:a16="http://schemas.microsoft.com/office/drawing/2014/main" id="{C0A261DC-CEA6-D7B5-DC20-3EA5DC320966}"/>
               </a:ext>
             </a:extLst>
           </p:cNvPr>
@@ -8731,7 +8731,7 @@
           <p:cNvPr id="20" name="AutoShape 115">
             <a:extLst>
               <a:ext uri="{FF2B5EF4-FFF2-40B4-BE49-F238E27FC236}">
-                <a16:creationId xmlns:a16="http://schemas.microsoft.com/office/drawing/2014/main" id="{468D1832-4946-D922-F95B-A5C5981DFE6C}"/>
+                <a16:creationId xmlns:a16="http://schemas.microsoft.com/office/drawing/2014/main" id="{4C220BD8-84F3-5097-1DEA-B238B6BF2702}"/>
               </a:ext>
             </a:extLst>
           </p:cNvPr>
@@ -8777,7 +8777,7 @@
           <p:cNvPr id="21" name="AutoShape 116">
             <a:extLst>
               <a:ext uri="{FF2B5EF4-FFF2-40B4-BE49-F238E27FC236}">
-                <a16:creationId xmlns:a16="http://schemas.microsoft.com/office/drawing/2014/main" id="{C12968CC-C0DF-3B75-1602-3B4820C97B6E}"/>
+                <a16:creationId xmlns:a16="http://schemas.microsoft.com/office/drawing/2014/main" id="{59C8CD50-A2F7-03E5-5265-BD5B085A2BA0}"/>
               </a:ext>
             </a:extLst>
           </p:cNvPr>
@@ -8823,7 +8823,7 @@
           <p:cNvPr id="22" name="AutoShape 117">
             <a:extLst>
               <a:ext uri="{FF2B5EF4-FFF2-40B4-BE49-F238E27FC236}">
-                <a16:creationId xmlns:a16="http://schemas.microsoft.com/office/drawing/2014/main" id="{A07EA0C3-5C77-FFAE-AD76-37FC134B44F1}"/>
+                <a16:creationId xmlns:a16="http://schemas.microsoft.com/office/drawing/2014/main" id="{CFE4119D-DC39-C8D2-D5C7-DE5EE2AF2984}"/>
               </a:ext>
             </a:extLst>
           </p:cNvPr>
@@ -8869,7 +8869,7 @@
           <p:cNvPr id="23" name="AutoShape 118">
             <a:extLst>
               <a:ext uri="{FF2B5EF4-FFF2-40B4-BE49-F238E27FC236}">
-                <a16:creationId xmlns:a16="http://schemas.microsoft.com/office/drawing/2014/main" id="{E80F000C-0F16-A42B-E251-DAD0578A4DE1}"/>
+                <a16:creationId xmlns:a16="http://schemas.microsoft.com/office/drawing/2014/main" id="{F501463C-3190-03DB-5399-E732AD19ADE0}"/>
               </a:ext>
             </a:extLst>
           </p:cNvPr>
@@ -8915,7 +8915,7 @@
           <p:cNvPr id="24" name="AutoShape 119">
             <a:extLst>
               <a:ext uri="{FF2B5EF4-FFF2-40B4-BE49-F238E27FC236}">
-                <a16:creationId xmlns:a16="http://schemas.microsoft.com/office/drawing/2014/main" id="{5DEA4961-8D96-A7B5-5631-E72009EE6935}"/>
+                <a16:creationId xmlns:a16="http://schemas.microsoft.com/office/drawing/2014/main" id="{94D44A89-EA1E-3D6F-39A2-4B2026EACAFB}"/>
               </a:ext>
             </a:extLst>
           </p:cNvPr>
@@ -8961,7 +8961,7 @@
           <p:cNvPr id="25" name="AutoShape 120">
             <a:extLst>
               <a:ext uri="{FF2B5EF4-FFF2-40B4-BE49-F238E27FC236}">
-                <a16:creationId xmlns:a16="http://schemas.microsoft.com/office/drawing/2014/main" id="{3059D0EE-4F68-EE09-8E60-4D57775078D9}"/>
+                <a16:creationId xmlns:a16="http://schemas.microsoft.com/office/drawing/2014/main" id="{B4025DC6-3AFE-4E53-965D-67A65693DE4C}"/>
               </a:ext>
             </a:extLst>
           </p:cNvPr>
@@ -9005,7 +9005,7 @@
     </p:spTree>
     <p:extLst>
       <p:ext uri="{BB962C8B-B14F-4D97-AF65-F5344CB8AC3E}">
-        <p14:creationId xmlns:p14="http://schemas.microsoft.com/office/powerpoint/2010/main" val="678273618"/>
+        <p14:creationId xmlns:p14="http://schemas.microsoft.com/office/powerpoint/2010/main" val="95760377"/>
       </p:ext>
     </p:extLst>
   </p:cSld>
@@ -9037,7 +9037,7 @@
           <p:cNvPr id="2" name="AutoShape 121">
             <a:extLst>
               <a:ext uri="{FF2B5EF4-FFF2-40B4-BE49-F238E27FC236}">
-                <a16:creationId xmlns:a16="http://schemas.microsoft.com/office/drawing/2014/main" id="{01502256-3362-456E-4843-C6CD5048BE2F}"/>
+                <a16:creationId xmlns:a16="http://schemas.microsoft.com/office/drawing/2014/main" id="{25C6A604-D2BC-B920-6A95-8CD74281AF93}"/>
               </a:ext>
             </a:extLst>
           </p:cNvPr>
@@ -9083,7 +9083,7 @@
           <p:cNvPr id="3" name="AutoShape 122">
             <a:extLst>
               <a:ext uri="{FF2B5EF4-FFF2-40B4-BE49-F238E27FC236}">
-                <a16:creationId xmlns:a16="http://schemas.microsoft.com/office/drawing/2014/main" id="{55EEBA8A-6066-4339-3455-A79643CB3629}"/>
+                <a16:creationId xmlns:a16="http://schemas.microsoft.com/office/drawing/2014/main" id="{C3F6AAB6-FE14-B513-0C17-4451C0CB5656}"/>
               </a:ext>
             </a:extLst>
           </p:cNvPr>
@@ -9129,7 +9129,7 @@
           <p:cNvPr id="4" name="AutoShape 123">
             <a:extLst>
               <a:ext uri="{FF2B5EF4-FFF2-40B4-BE49-F238E27FC236}">
-                <a16:creationId xmlns:a16="http://schemas.microsoft.com/office/drawing/2014/main" id="{23108513-0934-4A2A-A7BD-886EDE93F7C5}"/>
+                <a16:creationId xmlns:a16="http://schemas.microsoft.com/office/drawing/2014/main" id="{C184C781-1480-9977-2657-F6E01952C187}"/>
               </a:ext>
             </a:extLst>
           </p:cNvPr>
@@ -9175,7 +9175,7 @@
           <p:cNvPr id="5" name="AutoShape 124">
             <a:extLst>
               <a:ext uri="{FF2B5EF4-FFF2-40B4-BE49-F238E27FC236}">
-                <a16:creationId xmlns:a16="http://schemas.microsoft.com/office/drawing/2014/main" id="{CDC45992-A5F7-6FE1-9D68-1F9CB9F2BF05}"/>
+                <a16:creationId xmlns:a16="http://schemas.microsoft.com/office/drawing/2014/main" id="{5A9BF1CC-01AC-F7FE-BBDB-279DC8673C97}"/>
               </a:ext>
             </a:extLst>
           </p:cNvPr>
@@ -9221,7 +9221,7 @@
           <p:cNvPr id="6" name="AutoShape 125">
             <a:extLst>
               <a:ext uri="{FF2B5EF4-FFF2-40B4-BE49-F238E27FC236}">
-                <a16:creationId xmlns:a16="http://schemas.microsoft.com/office/drawing/2014/main" id="{20FCAE48-EB66-7617-F4B1-21E8D3D5D11F}"/>
+                <a16:creationId xmlns:a16="http://schemas.microsoft.com/office/drawing/2014/main" id="{15AE6B6D-2B08-9C4B-F798-2BEC0AFF860F}"/>
               </a:ext>
             </a:extLst>
           </p:cNvPr>
@@ -9267,7 +9267,7 @@
           <p:cNvPr id="7" name="AutoShape 126">
             <a:extLst>
               <a:ext uri="{FF2B5EF4-FFF2-40B4-BE49-F238E27FC236}">
-                <a16:creationId xmlns:a16="http://schemas.microsoft.com/office/drawing/2014/main" id="{155C6FB0-4214-CB36-CEB5-88E247C9CB1C}"/>
+                <a16:creationId xmlns:a16="http://schemas.microsoft.com/office/drawing/2014/main" id="{1DC95B18-F768-4D89-15B9-C53449C867F0}"/>
               </a:ext>
             </a:extLst>
           </p:cNvPr>
@@ -9313,7 +9313,7 @@
           <p:cNvPr id="8" name="AutoShape 127">
             <a:extLst>
               <a:ext uri="{FF2B5EF4-FFF2-40B4-BE49-F238E27FC236}">
-                <a16:creationId xmlns:a16="http://schemas.microsoft.com/office/drawing/2014/main" id="{9300E69E-88B1-4238-3153-B2810AE29964}"/>
+                <a16:creationId xmlns:a16="http://schemas.microsoft.com/office/drawing/2014/main" id="{80A37CBC-246B-72BB-C868-C1933B09D1B0}"/>
               </a:ext>
             </a:extLst>
           </p:cNvPr>
@@ -9359,7 +9359,7 @@
           <p:cNvPr id="9" name="AutoShape 128">
             <a:extLst>
               <a:ext uri="{FF2B5EF4-FFF2-40B4-BE49-F238E27FC236}">
-                <a16:creationId xmlns:a16="http://schemas.microsoft.com/office/drawing/2014/main" id="{60CA7DAF-931B-F0D4-87A3-8F35F1DC51F5}"/>
+                <a16:creationId xmlns:a16="http://schemas.microsoft.com/office/drawing/2014/main" id="{5E984B8C-0044-AB23-9C7F-9848E3D47476}"/>
               </a:ext>
             </a:extLst>
           </p:cNvPr>
@@ -9405,7 +9405,7 @@
           <p:cNvPr id="10" name="AutoShape 129">
             <a:extLst>
               <a:ext uri="{FF2B5EF4-FFF2-40B4-BE49-F238E27FC236}">
-                <a16:creationId xmlns:a16="http://schemas.microsoft.com/office/drawing/2014/main" id="{A0AB98EB-CD95-E84C-C50E-45EC088FDDEC}"/>
+                <a16:creationId xmlns:a16="http://schemas.microsoft.com/office/drawing/2014/main" id="{5F1B44A9-78F7-C2B3-78E4-3E8D0F75AED3}"/>
               </a:ext>
             </a:extLst>
           </p:cNvPr>
@@ -9451,7 +9451,7 @@
           <p:cNvPr id="11" name="AutoShape 130">
             <a:extLst>
               <a:ext uri="{FF2B5EF4-FFF2-40B4-BE49-F238E27FC236}">
-                <a16:creationId xmlns:a16="http://schemas.microsoft.com/office/drawing/2014/main" id="{A16B952E-3EFE-1BE2-80C1-472B7B397DCF}"/>
+                <a16:creationId xmlns:a16="http://schemas.microsoft.com/office/drawing/2014/main" id="{22EDDD77-9559-E285-C928-56273D3E6BD7}"/>
               </a:ext>
             </a:extLst>
           </p:cNvPr>
@@ -9497,7 +9497,7 @@
           <p:cNvPr id="12" name="AutoShape 131">
             <a:extLst>
               <a:ext uri="{FF2B5EF4-FFF2-40B4-BE49-F238E27FC236}">
-                <a16:creationId xmlns:a16="http://schemas.microsoft.com/office/drawing/2014/main" id="{368AF8E4-C908-C8E4-2E69-C136EE8263BD}"/>
+                <a16:creationId xmlns:a16="http://schemas.microsoft.com/office/drawing/2014/main" id="{0CF3D93F-F548-5EC4-32CE-58E0BE3D1DF6}"/>
               </a:ext>
             </a:extLst>
           </p:cNvPr>
@@ -9543,7 +9543,7 @@
           <p:cNvPr id="13" name="AutoShape 132">
             <a:extLst>
               <a:ext uri="{FF2B5EF4-FFF2-40B4-BE49-F238E27FC236}">
-                <a16:creationId xmlns:a16="http://schemas.microsoft.com/office/drawing/2014/main" id="{404ED2A2-D483-A12D-62D7-083F3EE4646D}"/>
+                <a16:creationId xmlns:a16="http://schemas.microsoft.com/office/drawing/2014/main" id="{7F3AF35B-AC15-CD03-68C1-1ED7B152601F}"/>
               </a:ext>
             </a:extLst>
           </p:cNvPr>
@@ -9589,7 +9589,7 @@
           <p:cNvPr id="14" name="AutoShape 133">
             <a:extLst>
               <a:ext uri="{FF2B5EF4-FFF2-40B4-BE49-F238E27FC236}">
-                <a16:creationId xmlns:a16="http://schemas.microsoft.com/office/drawing/2014/main" id="{5C0FDF7A-96EB-AE79-0CCE-891FB1F834E3}"/>
+                <a16:creationId xmlns:a16="http://schemas.microsoft.com/office/drawing/2014/main" id="{75DD24C7-F596-F887-80DF-CA62E58E0D29}"/>
               </a:ext>
             </a:extLst>
           </p:cNvPr>
@@ -9635,7 +9635,7 @@
           <p:cNvPr id="15" name="AutoShape 134">
             <a:extLst>
               <a:ext uri="{FF2B5EF4-FFF2-40B4-BE49-F238E27FC236}">
-                <a16:creationId xmlns:a16="http://schemas.microsoft.com/office/drawing/2014/main" id="{F573AF83-A039-A085-80AC-DFEEE4C2B9B9}"/>
+                <a16:creationId xmlns:a16="http://schemas.microsoft.com/office/drawing/2014/main" id="{FB9874DA-1971-A40F-E4BD-A4D9E10FE077}"/>
               </a:ext>
             </a:extLst>
           </p:cNvPr>
@@ -9681,7 +9681,7 @@
           <p:cNvPr id="16" name="AutoShape 135">
             <a:extLst>
               <a:ext uri="{FF2B5EF4-FFF2-40B4-BE49-F238E27FC236}">
-                <a16:creationId xmlns:a16="http://schemas.microsoft.com/office/drawing/2014/main" id="{7873E5C3-2546-4E4B-6DF2-27C224983252}"/>
+                <a16:creationId xmlns:a16="http://schemas.microsoft.com/office/drawing/2014/main" id="{28E36A17-8F18-1DBB-57F0-7119A5F75B9A}"/>
               </a:ext>
             </a:extLst>
           </p:cNvPr>
@@ -9727,7 +9727,7 @@
           <p:cNvPr id="17" name="AutoShape 136">
             <a:extLst>
               <a:ext uri="{FF2B5EF4-FFF2-40B4-BE49-F238E27FC236}">
-                <a16:creationId xmlns:a16="http://schemas.microsoft.com/office/drawing/2014/main" id="{00C0261F-D428-9A43-6809-F31B3AAB40C4}"/>
+                <a16:creationId xmlns:a16="http://schemas.microsoft.com/office/drawing/2014/main" id="{4031753D-141D-0984-0CF3-D3EE1061007C}"/>
               </a:ext>
             </a:extLst>
           </p:cNvPr>
@@ -9773,7 +9773,7 @@
           <p:cNvPr id="18" name="AutoShape 137">
             <a:extLst>
               <a:ext uri="{FF2B5EF4-FFF2-40B4-BE49-F238E27FC236}">
-                <a16:creationId xmlns:a16="http://schemas.microsoft.com/office/drawing/2014/main" id="{AE89F737-11F5-D6EB-4C6F-C49DE0D79A11}"/>
+                <a16:creationId xmlns:a16="http://schemas.microsoft.com/office/drawing/2014/main" id="{5D7B5F50-4DC3-FF51-BFD2-A188D259BA00}"/>
               </a:ext>
             </a:extLst>
           </p:cNvPr>
@@ -9819,7 +9819,7 @@
           <p:cNvPr id="19" name="AutoShape 139">
             <a:extLst>
               <a:ext uri="{FF2B5EF4-FFF2-40B4-BE49-F238E27FC236}">
-                <a16:creationId xmlns:a16="http://schemas.microsoft.com/office/drawing/2014/main" id="{355782E2-9799-7C89-8DD9-EB87E03F5E3C}"/>
+                <a16:creationId xmlns:a16="http://schemas.microsoft.com/office/drawing/2014/main" id="{43060AAA-AC8B-7535-B9DF-7B07C9FAA7EB}"/>
               </a:ext>
             </a:extLst>
           </p:cNvPr>
@@ -9865,7 +9865,7 @@
           <p:cNvPr id="20" name="AutoShape 140">
             <a:extLst>
               <a:ext uri="{FF2B5EF4-FFF2-40B4-BE49-F238E27FC236}">
-                <a16:creationId xmlns:a16="http://schemas.microsoft.com/office/drawing/2014/main" id="{95CB8580-C014-850A-24D2-0063BA311A29}"/>
+                <a16:creationId xmlns:a16="http://schemas.microsoft.com/office/drawing/2014/main" id="{01A7E5AA-390E-7056-DE2A-A9298B2F6D24}"/>
               </a:ext>
             </a:extLst>
           </p:cNvPr>
@@ -9911,7 +9911,7 @@
           <p:cNvPr id="21" name="AutoShape 141">
             <a:extLst>
               <a:ext uri="{FF2B5EF4-FFF2-40B4-BE49-F238E27FC236}">
-                <a16:creationId xmlns:a16="http://schemas.microsoft.com/office/drawing/2014/main" id="{39FF508F-9116-E6B0-B543-54F15853A8CE}"/>
+                <a16:creationId xmlns:a16="http://schemas.microsoft.com/office/drawing/2014/main" id="{BD606E73-A996-F0E4-FC45-D6F14AB3E030}"/>
               </a:ext>
             </a:extLst>
           </p:cNvPr>
@@ -9961,7 +9961,7 @@
           <p:cNvPr id="22" name="AutoShape 142">
             <a:extLst>
               <a:ext uri="{FF2B5EF4-FFF2-40B4-BE49-F238E27FC236}">
-                <a16:creationId xmlns:a16="http://schemas.microsoft.com/office/drawing/2014/main" id="{E4D17C37-1357-E3CB-DCD2-79EDECD6410A}"/>
+                <a16:creationId xmlns:a16="http://schemas.microsoft.com/office/drawing/2014/main" id="{51AF7B2B-2DCB-62FD-B99E-781B79747A35}"/>
               </a:ext>
             </a:extLst>
           </p:cNvPr>
@@ -10011,7 +10011,7 @@
           <p:cNvPr id="23" name="AutoShape 143">
             <a:extLst>
               <a:ext uri="{FF2B5EF4-FFF2-40B4-BE49-F238E27FC236}">
-                <a16:creationId xmlns:a16="http://schemas.microsoft.com/office/drawing/2014/main" id="{00B71682-53FE-2263-449E-939E8F22846E}"/>
+                <a16:creationId xmlns:a16="http://schemas.microsoft.com/office/drawing/2014/main" id="{355FD566-B5DA-2A2F-83A4-3318AF3A9243}"/>
               </a:ext>
             </a:extLst>
           </p:cNvPr>
@@ -10057,7 +10057,7 @@
           <p:cNvPr id="24" name="AutoShape 144">
             <a:extLst>
               <a:ext uri="{FF2B5EF4-FFF2-40B4-BE49-F238E27FC236}">
-                <a16:creationId xmlns:a16="http://schemas.microsoft.com/office/drawing/2014/main" id="{9F5266E8-697B-9A1B-8F0D-34FC28F228AD}"/>
+                <a16:creationId xmlns:a16="http://schemas.microsoft.com/office/drawing/2014/main" id="{987DBF8D-8ABE-609F-6D14-43354FFA669F}"/>
               </a:ext>
             </a:extLst>
           </p:cNvPr>
@@ -10103,7 +10103,7 @@
           <p:cNvPr id="25" name="AutoShape 145">
             <a:extLst>
               <a:ext uri="{FF2B5EF4-FFF2-40B4-BE49-F238E27FC236}">
-                <a16:creationId xmlns:a16="http://schemas.microsoft.com/office/drawing/2014/main" id="{961D3244-F1C1-DC70-8895-65559FC9D174}"/>
+                <a16:creationId xmlns:a16="http://schemas.microsoft.com/office/drawing/2014/main" id="{BB21BAF4-1A0F-EF5A-B8EC-80484B0CFE62}"/>
               </a:ext>
             </a:extLst>
           </p:cNvPr>
@@ -10147,7 +10147,7 @@
     </p:spTree>
     <p:extLst>
       <p:ext uri="{BB962C8B-B14F-4D97-AF65-F5344CB8AC3E}">
-        <p14:creationId xmlns:p14="http://schemas.microsoft.com/office/powerpoint/2010/main" val="202178005"/>
+        <p14:creationId xmlns:p14="http://schemas.microsoft.com/office/powerpoint/2010/main" val="979608960"/>
       </p:ext>
     </p:extLst>
   </p:cSld>
@@ -10179,7 +10179,7 @@
           <p:cNvPr id="2" name="AutoShape 146">
             <a:extLst>
               <a:ext uri="{FF2B5EF4-FFF2-40B4-BE49-F238E27FC236}">
-                <a16:creationId xmlns:a16="http://schemas.microsoft.com/office/drawing/2014/main" id="{D16011B8-3AF5-502E-6D92-12738464C147}"/>
+                <a16:creationId xmlns:a16="http://schemas.microsoft.com/office/drawing/2014/main" id="{F788C881-17FD-10E8-17D0-C459A28BD12F}"/>
               </a:ext>
             </a:extLst>
           </p:cNvPr>
@@ -10225,7 +10225,7 @@
           <p:cNvPr id="3" name="AutoShape 147">
             <a:extLst>
               <a:ext uri="{FF2B5EF4-FFF2-40B4-BE49-F238E27FC236}">
-                <a16:creationId xmlns:a16="http://schemas.microsoft.com/office/drawing/2014/main" id="{84393AB3-4975-F5FB-9ABD-38F936CD4046}"/>
+                <a16:creationId xmlns:a16="http://schemas.microsoft.com/office/drawing/2014/main" id="{2D56E4D0-4A0E-5E92-5907-A7655D592289}"/>
               </a:ext>
             </a:extLst>
           </p:cNvPr>
@@ -10271,7 +10271,7 @@
           <p:cNvPr id="4" name="AutoShape 148">
             <a:extLst>
               <a:ext uri="{FF2B5EF4-FFF2-40B4-BE49-F238E27FC236}">
-                <a16:creationId xmlns:a16="http://schemas.microsoft.com/office/drawing/2014/main" id="{404C4435-A6AE-E2D0-8059-A52059F676AD}"/>
+                <a16:creationId xmlns:a16="http://schemas.microsoft.com/office/drawing/2014/main" id="{4B586C12-E9D0-A598-E7DA-458FB94DC2E4}"/>
               </a:ext>
             </a:extLst>
           </p:cNvPr>
@@ -10317,7 +10317,7 @@
           <p:cNvPr id="5" name="AutoShape 149">
             <a:extLst>
               <a:ext uri="{FF2B5EF4-FFF2-40B4-BE49-F238E27FC236}">
-                <a16:creationId xmlns:a16="http://schemas.microsoft.com/office/drawing/2014/main" id="{855A648E-84D1-6EF8-13D3-6DE07631CCFF}"/>
+                <a16:creationId xmlns:a16="http://schemas.microsoft.com/office/drawing/2014/main" id="{C32079DE-DB3E-5332-4BC5-5640E5C98C09}"/>
               </a:ext>
             </a:extLst>
           </p:cNvPr>
@@ -10363,7 +10363,7 @@
           <p:cNvPr id="6" name="AutoShape 150">
             <a:extLst>
               <a:ext uri="{FF2B5EF4-FFF2-40B4-BE49-F238E27FC236}">
-                <a16:creationId xmlns:a16="http://schemas.microsoft.com/office/drawing/2014/main" id="{F8740F3C-CCD2-50D9-01DF-66FC2788BE72}"/>
+                <a16:creationId xmlns:a16="http://schemas.microsoft.com/office/drawing/2014/main" id="{1AE8109C-F795-660D-B411-C67571227429}"/>
               </a:ext>
             </a:extLst>
           </p:cNvPr>
@@ -10409,7 +10409,7 @@
           <p:cNvPr id="7" name="AutoShape 151">
             <a:extLst>
               <a:ext uri="{FF2B5EF4-FFF2-40B4-BE49-F238E27FC236}">
-                <a16:creationId xmlns:a16="http://schemas.microsoft.com/office/drawing/2014/main" id="{5C66E934-4424-CDB8-95C2-192E0DD208FE}"/>
+                <a16:creationId xmlns:a16="http://schemas.microsoft.com/office/drawing/2014/main" id="{CFCEEFC3-0619-616E-B2EF-0D6C8824D6E0}"/>
               </a:ext>
             </a:extLst>
           </p:cNvPr>
@@ -10455,7 +10455,7 @@
           <p:cNvPr id="8" name="AutoShape 152">
             <a:extLst>
               <a:ext uri="{FF2B5EF4-FFF2-40B4-BE49-F238E27FC236}">
-                <a16:creationId xmlns:a16="http://schemas.microsoft.com/office/drawing/2014/main" id="{34E0A2DE-17D3-AADE-0FB9-0E7AD538125C}"/>
+                <a16:creationId xmlns:a16="http://schemas.microsoft.com/office/drawing/2014/main" id="{0D05DE39-55EC-BFCD-88B6-B448A0C06939}"/>
               </a:ext>
             </a:extLst>
           </p:cNvPr>
@@ -10501,7 +10501,7 @@
           <p:cNvPr id="9" name="AutoShape 153">
             <a:extLst>
               <a:ext uri="{FF2B5EF4-FFF2-40B4-BE49-F238E27FC236}">
-                <a16:creationId xmlns:a16="http://schemas.microsoft.com/office/drawing/2014/main" id="{C90CB17E-E8BC-3D23-30D0-E152ADBC1E27}"/>
+                <a16:creationId xmlns:a16="http://schemas.microsoft.com/office/drawing/2014/main" id="{F5D8BD5D-7568-907C-49DD-1305F9C88AE2}"/>
               </a:ext>
             </a:extLst>
           </p:cNvPr>
@@ -10547,7 +10547,7 @@
           <p:cNvPr id="10" name="AutoShape 154">
             <a:extLst>
               <a:ext uri="{FF2B5EF4-FFF2-40B4-BE49-F238E27FC236}">
-                <a16:creationId xmlns:a16="http://schemas.microsoft.com/office/drawing/2014/main" id="{41A5F76D-1520-1B7D-23CA-9F71A7782DA0}"/>
+                <a16:creationId xmlns:a16="http://schemas.microsoft.com/office/drawing/2014/main" id="{3351266F-CC09-DA8B-D628-CF449D0189D4}"/>
               </a:ext>
             </a:extLst>
           </p:cNvPr>
@@ -10593,7 +10593,7 @@
           <p:cNvPr id="11" name="AutoShape 155">
             <a:extLst>
               <a:ext uri="{FF2B5EF4-FFF2-40B4-BE49-F238E27FC236}">
-                <a16:creationId xmlns:a16="http://schemas.microsoft.com/office/drawing/2014/main" id="{6E43AB41-168C-989C-3DD3-5479ECBD5B9A}"/>
+                <a16:creationId xmlns:a16="http://schemas.microsoft.com/office/drawing/2014/main" id="{1A8808EE-3DE2-8810-7B97-4C3213EBC17A}"/>
               </a:ext>
             </a:extLst>
           </p:cNvPr>
@@ -10639,7 +10639,7 @@
           <p:cNvPr id="12" name="AutoShape 156">
             <a:extLst>
               <a:ext uri="{FF2B5EF4-FFF2-40B4-BE49-F238E27FC236}">
-                <a16:creationId xmlns:a16="http://schemas.microsoft.com/office/drawing/2014/main" id="{D6CE515C-A686-030A-98D5-F0C9A6F27138}"/>
+                <a16:creationId xmlns:a16="http://schemas.microsoft.com/office/drawing/2014/main" id="{0DA0D7BD-7FA1-8057-FC66-02F11344A7C8}"/>
               </a:ext>
             </a:extLst>
           </p:cNvPr>
@@ -10685,7 +10685,7 @@
           <p:cNvPr id="13" name="AutoShape 157">
             <a:extLst>
               <a:ext uri="{FF2B5EF4-FFF2-40B4-BE49-F238E27FC236}">
-                <a16:creationId xmlns:a16="http://schemas.microsoft.com/office/drawing/2014/main" id="{1B295598-38E6-43CD-74BB-D3ECDBC5905C}"/>
+                <a16:creationId xmlns:a16="http://schemas.microsoft.com/office/drawing/2014/main" id="{C6329F41-403B-8291-4DC4-AF2A021D0723}"/>
               </a:ext>
             </a:extLst>
           </p:cNvPr>
@@ -10731,7 +10731,7 @@
           <p:cNvPr id="14" name="AutoShape 158">
             <a:extLst>
               <a:ext uri="{FF2B5EF4-FFF2-40B4-BE49-F238E27FC236}">
-                <a16:creationId xmlns:a16="http://schemas.microsoft.com/office/drawing/2014/main" id="{36C3FC63-DF5A-C441-883B-2183FABAC60A}"/>
+                <a16:creationId xmlns:a16="http://schemas.microsoft.com/office/drawing/2014/main" id="{EA46EAAC-8202-B329-50B7-344E8A8AAD4C}"/>
               </a:ext>
             </a:extLst>
           </p:cNvPr>
@@ -10781,7 +10781,7 @@
           <p:cNvPr id="15" name="AutoShape 159">
             <a:extLst>
               <a:ext uri="{FF2B5EF4-FFF2-40B4-BE49-F238E27FC236}">
-                <a16:creationId xmlns:a16="http://schemas.microsoft.com/office/drawing/2014/main" id="{70F75D78-40E3-00C8-78F7-246CE769A4E0}"/>
+                <a16:creationId xmlns:a16="http://schemas.microsoft.com/office/drawing/2014/main" id="{E7979488-DFAA-5AFB-A3D4-1CF9A8C78937}"/>
               </a:ext>
             </a:extLst>
           </p:cNvPr>
@@ -10831,7 +10831,7 @@
           <p:cNvPr id="16" name="AutoShape 160">
             <a:extLst>
               <a:ext uri="{FF2B5EF4-FFF2-40B4-BE49-F238E27FC236}">
-                <a16:creationId xmlns:a16="http://schemas.microsoft.com/office/drawing/2014/main" id="{0C18E8C6-A4A1-FDE6-E24B-421FACD82416}"/>
+                <a16:creationId xmlns:a16="http://schemas.microsoft.com/office/drawing/2014/main" id="{F62C42CB-D717-481A-AA69-D6EF07C48ADC}"/>
               </a:ext>
             </a:extLst>
           </p:cNvPr>
@@ -10877,7 +10877,7 @@
           <p:cNvPr id="17" name="AutoShape 161">
             <a:extLst>
               <a:ext uri="{FF2B5EF4-FFF2-40B4-BE49-F238E27FC236}">
-                <a16:creationId xmlns:a16="http://schemas.microsoft.com/office/drawing/2014/main" id="{F07572C5-5AC1-4C8F-5777-810E1FD436BC}"/>
+                <a16:creationId xmlns:a16="http://schemas.microsoft.com/office/drawing/2014/main" id="{BA4090EC-9D14-36A4-8219-C1D4E7FBBC30}"/>
               </a:ext>
             </a:extLst>
           </p:cNvPr>
@@ -10923,7 +10923,7 @@
           <p:cNvPr id="18" name="AutoShape 162">
             <a:extLst>
               <a:ext uri="{FF2B5EF4-FFF2-40B4-BE49-F238E27FC236}">
-                <a16:creationId xmlns:a16="http://schemas.microsoft.com/office/drawing/2014/main" id="{C65C2459-B4F1-CB09-2BF0-45466DA5D75B}"/>
+                <a16:creationId xmlns:a16="http://schemas.microsoft.com/office/drawing/2014/main" id="{4FDA0DE7-C333-3CAA-BBAB-EF15F764AF4B}"/>
               </a:ext>
             </a:extLst>
           </p:cNvPr>
@@ -10969,7 +10969,7 @@
           <p:cNvPr id="19" name="AutoShape 163">
             <a:extLst>
               <a:ext uri="{FF2B5EF4-FFF2-40B4-BE49-F238E27FC236}">
-                <a16:creationId xmlns:a16="http://schemas.microsoft.com/office/drawing/2014/main" id="{7AA7E7A4-3BC5-4D10-FB4A-D17E4C4F169E}"/>
+                <a16:creationId xmlns:a16="http://schemas.microsoft.com/office/drawing/2014/main" id="{C9ED9DF9-DA6D-39AA-A2D2-7E98FE4DD125}"/>
               </a:ext>
             </a:extLst>
           </p:cNvPr>
@@ -11015,7 +11015,7 @@
           <p:cNvPr id="20" name="AutoShape 164">
             <a:extLst>
               <a:ext uri="{FF2B5EF4-FFF2-40B4-BE49-F238E27FC236}">
-                <a16:creationId xmlns:a16="http://schemas.microsoft.com/office/drawing/2014/main" id="{7BE1AAB1-D147-8B67-3804-0F0E5D847805}"/>
+                <a16:creationId xmlns:a16="http://schemas.microsoft.com/office/drawing/2014/main" id="{7E932A10-27D0-BC8C-569E-3F16E5A0ED10}"/>
               </a:ext>
             </a:extLst>
           </p:cNvPr>
@@ -11061,7 +11061,7 @@
           <p:cNvPr id="21" name="AutoShape 165">
             <a:extLst>
               <a:ext uri="{FF2B5EF4-FFF2-40B4-BE49-F238E27FC236}">
-                <a16:creationId xmlns:a16="http://schemas.microsoft.com/office/drawing/2014/main" id="{B7116B05-BF0E-684E-4195-723417776A12}"/>
+                <a16:creationId xmlns:a16="http://schemas.microsoft.com/office/drawing/2014/main" id="{60A2543D-A4BD-39F2-4A28-FF77AFA388C8}"/>
               </a:ext>
             </a:extLst>
           </p:cNvPr>
@@ -11107,7 +11107,7 @@
           <p:cNvPr id="22" name="AutoShape 166">
             <a:extLst>
               <a:ext uri="{FF2B5EF4-FFF2-40B4-BE49-F238E27FC236}">
-                <a16:creationId xmlns:a16="http://schemas.microsoft.com/office/drawing/2014/main" id="{A6906F9D-85A2-228A-5B23-D18EB781CFA6}"/>
+                <a16:creationId xmlns:a16="http://schemas.microsoft.com/office/drawing/2014/main" id="{10057F64-C7AE-E504-A283-F9F665649C0B}"/>
               </a:ext>
             </a:extLst>
           </p:cNvPr>
@@ -11153,7 +11153,7 @@
           <p:cNvPr id="23" name="AutoShape 167">
             <a:extLst>
               <a:ext uri="{FF2B5EF4-FFF2-40B4-BE49-F238E27FC236}">
-                <a16:creationId xmlns:a16="http://schemas.microsoft.com/office/drawing/2014/main" id="{78992F95-CBCC-9632-B590-D8B36E151649}"/>
+                <a16:creationId xmlns:a16="http://schemas.microsoft.com/office/drawing/2014/main" id="{555657D0-7D58-D2E4-412A-2FF78D6B8500}"/>
               </a:ext>
             </a:extLst>
           </p:cNvPr>
@@ -11203,7 +11203,7 @@
           <p:cNvPr id="24" name="AutoShape 168">
             <a:extLst>
               <a:ext uri="{FF2B5EF4-FFF2-40B4-BE49-F238E27FC236}">
-                <a16:creationId xmlns:a16="http://schemas.microsoft.com/office/drawing/2014/main" id="{BF38B3B3-CD95-0D58-12B8-EEE247C6322B}"/>
+                <a16:creationId xmlns:a16="http://schemas.microsoft.com/office/drawing/2014/main" id="{12ABFC46-A87F-0514-E714-86F302E939D6}"/>
               </a:ext>
             </a:extLst>
           </p:cNvPr>
@@ -11253,7 +11253,7 @@
           <p:cNvPr id="25" name="AutoShape 169">
             <a:extLst>
               <a:ext uri="{FF2B5EF4-FFF2-40B4-BE49-F238E27FC236}">
-                <a16:creationId xmlns:a16="http://schemas.microsoft.com/office/drawing/2014/main" id="{75B1FD41-5104-B409-561B-8B0681D6C286}"/>
+                <a16:creationId xmlns:a16="http://schemas.microsoft.com/office/drawing/2014/main" id="{2C1AB71B-20FF-CD1F-D00F-FD685986DE08}"/>
               </a:ext>
             </a:extLst>
           </p:cNvPr>
@@ -11301,7 +11301,7 @@
     </p:spTree>
     <p:extLst>
       <p:ext uri="{BB962C8B-B14F-4D97-AF65-F5344CB8AC3E}">
-        <p14:creationId xmlns:p14="http://schemas.microsoft.com/office/powerpoint/2010/main" val="4164501446"/>
+        <p14:creationId xmlns:p14="http://schemas.microsoft.com/office/powerpoint/2010/main" val="13845736"/>
       </p:ext>
     </p:extLst>
   </p:cSld>
@@ -11333,7 +11333,7 @@
           <p:cNvPr id="2" name="AutoShape 170">
             <a:extLst>
               <a:ext uri="{FF2B5EF4-FFF2-40B4-BE49-F238E27FC236}">
-                <a16:creationId xmlns:a16="http://schemas.microsoft.com/office/drawing/2014/main" id="{94C1E75D-7DDF-8DB7-64CF-208B16044AFE}"/>
+                <a16:creationId xmlns:a16="http://schemas.microsoft.com/office/drawing/2014/main" id="{58E05954-3206-B2AC-E5CB-98711810ADE3}"/>
               </a:ext>
             </a:extLst>
           </p:cNvPr>
@@ -11383,7 +11383,7 @@
           <p:cNvPr id="3" name="AutoShape 171">
             <a:extLst>
               <a:ext uri="{FF2B5EF4-FFF2-40B4-BE49-F238E27FC236}">
-                <a16:creationId xmlns:a16="http://schemas.microsoft.com/office/drawing/2014/main" id="{BDC14929-F0C7-C8FB-6365-0AD1476C0530}"/>
+                <a16:creationId xmlns:a16="http://schemas.microsoft.com/office/drawing/2014/main" id="{CEC90CA9-C24B-EA43-C3C9-71BA61F0484C}"/>
               </a:ext>
             </a:extLst>
           </p:cNvPr>
@@ -11433,7 +11433,7 @@
           <p:cNvPr id="4" name="AutoShape 172">
             <a:extLst>
               <a:ext uri="{FF2B5EF4-FFF2-40B4-BE49-F238E27FC236}">
-                <a16:creationId xmlns:a16="http://schemas.microsoft.com/office/drawing/2014/main" id="{D479F61E-C307-F8F6-FE38-7364943C0398}"/>
+                <a16:creationId xmlns:a16="http://schemas.microsoft.com/office/drawing/2014/main" id="{C1B19189-4FE1-C0C4-22C7-2B7BD3258D81}"/>
               </a:ext>
             </a:extLst>
           </p:cNvPr>
@@ -11479,7 +11479,7 @@
           <p:cNvPr id="5" name="AutoShape 173">
             <a:extLst>
               <a:ext uri="{FF2B5EF4-FFF2-40B4-BE49-F238E27FC236}">
-                <a16:creationId xmlns:a16="http://schemas.microsoft.com/office/drawing/2014/main" id="{D36225BD-5E30-23AE-5E3D-7778C5A1C973}"/>
+                <a16:creationId xmlns:a16="http://schemas.microsoft.com/office/drawing/2014/main" id="{9568392B-2F27-0491-5E50-AC212227521A}"/>
               </a:ext>
             </a:extLst>
           </p:cNvPr>
@@ -11525,7 +11525,7 @@
           <p:cNvPr id="6" name="AutoShape 174">
             <a:extLst>
               <a:ext uri="{FF2B5EF4-FFF2-40B4-BE49-F238E27FC236}">
-                <a16:creationId xmlns:a16="http://schemas.microsoft.com/office/drawing/2014/main" id="{C64E9610-FF45-13B9-2225-3D451406CE19}"/>
+                <a16:creationId xmlns:a16="http://schemas.microsoft.com/office/drawing/2014/main" id="{190A412F-6763-2FAB-100A-7DBA93BA12EF}"/>
               </a:ext>
             </a:extLst>
           </p:cNvPr>
@@ -11571,7 +11571,7 @@
           <p:cNvPr id="7" name="AutoShape 175">
             <a:extLst>
               <a:ext uri="{FF2B5EF4-FFF2-40B4-BE49-F238E27FC236}">
-                <a16:creationId xmlns:a16="http://schemas.microsoft.com/office/drawing/2014/main" id="{AFB2B3AA-97F2-2CD6-C9B5-73ABF1D01541}"/>
+                <a16:creationId xmlns:a16="http://schemas.microsoft.com/office/drawing/2014/main" id="{2DC79F6D-6425-D7D5-F7C3-957A22F3FA44}"/>
               </a:ext>
             </a:extLst>
           </p:cNvPr>
@@ -11617,7 +11617,7 @@
           <p:cNvPr id="8" name="AutoShape 176">
             <a:extLst>
               <a:ext uri="{FF2B5EF4-FFF2-40B4-BE49-F238E27FC236}">
-                <a16:creationId xmlns:a16="http://schemas.microsoft.com/office/drawing/2014/main" id="{464B6267-F99B-B95F-AD23-0E3F82687304}"/>
+                <a16:creationId xmlns:a16="http://schemas.microsoft.com/office/drawing/2014/main" id="{F5EFC3C4-0438-4AC7-2B18-75D6545BF8B3}"/>
               </a:ext>
             </a:extLst>
           </p:cNvPr>
@@ -11667,7 +11667,7 @@
           <p:cNvPr id="9" name="AutoShape 177">
             <a:extLst>
               <a:ext uri="{FF2B5EF4-FFF2-40B4-BE49-F238E27FC236}">
-                <a16:creationId xmlns:a16="http://schemas.microsoft.com/office/drawing/2014/main" id="{F98E3A67-D453-7F31-5D01-648CEA1E9636}"/>
+                <a16:creationId xmlns:a16="http://schemas.microsoft.com/office/drawing/2014/main" id="{62546B80-5ECC-5DED-38EC-F0FA3B92E0F9}"/>
               </a:ext>
             </a:extLst>
           </p:cNvPr>
@@ -11717,7 +11717,7 @@
           <p:cNvPr id="10" name="AutoShape 178">
             <a:extLst>
               <a:ext uri="{FF2B5EF4-FFF2-40B4-BE49-F238E27FC236}">
-                <a16:creationId xmlns:a16="http://schemas.microsoft.com/office/drawing/2014/main" id="{F286B8E9-5DEC-A391-A964-192CF9C2AC4E}"/>
+                <a16:creationId xmlns:a16="http://schemas.microsoft.com/office/drawing/2014/main" id="{645A3EEA-5728-B91F-246C-3E8EC7AE424F}"/>
               </a:ext>
             </a:extLst>
           </p:cNvPr>
@@ -11767,7 +11767,7 @@
           <p:cNvPr id="11" name="AutoShape 179">
             <a:extLst>
               <a:ext uri="{FF2B5EF4-FFF2-40B4-BE49-F238E27FC236}">
-                <a16:creationId xmlns:a16="http://schemas.microsoft.com/office/drawing/2014/main" id="{C5737512-CA2B-A9D8-18C5-2774D8442A30}"/>
+                <a16:creationId xmlns:a16="http://schemas.microsoft.com/office/drawing/2014/main" id="{EEF56B64-8178-67FE-3E3F-0F6B7A16EB40}"/>
               </a:ext>
             </a:extLst>
           </p:cNvPr>
@@ -11813,7 +11813,7 @@
           <p:cNvPr id="12" name="AutoShape 180">
             <a:extLst>
               <a:ext uri="{FF2B5EF4-FFF2-40B4-BE49-F238E27FC236}">
-                <a16:creationId xmlns:a16="http://schemas.microsoft.com/office/drawing/2014/main" id="{56AE900D-DF71-1AEC-6F25-1D07EEDF6EB3}"/>
+                <a16:creationId xmlns:a16="http://schemas.microsoft.com/office/drawing/2014/main" id="{C366D821-40FC-F18C-CC04-C0B435D0B654}"/>
               </a:ext>
             </a:extLst>
           </p:cNvPr>
@@ -11859,7 +11859,7 @@
           <p:cNvPr id="13" name="AutoShape 181">
             <a:extLst>
               <a:ext uri="{FF2B5EF4-FFF2-40B4-BE49-F238E27FC236}">
-                <a16:creationId xmlns:a16="http://schemas.microsoft.com/office/drawing/2014/main" id="{3614900B-A348-92B3-7C53-CC7542DE5369}"/>
+                <a16:creationId xmlns:a16="http://schemas.microsoft.com/office/drawing/2014/main" id="{9B6360DE-EA17-4086-BDD2-B1E04EDBB288}"/>
               </a:ext>
             </a:extLst>
           </p:cNvPr>
@@ -11905,7 +11905,7 @@
           <p:cNvPr id="14" name="AutoShape 182">
             <a:extLst>
               <a:ext uri="{FF2B5EF4-FFF2-40B4-BE49-F238E27FC236}">
-                <a16:creationId xmlns:a16="http://schemas.microsoft.com/office/drawing/2014/main" id="{31BC22E4-C38A-090D-B6BC-9814A60217CD}"/>
+                <a16:creationId xmlns:a16="http://schemas.microsoft.com/office/drawing/2014/main" id="{F1C0F8A7-4883-9A74-B58C-C44890A0D896}"/>
               </a:ext>
             </a:extLst>
           </p:cNvPr>
@@ -11951,7 +11951,7 @@
           <p:cNvPr id="15" name="AutoShape 183">
             <a:extLst>
               <a:ext uri="{FF2B5EF4-FFF2-40B4-BE49-F238E27FC236}">
-                <a16:creationId xmlns:a16="http://schemas.microsoft.com/office/drawing/2014/main" id="{55034728-3CB3-638B-6F45-E2E6B022274C}"/>
+                <a16:creationId xmlns:a16="http://schemas.microsoft.com/office/drawing/2014/main" id="{C4F5FECF-7100-F326-46DC-48D268C7735A}"/>
               </a:ext>
             </a:extLst>
           </p:cNvPr>
@@ -11993,7 +11993,7 @@
     </p:spTree>
     <p:extLst>
       <p:ext uri="{BB962C8B-B14F-4D97-AF65-F5344CB8AC3E}">
-        <p14:creationId xmlns:p14="http://schemas.microsoft.com/office/powerpoint/2010/main" val="2348186699"/>
+        <p14:creationId xmlns:p14="http://schemas.microsoft.com/office/powerpoint/2010/main" val="3030896701"/>
       </p:ext>
     </p:extLst>
   </p:cSld>

--- a/tests/corpus/pptx/generated/geometry-presets.pptx
+++ b/tests/corpus/pptx/generated/geometry-presets.pptx
@@ -136,7 +136,7 @@
           <p:cNvPr id="2" name="Titel 1">
             <a:extLst>
               <a:ext uri="{FF2B5EF4-FFF2-40B4-BE49-F238E27FC236}">
-                <a16:creationId xmlns:a16="http://schemas.microsoft.com/office/drawing/2014/main" id="{5CD2AF6F-72CA-BBC5-4507-182E2A984AC4}"/>
+                <a16:creationId xmlns:a16="http://schemas.microsoft.com/office/drawing/2014/main" id="{2EA88000-EE4A-18BF-8DAB-30A6609BA58B}"/>
               </a:ext>
             </a:extLst>
           </p:cNvPr>
@@ -173,7 +173,7 @@
           <p:cNvPr id="3" name="Untertitel 2">
             <a:extLst>
               <a:ext uri="{FF2B5EF4-FFF2-40B4-BE49-F238E27FC236}">
-                <a16:creationId xmlns:a16="http://schemas.microsoft.com/office/drawing/2014/main" id="{430C5C92-9BED-DF2A-E2BC-8AA2648BE22C}"/>
+                <a16:creationId xmlns:a16="http://schemas.microsoft.com/office/drawing/2014/main" id="{B87C7570-F7B4-5426-B2F8-7027FD207260}"/>
               </a:ext>
             </a:extLst>
           </p:cNvPr>
@@ -243,7 +243,7 @@
           <p:cNvPr id="4" name="Datumsplatzhalter 3">
             <a:extLst>
               <a:ext uri="{FF2B5EF4-FFF2-40B4-BE49-F238E27FC236}">
-                <a16:creationId xmlns:a16="http://schemas.microsoft.com/office/drawing/2014/main" id="{29566B3C-2AB1-90AA-BD7D-E41AEDF2256F}"/>
+                <a16:creationId xmlns:a16="http://schemas.microsoft.com/office/drawing/2014/main" id="{377A8B75-F540-B60A-942A-B70DBED806C4}"/>
               </a:ext>
             </a:extLst>
           </p:cNvPr>
@@ -259,7 +259,7 @@
           <a:bodyPr/>
           <a:lstStyle/>
           <a:p>
-            <a:fld id="{DCE360E9-0FB8-400D-AC15-8242C30AE4EE}" type="datetimeFigureOut">
+            <a:fld id="{A82F466D-0CBC-4E3B-8B04-063A178DA052}" type="datetimeFigureOut">
               <a:rPr lang="de-DE" smtClean="0"/>
               <a:t>08.10.2026</a:t>
             </a:fld>
@@ -272,7 +272,7 @@
           <p:cNvPr id="5" name="Fußzeilenplatzhalter 4">
             <a:extLst>
               <a:ext uri="{FF2B5EF4-FFF2-40B4-BE49-F238E27FC236}">
-                <a16:creationId xmlns:a16="http://schemas.microsoft.com/office/drawing/2014/main" id="{A65489BD-1076-4E94-E836-85330CCCC023}"/>
+                <a16:creationId xmlns:a16="http://schemas.microsoft.com/office/drawing/2014/main" id="{31F9686B-E8FA-B1B6-3F6E-AE014DD61720}"/>
               </a:ext>
             </a:extLst>
           </p:cNvPr>
@@ -297,7 +297,7 @@
           <p:cNvPr id="6" name="Foliennummernplatzhalter 5">
             <a:extLst>
               <a:ext uri="{FF2B5EF4-FFF2-40B4-BE49-F238E27FC236}">
-                <a16:creationId xmlns:a16="http://schemas.microsoft.com/office/drawing/2014/main" id="{376BB11C-78ED-9091-6E3D-E9296CBAF0EA}"/>
+                <a16:creationId xmlns:a16="http://schemas.microsoft.com/office/drawing/2014/main" id="{5CF6A71F-D2DF-5087-D43F-467CFC1E1864}"/>
               </a:ext>
             </a:extLst>
           </p:cNvPr>
@@ -313,7 +313,7 @@
           <a:bodyPr/>
           <a:lstStyle/>
           <a:p>
-            <a:fld id="{BD06C979-E34A-47C6-BB4C-39A0B120C4F2}" type="slidenum">
+            <a:fld id="{C000F45D-680B-4BE6-9105-0A5FC8F8FA26}" type="slidenum">
               <a:rPr lang="de-DE" smtClean="0"/>
               <a:t>‹Nr.›</a:t>
             </a:fld>
@@ -324,7 +324,7 @@
     </p:spTree>
     <p:extLst>
       <p:ext uri="{BB962C8B-B14F-4D97-AF65-F5344CB8AC3E}">
-        <p14:creationId xmlns:p14="http://schemas.microsoft.com/office/powerpoint/2010/main" val="1168732269"/>
+        <p14:creationId xmlns:p14="http://schemas.microsoft.com/office/powerpoint/2010/main" val="4124846985"/>
       </p:ext>
     </p:extLst>
   </p:cSld>
@@ -356,7 +356,7 @@
           <p:cNvPr id="2" name="Titel 1">
             <a:extLst>
               <a:ext uri="{FF2B5EF4-FFF2-40B4-BE49-F238E27FC236}">
-                <a16:creationId xmlns:a16="http://schemas.microsoft.com/office/drawing/2014/main" id="{A9998FD2-5004-366F-C708-C11E235BBFB7}"/>
+                <a16:creationId xmlns:a16="http://schemas.microsoft.com/office/drawing/2014/main" id="{89076BCE-D910-9FD0-177B-9A20D5556249}"/>
               </a:ext>
             </a:extLst>
           </p:cNvPr>
@@ -384,7 +384,7 @@
           <p:cNvPr id="3" name="Vertikaler Textplatzhalter 2">
             <a:extLst>
               <a:ext uri="{FF2B5EF4-FFF2-40B4-BE49-F238E27FC236}">
-                <a16:creationId xmlns:a16="http://schemas.microsoft.com/office/drawing/2014/main" id="{5E688A67-6748-7145-190C-6188096B7AE1}"/>
+                <a16:creationId xmlns:a16="http://schemas.microsoft.com/office/drawing/2014/main" id="{EA2FBBEA-22E3-39FE-CBDC-11EDFF913C68}"/>
               </a:ext>
             </a:extLst>
           </p:cNvPr>
@@ -441,7 +441,7 @@
           <p:cNvPr id="4" name="Datumsplatzhalter 3">
             <a:extLst>
               <a:ext uri="{FF2B5EF4-FFF2-40B4-BE49-F238E27FC236}">
-                <a16:creationId xmlns:a16="http://schemas.microsoft.com/office/drawing/2014/main" id="{B8ADAB25-4ED9-25A5-B653-5B96415E447F}"/>
+                <a16:creationId xmlns:a16="http://schemas.microsoft.com/office/drawing/2014/main" id="{F0A33FD5-9359-5FE1-4F03-AC9FA11008D5}"/>
               </a:ext>
             </a:extLst>
           </p:cNvPr>
@@ -457,7 +457,7 @@
           <a:bodyPr/>
           <a:lstStyle/>
           <a:p>
-            <a:fld id="{DCE360E9-0FB8-400D-AC15-8242C30AE4EE}" type="datetimeFigureOut">
+            <a:fld id="{A82F466D-0CBC-4E3B-8B04-063A178DA052}" type="datetimeFigureOut">
               <a:rPr lang="de-DE" smtClean="0"/>
               <a:t>08.10.2026</a:t>
             </a:fld>
@@ -470,7 +470,7 @@
           <p:cNvPr id="5" name="Fußzeilenplatzhalter 4">
             <a:extLst>
               <a:ext uri="{FF2B5EF4-FFF2-40B4-BE49-F238E27FC236}">
-                <a16:creationId xmlns:a16="http://schemas.microsoft.com/office/drawing/2014/main" id="{67B2FECC-8BF0-B402-E3AE-A7672760A020}"/>
+                <a16:creationId xmlns:a16="http://schemas.microsoft.com/office/drawing/2014/main" id="{2DE80884-4EBA-86BC-0F83-30B2E3B7C414}"/>
               </a:ext>
             </a:extLst>
           </p:cNvPr>
@@ -495,7 +495,7 @@
           <p:cNvPr id="6" name="Foliennummernplatzhalter 5">
             <a:extLst>
               <a:ext uri="{FF2B5EF4-FFF2-40B4-BE49-F238E27FC236}">
-                <a16:creationId xmlns:a16="http://schemas.microsoft.com/office/drawing/2014/main" id="{D800A22C-3277-2B03-D9E8-DC97A0A997C9}"/>
+                <a16:creationId xmlns:a16="http://schemas.microsoft.com/office/drawing/2014/main" id="{4C70EDC5-C3BD-E007-2234-D11609F68A66}"/>
               </a:ext>
             </a:extLst>
           </p:cNvPr>
@@ -511,7 +511,7 @@
           <a:bodyPr/>
           <a:lstStyle/>
           <a:p>
-            <a:fld id="{BD06C979-E34A-47C6-BB4C-39A0B120C4F2}" type="slidenum">
+            <a:fld id="{C000F45D-680B-4BE6-9105-0A5FC8F8FA26}" type="slidenum">
               <a:rPr lang="de-DE" smtClean="0"/>
               <a:t>‹Nr.›</a:t>
             </a:fld>
@@ -522,7 +522,7 @@
     </p:spTree>
     <p:extLst>
       <p:ext uri="{BB962C8B-B14F-4D97-AF65-F5344CB8AC3E}">
-        <p14:creationId xmlns:p14="http://schemas.microsoft.com/office/powerpoint/2010/main" val="879353443"/>
+        <p14:creationId xmlns:p14="http://schemas.microsoft.com/office/powerpoint/2010/main" val="3238368029"/>
       </p:ext>
     </p:extLst>
   </p:cSld>
@@ -554,7 +554,7 @@
           <p:cNvPr id="2" name="Vertikaler Titel 1">
             <a:extLst>
               <a:ext uri="{FF2B5EF4-FFF2-40B4-BE49-F238E27FC236}">
-                <a16:creationId xmlns:a16="http://schemas.microsoft.com/office/drawing/2014/main" id="{635D9D09-2305-8F61-123A-820548D7D302}"/>
+                <a16:creationId xmlns:a16="http://schemas.microsoft.com/office/drawing/2014/main" id="{CBB90D0A-2BDD-D403-8FD5-F23962C38480}"/>
               </a:ext>
             </a:extLst>
           </p:cNvPr>
@@ -587,7 +587,7 @@
           <p:cNvPr id="3" name="Vertikaler Textplatzhalter 2">
             <a:extLst>
               <a:ext uri="{FF2B5EF4-FFF2-40B4-BE49-F238E27FC236}">
-                <a16:creationId xmlns:a16="http://schemas.microsoft.com/office/drawing/2014/main" id="{99B0EAC9-B242-16A5-EC43-B0E3F9F9DE5C}"/>
+                <a16:creationId xmlns:a16="http://schemas.microsoft.com/office/drawing/2014/main" id="{C4950B5A-F59A-AB6D-657A-A8FFB3DCCA55}"/>
               </a:ext>
             </a:extLst>
           </p:cNvPr>
@@ -649,7 +649,7 @@
           <p:cNvPr id="4" name="Datumsplatzhalter 3">
             <a:extLst>
               <a:ext uri="{FF2B5EF4-FFF2-40B4-BE49-F238E27FC236}">
-                <a16:creationId xmlns:a16="http://schemas.microsoft.com/office/drawing/2014/main" id="{F1BAD412-3958-6FF3-BF8A-7FD9158ED0E0}"/>
+                <a16:creationId xmlns:a16="http://schemas.microsoft.com/office/drawing/2014/main" id="{69FDC375-ADDC-F532-284D-D3BB318D3547}"/>
               </a:ext>
             </a:extLst>
           </p:cNvPr>
@@ -665,7 +665,7 @@
           <a:bodyPr/>
           <a:lstStyle/>
           <a:p>
-            <a:fld id="{DCE360E9-0FB8-400D-AC15-8242C30AE4EE}" type="datetimeFigureOut">
+            <a:fld id="{A82F466D-0CBC-4E3B-8B04-063A178DA052}" type="datetimeFigureOut">
               <a:rPr lang="de-DE" smtClean="0"/>
               <a:t>08.10.2026</a:t>
             </a:fld>
@@ -678,7 +678,7 @@
           <p:cNvPr id="5" name="Fußzeilenplatzhalter 4">
             <a:extLst>
               <a:ext uri="{FF2B5EF4-FFF2-40B4-BE49-F238E27FC236}">
-                <a16:creationId xmlns:a16="http://schemas.microsoft.com/office/drawing/2014/main" id="{7DCE3D6C-9574-5173-96DD-D49D28B99B84}"/>
+                <a16:creationId xmlns:a16="http://schemas.microsoft.com/office/drawing/2014/main" id="{CE845069-BA4D-593C-3589-9B492B3D0C46}"/>
               </a:ext>
             </a:extLst>
           </p:cNvPr>
@@ -703,7 +703,7 @@
           <p:cNvPr id="6" name="Foliennummernplatzhalter 5">
             <a:extLst>
               <a:ext uri="{FF2B5EF4-FFF2-40B4-BE49-F238E27FC236}">
-                <a16:creationId xmlns:a16="http://schemas.microsoft.com/office/drawing/2014/main" id="{EAF5EED2-7614-AF53-E582-6FE07339F6F2}"/>
+                <a16:creationId xmlns:a16="http://schemas.microsoft.com/office/drawing/2014/main" id="{8E0D3A35-C0D1-AD6D-23DE-7C619D4626F2}"/>
               </a:ext>
             </a:extLst>
           </p:cNvPr>
@@ -719,7 +719,7 @@
           <a:bodyPr/>
           <a:lstStyle/>
           <a:p>
-            <a:fld id="{BD06C979-E34A-47C6-BB4C-39A0B120C4F2}" type="slidenum">
+            <a:fld id="{C000F45D-680B-4BE6-9105-0A5FC8F8FA26}" type="slidenum">
               <a:rPr lang="de-DE" smtClean="0"/>
               <a:t>‹Nr.›</a:t>
             </a:fld>
@@ -730,7 +730,7 @@
     </p:spTree>
     <p:extLst>
       <p:ext uri="{BB962C8B-B14F-4D97-AF65-F5344CB8AC3E}">
-        <p14:creationId xmlns:p14="http://schemas.microsoft.com/office/powerpoint/2010/main" val="2005603752"/>
+        <p14:creationId xmlns:p14="http://schemas.microsoft.com/office/powerpoint/2010/main" val="1489547021"/>
       </p:ext>
     </p:extLst>
   </p:cSld>
@@ -762,7 +762,7 @@
           <p:cNvPr id="2" name="Titel 1">
             <a:extLst>
               <a:ext uri="{FF2B5EF4-FFF2-40B4-BE49-F238E27FC236}">
-                <a16:creationId xmlns:a16="http://schemas.microsoft.com/office/drawing/2014/main" id="{5A9FE337-1543-45E9-2A30-A703F7CC1C71}"/>
+                <a16:creationId xmlns:a16="http://schemas.microsoft.com/office/drawing/2014/main" id="{ABB29420-FE23-72CC-6F96-C051A9041EB2}"/>
               </a:ext>
             </a:extLst>
           </p:cNvPr>
@@ -790,7 +790,7 @@
           <p:cNvPr id="3" name="Inhaltsplatzhalter 2">
             <a:extLst>
               <a:ext uri="{FF2B5EF4-FFF2-40B4-BE49-F238E27FC236}">
-                <a16:creationId xmlns:a16="http://schemas.microsoft.com/office/drawing/2014/main" id="{538BE321-A629-7971-7D85-BAEA2582D52D}"/>
+                <a16:creationId xmlns:a16="http://schemas.microsoft.com/office/drawing/2014/main" id="{D63006AF-2FA1-7841-DE94-B707968D4943}"/>
               </a:ext>
             </a:extLst>
           </p:cNvPr>
@@ -847,7 +847,7 @@
           <p:cNvPr id="4" name="Datumsplatzhalter 3">
             <a:extLst>
               <a:ext uri="{FF2B5EF4-FFF2-40B4-BE49-F238E27FC236}">
-                <a16:creationId xmlns:a16="http://schemas.microsoft.com/office/drawing/2014/main" id="{0BDB749A-3B60-0C86-3AFB-FF5142BEA94E}"/>
+                <a16:creationId xmlns:a16="http://schemas.microsoft.com/office/drawing/2014/main" id="{616BF34F-9C75-7C26-8AE0-660A64771F14}"/>
               </a:ext>
             </a:extLst>
           </p:cNvPr>
@@ -863,7 +863,7 @@
           <a:bodyPr/>
           <a:lstStyle/>
           <a:p>
-            <a:fld id="{DCE360E9-0FB8-400D-AC15-8242C30AE4EE}" type="datetimeFigureOut">
+            <a:fld id="{A82F466D-0CBC-4E3B-8B04-063A178DA052}" type="datetimeFigureOut">
               <a:rPr lang="de-DE" smtClean="0"/>
               <a:t>08.10.2026</a:t>
             </a:fld>
@@ -876,7 +876,7 @@
           <p:cNvPr id="5" name="Fußzeilenplatzhalter 4">
             <a:extLst>
               <a:ext uri="{FF2B5EF4-FFF2-40B4-BE49-F238E27FC236}">
-                <a16:creationId xmlns:a16="http://schemas.microsoft.com/office/drawing/2014/main" id="{6B66FF72-F58D-2154-7748-6C549854E7E6}"/>
+                <a16:creationId xmlns:a16="http://schemas.microsoft.com/office/drawing/2014/main" id="{20928B2E-F53E-1353-117E-73E421B496B2}"/>
               </a:ext>
             </a:extLst>
           </p:cNvPr>
@@ -901,7 +901,7 @@
           <p:cNvPr id="6" name="Foliennummernplatzhalter 5">
             <a:extLst>
               <a:ext uri="{FF2B5EF4-FFF2-40B4-BE49-F238E27FC236}">
-                <a16:creationId xmlns:a16="http://schemas.microsoft.com/office/drawing/2014/main" id="{BB2695C9-8E00-A83E-39A6-0197C3C6BB71}"/>
+                <a16:creationId xmlns:a16="http://schemas.microsoft.com/office/drawing/2014/main" id="{0DD37E8C-CA3F-9CC6-C358-1190FC06D1CB}"/>
               </a:ext>
             </a:extLst>
           </p:cNvPr>
@@ -917,7 +917,7 @@
           <a:bodyPr/>
           <a:lstStyle/>
           <a:p>
-            <a:fld id="{BD06C979-E34A-47C6-BB4C-39A0B120C4F2}" type="slidenum">
+            <a:fld id="{C000F45D-680B-4BE6-9105-0A5FC8F8FA26}" type="slidenum">
               <a:rPr lang="de-DE" smtClean="0"/>
               <a:t>‹Nr.›</a:t>
             </a:fld>
@@ -928,7 +928,7 @@
     </p:spTree>
     <p:extLst>
       <p:ext uri="{BB962C8B-B14F-4D97-AF65-F5344CB8AC3E}">
-        <p14:creationId xmlns:p14="http://schemas.microsoft.com/office/powerpoint/2010/main" val="4289787747"/>
+        <p14:creationId xmlns:p14="http://schemas.microsoft.com/office/powerpoint/2010/main" val="1712327397"/>
       </p:ext>
     </p:extLst>
   </p:cSld>
@@ -960,7 +960,7 @@
           <p:cNvPr id="2" name="Titel 1">
             <a:extLst>
               <a:ext uri="{FF2B5EF4-FFF2-40B4-BE49-F238E27FC236}">
-                <a16:creationId xmlns:a16="http://schemas.microsoft.com/office/drawing/2014/main" id="{C02F56B3-0993-1A79-0E75-A080D933F46B}"/>
+                <a16:creationId xmlns:a16="http://schemas.microsoft.com/office/drawing/2014/main" id="{C9BB75AB-595B-C3F7-1567-7E531AE7203B}"/>
               </a:ext>
             </a:extLst>
           </p:cNvPr>
@@ -997,7 +997,7 @@
           <p:cNvPr id="3" name="Textplatzhalter 2">
             <a:extLst>
               <a:ext uri="{FF2B5EF4-FFF2-40B4-BE49-F238E27FC236}">
-                <a16:creationId xmlns:a16="http://schemas.microsoft.com/office/drawing/2014/main" id="{73972478-261C-3ED4-06F7-AC0047F71E13}"/>
+                <a16:creationId xmlns:a16="http://schemas.microsoft.com/office/drawing/2014/main" id="{BC147261-9225-57CD-60FE-C2812B899A66}"/>
               </a:ext>
             </a:extLst>
           </p:cNvPr>
@@ -1122,7 +1122,7 @@
           <p:cNvPr id="4" name="Datumsplatzhalter 3">
             <a:extLst>
               <a:ext uri="{FF2B5EF4-FFF2-40B4-BE49-F238E27FC236}">
-                <a16:creationId xmlns:a16="http://schemas.microsoft.com/office/drawing/2014/main" id="{4BC924A1-F8F6-EA85-A01E-C05E02651FB2}"/>
+                <a16:creationId xmlns:a16="http://schemas.microsoft.com/office/drawing/2014/main" id="{7B02EA2E-7383-D8D6-B534-2C0C1FB9C779}"/>
               </a:ext>
             </a:extLst>
           </p:cNvPr>
@@ -1138,7 +1138,7 @@
           <a:bodyPr/>
           <a:lstStyle/>
           <a:p>
-            <a:fld id="{DCE360E9-0FB8-400D-AC15-8242C30AE4EE}" type="datetimeFigureOut">
+            <a:fld id="{A82F466D-0CBC-4E3B-8B04-063A178DA052}" type="datetimeFigureOut">
               <a:rPr lang="de-DE" smtClean="0"/>
               <a:t>08.10.2026</a:t>
             </a:fld>
@@ -1151,7 +1151,7 @@
           <p:cNvPr id="5" name="Fußzeilenplatzhalter 4">
             <a:extLst>
               <a:ext uri="{FF2B5EF4-FFF2-40B4-BE49-F238E27FC236}">
-                <a16:creationId xmlns:a16="http://schemas.microsoft.com/office/drawing/2014/main" id="{F2B109AA-0544-EE3E-B3DB-04B943D43B09}"/>
+                <a16:creationId xmlns:a16="http://schemas.microsoft.com/office/drawing/2014/main" id="{8F204866-5DFB-B6C0-C021-85A20D223360}"/>
               </a:ext>
             </a:extLst>
           </p:cNvPr>
@@ -1176,7 +1176,7 @@
           <p:cNvPr id="6" name="Foliennummernplatzhalter 5">
             <a:extLst>
               <a:ext uri="{FF2B5EF4-FFF2-40B4-BE49-F238E27FC236}">
-                <a16:creationId xmlns:a16="http://schemas.microsoft.com/office/drawing/2014/main" id="{3AEF0AF4-3B32-F38A-FF8E-52670D08F0CE}"/>
+                <a16:creationId xmlns:a16="http://schemas.microsoft.com/office/drawing/2014/main" id="{277BA66B-733D-A10F-EB4C-E0B7F4A19BDA}"/>
               </a:ext>
             </a:extLst>
           </p:cNvPr>
@@ -1192,7 +1192,7 @@
           <a:bodyPr/>
           <a:lstStyle/>
           <a:p>
-            <a:fld id="{BD06C979-E34A-47C6-BB4C-39A0B120C4F2}" type="slidenum">
+            <a:fld id="{C000F45D-680B-4BE6-9105-0A5FC8F8FA26}" type="slidenum">
               <a:rPr lang="de-DE" smtClean="0"/>
               <a:t>‹Nr.›</a:t>
             </a:fld>
@@ -1203,7 +1203,7 @@
     </p:spTree>
     <p:extLst>
       <p:ext uri="{BB962C8B-B14F-4D97-AF65-F5344CB8AC3E}">
-        <p14:creationId xmlns:p14="http://schemas.microsoft.com/office/powerpoint/2010/main" val="3756014891"/>
+        <p14:creationId xmlns:p14="http://schemas.microsoft.com/office/powerpoint/2010/main" val="3751382387"/>
       </p:ext>
     </p:extLst>
   </p:cSld>
@@ -1235,7 +1235,7 @@
           <p:cNvPr id="2" name="Titel 1">
             <a:extLst>
               <a:ext uri="{FF2B5EF4-FFF2-40B4-BE49-F238E27FC236}">
-                <a16:creationId xmlns:a16="http://schemas.microsoft.com/office/drawing/2014/main" id="{EB7852FA-92AC-F316-8E86-A24A40CA5D3C}"/>
+                <a16:creationId xmlns:a16="http://schemas.microsoft.com/office/drawing/2014/main" id="{BF32C709-C455-E00C-809F-B4B755B56794}"/>
               </a:ext>
             </a:extLst>
           </p:cNvPr>
@@ -1263,7 +1263,7 @@
           <p:cNvPr id="3" name="Inhaltsplatzhalter 2">
             <a:extLst>
               <a:ext uri="{FF2B5EF4-FFF2-40B4-BE49-F238E27FC236}">
-                <a16:creationId xmlns:a16="http://schemas.microsoft.com/office/drawing/2014/main" id="{41B0AE6A-EDFE-A42A-2E95-E34902E7BF4D}"/>
+                <a16:creationId xmlns:a16="http://schemas.microsoft.com/office/drawing/2014/main" id="{E045C5BC-1B8A-EDD0-65C6-5AF89C2AB7B1}"/>
               </a:ext>
             </a:extLst>
           </p:cNvPr>
@@ -1325,7 +1325,7 @@
           <p:cNvPr id="4" name="Inhaltsplatzhalter 3">
             <a:extLst>
               <a:ext uri="{FF2B5EF4-FFF2-40B4-BE49-F238E27FC236}">
-                <a16:creationId xmlns:a16="http://schemas.microsoft.com/office/drawing/2014/main" id="{CB108109-1C44-64E6-2A5C-13E6FD061D4D}"/>
+                <a16:creationId xmlns:a16="http://schemas.microsoft.com/office/drawing/2014/main" id="{54B79C2C-5A52-7A84-A427-B2BD3A4D8040}"/>
               </a:ext>
             </a:extLst>
           </p:cNvPr>
@@ -1387,7 +1387,7 @@
           <p:cNvPr id="5" name="Datumsplatzhalter 4">
             <a:extLst>
               <a:ext uri="{FF2B5EF4-FFF2-40B4-BE49-F238E27FC236}">
-                <a16:creationId xmlns:a16="http://schemas.microsoft.com/office/drawing/2014/main" id="{9A0F7D7C-6F3F-5121-FF93-C521A3B73DC3}"/>
+                <a16:creationId xmlns:a16="http://schemas.microsoft.com/office/drawing/2014/main" id="{56F74F77-67E6-FC5D-BBBF-855A01D64569}"/>
               </a:ext>
             </a:extLst>
           </p:cNvPr>
@@ -1403,7 +1403,7 @@
           <a:bodyPr/>
           <a:lstStyle/>
           <a:p>
-            <a:fld id="{DCE360E9-0FB8-400D-AC15-8242C30AE4EE}" type="datetimeFigureOut">
+            <a:fld id="{A82F466D-0CBC-4E3B-8B04-063A178DA052}" type="datetimeFigureOut">
               <a:rPr lang="de-DE" smtClean="0"/>
               <a:t>08.10.2026</a:t>
             </a:fld>
@@ -1416,7 +1416,7 @@
           <p:cNvPr id="6" name="Fußzeilenplatzhalter 5">
             <a:extLst>
               <a:ext uri="{FF2B5EF4-FFF2-40B4-BE49-F238E27FC236}">
-                <a16:creationId xmlns:a16="http://schemas.microsoft.com/office/drawing/2014/main" id="{C86A9923-47CF-EEF9-C267-83CB18EF7C2F}"/>
+                <a16:creationId xmlns:a16="http://schemas.microsoft.com/office/drawing/2014/main" id="{0A53F0E9-C433-56F1-E8AD-8904DE408728}"/>
               </a:ext>
             </a:extLst>
           </p:cNvPr>
@@ -1441,7 +1441,7 @@
           <p:cNvPr id="7" name="Foliennummernplatzhalter 6">
             <a:extLst>
               <a:ext uri="{FF2B5EF4-FFF2-40B4-BE49-F238E27FC236}">
-                <a16:creationId xmlns:a16="http://schemas.microsoft.com/office/drawing/2014/main" id="{A8759221-29A0-C01E-7F67-46AB2C3CD3A9}"/>
+                <a16:creationId xmlns:a16="http://schemas.microsoft.com/office/drawing/2014/main" id="{E45FEEFF-2F5F-0FED-CDE5-6CDD7838170B}"/>
               </a:ext>
             </a:extLst>
           </p:cNvPr>
@@ -1457,7 +1457,7 @@
           <a:bodyPr/>
           <a:lstStyle/>
           <a:p>
-            <a:fld id="{BD06C979-E34A-47C6-BB4C-39A0B120C4F2}" type="slidenum">
+            <a:fld id="{C000F45D-680B-4BE6-9105-0A5FC8F8FA26}" type="slidenum">
               <a:rPr lang="de-DE" smtClean="0"/>
               <a:t>‹Nr.›</a:t>
             </a:fld>
@@ -1468,7 +1468,7 @@
     </p:spTree>
     <p:extLst>
       <p:ext uri="{BB962C8B-B14F-4D97-AF65-F5344CB8AC3E}">
-        <p14:creationId xmlns:p14="http://schemas.microsoft.com/office/powerpoint/2010/main" val="2568584122"/>
+        <p14:creationId xmlns:p14="http://schemas.microsoft.com/office/powerpoint/2010/main" val="4292844101"/>
       </p:ext>
     </p:extLst>
   </p:cSld>
@@ -1500,7 +1500,7 @@
           <p:cNvPr id="2" name="Titel 1">
             <a:extLst>
               <a:ext uri="{FF2B5EF4-FFF2-40B4-BE49-F238E27FC236}">
-                <a16:creationId xmlns:a16="http://schemas.microsoft.com/office/drawing/2014/main" id="{B9D1E7EB-5432-3FAE-2174-904FB89ADF86}"/>
+                <a16:creationId xmlns:a16="http://schemas.microsoft.com/office/drawing/2014/main" id="{B210D47B-8E8C-F109-618A-3CBBAEB14840}"/>
               </a:ext>
             </a:extLst>
           </p:cNvPr>
@@ -1533,7 +1533,7 @@
           <p:cNvPr id="3" name="Textplatzhalter 2">
             <a:extLst>
               <a:ext uri="{FF2B5EF4-FFF2-40B4-BE49-F238E27FC236}">
-                <a16:creationId xmlns:a16="http://schemas.microsoft.com/office/drawing/2014/main" id="{C2F06E25-261F-E36E-E1C6-E1314163BF32}"/>
+                <a16:creationId xmlns:a16="http://schemas.microsoft.com/office/drawing/2014/main" id="{10068881-CF71-5946-06B3-03B9E42B6FB7}"/>
               </a:ext>
             </a:extLst>
           </p:cNvPr>
@@ -1604,7 +1604,7 @@
           <p:cNvPr id="4" name="Inhaltsplatzhalter 3">
             <a:extLst>
               <a:ext uri="{FF2B5EF4-FFF2-40B4-BE49-F238E27FC236}">
-                <a16:creationId xmlns:a16="http://schemas.microsoft.com/office/drawing/2014/main" id="{B5DFB099-B244-B99D-4A5F-AF9DC9845D0C}"/>
+                <a16:creationId xmlns:a16="http://schemas.microsoft.com/office/drawing/2014/main" id="{657B4BCD-428E-7CDC-B42F-2CBC9092B0B7}"/>
               </a:ext>
             </a:extLst>
           </p:cNvPr>
@@ -1666,7 +1666,7 @@
           <p:cNvPr id="5" name="Textplatzhalter 4">
             <a:extLst>
               <a:ext uri="{FF2B5EF4-FFF2-40B4-BE49-F238E27FC236}">
-                <a16:creationId xmlns:a16="http://schemas.microsoft.com/office/drawing/2014/main" id="{94002002-EFC7-4653-3B80-C2AEF62D1921}"/>
+                <a16:creationId xmlns:a16="http://schemas.microsoft.com/office/drawing/2014/main" id="{2695AAD6-DF1A-DA0A-03FA-482CDF52A516}"/>
               </a:ext>
             </a:extLst>
           </p:cNvPr>
@@ -1737,7 +1737,7 @@
           <p:cNvPr id="6" name="Inhaltsplatzhalter 5">
             <a:extLst>
               <a:ext uri="{FF2B5EF4-FFF2-40B4-BE49-F238E27FC236}">
-                <a16:creationId xmlns:a16="http://schemas.microsoft.com/office/drawing/2014/main" id="{83164BEC-5582-52D3-A8FE-912DCE14E510}"/>
+                <a16:creationId xmlns:a16="http://schemas.microsoft.com/office/drawing/2014/main" id="{6E3FB55A-F7BB-81C8-97AC-BD2BFB884FCC}"/>
               </a:ext>
             </a:extLst>
           </p:cNvPr>
@@ -1799,7 +1799,7 @@
           <p:cNvPr id="7" name="Datumsplatzhalter 6">
             <a:extLst>
               <a:ext uri="{FF2B5EF4-FFF2-40B4-BE49-F238E27FC236}">
-                <a16:creationId xmlns:a16="http://schemas.microsoft.com/office/drawing/2014/main" id="{F1A3BED8-81F8-3B65-375C-A589C9D56663}"/>
+                <a16:creationId xmlns:a16="http://schemas.microsoft.com/office/drawing/2014/main" id="{334368FE-E958-2DDD-454E-ADA43E5F4FD2}"/>
               </a:ext>
             </a:extLst>
           </p:cNvPr>
@@ -1815,7 +1815,7 @@
           <a:bodyPr/>
           <a:lstStyle/>
           <a:p>
-            <a:fld id="{DCE360E9-0FB8-400D-AC15-8242C30AE4EE}" type="datetimeFigureOut">
+            <a:fld id="{A82F466D-0CBC-4E3B-8B04-063A178DA052}" type="datetimeFigureOut">
               <a:rPr lang="de-DE" smtClean="0"/>
               <a:t>08.10.2026</a:t>
             </a:fld>
@@ -1828,7 +1828,7 @@
           <p:cNvPr id="8" name="Fußzeilenplatzhalter 7">
             <a:extLst>
               <a:ext uri="{FF2B5EF4-FFF2-40B4-BE49-F238E27FC236}">
-                <a16:creationId xmlns:a16="http://schemas.microsoft.com/office/drawing/2014/main" id="{30243EFA-D728-9CB8-6C91-896C4F834E82}"/>
+                <a16:creationId xmlns:a16="http://schemas.microsoft.com/office/drawing/2014/main" id="{C5EA7B27-4B2B-9D04-D6FE-A9C8042410CD}"/>
               </a:ext>
             </a:extLst>
           </p:cNvPr>
@@ -1853,7 +1853,7 @@
           <p:cNvPr id="9" name="Foliennummernplatzhalter 8">
             <a:extLst>
               <a:ext uri="{FF2B5EF4-FFF2-40B4-BE49-F238E27FC236}">
-                <a16:creationId xmlns:a16="http://schemas.microsoft.com/office/drawing/2014/main" id="{701B8414-BF67-7648-C58E-866DE8C7C3DC}"/>
+                <a16:creationId xmlns:a16="http://schemas.microsoft.com/office/drawing/2014/main" id="{9A5275B8-59FC-BC73-5183-ABC854E02361}"/>
               </a:ext>
             </a:extLst>
           </p:cNvPr>
@@ -1869,7 +1869,7 @@
           <a:bodyPr/>
           <a:lstStyle/>
           <a:p>
-            <a:fld id="{BD06C979-E34A-47C6-BB4C-39A0B120C4F2}" type="slidenum">
+            <a:fld id="{C000F45D-680B-4BE6-9105-0A5FC8F8FA26}" type="slidenum">
               <a:rPr lang="de-DE" smtClean="0"/>
               <a:t>‹Nr.›</a:t>
             </a:fld>
@@ -1880,7 +1880,7 @@
     </p:spTree>
     <p:extLst>
       <p:ext uri="{BB962C8B-B14F-4D97-AF65-F5344CB8AC3E}">
-        <p14:creationId xmlns:p14="http://schemas.microsoft.com/office/powerpoint/2010/main" val="289897917"/>
+        <p14:creationId xmlns:p14="http://schemas.microsoft.com/office/powerpoint/2010/main" val="1486504189"/>
       </p:ext>
     </p:extLst>
   </p:cSld>
@@ -1912,7 +1912,7 @@
           <p:cNvPr id="2" name="Titel 1">
             <a:extLst>
               <a:ext uri="{FF2B5EF4-FFF2-40B4-BE49-F238E27FC236}">
-                <a16:creationId xmlns:a16="http://schemas.microsoft.com/office/drawing/2014/main" id="{51AD5E8F-00EC-B0E4-65D4-A8C8D30E46A2}"/>
+                <a16:creationId xmlns:a16="http://schemas.microsoft.com/office/drawing/2014/main" id="{CA53EA2E-77EB-DA04-40EC-45C5B362D5D0}"/>
               </a:ext>
             </a:extLst>
           </p:cNvPr>
@@ -1940,7 +1940,7 @@
           <p:cNvPr id="3" name="Datumsplatzhalter 2">
             <a:extLst>
               <a:ext uri="{FF2B5EF4-FFF2-40B4-BE49-F238E27FC236}">
-                <a16:creationId xmlns:a16="http://schemas.microsoft.com/office/drawing/2014/main" id="{3EA5B620-0DE3-E680-3537-49C1633F667B}"/>
+                <a16:creationId xmlns:a16="http://schemas.microsoft.com/office/drawing/2014/main" id="{42E923E2-538C-7BE5-E20E-286C3EABEE5D}"/>
               </a:ext>
             </a:extLst>
           </p:cNvPr>
@@ -1956,7 +1956,7 @@
           <a:bodyPr/>
           <a:lstStyle/>
           <a:p>
-            <a:fld id="{DCE360E9-0FB8-400D-AC15-8242C30AE4EE}" type="datetimeFigureOut">
+            <a:fld id="{A82F466D-0CBC-4E3B-8B04-063A178DA052}" type="datetimeFigureOut">
               <a:rPr lang="de-DE" smtClean="0"/>
               <a:t>08.10.2026</a:t>
             </a:fld>
@@ -1969,7 +1969,7 @@
           <p:cNvPr id="4" name="Fußzeilenplatzhalter 3">
             <a:extLst>
               <a:ext uri="{FF2B5EF4-FFF2-40B4-BE49-F238E27FC236}">
-                <a16:creationId xmlns:a16="http://schemas.microsoft.com/office/drawing/2014/main" id="{75501F5D-9BE4-B7F5-8995-9A04EB37F910}"/>
+                <a16:creationId xmlns:a16="http://schemas.microsoft.com/office/drawing/2014/main" id="{6FF56655-1E54-8D4A-9BE0-F86D45356A81}"/>
               </a:ext>
             </a:extLst>
           </p:cNvPr>
@@ -1994,7 +1994,7 @@
           <p:cNvPr id="5" name="Foliennummernplatzhalter 4">
             <a:extLst>
               <a:ext uri="{FF2B5EF4-FFF2-40B4-BE49-F238E27FC236}">
-                <a16:creationId xmlns:a16="http://schemas.microsoft.com/office/drawing/2014/main" id="{B87165B3-FE6B-6FC2-96B5-F28337A70CF7}"/>
+                <a16:creationId xmlns:a16="http://schemas.microsoft.com/office/drawing/2014/main" id="{2E9E9FBE-483D-3BF3-9C10-01B4563D0579}"/>
               </a:ext>
             </a:extLst>
           </p:cNvPr>
@@ -2010,7 +2010,7 @@
           <a:bodyPr/>
           <a:lstStyle/>
           <a:p>
-            <a:fld id="{BD06C979-E34A-47C6-BB4C-39A0B120C4F2}" type="slidenum">
+            <a:fld id="{C000F45D-680B-4BE6-9105-0A5FC8F8FA26}" type="slidenum">
               <a:rPr lang="de-DE" smtClean="0"/>
               <a:t>‹Nr.›</a:t>
             </a:fld>
@@ -2021,7 +2021,7 @@
     </p:spTree>
     <p:extLst>
       <p:ext uri="{BB962C8B-B14F-4D97-AF65-F5344CB8AC3E}">
-        <p14:creationId xmlns:p14="http://schemas.microsoft.com/office/powerpoint/2010/main" val="3036679918"/>
+        <p14:creationId xmlns:p14="http://schemas.microsoft.com/office/powerpoint/2010/main" val="4221289198"/>
       </p:ext>
     </p:extLst>
   </p:cSld>
@@ -2053,7 +2053,7 @@
           <p:cNvPr id="2" name="Datumsplatzhalter 1">
             <a:extLst>
               <a:ext uri="{FF2B5EF4-FFF2-40B4-BE49-F238E27FC236}">
-                <a16:creationId xmlns:a16="http://schemas.microsoft.com/office/drawing/2014/main" id="{70D9B5FD-F07A-AD09-A534-FCACBAC27E67}"/>
+                <a16:creationId xmlns:a16="http://schemas.microsoft.com/office/drawing/2014/main" id="{8CA1326F-B53D-6AC0-1E8D-4C0E699D1A81}"/>
               </a:ext>
             </a:extLst>
           </p:cNvPr>
@@ -2069,7 +2069,7 @@
           <a:bodyPr/>
           <a:lstStyle/>
           <a:p>
-            <a:fld id="{DCE360E9-0FB8-400D-AC15-8242C30AE4EE}" type="datetimeFigureOut">
+            <a:fld id="{A82F466D-0CBC-4E3B-8B04-063A178DA052}" type="datetimeFigureOut">
               <a:rPr lang="de-DE" smtClean="0"/>
               <a:t>08.10.2026</a:t>
             </a:fld>
@@ -2082,7 +2082,7 @@
           <p:cNvPr id="3" name="Fußzeilenplatzhalter 2">
             <a:extLst>
               <a:ext uri="{FF2B5EF4-FFF2-40B4-BE49-F238E27FC236}">
-                <a16:creationId xmlns:a16="http://schemas.microsoft.com/office/drawing/2014/main" id="{71F983E8-DB43-71D7-F8CC-BC9A00DB7126}"/>
+                <a16:creationId xmlns:a16="http://schemas.microsoft.com/office/drawing/2014/main" id="{836822DA-4C2C-177D-389B-A8FD536F6ABF}"/>
               </a:ext>
             </a:extLst>
           </p:cNvPr>
@@ -2107,7 +2107,7 @@
           <p:cNvPr id="4" name="Foliennummernplatzhalter 3">
             <a:extLst>
               <a:ext uri="{FF2B5EF4-FFF2-40B4-BE49-F238E27FC236}">
-                <a16:creationId xmlns:a16="http://schemas.microsoft.com/office/drawing/2014/main" id="{4EFDBC0B-04A1-2771-4FDE-729A07FEE949}"/>
+                <a16:creationId xmlns:a16="http://schemas.microsoft.com/office/drawing/2014/main" id="{94596691-6DAD-F8AF-9E48-74B4F7EBF4F6}"/>
               </a:ext>
             </a:extLst>
           </p:cNvPr>
@@ -2123,7 +2123,7 @@
           <a:bodyPr/>
           <a:lstStyle/>
           <a:p>
-            <a:fld id="{BD06C979-E34A-47C6-BB4C-39A0B120C4F2}" type="slidenum">
+            <a:fld id="{C000F45D-680B-4BE6-9105-0A5FC8F8FA26}" type="slidenum">
               <a:rPr lang="de-DE" smtClean="0"/>
               <a:t>‹Nr.›</a:t>
             </a:fld>
@@ -2134,7 +2134,7 @@
     </p:spTree>
     <p:extLst>
       <p:ext uri="{BB962C8B-B14F-4D97-AF65-F5344CB8AC3E}">
-        <p14:creationId xmlns:p14="http://schemas.microsoft.com/office/powerpoint/2010/main" val="3728670547"/>
+        <p14:creationId xmlns:p14="http://schemas.microsoft.com/office/powerpoint/2010/main" val="2640552091"/>
       </p:ext>
     </p:extLst>
   </p:cSld>
@@ -2166,7 +2166,7 @@
           <p:cNvPr id="2" name="Titel 1">
             <a:extLst>
               <a:ext uri="{FF2B5EF4-FFF2-40B4-BE49-F238E27FC236}">
-                <a16:creationId xmlns:a16="http://schemas.microsoft.com/office/drawing/2014/main" id="{4AAAFF21-B16C-BCD4-BB16-673A1E5EEAA5}"/>
+                <a16:creationId xmlns:a16="http://schemas.microsoft.com/office/drawing/2014/main" id="{4AECBCD6-5F80-5B40-EB11-3E863B07DEAC}"/>
               </a:ext>
             </a:extLst>
           </p:cNvPr>
@@ -2203,7 +2203,7 @@
           <p:cNvPr id="3" name="Inhaltsplatzhalter 2">
             <a:extLst>
               <a:ext uri="{FF2B5EF4-FFF2-40B4-BE49-F238E27FC236}">
-                <a16:creationId xmlns:a16="http://schemas.microsoft.com/office/drawing/2014/main" id="{85582968-38B0-DF5D-FCF8-20B70A81075B}"/>
+                <a16:creationId xmlns:a16="http://schemas.microsoft.com/office/drawing/2014/main" id="{67313EA6-2F04-8F5A-9160-55CFDA42E849}"/>
               </a:ext>
             </a:extLst>
           </p:cNvPr>
@@ -2293,7 +2293,7 @@
           <p:cNvPr id="4" name="Textplatzhalter 3">
             <a:extLst>
               <a:ext uri="{FF2B5EF4-FFF2-40B4-BE49-F238E27FC236}">
-                <a16:creationId xmlns:a16="http://schemas.microsoft.com/office/drawing/2014/main" id="{DB811100-324B-C4BE-1E01-1421BE2640CC}"/>
+                <a16:creationId xmlns:a16="http://schemas.microsoft.com/office/drawing/2014/main" id="{317878FA-6FC8-5300-D722-EB4E2040F4A3}"/>
               </a:ext>
             </a:extLst>
           </p:cNvPr>
@@ -2364,7 +2364,7 @@
           <p:cNvPr id="5" name="Datumsplatzhalter 4">
             <a:extLst>
               <a:ext uri="{FF2B5EF4-FFF2-40B4-BE49-F238E27FC236}">
-                <a16:creationId xmlns:a16="http://schemas.microsoft.com/office/drawing/2014/main" id="{255EBF4C-AFF8-2429-F5C6-0A4E7CB2A333}"/>
+                <a16:creationId xmlns:a16="http://schemas.microsoft.com/office/drawing/2014/main" id="{0E9AE0E2-8E52-AB79-AE04-90EEE54B7C13}"/>
               </a:ext>
             </a:extLst>
           </p:cNvPr>
@@ -2380,7 +2380,7 @@
           <a:bodyPr/>
           <a:lstStyle/>
           <a:p>
-            <a:fld id="{DCE360E9-0FB8-400D-AC15-8242C30AE4EE}" type="datetimeFigureOut">
+            <a:fld id="{A82F466D-0CBC-4E3B-8B04-063A178DA052}" type="datetimeFigureOut">
               <a:rPr lang="de-DE" smtClean="0"/>
               <a:t>08.10.2026</a:t>
             </a:fld>
@@ -2393,7 +2393,7 @@
           <p:cNvPr id="6" name="Fußzeilenplatzhalter 5">
             <a:extLst>
               <a:ext uri="{FF2B5EF4-FFF2-40B4-BE49-F238E27FC236}">
-                <a16:creationId xmlns:a16="http://schemas.microsoft.com/office/drawing/2014/main" id="{2B81A7F2-B65B-A487-78B9-5A63BD5AAF4C}"/>
+                <a16:creationId xmlns:a16="http://schemas.microsoft.com/office/drawing/2014/main" id="{139D783F-45B5-48A3-569B-13E6A9B0AFF2}"/>
               </a:ext>
             </a:extLst>
           </p:cNvPr>
@@ -2418,7 +2418,7 @@
           <p:cNvPr id="7" name="Foliennummernplatzhalter 6">
             <a:extLst>
               <a:ext uri="{FF2B5EF4-FFF2-40B4-BE49-F238E27FC236}">
-                <a16:creationId xmlns:a16="http://schemas.microsoft.com/office/drawing/2014/main" id="{F837510E-8E18-E7A6-745E-14B48F2D9A2B}"/>
+                <a16:creationId xmlns:a16="http://schemas.microsoft.com/office/drawing/2014/main" id="{16477420-111A-2F24-A92F-C93F7EDED669}"/>
               </a:ext>
             </a:extLst>
           </p:cNvPr>
@@ -2434,7 +2434,7 @@
           <a:bodyPr/>
           <a:lstStyle/>
           <a:p>
-            <a:fld id="{BD06C979-E34A-47C6-BB4C-39A0B120C4F2}" type="slidenum">
+            <a:fld id="{C000F45D-680B-4BE6-9105-0A5FC8F8FA26}" type="slidenum">
               <a:rPr lang="de-DE" smtClean="0"/>
               <a:t>‹Nr.›</a:t>
             </a:fld>
@@ -2445,7 +2445,7 @@
     </p:spTree>
     <p:extLst>
       <p:ext uri="{BB962C8B-B14F-4D97-AF65-F5344CB8AC3E}">
-        <p14:creationId xmlns:p14="http://schemas.microsoft.com/office/powerpoint/2010/main" val="142176752"/>
+        <p14:creationId xmlns:p14="http://schemas.microsoft.com/office/powerpoint/2010/main" val="2306452419"/>
       </p:ext>
     </p:extLst>
   </p:cSld>
@@ -2477,7 +2477,7 @@
           <p:cNvPr id="2" name="Titel 1">
             <a:extLst>
               <a:ext uri="{FF2B5EF4-FFF2-40B4-BE49-F238E27FC236}">
-                <a16:creationId xmlns:a16="http://schemas.microsoft.com/office/drawing/2014/main" id="{25EB82A6-BE17-B296-D17D-B66A06520981}"/>
+                <a16:creationId xmlns:a16="http://schemas.microsoft.com/office/drawing/2014/main" id="{650F7FD1-2965-AB3F-90F8-1B021CD6A320}"/>
               </a:ext>
             </a:extLst>
           </p:cNvPr>
@@ -2514,7 +2514,7 @@
           <p:cNvPr id="3" name="Bildplatzhalter 2">
             <a:extLst>
               <a:ext uri="{FF2B5EF4-FFF2-40B4-BE49-F238E27FC236}">
-                <a16:creationId xmlns:a16="http://schemas.microsoft.com/office/drawing/2014/main" id="{2F591E62-24A6-963E-6804-A111028C17C0}"/>
+                <a16:creationId xmlns:a16="http://schemas.microsoft.com/office/drawing/2014/main" id="{C8F33682-5FA2-F844-C900-399BEAB774F2}"/>
               </a:ext>
             </a:extLst>
           </p:cNvPr>
@@ -2581,7 +2581,7 @@
           <p:cNvPr id="4" name="Textplatzhalter 3">
             <a:extLst>
               <a:ext uri="{FF2B5EF4-FFF2-40B4-BE49-F238E27FC236}">
-                <a16:creationId xmlns:a16="http://schemas.microsoft.com/office/drawing/2014/main" id="{C5A19A89-5A59-3217-E551-E55D7637D86D}"/>
+                <a16:creationId xmlns:a16="http://schemas.microsoft.com/office/drawing/2014/main" id="{998F9E45-3056-1BB1-2D6D-31F32373D186}"/>
               </a:ext>
             </a:extLst>
           </p:cNvPr>
@@ -2652,7 +2652,7 @@
           <p:cNvPr id="5" name="Datumsplatzhalter 4">
             <a:extLst>
               <a:ext uri="{FF2B5EF4-FFF2-40B4-BE49-F238E27FC236}">
-                <a16:creationId xmlns:a16="http://schemas.microsoft.com/office/drawing/2014/main" id="{32ED56A2-5D7B-15EE-118C-C2892FDC7A38}"/>
+                <a16:creationId xmlns:a16="http://schemas.microsoft.com/office/drawing/2014/main" id="{723A0CBC-2B63-0715-075D-4B7B56191B96}"/>
               </a:ext>
             </a:extLst>
           </p:cNvPr>
@@ -2668,7 +2668,7 @@
           <a:bodyPr/>
           <a:lstStyle/>
           <a:p>
-            <a:fld id="{DCE360E9-0FB8-400D-AC15-8242C30AE4EE}" type="datetimeFigureOut">
+            <a:fld id="{A82F466D-0CBC-4E3B-8B04-063A178DA052}" type="datetimeFigureOut">
               <a:rPr lang="de-DE" smtClean="0"/>
               <a:t>08.10.2026</a:t>
             </a:fld>
@@ -2681,7 +2681,7 @@
           <p:cNvPr id="6" name="Fußzeilenplatzhalter 5">
             <a:extLst>
               <a:ext uri="{FF2B5EF4-FFF2-40B4-BE49-F238E27FC236}">
-                <a16:creationId xmlns:a16="http://schemas.microsoft.com/office/drawing/2014/main" id="{B488970A-6270-6982-1DC2-F2F340FC49AC}"/>
+                <a16:creationId xmlns:a16="http://schemas.microsoft.com/office/drawing/2014/main" id="{A2A2B1D4-5C31-C289-2D27-86FA98CAE033}"/>
               </a:ext>
             </a:extLst>
           </p:cNvPr>
@@ -2706,7 +2706,7 @@
           <p:cNvPr id="7" name="Foliennummernplatzhalter 6">
             <a:extLst>
               <a:ext uri="{FF2B5EF4-FFF2-40B4-BE49-F238E27FC236}">
-                <a16:creationId xmlns:a16="http://schemas.microsoft.com/office/drawing/2014/main" id="{14CB5EA9-51F8-C560-3DC7-CC464585301A}"/>
+                <a16:creationId xmlns:a16="http://schemas.microsoft.com/office/drawing/2014/main" id="{F03463CC-D22B-9B7C-62F7-CF72FF2CCFC6}"/>
               </a:ext>
             </a:extLst>
           </p:cNvPr>
@@ -2722,7 +2722,7 @@
           <a:bodyPr/>
           <a:lstStyle/>
           <a:p>
-            <a:fld id="{BD06C979-E34A-47C6-BB4C-39A0B120C4F2}" type="slidenum">
+            <a:fld id="{C000F45D-680B-4BE6-9105-0A5FC8F8FA26}" type="slidenum">
               <a:rPr lang="de-DE" smtClean="0"/>
               <a:t>‹Nr.›</a:t>
             </a:fld>
@@ -2733,7 +2733,7 @@
     </p:spTree>
     <p:extLst>
       <p:ext uri="{BB962C8B-B14F-4D97-AF65-F5344CB8AC3E}">
-        <p14:creationId xmlns:p14="http://schemas.microsoft.com/office/powerpoint/2010/main" val="2975917273"/>
+        <p14:creationId xmlns:p14="http://schemas.microsoft.com/office/powerpoint/2010/main" val="1970769080"/>
       </p:ext>
     </p:extLst>
   </p:cSld>
@@ -2770,7 +2770,7 @@
           <p:cNvPr id="2" name="Titelplatzhalter 1">
             <a:extLst>
               <a:ext uri="{FF2B5EF4-FFF2-40B4-BE49-F238E27FC236}">
-                <a16:creationId xmlns:a16="http://schemas.microsoft.com/office/drawing/2014/main" id="{565DE672-ECC3-7705-8D96-3989A22A9C04}"/>
+                <a16:creationId xmlns:a16="http://schemas.microsoft.com/office/drawing/2014/main" id="{3E1BE9E2-E796-16C4-A7FF-FAC1D923D936}"/>
               </a:ext>
             </a:extLst>
           </p:cNvPr>
@@ -2808,7 +2808,7 @@
           <p:cNvPr id="3" name="Textplatzhalter 2">
             <a:extLst>
               <a:ext uri="{FF2B5EF4-FFF2-40B4-BE49-F238E27FC236}">
-                <a16:creationId xmlns:a16="http://schemas.microsoft.com/office/drawing/2014/main" id="{B93A9834-6DA0-42CC-99CC-6F63BBC3BF8F}"/>
+                <a16:creationId xmlns:a16="http://schemas.microsoft.com/office/drawing/2014/main" id="{E16B4DC3-54D1-54A7-396F-601BDE760499}"/>
               </a:ext>
             </a:extLst>
           </p:cNvPr>
@@ -2875,7 +2875,7 @@
           <p:cNvPr id="4" name="Datumsplatzhalter 3">
             <a:extLst>
               <a:ext uri="{FF2B5EF4-FFF2-40B4-BE49-F238E27FC236}">
-                <a16:creationId xmlns:a16="http://schemas.microsoft.com/office/drawing/2014/main" id="{7EF473A6-13F8-3A12-B979-0D88F0BAB131}"/>
+                <a16:creationId xmlns:a16="http://schemas.microsoft.com/office/drawing/2014/main" id="{A6C16C56-F627-0E20-3C59-99B2D2C2D375}"/>
               </a:ext>
             </a:extLst>
           </p:cNvPr>
@@ -2909,7 +2909,7 @@
             </a:lvl1pPr>
           </a:lstStyle>
           <a:p>
-            <a:fld id="{DCE360E9-0FB8-400D-AC15-8242C30AE4EE}" type="datetimeFigureOut">
+            <a:fld id="{A82F466D-0CBC-4E3B-8B04-063A178DA052}" type="datetimeFigureOut">
               <a:rPr lang="de-DE" smtClean="0"/>
               <a:t>08.10.2026</a:t>
             </a:fld>
@@ -2922,7 +2922,7 @@
           <p:cNvPr id="5" name="Fußzeilenplatzhalter 4">
             <a:extLst>
               <a:ext uri="{FF2B5EF4-FFF2-40B4-BE49-F238E27FC236}">
-                <a16:creationId xmlns:a16="http://schemas.microsoft.com/office/drawing/2014/main" id="{9F2BD7CE-FF2C-0ABA-AAB6-427B0A32A614}"/>
+                <a16:creationId xmlns:a16="http://schemas.microsoft.com/office/drawing/2014/main" id="{467694C4-23A5-60E8-92C2-87D673D0B49E}"/>
               </a:ext>
             </a:extLst>
           </p:cNvPr>
@@ -2965,7 +2965,7 @@
           <p:cNvPr id="6" name="Foliennummernplatzhalter 5">
             <a:extLst>
               <a:ext uri="{FF2B5EF4-FFF2-40B4-BE49-F238E27FC236}">
-                <a16:creationId xmlns:a16="http://schemas.microsoft.com/office/drawing/2014/main" id="{8A9DCD82-E145-FF98-E567-B3A525833D38}"/>
+                <a16:creationId xmlns:a16="http://schemas.microsoft.com/office/drawing/2014/main" id="{695A05EE-ECE5-2B99-3136-0AAC6DB195C7}"/>
               </a:ext>
             </a:extLst>
           </p:cNvPr>
@@ -2999,7 +2999,7 @@
             </a:lvl1pPr>
           </a:lstStyle>
           <a:p>
-            <a:fld id="{BD06C979-E34A-47C6-BB4C-39A0B120C4F2}" type="slidenum">
+            <a:fld id="{C000F45D-680B-4BE6-9105-0A5FC8F8FA26}" type="slidenum">
               <a:rPr lang="de-DE" smtClean="0"/>
               <a:t>‹Nr.›</a:t>
             </a:fld>
@@ -3010,7 +3010,7 @@
     </p:spTree>
     <p:extLst>
       <p:ext uri="{BB962C8B-B14F-4D97-AF65-F5344CB8AC3E}">
-        <p14:creationId xmlns:p14="http://schemas.microsoft.com/office/powerpoint/2010/main" val="3321312344"/>
+        <p14:creationId xmlns:p14="http://schemas.microsoft.com/office/powerpoint/2010/main" val="1594900725"/>
       </p:ext>
     </p:extLst>
   </p:cSld>
@@ -3333,7 +3333,7 @@
           <p:cNvPr id="2" name="AutoShape 1">
             <a:extLst>
               <a:ext uri="{FF2B5EF4-FFF2-40B4-BE49-F238E27FC236}">
-                <a16:creationId xmlns:a16="http://schemas.microsoft.com/office/drawing/2014/main" id="{64F2E390-9FD5-A23C-4A16-F8CC5FF88E5A}"/>
+                <a16:creationId xmlns:a16="http://schemas.microsoft.com/office/drawing/2014/main" id="{3A137CE8-B2E9-FF51-8567-16EE8001EE07}"/>
               </a:ext>
             </a:extLst>
           </p:cNvPr>
@@ -3379,7 +3379,7 @@
           <p:cNvPr id="3" name="AutoShape 2">
             <a:extLst>
               <a:ext uri="{FF2B5EF4-FFF2-40B4-BE49-F238E27FC236}">
-                <a16:creationId xmlns:a16="http://schemas.microsoft.com/office/drawing/2014/main" id="{56F3FAFE-5ACC-3161-24C3-E9E8A618979D}"/>
+                <a16:creationId xmlns:a16="http://schemas.microsoft.com/office/drawing/2014/main" id="{0E7E7412-4B36-20DC-9F88-331052FEB65B}"/>
               </a:ext>
             </a:extLst>
           </p:cNvPr>
@@ -3425,7 +3425,7 @@
           <p:cNvPr id="4" name="AutoShape 3">
             <a:extLst>
               <a:ext uri="{FF2B5EF4-FFF2-40B4-BE49-F238E27FC236}">
-                <a16:creationId xmlns:a16="http://schemas.microsoft.com/office/drawing/2014/main" id="{9FE8384B-ED33-24A6-3077-42A762AD1A3C}"/>
+                <a16:creationId xmlns:a16="http://schemas.microsoft.com/office/drawing/2014/main" id="{BD5B8599-F469-A276-031D-DD34DEC65DEB}"/>
               </a:ext>
             </a:extLst>
           </p:cNvPr>
@@ -3471,7 +3471,7 @@
           <p:cNvPr id="5" name="AutoShape 4">
             <a:extLst>
               <a:ext uri="{FF2B5EF4-FFF2-40B4-BE49-F238E27FC236}">
-                <a16:creationId xmlns:a16="http://schemas.microsoft.com/office/drawing/2014/main" id="{84E0BF67-B93F-90A6-85BF-A2A818563BB6}"/>
+                <a16:creationId xmlns:a16="http://schemas.microsoft.com/office/drawing/2014/main" id="{CD2E11C4-E156-59BB-7420-FAC51B825A4D}"/>
               </a:ext>
             </a:extLst>
           </p:cNvPr>
@@ -3517,7 +3517,7 @@
           <p:cNvPr id="6" name="AutoShape 5">
             <a:extLst>
               <a:ext uri="{FF2B5EF4-FFF2-40B4-BE49-F238E27FC236}">
-                <a16:creationId xmlns:a16="http://schemas.microsoft.com/office/drawing/2014/main" id="{26B8CA52-6179-D7D6-E73A-22A05465A39B}"/>
+                <a16:creationId xmlns:a16="http://schemas.microsoft.com/office/drawing/2014/main" id="{BBFC002A-4B52-76EA-C529-FFA284F20CC1}"/>
               </a:ext>
             </a:extLst>
           </p:cNvPr>
@@ -3563,7 +3563,7 @@
           <p:cNvPr id="7" name="AutoShape 6">
             <a:extLst>
               <a:ext uri="{FF2B5EF4-FFF2-40B4-BE49-F238E27FC236}">
-                <a16:creationId xmlns:a16="http://schemas.microsoft.com/office/drawing/2014/main" id="{15BB5CCC-5E52-C9C8-63CF-79258A478CFB}"/>
+                <a16:creationId xmlns:a16="http://schemas.microsoft.com/office/drawing/2014/main" id="{9D286DF4-66F5-1328-2C0A-F8903FDA87C9}"/>
               </a:ext>
             </a:extLst>
           </p:cNvPr>
@@ -3609,7 +3609,7 @@
           <p:cNvPr id="8" name="AutoShape 7">
             <a:extLst>
               <a:ext uri="{FF2B5EF4-FFF2-40B4-BE49-F238E27FC236}">
-                <a16:creationId xmlns:a16="http://schemas.microsoft.com/office/drawing/2014/main" id="{C4AB30C2-7D7B-9073-3D01-7B3D5F5BF65F}"/>
+                <a16:creationId xmlns:a16="http://schemas.microsoft.com/office/drawing/2014/main" id="{C9FC56E4-852D-5A02-2BC6-4E72B5B59B9B}"/>
               </a:ext>
             </a:extLst>
           </p:cNvPr>
@@ -3655,7 +3655,7 @@
           <p:cNvPr id="9" name="AutoShape 8">
             <a:extLst>
               <a:ext uri="{FF2B5EF4-FFF2-40B4-BE49-F238E27FC236}">
-                <a16:creationId xmlns:a16="http://schemas.microsoft.com/office/drawing/2014/main" id="{7474B19D-1956-99BB-C94A-AEDCE55BA404}"/>
+                <a16:creationId xmlns:a16="http://schemas.microsoft.com/office/drawing/2014/main" id="{B030FF22-E717-115B-AD37-BAB00D2B2C8C}"/>
               </a:ext>
             </a:extLst>
           </p:cNvPr>
@@ -3701,7 +3701,7 @@
           <p:cNvPr id="10" name="AutoShape 9">
             <a:extLst>
               <a:ext uri="{FF2B5EF4-FFF2-40B4-BE49-F238E27FC236}">
-                <a16:creationId xmlns:a16="http://schemas.microsoft.com/office/drawing/2014/main" id="{AA44B350-84FD-91C0-B5F9-B82D671C434D}"/>
+                <a16:creationId xmlns:a16="http://schemas.microsoft.com/office/drawing/2014/main" id="{E62DA990-98CD-CA26-6DDA-3BDBC13C2B6C}"/>
               </a:ext>
             </a:extLst>
           </p:cNvPr>
@@ -3747,7 +3747,7 @@
           <p:cNvPr id="11" name="AutoShape 10">
             <a:extLst>
               <a:ext uri="{FF2B5EF4-FFF2-40B4-BE49-F238E27FC236}">
-                <a16:creationId xmlns:a16="http://schemas.microsoft.com/office/drawing/2014/main" id="{6230A0FF-855B-D33C-CE76-4D907A4D034F}"/>
+                <a16:creationId xmlns:a16="http://schemas.microsoft.com/office/drawing/2014/main" id="{E7B4F9B2-C359-9ECA-B1B6-CAADF60E64F6}"/>
               </a:ext>
             </a:extLst>
           </p:cNvPr>
@@ -3793,7 +3793,7 @@
           <p:cNvPr id="12" name="AutoShape 11">
             <a:extLst>
               <a:ext uri="{FF2B5EF4-FFF2-40B4-BE49-F238E27FC236}">
-                <a16:creationId xmlns:a16="http://schemas.microsoft.com/office/drawing/2014/main" id="{6099B6A5-2257-612D-D8A6-18526484E4C4}"/>
+                <a16:creationId xmlns:a16="http://schemas.microsoft.com/office/drawing/2014/main" id="{1F1623DF-051A-B4FF-4C09-ED911F832C5D}"/>
               </a:ext>
             </a:extLst>
           </p:cNvPr>
@@ -3839,7 +3839,7 @@
           <p:cNvPr id="13" name="AutoShape 12">
             <a:extLst>
               <a:ext uri="{FF2B5EF4-FFF2-40B4-BE49-F238E27FC236}">
-                <a16:creationId xmlns:a16="http://schemas.microsoft.com/office/drawing/2014/main" id="{8D060044-4A47-1985-42C4-37EEFA602E20}"/>
+                <a16:creationId xmlns:a16="http://schemas.microsoft.com/office/drawing/2014/main" id="{ECA53F64-A4FC-D064-91F8-A429450CB50C}"/>
               </a:ext>
             </a:extLst>
           </p:cNvPr>
@@ -3885,7 +3885,7 @@
           <p:cNvPr id="14" name="AutoShape 13">
             <a:extLst>
               <a:ext uri="{FF2B5EF4-FFF2-40B4-BE49-F238E27FC236}">
-                <a16:creationId xmlns:a16="http://schemas.microsoft.com/office/drawing/2014/main" id="{772A3B33-8E5E-8998-2681-C7E978AAA5DE}"/>
+                <a16:creationId xmlns:a16="http://schemas.microsoft.com/office/drawing/2014/main" id="{8D04840A-BE3B-E182-ABDE-D9F03312D948}"/>
               </a:ext>
             </a:extLst>
           </p:cNvPr>
@@ -3931,7 +3931,7 @@
           <p:cNvPr id="15" name="AutoShape 14">
             <a:extLst>
               <a:ext uri="{FF2B5EF4-FFF2-40B4-BE49-F238E27FC236}">
-                <a16:creationId xmlns:a16="http://schemas.microsoft.com/office/drawing/2014/main" id="{EA13E90B-03F1-FFFF-9064-35C5914B783E}"/>
+                <a16:creationId xmlns:a16="http://schemas.microsoft.com/office/drawing/2014/main" id="{2D9A598B-8800-225A-CA4E-6097CF7FA854}"/>
               </a:ext>
             </a:extLst>
           </p:cNvPr>
@@ -3977,7 +3977,7 @@
           <p:cNvPr id="16" name="AutoShape 15">
             <a:extLst>
               <a:ext uri="{FF2B5EF4-FFF2-40B4-BE49-F238E27FC236}">
-                <a16:creationId xmlns:a16="http://schemas.microsoft.com/office/drawing/2014/main" id="{1780AC1F-AF91-CFA2-658D-F66E2850E084}"/>
+                <a16:creationId xmlns:a16="http://schemas.microsoft.com/office/drawing/2014/main" id="{38E47949-783B-7E25-3982-FD950B2E5186}"/>
               </a:ext>
             </a:extLst>
           </p:cNvPr>
@@ -4023,7 +4023,7 @@
           <p:cNvPr id="17" name="AutoShape 16">
             <a:extLst>
               <a:ext uri="{FF2B5EF4-FFF2-40B4-BE49-F238E27FC236}">
-                <a16:creationId xmlns:a16="http://schemas.microsoft.com/office/drawing/2014/main" id="{C610B5CB-55E5-B7CF-BCAC-5FE00F24E012}"/>
+                <a16:creationId xmlns:a16="http://schemas.microsoft.com/office/drawing/2014/main" id="{8F532036-9687-D0B5-16EA-5F849EC01182}"/>
               </a:ext>
             </a:extLst>
           </p:cNvPr>
@@ -4069,7 +4069,7 @@
           <p:cNvPr id="18" name="AutoShape 17">
             <a:extLst>
               <a:ext uri="{FF2B5EF4-FFF2-40B4-BE49-F238E27FC236}">
-                <a16:creationId xmlns:a16="http://schemas.microsoft.com/office/drawing/2014/main" id="{F2603E68-7703-6F33-B873-43F5771FE039}"/>
+                <a16:creationId xmlns:a16="http://schemas.microsoft.com/office/drawing/2014/main" id="{970BB6D9-541D-F88D-4B2D-227FCD0B241E}"/>
               </a:ext>
             </a:extLst>
           </p:cNvPr>
@@ -4115,7 +4115,7 @@
           <p:cNvPr id="19" name="AutoShape 18">
             <a:extLst>
               <a:ext uri="{FF2B5EF4-FFF2-40B4-BE49-F238E27FC236}">
-                <a16:creationId xmlns:a16="http://schemas.microsoft.com/office/drawing/2014/main" id="{F6E922F2-8832-8681-F4E7-9FC52615A45A}"/>
+                <a16:creationId xmlns:a16="http://schemas.microsoft.com/office/drawing/2014/main" id="{67EB9F44-4B8B-9521-7E17-581C11219ED5}"/>
               </a:ext>
             </a:extLst>
           </p:cNvPr>
@@ -4165,7 +4165,7 @@
           <p:cNvPr id="20" name="AutoShape 19">
             <a:extLst>
               <a:ext uri="{FF2B5EF4-FFF2-40B4-BE49-F238E27FC236}">
-                <a16:creationId xmlns:a16="http://schemas.microsoft.com/office/drawing/2014/main" id="{0AB46984-CC89-A521-8AEE-D14AC0D6E1D0}"/>
+                <a16:creationId xmlns:a16="http://schemas.microsoft.com/office/drawing/2014/main" id="{02EC5340-D6EA-2E3E-B849-4F8142B4D4DB}"/>
               </a:ext>
             </a:extLst>
           </p:cNvPr>
@@ -4215,7 +4215,7 @@
           <p:cNvPr id="21" name="AutoShape 20">
             <a:extLst>
               <a:ext uri="{FF2B5EF4-FFF2-40B4-BE49-F238E27FC236}">
-                <a16:creationId xmlns:a16="http://schemas.microsoft.com/office/drawing/2014/main" id="{BB13A4D7-290A-428E-3BE0-3F499B3D0B54}"/>
+                <a16:creationId xmlns:a16="http://schemas.microsoft.com/office/drawing/2014/main" id="{29A9C3AA-87C2-D2DD-E259-3321926A5539}"/>
               </a:ext>
             </a:extLst>
           </p:cNvPr>
@@ -4265,7 +4265,7 @@
           <p:cNvPr id="22" name="AutoShape 21">
             <a:extLst>
               <a:ext uri="{FF2B5EF4-FFF2-40B4-BE49-F238E27FC236}">
-                <a16:creationId xmlns:a16="http://schemas.microsoft.com/office/drawing/2014/main" id="{4AE10CDF-36F0-A193-CB38-9A97DE1CD857}"/>
+                <a16:creationId xmlns:a16="http://schemas.microsoft.com/office/drawing/2014/main" id="{7D1E513D-4A7D-4C03-8F54-B268C085A4D2}"/>
               </a:ext>
             </a:extLst>
           </p:cNvPr>
@@ -4311,7 +4311,7 @@
           <p:cNvPr id="23" name="AutoShape 22">
             <a:extLst>
               <a:ext uri="{FF2B5EF4-FFF2-40B4-BE49-F238E27FC236}">
-                <a16:creationId xmlns:a16="http://schemas.microsoft.com/office/drawing/2014/main" id="{0B03667C-826F-5ADF-1558-62DAB57EB154}"/>
+                <a16:creationId xmlns:a16="http://schemas.microsoft.com/office/drawing/2014/main" id="{21A21314-10E3-C6BD-2643-199FB2E599DE}"/>
               </a:ext>
             </a:extLst>
           </p:cNvPr>
@@ -4357,7 +4357,7 @@
           <p:cNvPr id="24" name="AutoShape 23">
             <a:extLst>
               <a:ext uri="{FF2B5EF4-FFF2-40B4-BE49-F238E27FC236}">
-                <a16:creationId xmlns:a16="http://schemas.microsoft.com/office/drawing/2014/main" id="{5BBE64B8-187F-5184-E168-51160C6A954B}"/>
+                <a16:creationId xmlns:a16="http://schemas.microsoft.com/office/drawing/2014/main" id="{A4587D23-964E-162F-CBCC-0BF78415A538}"/>
               </a:ext>
             </a:extLst>
           </p:cNvPr>
@@ -4403,7 +4403,7 @@
           <p:cNvPr id="25" name="AutoShape 24">
             <a:extLst>
               <a:ext uri="{FF2B5EF4-FFF2-40B4-BE49-F238E27FC236}">
-                <a16:creationId xmlns:a16="http://schemas.microsoft.com/office/drawing/2014/main" id="{8E23B5EF-B2FC-6538-73C3-E46AF5B6B513}"/>
+                <a16:creationId xmlns:a16="http://schemas.microsoft.com/office/drawing/2014/main" id="{2762BB1C-7684-C1C1-AE6E-4697B1A93B9B}"/>
               </a:ext>
             </a:extLst>
           </p:cNvPr>
@@ -4447,7 +4447,7 @@
     </p:spTree>
     <p:extLst>
       <p:ext uri="{BB962C8B-B14F-4D97-AF65-F5344CB8AC3E}">
-        <p14:creationId xmlns:p14="http://schemas.microsoft.com/office/powerpoint/2010/main" val="2929749332"/>
+        <p14:creationId xmlns:p14="http://schemas.microsoft.com/office/powerpoint/2010/main" val="919367059"/>
       </p:ext>
     </p:extLst>
   </p:cSld>
@@ -4479,7 +4479,7 @@
           <p:cNvPr id="2" name="AutoShape 25">
             <a:extLst>
               <a:ext uri="{FF2B5EF4-FFF2-40B4-BE49-F238E27FC236}">
-                <a16:creationId xmlns:a16="http://schemas.microsoft.com/office/drawing/2014/main" id="{D2D6F60F-A395-B03A-391C-EC59A3FF4F39}"/>
+                <a16:creationId xmlns:a16="http://schemas.microsoft.com/office/drawing/2014/main" id="{91E52100-CCAE-CF0B-7559-E3CE293B0E05}"/>
               </a:ext>
             </a:extLst>
           </p:cNvPr>
@@ -4523,7 +4523,7 @@
           <p:cNvPr id="3" name="AutoShape 26">
             <a:extLst>
               <a:ext uri="{FF2B5EF4-FFF2-40B4-BE49-F238E27FC236}">
-                <a16:creationId xmlns:a16="http://schemas.microsoft.com/office/drawing/2014/main" id="{D3AFF78F-7019-4894-1CBE-3116F149AB3D}"/>
+                <a16:creationId xmlns:a16="http://schemas.microsoft.com/office/drawing/2014/main" id="{030AB5FD-B1A9-7C2B-A950-65A9D06A773D}"/>
               </a:ext>
             </a:extLst>
           </p:cNvPr>
@@ -4567,7 +4567,7 @@
           <p:cNvPr id="4" name="AutoShape 27">
             <a:extLst>
               <a:ext uri="{FF2B5EF4-FFF2-40B4-BE49-F238E27FC236}">
-                <a16:creationId xmlns:a16="http://schemas.microsoft.com/office/drawing/2014/main" id="{5C83CD38-631E-C274-B9F9-69A5230BD329}"/>
+                <a16:creationId xmlns:a16="http://schemas.microsoft.com/office/drawing/2014/main" id="{A85A039A-757D-2B17-3783-390D3F30D2A8}"/>
               </a:ext>
             </a:extLst>
           </p:cNvPr>
@@ -4611,7 +4611,7 @@
           <p:cNvPr id="5" name="AutoShape 28">
             <a:extLst>
               <a:ext uri="{FF2B5EF4-FFF2-40B4-BE49-F238E27FC236}">
-                <a16:creationId xmlns:a16="http://schemas.microsoft.com/office/drawing/2014/main" id="{AE509D71-064E-6B97-165B-AB80E5A70C96}"/>
+                <a16:creationId xmlns:a16="http://schemas.microsoft.com/office/drawing/2014/main" id="{EF4EB68C-D205-8C8C-AFDF-7B10FECA9112}"/>
               </a:ext>
             </a:extLst>
           </p:cNvPr>
@@ -4657,7 +4657,7 @@
           <p:cNvPr id="6" name="AutoShape 29">
             <a:extLst>
               <a:ext uri="{FF2B5EF4-FFF2-40B4-BE49-F238E27FC236}">
-                <a16:creationId xmlns:a16="http://schemas.microsoft.com/office/drawing/2014/main" id="{80004EAF-D73C-51B1-0B21-8CC656E2E14E}"/>
+                <a16:creationId xmlns:a16="http://schemas.microsoft.com/office/drawing/2014/main" id="{F15C0FC5-5886-C63F-5A00-B17106305495}"/>
               </a:ext>
             </a:extLst>
           </p:cNvPr>
@@ -4701,7 +4701,7 @@
           <p:cNvPr id="7" name="AutoShape 30">
             <a:extLst>
               <a:ext uri="{FF2B5EF4-FFF2-40B4-BE49-F238E27FC236}">
-                <a16:creationId xmlns:a16="http://schemas.microsoft.com/office/drawing/2014/main" id="{1E5EA771-079E-6466-F9F2-640FC16724E2}"/>
+                <a16:creationId xmlns:a16="http://schemas.microsoft.com/office/drawing/2014/main" id="{2BE5CFC4-9E31-09C9-AD0C-E2B37E868A32}"/>
               </a:ext>
             </a:extLst>
           </p:cNvPr>
@@ -4745,7 +4745,7 @@
           <p:cNvPr id="8" name="AutoShape 31">
             <a:extLst>
               <a:ext uri="{FF2B5EF4-FFF2-40B4-BE49-F238E27FC236}">
-                <a16:creationId xmlns:a16="http://schemas.microsoft.com/office/drawing/2014/main" id="{180BAB83-3DE5-98B9-BF2A-C5253CFFCA41}"/>
+                <a16:creationId xmlns:a16="http://schemas.microsoft.com/office/drawing/2014/main" id="{40BFD30B-7E43-2FBE-9B83-CB47BBBA75E6}"/>
               </a:ext>
             </a:extLst>
           </p:cNvPr>
@@ -4789,7 +4789,7 @@
           <p:cNvPr id="9" name="AutoShape 32">
             <a:extLst>
               <a:ext uri="{FF2B5EF4-FFF2-40B4-BE49-F238E27FC236}">
-                <a16:creationId xmlns:a16="http://schemas.microsoft.com/office/drawing/2014/main" id="{3F0AF136-2919-B504-1306-9D1C2FE38376}"/>
+                <a16:creationId xmlns:a16="http://schemas.microsoft.com/office/drawing/2014/main" id="{A68A7A94-E7FC-1D63-97E7-B8372B5B8779}"/>
               </a:ext>
             </a:extLst>
           </p:cNvPr>
@@ -4833,7 +4833,7 @@
           <p:cNvPr id="10" name="AutoShape 33">
             <a:extLst>
               <a:ext uri="{FF2B5EF4-FFF2-40B4-BE49-F238E27FC236}">
-                <a16:creationId xmlns:a16="http://schemas.microsoft.com/office/drawing/2014/main" id="{D38049FE-9510-EE8E-D941-83B255A90BF7}"/>
+                <a16:creationId xmlns:a16="http://schemas.microsoft.com/office/drawing/2014/main" id="{85BFD655-F076-11BA-581F-DCC1BC8A5568}"/>
               </a:ext>
             </a:extLst>
           </p:cNvPr>
@@ -4879,7 +4879,7 @@
           <p:cNvPr id="11" name="AutoShape 34">
             <a:extLst>
               <a:ext uri="{FF2B5EF4-FFF2-40B4-BE49-F238E27FC236}">
-                <a16:creationId xmlns:a16="http://schemas.microsoft.com/office/drawing/2014/main" id="{46F5CCE1-9EE0-FA3A-6227-649271239F69}"/>
+                <a16:creationId xmlns:a16="http://schemas.microsoft.com/office/drawing/2014/main" id="{3B296182-E8B7-B1C3-BBD9-6D3D79811981}"/>
               </a:ext>
             </a:extLst>
           </p:cNvPr>
@@ -4925,7 +4925,7 @@
           <p:cNvPr id="12" name="AutoShape 35">
             <a:extLst>
               <a:ext uri="{FF2B5EF4-FFF2-40B4-BE49-F238E27FC236}">
-                <a16:creationId xmlns:a16="http://schemas.microsoft.com/office/drawing/2014/main" id="{D4BF68B2-6E14-7765-2009-22F42BAD34AE}"/>
+                <a16:creationId xmlns:a16="http://schemas.microsoft.com/office/drawing/2014/main" id="{00138495-ACB5-9310-AAAE-534539F15D1C}"/>
               </a:ext>
             </a:extLst>
           </p:cNvPr>
@@ -4971,7 +4971,7 @@
           <p:cNvPr id="13" name="AutoShape 36">
             <a:extLst>
               <a:ext uri="{FF2B5EF4-FFF2-40B4-BE49-F238E27FC236}">
-                <a16:creationId xmlns:a16="http://schemas.microsoft.com/office/drawing/2014/main" id="{E68352DA-73B1-226C-692F-E8A48E291AC6}"/>
+                <a16:creationId xmlns:a16="http://schemas.microsoft.com/office/drawing/2014/main" id="{C415BA45-9A9D-BAFA-FD26-60EC28D9FD99}"/>
               </a:ext>
             </a:extLst>
           </p:cNvPr>
@@ -5017,7 +5017,7 @@
           <p:cNvPr id="14" name="AutoShape 37">
             <a:extLst>
               <a:ext uri="{FF2B5EF4-FFF2-40B4-BE49-F238E27FC236}">
-                <a16:creationId xmlns:a16="http://schemas.microsoft.com/office/drawing/2014/main" id="{7CA467E2-9296-4E9D-1D36-6CF41638CF89}"/>
+                <a16:creationId xmlns:a16="http://schemas.microsoft.com/office/drawing/2014/main" id="{5C3C35C8-F0DB-B914-268A-CBB6E68E24A2}"/>
               </a:ext>
             </a:extLst>
           </p:cNvPr>
@@ -5063,7 +5063,7 @@
           <p:cNvPr id="15" name="AutoShape 38">
             <a:extLst>
               <a:ext uri="{FF2B5EF4-FFF2-40B4-BE49-F238E27FC236}">
-                <a16:creationId xmlns:a16="http://schemas.microsoft.com/office/drawing/2014/main" id="{CC699235-1CDE-BE5C-4D94-863CE1B720C6}"/>
+                <a16:creationId xmlns:a16="http://schemas.microsoft.com/office/drawing/2014/main" id="{9947646D-BC90-653B-4EFE-9D677CA922D7}"/>
               </a:ext>
             </a:extLst>
           </p:cNvPr>
@@ -5109,7 +5109,7 @@
           <p:cNvPr id="16" name="AutoShape 39">
             <a:extLst>
               <a:ext uri="{FF2B5EF4-FFF2-40B4-BE49-F238E27FC236}">
-                <a16:creationId xmlns:a16="http://schemas.microsoft.com/office/drawing/2014/main" id="{0E5A4523-A681-7343-47BD-3F945AD58650}"/>
+                <a16:creationId xmlns:a16="http://schemas.microsoft.com/office/drawing/2014/main" id="{D277065A-AAFE-6727-C175-3936FD0388C5}"/>
               </a:ext>
             </a:extLst>
           </p:cNvPr>
@@ -5155,7 +5155,7 @@
           <p:cNvPr id="17" name="AutoShape 40">
             <a:extLst>
               <a:ext uri="{FF2B5EF4-FFF2-40B4-BE49-F238E27FC236}">
-                <a16:creationId xmlns:a16="http://schemas.microsoft.com/office/drawing/2014/main" id="{05C27D09-8380-6F1D-5141-751CF0B92058}"/>
+                <a16:creationId xmlns:a16="http://schemas.microsoft.com/office/drawing/2014/main" id="{82FCFEF6-C64C-17C4-D04F-18318B374E9A}"/>
               </a:ext>
             </a:extLst>
           </p:cNvPr>
@@ -5201,7 +5201,7 @@
           <p:cNvPr id="18" name="AutoShape 41">
             <a:extLst>
               <a:ext uri="{FF2B5EF4-FFF2-40B4-BE49-F238E27FC236}">
-                <a16:creationId xmlns:a16="http://schemas.microsoft.com/office/drawing/2014/main" id="{75F8F940-4181-6B7F-BC8A-615D2786281D}"/>
+                <a16:creationId xmlns:a16="http://schemas.microsoft.com/office/drawing/2014/main" id="{1A41C42E-0789-F675-CD4D-FAA737C957D5}"/>
               </a:ext>
             </a:extLst>
           </p:cNvPr>
@@ -5251,7 +5251,7 @@
           <p:cNvPr id="19" name="AutoShape 42">
             <a:extLst>
               <a:ext uri="{FF2B5EF4-FFF2-40B4-BE49-F238E27FC236}">
-                <a16:creationId xmlns:a16="http://schemas.microsoft.com/office/drawing/2014/main" id="{095B1A7D-21C2-0CC3-1BD5-DE0E3679CC5D}"/>
+                <a16:creationId xmlns:a16="http://schemas.microsoft.com/office/drawing/2014/main" id="{892DFD9C-A263-5D9A-D662-6CCA7CD9B4AE}"/>
               </a:ext>
             </a:extLst>
           </p:cNvPr>
@@ -5301,7 +5301,7 @@
           <p:cNvPr id="20" name="AutoShape 43">
             <a:extLst>
               <a:ext uri="{FF2B5EF4-FFF2-40B4-BE49-F238E27FC236}">
-                <a16:creationId xmlns:a16="http://schemas.microsoft.com/office/drawing/2014/main" id="{2A3669B7-5919-CABE-378E-AF4D76A882F0}"/>
+                <a16:creationId xmlns:a16="http://schemas.microsoft.com/office/drawing/2014/main" id="{4985B58F-8F41-4EF9-C360-D7486DC0D072}"/>
               </a:ext>
             </a:extLst>
           </p:cNvPr>
@@ -5347,7 +5347,7 @@
           <p:cNvPr id="21" name="AutoShape 44">
             <a:extLst>
               <a:ext uri="{FF2B5EF4-FFF2-40B4-BE49-F238E27FC236}">
-                <a16:creationId xmlns:a16="http://schemas.microsoft.com/office/drawing/2014/main" id="{F86215B6-96F6-8552-B564-F90127486CA9}"/>
+                <a16:creationId xmlns:a16="http://schemas.microsoft.com/office/drawing/2014/main" id="{BC7215D2-2EFD-4E5C-7BE9-822B875CCB69}"/>
               </a:ext>
             </a:extLst>
           </p:cNvPr>
@@ -5393,7 +5393,7 @@
           <p:cNvPr id="22" name="AutoShape 45">
             <a:extLst>
               <a:ext uri="{FF2B5EF4-FFF2-40B4-BE49-F238E27FC236}">
-                <a16:creationId xmlns:a16="http://schemas.microsoft.com/office/drawing/2014/main" id="{805F18D7-2354-9115-DC39-68A4AC305217}"/>
+                <a16:creationId xmlns:a16="http://schemas.microsoft.com/office/drawing/2014/main" id="{1B5C9E9C-5147-D03F-D8BF-E8A66999E9E9}"/>
               </a:ext>
             </a:extLst>
           </p:cNvPr>
@@ -5443,7 +5443,7 @@
           <p:cNvPr id="23" name="AutoShape 46">
             <a:extLst>
               <a:ext uri="{FF2B5EF4-FFF2-40B4-BE49-F238E27FC236}">
-                <a16:creationId xmlns:a16="http://schemas.microsoft.com/office/drawing/2014/main" id="{1DE62878-4C5D-4805-C7C6-79F32C091F61}"/>
+                <a16:creationId xmlns:a16="http://schemas.microsoft.com/office/drawing/2014/main" id="{D5E7B715-DCEA-F712-47B6-E86773ECD8C9}"/>
               </a:ext>
             </a:extLst>
           </p:cNvPr>
@@ -5493,7 +5493,7 @@
           <p:cNvPr id="24" name="AutoShape 47">
             <a:extLst>
               <a:ext uri="{FF2B5EF4-FFF2-40B4-BE49-F238E27FC236}">
-                <a16:creationId xmlns:a16="http://schemas.microsoft.com/office/drawing/2014/main" id="{03AD0767-5268-E57F-E8F3-CFBD1D6350C9}"/>
+                <a16:creationId xmlns:a16="http://schemas.microsoft.com/office/drawing/2014/main" id="{8F29380C-0E2D-B065-BC17-943FB727EF3F}"/>
               </a:ext>
             </a:extLst>
           </p:cNvPr>
@@ -5543,7 +5543,7 @@
           <p:cNvPr id="25" name="AutoShape 48">
             <a:extLst>
               <a:ext uri="{FF2B5EF4-FFF2-40B4-BE49-F238E27FC236}">
-                <a16:creationId xmlns:a16="http://schemas.microsoft.com/office/drawing/2014/main" id="{90858AB3-D0A9-A587-1768-1FA4CCF4B9DB}"/>
+                <a16:creationId xmlns:a16="http://schemas.microsoft.com/office/drawing/2014/main" id="{8883C123-4745-31A5-E206-A9B59472FA9D}"/>
               </a:ext>
             </a:extLst>
           </p:cNvPr>
@@ -5591,7 +5591,7 @@
     </p:spTree>
     <p:extLst>
       <p:ext uri="{BB962C8B-B14F-4D97-AF65-F5344CB8AC3E}">
-        <p14:creationId xmlns:p14="http://schemas.microsoft.com/office/powerpoint/2010/main" val="210300146"/>
+        <p14:creationId xmlns:p14="http://schemas.microsoft.com/office/powerpoint/2010/main" val="52550823"/>
       </p:ext>
     </p:extLst>
   </p:cSld>
@@ -5623,7 +5623,7 @@
           <p:cNvPr id="2" name="AutoShape 49">
             <a:extLst>
               <a:ext uri="{FF2B5EF4-FFF2-40B4-BE49-F238E27FC236}">
-                <a16:creationId xmlns:a16="http://schemas.microsoft.com/office/drawing/2014/main" id="{ACFF41A3-2EA3-92A6-E3C3-887AD30AFF2A}"/>
+                <a16:creationId xmlns:a16="http://schemas.microsoft.com/office/drawing/2014/main" id="{BFF07EC1-112F-5FA6-96B7-77CA1615C2AE}"/>
               </a:ext>
             </a:extLst>
           </p:cNvPr>
@@ -5669,7 +5669,7 @@
           <p:cNvPr id="3" name="AutoShape 50">
             <a:extLst>
               <a:ext uri="{FF2B5EF4-FFF2-40B4-BE49-F238E27FC236}">
-                <a16:creationId xmlns:a16="http://schemas.microsoft.com/office/drawing/2014/main" id="{5D472124-1256-F79D-6FD9-558FCD0056B3}"/>
+                <a16:creationId xmlns:a16="http://schemas.microsoft.com/office/drawing/2014/main" id="{C7C6236E-CA26-2346-D6F3-104865A3419E}"/>
               </a:ext>
             </a:extLst>
           </p:cNvPr>
@@ -5715,7 +5715,7 @@
           <p:cNvPr id="4" name="AutoShape 51">
             <a:extLst>
               <a:ext uri="{FF2B5EF4-FFF2-40B4-BE49-F238E27FC236}">
-                <a16:creationId xmlns:a16="http://schemas.microsoft.com/office/drawing/2014/main" id="{82269C92-5BFD-BA3D-636D-4359B122F1B7}"/>
+                <a16:creationId xmlns:a16="http://schemas.microsoft.com/office/drawing/2014/main" id="{1C449E6B-C9C1-A6AB-C0D7-4AF2507A7A47}"/>
               </a:ext>
             </a:extLst>
           </p:cNvPr>
@@ -5761,7 +5761,7 @@
           <p:cNvPr id="5" name="AutoShape 52">
             <a:extLst>
               <a:ext uri="{FF2B5EF4-FFF2-40B4-BE49-F238E27FC236}">
-                <a16:creationId xmlns:a16="http://schemas.microsoft.com/office/drawing/2014/main" id="{D77333A6-B47E-5DC6-182C-0148C81C9AE6}"/>
+                <a16:creationId xmlns:a16="http://schemas.microsoft.com/office/drawing/2014/main" id="{FCB03F04-334F-A9C1-CD4B-DBA1FD176994}"/>
               </a:ext>
             </a:extLst>
           </p:cNvPr>
@@ -5811,7 +5811,7 @@
           <p:cNvPr id="6" name="AutoShape 53">
             <a:extLst>
               <a:ext uri="{FF2B5EF4-FFF2-40B4-BE49-F238E27FC236}">
-                <a16:creationId xmlns:a16="http://schemas.microsoft.com/office/drawing/2014/main" id="{BF7E663D-BDEE-A139-3531-73D95866C3C5}"/>
+                <a16:creationId xmlns:a16="http://schemas.microsoft.com/office/drawing/2014/main" id="{E074EEA1-3329-21D6-67F0-C0D6C1520D30}"/>
               </a:ext>
             </a:extLst>
           </p:cNvPr>
@@ -5857,7 +5857,7 @@
           <p:cNvPr id="7" name="AutoShape 54">
             <a:extLst>
               <a:ext uri="{FF2B5EF4-FFF2-40B4-BE49-F238E27FC236}">
-                <a16:creationId xmlns:a16="http://schemas.microsoft.com/office/drawing/2014/main" id="{8ABD8B61-EC89-8085-3973-C86103D94D19}"/>
+                <a16:creationId xmlns:a16="http://schemas.microsoft.com/office/drawing/2014/main" id="{99CF0780-1711-98B0-71B3-8A660273FE91}"/>
               </a:ext>
             </a:extLst>
           </p:cNvPr>
@@ -5903,7 +5903,7 @@
           <p:cNvPr id="8" name="AutoShape 55">
             <a:extLst>
               <a:ext uri="{FF2B5EF4-FFF2-40B4-BE49-F238E27FC236}">
-                <a16:creationId xmlns:a16="http://schemas.microsoft.com/office/drawing/2014/main" id="{08867E80-98D2-2F7B-7916-77A01FF6A304}"/>
+                <a16:creationId xmlns:a16="http://schemas.microsoft.com/office/drawing/2014/main" id="{6502E583-B34A-7EF6-9B7B-BACC2230B612}"/>
               </a:ext>
             </a:extLst>
           </p:cNvPr>
@@ -5949,7 +5949,7 @@
           <p:cNvPr id="9" name="AutoShape 56">
             <a:extLst>
               <a:ext uri="{FF2B5EF4-FFF2-40B4-BE49-F238E27FC236}">
-                <a16:creationId xmlns:a16="http://schemas.microsoft.com/office/drawing/2014/main" id="{11C65C62-D1B8-A1B4-3830-B945ABCC26F7}"/>
+                <a16:creationId xmlns:a16="http://schemas.microsoft.com/office/drawing/2014/main" id="{26C273A5-C118-D872-0807-50B0057CA75E}"/>
               </a:ext>
             </a:extLst>
           </p:cNvPr>
@@ -5995,7 +5995,7 @@
           <p:cNvPr id="10" name="AutoShape 57">
             <a:extLst>
               <a:ext uri="{FF2B5EF4-FFF2-40B4-BE49-F238E27FC236}">
-                <a16:creationId xmlns:a16="http://schemas.microsoft.com/office/drawing/2014/main" id="{E8F4D873-0089-89A9-203E-6E7DD560D681}"/>
+                <a16:creationId xmlns:a16="http://schemas.microsoft.com/office/drawing/2014/main" id="{0FEC72F0-2BA0-4FF7-9B7F-2AD160DEA3A3}"/>
               </a:ext>
             </a:extLst>
           </p:cNvPr>
@@ -6041,7 +6041,7 @@
           <p:cNvPr id="11" name="AutoShape 58">
             <a:extLst>
               <a:ext uri="{FF2B5EF4-FFF2-40B4-BE49-F238E27FC236}">
-                <a16:creationId xmlns:a16="http://schemas.microsoft.com/office/drawing/2014/main" id="{A1202AC1-B057-16B9-C45E-3F24B8AC8007}"/>
+                <a16:creationId xmlns:a16="http://schemas.microsoft.com/office/drawing/2014/main" id="{F5F3387C-3435-6DCB-2028-0F5CE4AB9D07}"/>
               </a:ext>
             </a:extLst>
           </p:cNvPr>
@@ -6087,7 +6087,7 @@
           <p:cNvPr id="12" name="AutoShape 59">
             <a:extLst>
               <a:ext uri="{FF2B5EF4-FFF2-40B4-BE49-F238E27FC236}">
-                <a16:creationId xmlns:a16="http://schemas.microsoft.com/office/drawing/2014/main" id="{05C0D6BC-1128-9043-21FC-0AAAB760E3DF}"/>
+                <a16:creationId xmlns:a16="http://schemas.microsoft.com/office/drawing/2014/main" id="{8BD21B2A-C1E1-D059-2C00-D30415B5C109}"/>
               </a:ext>
             </a:extLst>
           </p:cNvPr>
@@ -6133,7 +6133,7 @@
           <p:cNvPr id="13" name="AutoShape 60">
             <a:extLst>
               <a:ext uri="{FF2B5EF4-FFF2-40B4-BE49-F238E27FC236}">
-                <a16:creationId xmlns:a16="http://schemas.microsoft.com/office/drawing/2014/main" id="{504166E5-9304-71B2-8F38-29DD9E3856F5}"/>
+                <a16:creationId xmlns:a16="http://schemas.microsoft.com/office/drawing/2014/main" id="{FB17A62D-F2EB-1DD7-A9D5-1C4A09E21741}"/>
               </a:ext>
             </a:extLst>
           </p:cNvPr>
@@ -6183,7 +6183,7 @@
           <p:cNvPr id="14" name="AutoShape 61">
             <a:extLst>
               <a:ext uri="{FF2B5EF4-FFF2-40B4-BE49-F238E27FC236}">
-                <a16:creationId xmlns:a16="http://schemas.microsoft.com/office/drawing/2014/main" id="{39C4EB3B-4459-9C27-0D68-BEC7586DF8C0}"/>
+                <a16:creationId xmlns:a16="http://schemas.microsoft.com/office/drawing/2014/main" id="{3D8D1E5D-5419-35BE-3862-FE60B4337B97}"/>
               </a:ext>
             </a:extLst>
           </p:cNvPr>
@@ -6229,7 +6229,7 @@
           <p:cNvPr id="15" name="AutoShape 62">
             <a:extLst>
               <a:ext uri="{FF2B5EF4-FFF2-40B4-BE49-F238E27FC236}">
-                <a16:creationId xmlns:a16="http://schemas.microsoft.com/office/drawing/2014/main" id="{836E5DB6-A9A0-1BE0-42CB-C8C9582E6F61}"/>
+                <a16:creationId xmlns:a16="http://schemas.microsoft.com/office/drawing/2014/main" id="{020F06AA-496F-5AE0-9AE0-5B66337B2308}"/>
               </a:ext>
             </a:extLst>
           </p:cNvPr>
@@ -6275,7 +6275,7 @@
           <p:cNvPr id="16" name="AutoShape 63">
             <a:extLst>
               <a:ext uri="{FF2B5EF4-FFF2-40B4-BE49-F238E27FC236}">
-                <a16:creationId xmlns:a16="http://schemas.microsoft.com/office/drawing/2014/main" id="{54594C66-4B27-0A9F-B92E-6D6C52F82EE1}"/>
+                <a16:creationId xmlns:a16="http://schemas.microsoft.com/office/drawing/2014/main" id="{8D3047B6-7119-AE1D-0A71-39C69919F3F8}"/>
               </a:ext>
             </a:extLst>
           </p:cNvPr>
@@ -6321,7 +6321,7 @@
           <p:cNvPr id="17" name="AutoShape 64">
             <a:extLst>
               <a:ext uri="{FF2B5EF4-FFF2-40B4-BE49-F238E27FC236}">
-                <a16:creationId xmlns:a16="http://schemas.microsoft.com/office/drawing/2014/main" id="{4EDE6895-9A2B-67C5-F88D-52853FA75DDE}"/>
+                <a16:creationId xmlns:a16="http://schemas.microsoft.com/office/drawing/2014/main" id="{EA2611B2-88C4-979D-6239-BC1C50E2BD17}"/>
               </a:ext>
             </a:extLst>
           </p:cNvPr>
@@ -6367,7 +6367,7 @@
           <p:cNvPr id="18" name="AutoShape 65">
             <a:extLst>
               <a:ext uri="{FF2B5EF4-FFF2-40B4-BE49-F238E27FC236}">
-                <a16:creationId xmlns:a16="http://schemas.microsoft.com/office/drawing/2014/main" id="{08B4E920-83FF-5DCB-97BD-8C65AE7C3263}"/>
+                <a16:creationId xmlns:a16="http://schemas.microsoft.com/office/drawing/2014/main" id="{C91FA8A5-4AE1-4DBA-2572-5EBDF09A4318}"/>
               </a:ext>
             </a:extLst>
           </p:cNvPr>
@@ -6413,7 +6413,7 @@
           <p:cNvPr id="19" name="AutoShape 66">
             <a:extLst>
               <a:ext uri="{FF2B5EF4-FFF2-40B4-BE49-F238E27FC236}">
-                <a16:creationId xmlns:a16="http://schemas.microsoft.com/office/drawing/2014/main" id="{1291BF8F-21F6-5C6E-805A-B3490027E133}"/>
+                <a16:creationId xmlns:a16="http://schemas.microsoft.com/office/drawing/2014/main" id="{78616C29-88EC-2F80-5463-8115223B2EC4}"/>
               </a:ext>
             </a:extLst>
           </p:cNvPr>
@@ -6459,7 +6459,7 @@
           <p:cNvPr id="20" name="AutoShape 67">
             <a:extLst>
               <a:ext uri="{FF2B5EF4-FFF2-40B4-BE49-F238E27FC236}">
-                <a16:creationId xmlns:a16="http://schemas.microsoft.com/office/drawing/2014/main" id="{FCB8FB89-4646-3FBF-5CB3-67342429AFB9}"/>
+                <a16:creationId xmlns:a16="http://schemas.microsoft.com/office/drawing/2014/main" id="{175B848F-79C8-E711-F31F-A2DA4B58C704}"/>
               </a:ext>
             </a:extLst>
           </p:cNvPr>
@@ -6505,7 +6505,7 @@
           <p:cNvPr id="21" name="AutoShape 68">
             <a:extLst>
               <a:ext uri="{FF2B5EF4-FFF2-40B4-BE49-F238E27FC236}">
-                <a16:creationId xmlns:a16="http://schemas.microsoft.com/office/drawing/2014/main" id="{A02C900B-B6BA-F0C4-09F9-BDEF50E09ABD}"/>
+                <a16:creationId xmlns:a16="http://schemas.microsoft.com/office/drawing/2014/main" id="{900A5CC5-D46B-3CBC-EEEB-2E4565C87203}"/>
               </a:ext>
             </a:extLst>
           </p:cNvPr>
@@ -6551,7 +6551,7 @@
           <p:cNvPr id="22" name="AutoShape 69">
             <a:extLst>
               <a:ext uri="{FF2B5EF4-FFF2-40B4-BE49-F238E27FC236}">
-                <a16:creationId xmlns:a16="http://schemas.microsoft.com/office/drawing/2014/main" id="{EC8A3920-3126-AAB9-3285-E83923E0D523}"/>
+                <a16:creationId xmlns:a16="http://schemas.microsoft.com/office/drawing/2014/main" id="{40195214-1436-49F4-5B5B-AD1E5116931D}"/>
               </a:ext>
             </a:extLst>
           </p:cNvPr>
@@ -6597,7 +6597,7 @@
           <p:cNvPr id="23" name="AutoShape 70">
             <a:extLst>
               <a:ext uri="{FF2B5EF4-FFF2-40B4-BE49-F238E27FC236}">
-                <a16:creationId xmlns:a16="http://schemas.microsoft.com/office/drawing/2014/main" id="{07D9C6CC-0606-6C86-E49B-7566107B1D70}"/>
+                <a16:creationId xmlns:a16="http://schemas.microsoft.com/office/drawing/2014/main" id="{14184F85-032D-B0B7-119B-8E4911BEEE8F}"/>
               </a:ext>
             </a:extLst>
           </p:cNvPr>
@@ -6643,7 +6643,7 @@
           <p:cNvPr id="24" name="AutoShape 71">
             <a:extLst>
               <a:ext uri="{FF2B5EF4-FFF2-40B4-BE49-F238E27FC236}">
-                <a16:creationId xmlns:a16="http://schemas.microsoft.com/office/drawing/2014/main" id="{DDCB6E11-050D-9822-3308-14C7E5079205}"/>
+                <a16:creationId xmlns:a16="http://schemas.microsoft.com/office/drawing/2014/main" id="{8647FB78-9DC9-4E80-3BE2-E09BC2700DD6}"/>
               </a:ext>
             </a:extLst>
           </p:cNvPr>
@@ -6689,7 +6689,7 @@
           <p:cNvPr id="25" name="AutoShape 72">
             <a:extLst>
               <a:ext uri="{FF2B5EF4-FFF2-40B4-BE49-F238E27FC236}">
-                <a16:creationId xmlns:a16="http://schemas.microsoft.com/office/drawing/2014/main" id="{FC46E78E-EA12-28B6-A7D0-F96E357372C4}"/>
+                <a16:creationId xmlns:a16="http://schemas.microsoft.com/office/drawing/2014/main" id="{72956866-058C-22A5-12F5-0B4A935DB7AB}"/>
               </a:ext>
             </a:extLst>
           </p:cNvPr>
@@ -6733,7 +6733,7 @@
     </p:spTree>
     <p:extLst>
       <p:ext uri="{BB962C8B-B14F-4D97-AF65-F5344CB8AC3E}">
-        <p14:creationId xmlns:p14="http://schemas.microsoft.com/office/powerpoint/2010/main" val="3948170795"/>
+        <p14:creationId xmlns:p14="http://schemas.microsoft.com/office/powerpoint/2010/main" val="4132416033"/>
       </p:ext>
     </p:extLst>
   </p:cSld>
@@ -6765,7 +6765,7 @@
           <p:cNvPr id="2" name="AutoShape 73">
             <a:extLst>
               <a:ext uri="{FF2B5EF4-FFF2-40B4-BE49-F238E27FC236}">
-                <a16:creationId xmlns:a16="http://schemas.microsoft.com/office/drawing/2014/main" id="{3B7796FB-8531-1C1F-7CF1-C964522100C3}"/>
+                <a16:creationId xmlns:a16="http://schemas.microsoft.com/office/drawing/2014/main" id="{4C40420F-BAE1-7306-8103-4B45A4C1FDDD}"/>
               </a:ext>
             </a:extLst>
           </p:cNvPr>
@@ -6811,7 +6811,7 @@
           <p:cNvPr id="3" name="AutoShape 74">
             <a:extLst>
               <a:ext uri="{FF2B5EF4-FFF2-40B4-BE49-F238E27FC236}">
-                <a16:creationId xmlns:a16="http://schemas.microsoft.com/office/drawing/2014/main" id="{815AE784-E4A8-BCC1-1752-1BA0A3D406C5}"/>
+                <a16:creationId xmlns:a16="http://schemas.microsoft.com/office/drawing/2014/main" id="{9FCC73FC-C8F1-B91F-B1AC-3F866690F182}"/>
               </a:ext>
             </a:extLst>
           </p:cNvPr>
@@ -6857,7 +6857,7 @@
           <p:cNvPr id="4" name="AutoShape 75">
             <a:extLst>
               <a:ext uri="{FF2B5EF4-FFF2-40B4-BE49-F238E27FC236}">
-                <a16:creationId xmlns:a16="http://schemas.microsoft.com/office/drawing/2014/main" id="{FB04173D-F668-C4AB-67BB-E1FDF1D863D4}"/>
+                <a16:creationId xmlns:a16="http://schemas.microsoft.com/office/drawing/2014/main" id="{45D9C1B1-C9BD-5646-DF90-89AD220CA99C}"/>
               </a:ext>
             </a:extLst>
           </p:cNvPr>
@@ -6903,7 +6903,7 @@
           <p:cNvPr id="5" name="AutoShape 76">
             <a:extLst>
               <a:ext uri="{FF2B5EF4-FFF2-40B4-BE49-F238E27FC236}">
-                <a16:creationId xmlns:a16="http://schemas.microsoft.com/office/drawing/2014/main" id="{DFA8DBD3-75C7-31BB-FE5C-D33FD4D979CD}"/>
+                <a16:creationId xmlns:a16="http://schemas.microsoft.com/office/drawing/2014/main" id="{849CB8C2-884B-1CD6-FB60-47F5BE4A4074}"/>
               </a:ext>
             </a:extLst>
           </p:cNvPr>
@@ -6949,7 +6949,7 @@
           <p:cNvPr id="6" name="AutoShape 77">
             <a:extLst>
               <a:ext uri="{FF2B5EF4-FFF2-40B4-BE49-F238E27FC236}">
-                <a16:creationId xmlns:a16="http://schemas.microsoft.com/office/drawing/2014/main" id="{D3CDFC66-C2D6-B01D-D88E-DC7E623F2527}"/>
+                <a16:creationId xmlns:a16="http://schemas.microsoft.com/office/drawing/2014/main" id="{EA3F2043-BD30-FE1D-15BB-F005BCB65D93}"/>
               </a:ext>
             </a:extLst>
           </p:cNvPr>
@@ -6995,7 +6995,7 @@
           <p:cNvPr id="7" name="AutoShape 78">
             <a:extLst>
               <a:ext uri="{FF2B5EF4-FFF2-40B4-BE49-F238E27FC236}">
-                <a16:creationId xmlns:a16="http://schemas.microsoft.com/office/drawing/2014/main" id="{CDC765BC-EDA7-627D-B5FC-0DCCD31FC5BC}"/>
+                <a16:creationId xmlns:a16="http://schemas.microsoft.com/office/drawing/2014/main" id="{333AAF0D-1C38-DD44-45CD-9EAE79003FEB}"/>
               </a:ext>
             </a:extLst>
           </p:cNvPr>
@@ -7041,7 +7041,7 @@
           <p:cNvPr id="8" name="AutoShape 79">
             <a:extLst>
               <a:ext uri="{FF2B5EF4-FFF2-40B4-BE49-F238E27FC236}">
-                <a16:creationId xmlns:a16="http://schemas.microsoft.com/office/drawing/2014/main" id="{56C4DBB5-3527-AD09-53BC-226FCFBD44F7}"/>
+                <a16:creationId xmlns:a16="http://schemas.microsoft.com/office/drawing/2014/main" id="{6D727BB3-AC0C-B369-8A0D-F4B0B0846CEF}"/>
               </a:ext>
             </a:extLst>
           </p:cNvPr>
@@ -7091,7 +7091,7 @@
           <p:cNvPr id="9" name="AutoShape 80">
             <a:extLst>
               <a:ext uri="{FF2B5EF4-FFF2-40B4-BE49-F238E27FC236}">
-                <a16:creationId xmlns:a16="http://schemas.microsoft.com/office/drawing/2014/main" id="{A4C8DFE7-C163-ADF7-B587-82D3FD1C7E18}"/>
+                <a16:creationId xmlns:a16="http://schemas.microsoft.com/office/drawing/2014/main" id="{472E8ED8-0170-B41D-B1FF-AC4CE2113BBF}"/>
               </a:ext>
             </a:extLst>
           </p:cNvPr>
@@ -7137,7 +7137,7 @@
           <p:cNvPr id="10" name="AutoShape 81">
             <a:extLst>
               <a:ext uri="{FF2B5EF4-FFF2-40B4-BE49-F238E27FC236}">
-                <a16:creationId xmlns:a16="http://schemas.microsoft.com/office/drawing/2014/main" id="{C14CA6CB-78E7-FFEC-C6C1-78AEF2E2CE85}"/>
+                <a16:creationId xmlns:a16="http://schemas.microsoft.com/office/drawing/2014/main" id="{7F29DD1E-0EFE-1774-2BAC-15DC5A2B7B80}"/>
               </a:ext>
             </a:extLst>
           </p:cNvPr>
@@ -7183,7 +7183,7 @@
           <p:cNvPr id="11" name="AutoShape 82">
             <a:extLst>
               <a:ext uri="{FF2B5EF4-FFF2-40B4-BE49-F238E27FC236}">
-                <a16:creationId xmlns:a16="http://schemas.microsoft.com/office/drawing/2014/main" id="{87049EFE-928F-A424-1BCC-CD7B60509869}"/>
+                <a16:creationId xmlns:a16="http://schemas.microsoft.com/office/drawing/2014/main" id="{2E7C21F1-9F43-8804-3E7F-ADD5FB1A2236}"/>
               </a:ext>
             </a:extLst>
           </p:cNvPr>
@@ -7229,7 +7229,7 @@
           <p:cNvPr id="12" name="AutoShape 83">
             <a:extLst>
               <a:ext uri="{FF2B5EF4-FFF2-40B4-BE49-F238E27FC236}">
-                <a16:creationId xmlns:a16="http://schemas.microsoft.com/office/drawing/2014/main" id="{D0FB5C84-46A8-5D91-C37B-B254CC89F642}"/>
+                <a16:creationId xmlns:a16="http://schemas.microsoft.com/office/drawing/2014/main" id="{E6BE09F9-F5D2-F03C-089F-401377969115}"/>
               </a:ext>
             </a:extLst>
           </p:cNvPr>
@@ -7275,7 +7275,7 @@
           <p:cNvPr id="13" name="AutoShape 84">
             <a:extLst>
               <a:ext uri="{FF2B5EF4-FFF2-40B4-BE49-F238E27FC236}">
-                <a16:creationId xmlns:a16="http://schemas.microsoft.com/office/drawing/2014/main" id="{869757FF-1060-21EC-66F4-4C9D82903A07}"/>
+                <a16:creationId xmlns:a16="http://schemas.microsoft.com/office/drawing/2014/main" id="{C4C4CEBD-E004-137B-E625-D759004EC69A}"/>
               </a:ext>
             </a:extLst>
           </p:cNvPr>
@@ -7321,7 +7321,7 @@
           <p:cNvPr id="14" name="AutoShape 85">
             <a:extLst>
               <a:ext uri="{FF2B5EF4-FFF2-40B4-BE49-F238E27FC236}">
-                <a16:creationId xmlns:a16="http://schemas.microsoft.com/office/drawing/2014/main" id="{E6D1A1F4-FA84-9391-0D9C-16595671CB28}"/>
+                <a16:creationId xmlns:a16="http://schemas.microsoft.com/office/drawing/2014/main" id="{B2A022C8-1A41-925B-D37D-E691BA433296}"/>
               </a:ext>
             </a:extLst>
           </p:cNvPr>
@@ -7367,7 +7367,7 @@
           <p:cNvPr id="15" name="AutoShape 86">
             <a:extLst>
               <a:ext uri="{FF2B5EF4-FFF2-40B4-BE49-F238E27FC236}">
-                <a16:creationId xmlns:a16="http://schemas.microsoft.com/office/drawing/2014/main" id="{4F55357B-3A76-FFA2-E8B5-7D00CA5B2D27}"/>
+                <a16:creationId xmlns:a16="http://schemas.microsoft.com/office/drawing/2014/main" id="{35839931-DBFC-669B-058B-AC237EF80917}"/>
               </a:ext>
             </a:extLst>
           </p:cNvPr>
@@ -7413,7 +7413,7 @@
           <p:cNvPr id="16" name="AutoShape 87">
             <a:extLst>
               <a:ext uri="{FF2B5EF4-FFF2-40B4-BE49-F238E27FC236}">
-                <a16:creationId xmlns:a16="http://schemas.microsoft.com/office/drawing/2014/main" id="{C1F6BDEE-F579-209A-777E-B7646F9DAC84}"/>
+                <a16:creationId xmlns:a16="http://schemas.microsoft.com/office/drawing/2014/main" id="{FBE943D0-7E3E-B8B9-5019-8C03294C8A52}"/>
               </a:ext>
             </a:extLst>
           </p:cNvPr>
@@ -7459,7 +7459,7 @@
           <p:cNvPr id="17" name="AutoShape 88">
             <a:extLst>
               <a:ext uri="{FF2B5EF4-FFF2-40B4-BE49-F238E27FC236}">
-                <a16:creationId xmlns:a16="http://schemas.microsoft.com/office/drawing/2014/main" id="{276148B9-93D6-D3D4-869E-FCA28823E65C}"/>
+                <a16:creationId xmlns:a16="http://schemas.microsoft.com/office/drawing/2014/main" id="{97A449B0-7722-7C6E-8E63-CD75026407C8}"/>
               </a:ext>
             </a:extLst>
           </p:cNvPr>
@@ -7505,7 +7505,7 @@
           <p:cNvPr id="18" name="AutoShape 89">
             <a:extLst>
               <a:ext uri="{FF2B5EF4-FFF2-40B4-BE49-F238E27FC236}">
-                <a16:creationId xmlns:a16="http://schemas.microsoft.com/office/drawing/2014/main" id="{27273CBB-A809-75F0-1DA8-2CF1003C8FBC}"/>
+                <a16:creationId xmlns:a16="http://schemas.microsoft.com/office/drawing/2014/main" id="{0DB940A3-76D2-FE1B-B327-A52612351622}"/>
               </a:ext>
             </a:extLst>
           </p:cNvPr>
@@ -7551,7 +7551,7 @@
           <p:cNvPr id="19" name="AutoShape 90">
             <a:extLst>
               <a:ext uri="{FF2B5EF4-FFF2-40B4-BE49-F238E27FC236}">
-                <a16:creationId xmlns:a16="http://schemas.microsoft.com/office/drawing/2014/main" id="{BB468E46-DCF5-AF72-B75D-7436A7ABDB4A}"/>
+                <a16:creationId xmlns:a16="http://schemas.microsoft.com/office/drawing/2014/main" id="{6442CC52-CEBF-AB5B-37A6-BFAFC3771886}"/>
               </a:ext>
             </a:extLst>
           </p:cNvPr>
@@ -7597,7 +7597,7 @@
           <p:cNvPr id="20" name="AutoShape 91">
             <a:extLst>
               <a:ext uri="{FF2B5EF4-FFF2-40B4-BE49-F238E27FC236}">
-                <a16:creationId xmlns:a16="http://schemas.microsoft.com/office/drawing/2014/main" id="{D56E595B-F506-7865-66B0-0796F1D15B56}"/>
+                <a16:creationId xmlns:a16="http://schemas.microsoft.com/office/drawing/2014/main" id="{3739AB1C-A684-578F-15CD-D0ABB5845873}"/>
               </a:ext>
             </a:extLst>
           </p:cNvPr>
@@ -7643,7 +7643,7 @@
           <p:cNvPr id="21" name="AutoShape 92">
             <a:extLst>
               <a:ext uri="{FF2B5EF4-FFF2-40B4-BE49-F238E27FC236}">
-                <a16:creationId xmlns:a16="http://schemas.microsoft.com/office/drawing/2014/main" id="{D38CC3D2-9A30-D939-BA7A-84279AA4ACEF}"/>
+                <a16:creationId xmlns:a16="http://schemas.microsoft.com/office/drawing/2014/main" id="{2317161B-CD74-A30C-0BFE-8CF556208C0E}"/>
               </a:ext>
             </a:extLst>
           </p:cNvPr>
@@ -7689,7 +7689,7 @@
           <p:cNvPr id="22" name="AutoShape 93">
             <a:extLst>
               <a:ext uri="{FF2B5EF4-FFF2-40B4-BE49-F238E27FC236}">
-                <a16:creationId xmlns:a16="http://schemas.microsoft.com/office/drawing/2014/main" id="{65575887-16DE-6283-7F45-E007030FE368}"/>
+                <a16:creationId xmlns:a16="http://schemas.microsoft.com/office/drawing/2014/main" id="{47F6CE3B-1662-0BAA-0C4F-BCA5BA3EB4DC}"/>
               </a:ext>
             </a:extLst>
           </p:cNvPr>
@@ -7735,7 +7735,7 @@
           <p:cNvPr id="23" name="AutoShape 94">
             <a:extLst>
               <a:ext uri="{FF2B5EF4-FFF2-40B4-BE49-F238E27FC236}">
-                <a16:creationId xmlns:a16="http://schemas.microsoft.com/office/drawing/2014/main" id="{F892B977-9244-62CA-EB92-C8C19F791452}"/>
+                <a16:creationId xmlns:a16="http://schemas.microsoft.com/office/drawing/2014/main" id="{16FD9A8C-170E-E05D-15FE-74102732B7E4}"/>
               </a:ext>
             </a:extLst>
           </p:cNvPr>
@@ -7781,7 +7781,7 @@
           <p:cNvPr id="24" name="AutoShape 95">
             <a:extLst>
               <a:ext uri="{FF2B5EF4-FFF2-40B4-BE49-F238E27FC236}">
-                <a16:creationId xmlns:a16="http://schemas.microsoft.com/office/drawing/2014/main" id="{591E346F-9193-36C8-6A9C-2CDAE6B0F72A}"/>
+                <a16:creationId xmlns:a16="http://schemas.microsoft.com/office/drawing/2014/main" id="{C1F94B40-B2FC-1C62-38AD-4BD458CEC4F1}"/>
               </a:ext>
             </a:extLst>
           </p:cNvPr>
@@ -7827,7 +7827,7 @@
           <p:cNvPr id="25" name="AutoShape 96">
             <a:extLst>
               <a:ext uri="{FF2B5EF4-FFF2-40B4-BE49-F238E27FC236}">
-                <a16:creationId xmlns:a16="http://schemas.microsoft.com/office/drawing/2014/main" id="{7FA24E8F-682B-ED9B-ECB9-DC626275EFB9}"/>
+                <a16:creationId xmlns:a16="http://schemas.microsoft.com/office/drawing/2014/main" id="{7C36C943-0298-7CCC-6383-117026765FB7}"/>
               </a:ext>
             </a:extLst>
           </p:cNvPr>
@@ -7871,7 +7871,7 @@
     </p:spTree>
     <p:extLst>
       <p:ext uri="{BB962C8B-B14F-4D97-AF65-F5344CB8AC3E}">
-        <p14:creationId xmlns:p14="http://schemas.microsoft.com/office/powerpoint/2010/main" val="1494305380"/>
+        <p14:creationId xmlns:p14="http://schemas.microsoft.com/office/powerpoint/2010/main" val="2417719752"/>
       </p:ext>
     </p:extLst>
   </p:cSld>
@@ -7903,7 +7903,7 @@
           <p:cNvPr id="2" name="AutoShape 97">
             <a:extLst>
               <a:ext uri="{FF2B5EF4-FFF2-40B4-BE49-F238E27FC236}">
-                <a16:creationId xmlns:a16="http://schemas.microsoft.com/office/drawing/2014/main" id="{E569FA3A-6ACF-4786-A2DF-B536371B8CE6}"/>
+                <a16:creationId xmlns:a16="http://schemas.microsoft.com/office/drawing/2014/main" id="{F7BBF12D-0BD5-EC9B-0BE8-DC5E4C7B6019}"/>
               </a:ext>
             </a:extLst>
           </p:cNvPr>
@@ -7949,7 +7949,7 @@
           <p:cNvPr id="3" name="AutoShape 98">
             <a:extLst>
               <a:ext uri="{FF2B5EF4-FFF2-40B4-BE49-F238E27FC236}">
-                <a16:creationId xmlns:a16="http://schemas.microsoft.com/office/drawing/2014/main" id="{31DB1B68-93EE-6D83-0E9F-4D87E0243C63}"/>
+                <a16:creationId xmlns:a16="http://schemas.microsoft.com/office/drawing/2014/main" id="{8D965F9D-A85C-915B-5B41-419B108DB970}"/>
               </a:ext>
             </a:extLst>
           </p:cNvPr>
@@ -7995,7 +7995,7 @@
           <p:cNvPr id="4" name="AutoShape 99">
             <a:extLst>
               <a:ext uri="{FF2B5EF4-FFF2-40B4-BE49-F238E27FC236}">
-                <a16:creationId xmlns:a16="http://schemas.microsoft.com/office/drawing/2014/main" id="{B3CDDFDC-DEBE-A3FC-76D5-371F75DE8C1F}"/>
+                <a16:creationId xmlns:a16="http://schemas.microsoft.com/office/drawing/2014/main" id="{3608030B-141D-E9C1-BA2A-ECFDD9CE1040}"/>
               </a:ext>
             </a:extLst>
           </p:cNvPr>
@@ -8041,7 +8041,7 @@
           <p:cNvPr id="5" name="AutoShape 100">
             <a:extLst>
               <a:ext uri="{FF2B5EF4-FFF2-40B4-BE49-F238E27FC236}">
-                <a16:creationId xmlns:a16="http://schemas.microsoft.com/office/drawing/2014/main" id="{9364E2CA-5792-5DF0-2E95-38B5E9F7E651}"/>
+                <a16:creationId xmlns:a16="http://schemas.microsoft.com/office/drawing/2014/main" id="{5022C0DA-084B-E555-DCA4-E65ED65A41A6}"/>
               </a:ext>
             </a:extLst>
           </p:cNvPr>
@@ -8087,7 +8087,7 @@
           <p:cNvPr id="6" name="AutoShape 101">
             <a:extLst>
               <a:ext uri="{FF2B5EF4-FFF2-40B4-BE49-F238E27FC236}">
-                <a16:creationId xmlns:a16="http://schemas.microsoft.com/office/drawing/2014/main" id="{C07AD75F-5666-2F45-8E5B-E5312CB62AFF}"/>
+                <a16:creationId xmlns:a16="http://schemas.microsoft.com/office/drawing/2014/main" id="{5810EE97-189A-401D-9607-4FDCA46A8F07}"/>
               </a:ext>
             </a:extLst>
           </p:cNvPr>
@@ -8133,7 +8133,7 @@
           <p:cNvPr id="7" name="AutoShape 102">
             <a:extLst>
               <a:ext uri="{FF2B5EF4-FFF2-40B4-BE49-F238E27FC236}">
-                <a16:creationId xmlns:a16="http://schemas.microsoft.com/office/drawing/2014/main" id="{66384FC1-32E2-C4FF-271D-C87FEC699009}"/>
+                <a16:creationId xmlns:a16="http://schemas.microsoft.com/office/drawing/2014/main" id="{722C74CE-A21A-6256-076D-873EC204531D}"/>
               </a:ext>
             </a:extLst>
           </p:cNvPr>
@@ -8179,7 +8179,7 @@
           <p:cNvPr id="8" name="AutoShape 103">
             <a:extLst>
               <a:ext uri="{FF2B5EF4-FFF2-40B4-BE49-F238E27FC236}">
-                <a16:creationId xmlns:a16="http://schemas.microsoft.com/office/drawing/2014/main" id="{CCEDF2D7-E418-3E97-7918-AE61E7E5B7FF}"/>
+                <a16:creationId xmlns:a16="http://schemas.microsoft.com/office/drawing/2014/main" id="{1CFE39E5-287E-F7FB-B8EF-7EA2631C1B7C}"/>
               </a:ext>
             </a:extLst>
           </p:cNvPr>
@@ -8225,7 +8225,7 @@
           <p:cNvPr id="9" name="AutoShape 104">
             <a:extLst>
               <a:ext uri="{FF2B5EF4-FFF2-40B4-BE49-F238E27FC236}">
-                <a16:creationId xmlns:a16="http://schemas.microsoft.com/office/drawing/2014/main" id="{B8D2A149-5149-716F-E96E-BE61C67A00AB}"/>
+                <a16:creationId xmlns:a16="http://schemas.microsoft.com/office/drawing/2014/main" id="{461CCE03-FAE1-8A9E-BD95-5739B184CEBE}"/>
               </a:ext>
             </a:extLst>
           </p:cNvPr>
@@ -8271,7 +8271,7 @@
           <p:cNvPr id="10" name="AutoShape 105">
             <a:extLst>
               <a:ext uri="{FF2B5EF4-FFF2-40B4-BE49-F238E27FC236}">
-                <a16:creationId xmlns:a16="http://schemas.microsoft.com/office/drawing/2014/main" id="{352A49F3-7B40-81BA-F12C-970DBA6EC8C6}"/>
+                <a16:creationId xmlns:a16="http://schemas.microsoft.com/office/drawing/2014/main" id="{6B6AB613-F9F6-D4F6-A78B-4D8ACD47A5E5}"/>
               </a:ext>
             </a:extLst>
           </p:cNvPr>
@@ -8317,7 +8317,7 @@
           <p:cNvPr id="11" name="AutoShape 106">
             <a:extLst>
               <a:ext uri="{FF2B5EF4-FFF2-40B4-BE49-F238E27FC236}">
-                <a16:creationId xmlns:a16="http://schemas.microsoft.com/office/drawing/2014/main" id="{93D63663-422A-AEB6-9451-6C8F80DA44E5}"/>
+                <a16:creationId xmlns:a16="http://schemas.microsoft.com/office/drawing/2014/main" id="{95604F00-2CDD-DBB3-11F1-21B15EB9BB44}"/>
               </a:ext>
             </a:extLst>
           </p:cNvPr>
@@ -8363,7 +8363,7 @@
           <p:cNvPr id="12" name="AutoShape 107">
             <a:extLst>
               <a:ext uri="{FF2B5EF4-FFF2-40B4-BE49-F238E27FC236}">
-                <a16:creationId xmlns:a16="http://schemas.microsoft.com/office/drawing/2014/main" id="{B2E81583-9560-6053-EAE7-78566DE03329}"/>
+                <a16:creationId xmlns:a16="http://schemas.microsoft.com/office/drawing/2014/main" id="{F2BF21F6-848F-7376-F460-F2073427216F}"/>
               </a:ext>
             </a:extLst>
           </p:cNvPr>
@@ -8409,7 +8409,7 @@
           <p:cNvPr id="13" name="AutoShape 108">
             <a:extLst>
               <a:ext uri="{FF2B5EF4-FFF2-40B4-BE49-F238E27FC236}">
-                <a16:creationId xmlns:a16="http://schemas.microsoft.com/office/drawing/2014/main" id="{764AEDAF-2C5B-5D94-65CE-7A2AE9F5B26A}"/>
+                <a16:creationId xmlns:a16="http://schemas.microsoft.com/office/drawing/2014/main" id="{5FBB8E5F-CB72-9EB7-4317-811246F1AD0F}"/>
               </a:ext>
             </a:extLst>
           </p:cNvPr>
@@ -8455,7 +8455,7 @@
           <p:cNvPr id="14" name="AutoShape 109">
             <a:extLst>
               <a:ext uri="{FF2B5EF4-FFF2-40B4-BE49-F238E27FC236}">
-                <a16:creationId xmlns:a16="http://schemas.microsoft.com/office/drawing/2014/main" id="{84403E13-3720-345C-D436-FA62A7FA2D54}"/>
+                <a16:creationId xmlns:a16="http://schemas.microsoft.com/office/drawing/2014/main" id="{800C966B-B40F-4CCF-D547-FCCC0DF32E74}"/>
               </a:ext>
             </a:extLst>
           </p:cNvPr>
@@ -8501,7 +8501,7 @@
           <p:cNvPr id="15" name="AutoShape 110">
             <a:extLst>
               <a:ext uri="{FF2B5EF4-FFF2-40B4-BE49-F238E27FC236}">
-                <a16:creationId xmlns:a16="http://schemas.microsoft.com/office/drawing/2014/main" id="{94D07C10-A7AE-1F3E-5DD8-E955E4097A4A}"/>
+                <a16:creationId xmlns:a16="http://schemas.microsoft.com/office/drawing/2014/main" id="{4E49794C-8791-3C74-4E97-9A8999741A28}"/>
               </a:ext>
             </a:extLst>
           </p:cNvPr>
@@ -8547,7 +8547,7 @@
           <p:cNvPr id="16" name="AutoShape 111">
             <a:extLst>
               <a:ext uri="{FF2B5EF4-FFF2-40B4-BE49-F238E27FC236}">
-                <a16:creationId xmlns:a16="http://schemas.microsoft.com/office/drawing/2014/main" id="{675C0CED-3D61-E1CE-0F2E-62A5D6397262}"/>
+                <a16:creationId xmlns:a16="http://schemas.microsoft.com/office/drawing/2014/main" id="{6F1AED59-0D8D-95F1-B41B-218156B7C1FB}"/>
               </a:ext>
             </a:extLst>
           </p:cNvPr>
@@ -8593,7 +8593,7 @@
           <p:cNvPr id="17" name="AutoShape 112">
             <a:extLst>
               <a:ext uri="{FF2B5EF4-FFF2-40B4-BE49-F238E27FC236}">
-                <a16:creationId xmlns:a16="http://schemas.microsoft.com/office/drawing/2014/main" id="{E782FAEA-C98B-AF07-D1D1-D31BECDE1DA5}"/>
+                <a16:creationId xmlns:a16="http://schemas.microsoft.com/office/drawing/2014/main" id="{99B92B0D-43F1-FF87-7AD9-761A26E7C152}"/>
               </a:ext>
             </a:extLst>
           </p:cNvPr>
@@ -8639,7 +8639,7 @@
           <p:cNvPr id="18" name="AutoShape 113">
             <a:extLst>
               <a:ext uri="{FF2B5EF4-FFF2-40B4-BE49-F238E27FC236}">
-                <a16:creationId xmlns:a16="http://schemas.microsoft.com/office/drawing/2014/main" id="{13A35000-5AD1-BD46-8EEB-88BA0B2B6079}"/>
+                <a16:creationId xmlns:a16="http://schemas.microsoft.com/office/drawing/2014/main" id="{647D00E0-2A10-4B63-AECB-121BFC2B35A2}"/>
               </a:ext>
             </a:extLst>
           </p:cNvPr>
@@ -8685,7 +8685,7 @@
           <p:cNvPr id="19" name="AutoShape 114">
             <a:extLst>
               <a:ext uri="{FF2B5EF4-FFF2-40B4-BE49-F238E27FC236}">
-                <a16:creationId xmlns:a16="http://schemas.microsoft.com/office/drawing/2014/main" id="{C0A261DC-CEA6-D7B5-DC20-3EA5DC320966}"/>
+                <a16:creationId xmlns:a16="http://schemas.microsoft.com/office/drawing/2014/main" id="{65BBA901-FBE3-CBD4-F160-21EF636F544B}"/>
               </a:ext>
             </a:extLst>
           </p:cNvPr>
@@ -8731,7 +8731,7 @@
           <p:cNvPr id="20" name="AutoShape 115">
             <a:extLst>
               <a:ext uri="{FF2B5EF4-FFF2-40B4-BE49-F238E27FC236}">
-                <a16:creationId xmlns:a16="http://schemas.microsoft.com/office/drawing/2014/main" id="{4C220BD8-84F3-5097-1DEA-B238B6BF2702}"/>
+                <a16:creationId xmlns:a16="http://schemas.microsoft.com/office/drawing/2014/main" id="{E1F3E4FF-6AE9-629C-05A7-C7DA08B2D17E}"/>
               </a:ext>
             </a:extLst>
           </p:cNvPr>
@@ -8777,7 +8777,7 @@
           <p:cNvPr id="21" name="AutoShape 116">
             <a:extLst>
               <a:ext uri="{FF2B5EF4-FFF2-40B4-BE49-F238E27FC236}">
-                <a16:creationId xmlns:a16="http://schemas.microsoft.com/office/drawing/2014/main" id="{59C8CD50-A2F7-03E5-5265-BD5B085A2BA0}"/>
+                <a16:creationId xmlns:a16="http://schemas.microsoft.com/office/drawing/2014/main" id="{607DD16B-784C-6E85-F676-AE8A798C21BF}"/>
               </a:ext>
             </a:extLst>
           </p:cNvPr>
@@ -8823,7 +8823,7 @@
           <p:cNvPr id="22" name="AutoShape 117">
             <a:extLst>
               <a:ext uri="{FF2B5EF4-FFF2-40B4-BE49-F238E27FC236}">
-                <a16:creationId xmlns:a16="http://schemas.microsoft.com/office/drawing/2014/main" id="{CFE4119D-DC39-C8D2-D5C7-DE5EE2AF2984}"/>
+                <a16:creationId xmlns:a16="http://schemas.microsoft.com/office/drawing/2014/main" id="{52A8985F-6354-D8D3-48F3-CD331CBBE417}"/>
               </a:ext>
             </a:extLst>
           </p:cNvPr>
@@ -8869,7 +8869,7 @@
           <p:cNvPr id="23" name="AutoShape 118">
             <a:extLst>
               <a:ext uri="{FF2B5EF4-FFF2-40B4-BE49-F238E27FC236}">
-                <a16:creationId xmlns:a16="http://schemas.microsoft.com/office/drawing/2014/main" id="{F501463C-3190-03DB-5399-E732AD19ADE0}"/>
+                <a16:creationId xmlns:a16="http://schemas.microsoft.com/office/drawing/2014/main" id="{7C987DA0-A410-AC6E-57FC-CFA3AABA43E9}"/>
               </a:ext>
             </a:extLst>
           </p:cNvPr>
@@ -8915,7 +8915,7 @@
           <p:cNvPr id="24" name="AutoShape 119">
             <a:extLst>
               <a:ext uri="{FF2B5EF4-FFF2-40B4-BE49-F238E27FC236}">
-                <a16:creationId xmlns:a16="http://schemas.microsoft.com/office/drawing/2014/main" id="{94D44A89-EA1E-3D6F-39A2-4B2026EACAFB}"/>
+                <a16:creationId xmlns:a16="http://schemas.microsoft.com/office/drawing/2014/main" id="{5D198119-7AFF-633E-459E-79C4BAE2274A}"/>
               </a:ext>
             </a:extLst>
           </p:cNvPr>
@@ -8961,7 +8961,7 @@
           <p:cNvPr id="25" name="AutoShape 120">
             <a:extLst>
               <a:ext uri="{FF2B5EF4-FFF2-40B4-BE49-F238E27FC236}">
-                <a16:creationId xmlns:a16="http://schemas.microsoft.com/office/drawing/2014/main" id="{B4025DC6-3AFE-4E53-965D-67A65693DE4C}"/>
+                <a16:creationId xmlns:a16="http://schemas.microsoft.com/office/drawing/2014/main" id="{20650B49-EEE4-D0CB-C8CE-6ABFECDFD5E1}"/>
               </a:ext>
             </a:extLst>
           </p:cNvPr>
@@ -9005,7 +9005,7 @@
     </p:spTree>
     <p:extLst>
       <p:ext uri="{BB962C8B-B14F-4D97-AF65-F5344CB8AC3E}">
-        <p14:creationId xmlns:p14="http://schemas.microsoft.com/office/powerpoint/2010/main" val="95760377"/>
+        <p14:creationId xmlns:p14="http://schemas.microsoft.com/office/powerpoint/2010/main" val="3855067031"/>
       </p:ext>
     </p:extLst>
   </p:cSld>
@@ -9037,7 +9037,7 @@
           <p:cNvPr id="2" name="AutoShape 121">
             <a:extLst>
               <a:ext uri="{FF2B5EF4-FFF2-40B4-BE49-F238E27FC236}">
-                <a16:creationId xmlns:a16="http://schemas.microsoft.com/office/drawing/2014/main" id="{25C6A604-D2BC-B920-6A95-8CD74281AF93}"/>
+                <a16:creationId xmlns:a16="http://schemas.microsoft.com/office/drawing/2014/main" id="{6D139E20-3144-7179-5EB9-6854B7ABEC46}"/>
               </a:ext>
             </a:extLst>
           </p:cNvPr>
@@ -9083,7 +9083,7 @@
           <p:cNvPr id="3" name="AutoShape 122">
             <a:extLst>
               <a:ext uri="{FF2B5EF4-FFF2-40B4-BE49-F238E27FC236}">
-                <a16:creationId xmlns:a16="http://schemas.microsoft.com/office/drawing/2014/main" id="{C3F6AAB6-FE14-B513-0C17-4451C0CB5656}"/>
+                <a16:creationId xmlns:a16="http://schemas.microsoft.com/office/drawing/2014/main" id="{49C6BAFA-9EB2-D3B4-4D1F-93DE6EC3BA24}"/>
               </a:ext>
             </a:extLst>
           </p:cNvPr>
@@ -9129,7 +9129,7 @@
           <p:cNvPr id="4" name="AutoShape 123">
             <a:extLst>
               <a:ext uri="{FF2B5EF4-FFF2-40B4-BE49-F238E27FC236}">
-                <a16:creationId xmlns:a16="http://schemas.microsoft.com/office/drawing/2014/main" id="{C184C781-1480-9977-2657-F6E01952C187}"/>
+                <a16:creationId xmlns:a16="http://schemas.microsoft.com/office/drawing/2014/main" id="{9ED4F3E1-F8DA-66E0-D51F-19EB6C88519E}"/>
               </a:ext>
             </a:extLst>
           </p:cNvPr>
@@ -9175,7 +9175,7 @@
           <p:cNvPr id="5" name="AutoShape 124">
             <a:extLst>
               <a:ext uri="{FF2B5EF4-FFF2-40B4-BE49-F238E27FC236}">
-                <a16:creationId xmlns:a16="http://schemas.microsoft.com/office/drawing/2014/main" id="{5A9BF1CC-01AC-F7FE-BBDB-279DC8673C97}"/>
+                <a16:creationId xmlns:a16="http://schemas.microsoft.com/office/drawing/2014/main" id="{42217AD1-EFB1-A48A-9B8A-AEBFE085E53C}"/>
               </a:ext>
             </a:extLst>
           </p:cNvPr>
@@ -9221,7 +9221,7 @@
           <p:cNvPr id="6" name="AutoShape 125">
             <a:extLst>
               <a:ext uri="{FF2B5EF4-FFF2-40B4-BE49-F238E27FC236}">
-                <a16:creationId xmlns:a16="http://schemas.microsoft.com/office/drawing/2014/main" id="{15AE6B6D-2B08-9C4B-F798-2BEC0AFF860F}"/>
+                <a16:creationId xmlns:a16="http://schemas.microsoft.com/office/drawing/2014/main" id="{CF7E2140-6E6D-EE28-9012-264B32DB1DAE}"/>
               </a:ext>
             </a:extLst>
           </p:cNvPr>
@@ -9267,7 +9267,7 @@
           <p:cNvPr id="7" name="AutoShape 126">
             <a:extLst>
               <a:ext uri="{FF2B5EF4-FFF2-40B4-BE49-F238E27FC236}">
-                <a16:creationId xmlns:a16="http://schemas.microsoft.com/office/drawing/2014/main" id="{1DC95B18-F768-4D89-15B9-C53449C867F0}"/>
+                <a16:creationId xmlns:a16="http://schemas.microsoft.com/office/drawing/2014/main" id="{D6F45FB9-6512-8B10-8273-76A13B2B7436}"/>
               </a:ext>
             </a:extLst>
           </p:cNvPr>
@@ -9313,7 +9313,7 @@
           <p:cNvPr id="8" name="AutoShape 127">
             <a:extLst>
               <a:ext uri="{FF2B5EF4-FFF2-40B4-BE49-F238E27FC236}">
-                <a16:creationId xmlns:a16="http://schemas.microsoft.com/office/drawing/2014/main" id="{80A37CBC-246B-72BB-C868-C1933B09D1B0}"/>
+                <a16:creationId xmlns:a16="http://schemas.microsoft.com/office/drawing/2014/main" id="{9CDF0EB2-F726-0FE5-961C-AB012456D8F5}"/>
               </a:ext>
             </a:extLst>
           </p:cNvPr>
@@ -9359,7 +9359,7 @@
           <p:cNvPr id="9" name="AutoShape 128">
             <a:extLst>
               <a:ext uri="{FF2B5EF4-FFF2-40B4-BE49-F238E27FC236}">
-                <a16:creationId xmlns:a16="http://schemas.microsoft.com/office/drawing/2014/main" id="{5E984B8C-0044-AB23-9C7F-9848E3D47476}"/>
+                <a16:creationId xmlns:a16="http://schemas.microsoft.com/office/drawing/2014/main" id="{1E98D95C-80EB-388B-865E-D15895AB15FE}"/>
               </a:ext>
             </a:extLst>
           </p:cNvPr>
@@ -9405,7 +9405,7 @@
           <p:cNvPr id="10" name="AutoShape 129">
             <a:extLst>
               <a:ext uri="{FF2B5EF4-FFF2-40B4-BE49-F238E27FC236}">
-                <a16:creationId xmlns:a16="http://schemas.microsoft.com/office/drawing/2014/main" id="{5F1B44A9-78F7-C2B3-78E4-3E8D0F75AED3}"/>
+                <a16:creationId xmlns:a16="http://schemas.microsoft.com/office/drawing/2014/main" id="{A554686B-0074-B88A-FAEE-214D4E9360A5}"/>
               </a:ext>
             </a:extLst>
           </p:cNvPr>
@@ -9451,7 +9451,7 @@
           <p:cNvPr id="11" name="AutoShape 130">
             <a:extLst>
               <a:ext uri="{FF2B5EF4-FFF2-40B4-BE49-F238E27FC236}">
-                <a16:creationId xmlns:a16="http://schemas.microsoft.com/office/drawing/2014/main" id="{22EDDD77-9559-E285-C928-56273D3E6BD7}"/>
+                <a16:creationId xmlns:a16="http://schemas.microsoft.com/office/drawing/2014/main" id="{C1A19B37-D63C-04D5-4B85-E2F0E91B6068}"/>
               </a:ext>
             </a:extLst>
           </p:cNvPr>
@@ -9497,7 +9497,7 @@
           <p:cNvPr id="12" name="AutoShape 131">
             <a:extLst>
               <a:ext uri="{FF2B5EF4-FFF2-40B4-BE49-F238E27FC236}">
-                <a16:creationId xmlns:a16="http://schemas.microsoft.com/office/drawing/2014/main" id="{0CF3D93F-F548-5EC4-32CE-58E0BE3D1DF6}"/>
+                <a16:creationId xmlns:a16="http://schemas.microsoft.com/office/drawing/2014/main" id="{EFF2326C-ED5A-E00D-BE58-78C66EC4B56C}"/>
               </a:ext>
             </a:extLst>
           </p:cNvPr>
@@ -9543,7 +9543,7 @@
           <p:cNvPr id="13" name="AutoShape 132">
             <a:extLst>
               <a:ext uri="{FF2B5EF4-FFF2-40B4-BE49-F238E27FC236}">
-                <a16:creationId xmlns:a16="http://schemas.microsoft.com/office/drawing/2014/main" id="{7F3AF35B-AC15-CD03-68C1-1ED7B152601F}"/>
+                <a16:creationId xmlns:a16="http://schemas.microsoft.com/office/drawing/2014/main" id="{BC2065DF-16C1-C7C9-D310-96AD3D9BDA9E}"/>
               </a:ext>
             </a:extLst>
           </p:cNvPr>
@@ -9589,7 +9589,7 @@
           <p:cNvPr id="14" name="AutoShape 133">
             <a:extLst>
               <a:ext uri="{FF2B5EF4-FFF2-40B4-BE49-F238E27FC236}">
-                <a16:creationId xmlns:a16="http://schemas.microsoft.com/office/drawing/2014/main" id="{75DD24C7-F596-F887-80DF-CA62E58E0D29}"/>
+                <a16:creationId xmlns:a16="http://schemas.microsoft.com/office/drawing/2014/main" id="{D09F8F4F-C403-2CB5-B563-DE5090BA3298}"/>
               </a:ext>
             </a:extLst>
           </p:cNvPr>
@@ -9635,7 +9635,7 @@
           <p:cNvPr id="15" name="AutoShape 134">
             <a:extLst>
               <a:ext uri="{FF2B5EF4-FFF2-40B4-BE49-F238E27FC236}">
-                <a16:creationId xmlns:a16="http://schemas.microsoft.com/office/drawing/2014/main" id="{FB9874DA-1971-A40F-E4BD-A4D9E10FE077}"/>
+                <a16:creationId xmlns:a16="http://schemas.microsoft.com/office/drawing/2014/main" id="{F8D5971E-470B-9444-A65A-3BDFE0599412}"/>
               </a:ext>
             </a:extLst>
           </p:cNvPr>
@@ -9681,7 +9681,7 @@
           <p:cNvPr id="16" name="AutoShape 135">
             <a:extLst>
               <a:ext uri="{FF2B5EF4-FFF2-40B4-BE49-F238E27FC236}">
-                <a16:creationId xmlns:a16="http://schemas.microsoft.com/office/drawing/2014/main" id="{28E36A17-8F18-1DBB-57F0-7119A5F75B9A}"/>
+                <a16:creationId xmlns:a16="http://schemas.microsoft.com/office/drawing/2014/main" id="{A565A48B-E549-883A-803C-6250A7B5DDD9}"/>
               </a:ext>
             </a:extLst>
           </p:cNvPr>
@@ -9727,7 +9727,7 @@
           <p:cNvPr id="17" name="AutoShape 136">
             <a:extLst>
               <a:ext uri="{FF2B5EF4-FFF2-40B4-BE49-F238E27FC236}">
-                <a16:creationId xmlns:a16="http://schemas.microsoft.com/office/drawing/2014/main" id="{4031753D-141D-0984-0CF3-D3EE1061007C}"/>
+                <a16:creationId xmlns:a16="http://schemas.microsoft.com/office/drawing/2014/main" id="{86D6FA21-E8EC-2FEE-F047-FA8EE9ACAAAA}"/>
               </a:ext>
             </a:extLst>
           </p:cNvPr>
@@ -9773,7 +9773,7 @@
           <p:cNvPr id="18" name="AutoShape 137">
             <a:extLst>
               <a:ext uri="{FF2B5EF4-FFF2-40B4-BE49-F238E27FC236}">
-                <a16:creationId xmlns:a16="http://schemas.microsoft.com/office/drawing/2014/main" id="{5D7B5F50-4DC3-FF51-BFD2-A188D259BA00}"/>
+                <a16:creationId xmlns:a16="http://schemas.microsoft.com/office/drawing/2014/main" id="{AA43B24D-88C4-13F1-CC6A-EDA9068BFABC}"/>
               </a:ext>
             </a:extLst>
           </p:cNvPr>
@@ -9819,7 +9819,7 @@
           <p:cNvPr id="19" name="AutoShape 139">
             <a:extLst>
               <a:ext uri="{FF2B5EF4-FFF2-40B4-BE49-F238E27FC236}">
-                <a16:creationId xmlns:a16="http://schemas.microsoft.com/office/drawing/2014/main" id="{43060AAA-AC8B-7535-B9DF-7B07C9FAA7EB}"/>
+                <a16:creationId xmlns:a16="http://schemas.microsoft.com/office/drawing/2014/main" id="{1F0E3FC6-A471-5446-9179-63AE83253A71}"/>
               </a:ext>
             </a:extLst>
           </p:cNvPr>
@@ -9865,7 +9865,7 @@
           <p:cNvPr id="20" name="AutoShape 140">
             <a:extLst>
               <a:ext uri="{FF2B5EF4-FFF2-40B4-BE49-F238E27FC236}">
-                <a16:creationId xmlns:a16="http://schemas.microsoft.com/office/drawing/2014/main" id="{01A7E5AA-390E-7056-DE2A-A9298B2F6D24}"/>
+                <a16:creationId xmlns:a16="http://schemas.microsoft.com/office/drawing/2014/main" id="{E1196BE0-3976-D611-6A47-75372453649A}"/>
               </a:ext>
             </a:extLst>
           </p:cNvPr>
@@ -9911,7 +9911,7 @@
           <p:cNvPr id="21" name="AutoShape 141">
             <a:extLst>
               <a:ext uri="{FF2B5EF4-FFF2-40B4-BE49-F238E27FC236}">
-                <a16:creationId xmlns:a16="http://schemas.microsoft.com/office/drawing/2014/main" id="{BD606E73-A996-F0E4-FC45-D6F14AB3E030}"/>
+                <a16:creationId xmlns:a16="http://schemas.microsoft.com/office/drawing/2014/main" id="{6B210309-5EDF-BF7A-D713-E134A6D58CD1}"/>
               </a:ext>
             </a:extLst>
           </p:cNvPr>
@@ -9961,7 +9961,7 @@
           <p:cNvPr id="22" name="AutoShape 142">
             <a:extLst>
               <a:ext uri="{FF2B5EF4-FFF2-40B4-BE49-F238E27FC236}">
-                <a16:creationId xmlns:a16="http://schemas.microsoft.com/office/drawing/2014/main" id="{51AF7B2B-2DCB-62FD-B99E-781B79747A35}"/>
+                <a16:creationId xmlns:a16="http://schemas.microsoft.com/office/drawing/2014/main" id="{596099F9-2011-6D4B-B063-CEB876B617CD}"/>
               </a:ext>
             </a:extLst>
           </p:cNvPr>
@@ -10011,7 +10011,7 @@
           <p:cNvPr id="23" name="AutoShape 143">
             <a:extLst>
               <a:ext uri="{FF2B5EF4-FFF2-40B4-BE49-F238E27FC236}">
-                <a16:creationId xmlns:a16="http://schemas.microsoft.com/office/drawing/2014/main" id="{355FD566-B5DA-2A2F-83A4-3318AF3A9243}"/>
+                <a16:creationId xmlns:a16="http://schemas.microsoft.com/office/drawing/2014/main" id="{173AD98C-815F-596B-EF56-FEE22AF2E691}"/>
               </a:ext>
             </a:extLst>
           </p:cNvPr>
@@ -10057,7 +10057,7 @@
           <p:cNvPr id="24" name="AutoShape 144">
             <a:extLst>
               <a:ext uri="{FF2B5EF4-FFF2-40B4-BE49-F238E27FC236}">
-                <a16:creationId xmlns:a16="http://schemas.microsoft.com/office/drawing/2014/main" id="{987DBF8D-8ABE-609F-6D14-43354FFA669F}"/>
+                <a16:creationId xmlns:a16="http://schemas.microsoft.com/office/drawing/2014/main" id="{08E17DE8-35D0-F758-C4CC-1AE0260E6ABB}"/>
               </a:ext>
             </a:extLst>
           </p:cNvPr>
@@ -10103,7 +10103,7 @@
           <p:cNvPr id="25" name="AutoShape 145">
             <a:extLst>
               <a:ext uri="{FF2B5EF4-FFF2-40B4-BE49-F238E27FC236}">
-                <a16:creationId xmlns:a16="http://schemas.microsoft.com/office/drawing/2014/main" id="{BB21BAF4-1A0F-EF5A-B8EC-80484B0CFE62}"/>
+                <a16:creationId xmlns:a16="http://schemas.microsoft.com/office/drawing/2014/main" id="{3690FDC3-2D25-9633-F747-D7651C8EB151}"/>
               </a:ext>
             </a:extLst>
           </p:cNvPr>
@@ -10147,7 +10147,7 @@
     </p:spTree>
     <p:extLst>
       <p:ext uri="{BB962C8B-B14F-4D97-AF65-F5344CB8AC3E}">
-        <p14:creationId xmlns:p14="http://schemas.microsoft.com/office/powerpoint/2010/main" val="979608960"/>
+        <p14:creationId xmlns:p14="http://schemas.microsoft.com/office/powerpoint/2010/main" val="165364987"/>
       </p:ext>
     </p:extLst>
   </p:cSld>
@@ -10179,7 +10179,7 @@
           <p:cNvPr id="2" name="AutoShape 146">
             <a:extLst>
               <a:ext uri="{FF2B5EF4-FFF2-40B4-BE49-F238E27FC236}">
-                <a16:creationId xmlns:a16="http://schemas.microsoft.com/office/drawing/2014/main" id="{F788C881-17FD-10E8-17D0-C459A28BD12F}"/>
+                <a16:creationId xmlns:a16="http://schemas.microsoft.com/office/drawing/2014/main" id="{82240FD7-B486-8A43-DFED-F9983A6AA038}"/>
               </a:ext>
             </a:extLst>
           </p:cNvPr>
@@ -10225,7 +10225,7 @@
           <p:cNvPr id="3" name="AutoShape 147">
             <a:extLst>
               <a:ext uri="{FF2B5EF4-FFF2-40B4-BE49-F238E27FC236}">
-                <a16:creationId xmlns:a16="http://schemas.microsoft.com/office/drawing/2014/main" id="{2D56E4D0-4A0E-5E92-5907-A7655D592289}"/>
+                <a16:creationId xmlns:a16="http://schemas.microsoft.com/office/drawing/2014/main" id="{8CCB24C8-B838-E7BE-FE27-59713F7BF2DB}"/>
               </a:ext>
             </a:extLst>
           </p:cNvPr>
@@ -10271,7 +10271,7 @@
           <p:cNvPr id="4" name="AutoShape 148">
             <a:extLst>
               <a:ext uri="{FF2B5EF4-FFF2-40B4-BE49-F238E27FC236}">
-                <a16:creationId xmlns:a16="http://schemas.microsoft.com/office/drawing/2014/main" id="{4B586C12-E9D0-A598-E7DA-458FB94DC2E4}"/>
+                <a16:creationId xmlns:a16="http://schemas.microsoft.com/office/drawing/2014/main" id="{285DD5DA-89AA-7EFD-56EF-BC3F7CB05D72}"/>
               </a:ext>
             </a:extLst>
           </p:cNvPr>
@@ -10317,7 +10317,7 @@
           <p:cNvPr id="5" name="AutoShape 149">
             <a:extLst>
               <a:ext uri="{FF2B5EF4-FFF2-40B4-BE49-F238E27FC236}">
-                <a16:creationId xmlns:a16="http://schemas.microsoft.com/office/drawing/2014/main" id="{C32079DE-DB3E-5332-4BC5-5640E5C98C09}"/>
+                <a16:creationId xmlns:a16="http://schemas.microsoft.com/office/drawing/2014/main" id="{5941AD72-4A6A-089E-A409-A4318396650B}"/>
               </a:ext>
             </a:extLst>
           </p:cNvPr>
@@ -10363,7 +10363,7 @@
           <p:cNvPr id="6" name="AutoShape 150">
             <a:extLst>
               <a:ext uri="{FF2B5EF4-FFF2-40B4-BE49-F238E27FC236}">
-                <a16:creationId xmlns:a16="http://schemas.microsoft.com/office/drawing/2014/main" id="{1AE8109C-F795-660D-B411-C67571227429}"/>
+                <a16:creationId xmlns:a16="http://schemas.microsoft.com/office/drawing/2014/main" id="{C69FFAD4-22AE-0304-E26F-952B2CEF1555}"/>
               </a:ext>
             </a:extLst>
           </p:cNvPr>
@@ -10409,7 +10409,7 @@
           <p:cNvPr id="7" name="AutoShape 151">
             <a:extLst>
               <a:ext uri="{FF2B5EF4-FFF2-40B4-BE49-F238E27FC236}">
-                <a16:creationId xmlns:a16="http://schemas.microsoft.com/office/drawing/2014/main" id="{CFCEEFC3-0619-616E-B2EF-0D6C8824D6E0}"/>
+                <a16:creationId xmlns:a16="http://schemas.microsoft.com/office/drawing/2014/main" id="{08E2F7A9-6A1F-6047-2FCB-3A82D5DACE3B}"/>
               </a:ext>
             </a:extLst>
           </p:cNvPr>
@@ -10455,7 +10455,7 @@
           <p:cNvPr id="8" name="AutoShape 152">
             <a:extLst>
               <a:ext uri="{FF2B5EF4-FFF2-40B4-BE49-F238E27FC236}">
-                <a16:creationId xmlns:a16="http://schemas.microsoft.com/office/drawing/2014/main" id="{0D05DE39-55EC-BFCD-88B6-B448A0C06939}"/>
+                <a16:creationId xmlns:a16="http://schemas.microsoft.com/office/drawing/2014/main" id="{A579427F-30A7-023B-79EF-F6B69FA9B4B8}"/>
               </a:ext>
             </a:extLst>
           </p:cNvPr>
@@ -10501,7 +10501,7 @@
           <p:cNvPr id="9" name="AutoShape 153">
             <a:extLst>
               <a:ext uri="{FF2B5EF4-FFF2-40B4-BE49-F238E27FC236}">
-                <a16:creationId xmlns:a16="http://schemas.microsoft.com/office/drawing/2014/main" id="{F5D8BD5D-7568-907C-49DD-1305F9C88AE2}"/>
+                <a16:creationId xmlns:a16="http://schemas.microsoft.com/office/drawing/2014/main" id="{388F5630-234E-E6B7-B872-FC85A0AF20EC}"/>
               </a:ext>
             </a:extLst>
           </p:cNvPr>
@@ -10547,7 +10547,7 @@
           <p:cNvPr id="10" name="AutoShape 154">
             <a:extLst>
               <a:ext uri="{FF2B5EF4-FFF2-40B4-BE49-F238E27FC236}">
-                <a16:creationId xmlns:a16="http://schemas.microsoft.com/office/drawing/2014/main" id="{3351266F-CC09-DA8B-D628-CF449D0189D4}"/>
+                <a16:creationId xmlns:a16="http://schemas.microsoft.com/office/drawing/2014/main" id="{71F9A5A2-984B-C8DD-0A22-8170406921B3}"/>
               </a:ext>
             </a:extLst>
           </p:cNvPr>
@@ -10593,7 +10593,7 @@
           <p:cNvPr id="11" name="AutoShape 155">
             <a:extLst>
               <a:ext uri="{FF2B5EF4-FFF2-40B4-BE49-F238E27FC236}">
-                <a16:creationId xmlns:a16="http://schemas.microsoft.com/office/drawing/2014/main" id="{1A8808EE-3DE2-8810-7B97-4C3213EBC17A}"/>
+                <a16:creationId xmlns:a16="http://schemas.microsoft.com/office/drawing/2014/main" id="{344F3551-D041-B610-E7E5-01BC4A920F65}"/>
               </a:ext>
             </a:extLst>
           </p:cNvPr>
@@ -10639,7 +10639,7 @@
           <p:cNvPr id="12" name="AutoShape 156">
             <a:extLst>
               <a:ext uri="{FF2B5EF4-FFF2-40B4-BE49-F238E27FC236}">
-                <a16:creationId xmlns:a16="http://schemas.microsoft.com/office/drawing/2014/main" id="{0DA0D7BD-7FA1-8057-FC66-02F11344A7C8}"/>
+                <a16:creationId xmlns:a16="http://schemas.microsoft.com/office/drawing/2014/main" id="{5E54051E-81D2-BA81-082C-3B361AA595D4}"/>
               </a:ext>
             </a:extLst>
           </p:cNvPr>
@@ -10685,7 +10685,7 @@
           <p:cNvPr id="13" name="AutoShape 157">
             <a:extLst>
               <a:ext uri="{FF2B5EF4-FFF2-40B4-BE49-F238E27FC236}">
-                <a16:creationId xmlns:a16="http://schemas.microsoft.com/office/drawing/2014/main" id="{C6329F41-403B-8291-4DC4-AF2A021D0723}"/>
+                <a16:creationId xmlns:a16="http://schemas.microsoft.com/office/drawing/2014/main" id="{BB4D47B6-F145-DF9A-8A56-2485F57F4AF0}"/>
               </a:ext>
             </a:extLst>
           </p:cNvPr>
@@ -10731,7 +10731,7 @@
           <p:cNvPr id="14" name="AutoShape 158">
             <a:extLst>
               <a:ext uri="{FF2B5EF4-FFF2-40B4-BE49-F238E27FC236}">
-                <a16:creationId xmlns:a16="http://schemas.microsoft.com/office/drawing/2014/main" id="{EA46EAAC-8202-B329-50B7-344E8A8AAD4C}"/>
+                <a16:creationId xmlns:a16="http://schemas.microsoft.com/office/drawing/2014/main" id="{9BEA6300-56E7-201F-D145-5E3DB2B53CE7}"/>
               </a:ext>
             </a:extLst>
           </p:cNvPr>
@@ -10781,7 +10781,7 @@
           <p:cNvPr id="15" name="AutoShape 159">
             <a:extLst>
               <a:ext uri="{FF2B5EF4-FFF2-40B4-BE49-F238E27FC236}">
-                <a16:creationId xmlns:a16="http://schemas.microsoft.com/office/drawing/2014/main" id="{E7979488-DFAA-5AFB-A3D4-1CF9A8C78937}"/>
+                <a16:creationId xmlns:a16="http://schemas.microsoft.com/office/drawing/2014/main" id="{8E7D6C94-C480-D4C0-7BC2-2B09E9D9720F}"/>
               </a:ext>
             </a:extLst>
           </p:cNvPr>
@@ -10831,7 +10831,7 @@
           <p:cNvPr id="16" name="AutoShape 160">
             <a:extLst>
               <a:ext uri="{FF2B5EF4-FFF2-40B4-BE49-F238E27FC236}">
-                <a16:creationId xmlns:a16="http://schemas.microsoft.com/office/drawing/2014/main" id="{F62C42CB-D717-481A-AA69-D6EF07C48ADC}"/>
+                <a16:creationId xmlns:a16="http://schemas.microsoft.com/office/drawing/2014/main" id="{4EB816C5-0185-FC9C-6F75-77431F7AB18E}"/>
               </a:ext>
             </a:extLst>
           </p:cNvPr>
@@ -10877,7 +10877,7 @@
           <p:cNvPr id="17" name="AutoShape 161">
             <a:extLst>
               <a:ext uri="{FF2B5EF4-FFF2-40B4-BE49-F238E27FC236}">
-                <a16:creationId xmlns:a16="http://schemas.microsoft.com/office/drawing/2014/main" id="{BA4090EC-9D14-36A4-8219-C1D4E7FBBC30}"/>
+                <a16:creationId xmlns:a16="http://schemas.microsoft.com/office/drawing/2014/main" id="{74E47B09-B0C9-271D-8801-5097BC6D810B}"/>
               </a:ext>
             </a:extLst>
           </p:cNvPr>
@@ -10923,7 +10923,7 @@
           <p:cNvPr id="18" name="AutoShape 162">
             <a:extLst>
               <a:ext uri="{FF2B5EF4-FFF2-40B4-BE49-F238E27FC236}">
-                <a16:creationId xmlns:a16="http://schemas.microsoft.com/office/drawing/2014/main" id="{4FDA0DE7-C333-3CAA-BBAB-EF15F764AF4B}"/>
+                <a16:creationId xmlns:a16="http://schemas.microsoft.com/office/drawing/2014/main" id="{4E427036-0AB6-461B-7E4E-532485D342A1}"/>
               </a:ext>
             </a:extLst>
           </p:cNvPr>
@@ -10969,7 +10969,7 @@
           <p:cNvPr id="19" name="AutoShape 163">
             <a:extLst>
               <a:ext uri="{FF2B5EF4-FFF2-40B4-BE49-F238E27FC236}">
-                <a16:creationId xmlns:a16="http://schemas.microsoft.com/office/drawing/2014/main" id="{C9ED9DF9-DA6D-39AA-A2D2-7E98FE4DD125}"/>
+                <a16:creationId xmlns:a16="http://schemas.microsoft.com/office/drawing/2014/main" id="{20B7AF14-FE10-7127-2C1C-8007ED581844}"/>
               </a:ext>
             </a:extLst>
           </p:cNvPr>
@@ -11015,7 +11015,7 @@
           <p:cNvPr id="20" name="AutoShape 164">
             <a:extLst>
               <a:ext uri="{FF2B5EF4-FFF2-40B4-BE49-F238E27FC236}">
-                <a16:creationId xmlns:a16="http://schemas.microsoft.com/office/drawing/2014/main" id="{7E932A10-27D0-BC8C-569E-3F16E5A0ED10}"/>
+                <a16:creationId xmlns:a16="http://schemas.microsoft.com/office/drawing/2014/main" id="{EF3A3270-72CD-16A8-CC3B-D43B0FFEE682}"/>
               </a:ext>
             </a:extLst>
           </p:cNvPr>
@@ -11061,7 +11061,7 @@
           <p:cNvPr id="21" name="AutoShape 165">
             <a:extLst>
               <a:ext uri="{FF2B5EF4-FFF2-40B4-BE49-F238E27FC236}">
-                <a16:creationId xmlns:a16="http://schemas.microsoft.com/office/drawing/2014/main" id="{60A2543D-A4BD-39F2-4A28-FF77AFA388C8}"/>
+                <a16:creationId xmlns:a16="http://schemas.microsoft.com/office/drawing/2014/main" id="{C5562363-D194-EC4C-B156-E92DF0798E89}"/>
               </a:ext>
             </a:extLst>
           </p:cNvPr>
@@ -11107,7 +11107,7 @@
           <p:cNvPr id="22" name="AutoShape 166">
             <a:extLst>
               <a:ext uri="{FF2B5EF4-FFF2-40B4-BE49-F238E27FC236}">
-                <a16:creationId xmlns:a16="http://schemas.microsoft.com/office/drawing/2014/main" id="{10057F64-C7AE-E504-A283-F9F665649C0B}"/>
+                <a16:creationId xmlns:a16="http://schemas.microsoft.com/office/drawing/2014/main" id="{D52DE1CE-F575-9C1B-FBE1-B77203FBBBFA}"/>
               </a:ext>
             </a:extLst>
           </p:cNvPr>
@@ -11153,7 +11153,7 @@
           <p:cNvPr id="23" name="AutoShape 167">
             <a:extLst>
               <a:ext uri="{FF2B5EF4-FFF2-40B4-BE49-F238E27FC236}">
-                <a16:creationId xmlns:a16="http://schemas.microsoft.com/office/drawing/2014/main" id="{555657D0-7D58-D2E4-412A-2FF78D6B8500}"/>
+                <a16:creationId xmlns:a16="http://schemas.microsoft.com/office/drawing/2014/main" id="{E95673E9-FA56-EB87-5E0D-9261FE228D34}"/>
               </a:ext>
             </a:extLst>
           </p:cNvPr>
@@ -11203,7 +11203,7 @@
           <p:cNvPr id="24" name="AutoShape 168">
             <a:extLst>
               <a:ext uri="{FF2B5EF4-FFF2-40B4-BE49-F238E27FC236}">
-                <a16:creationId xmlns:a16="http://schemas.microsoft.com/office/drawing/2014/main" id="{12ABFC46-A87F-0514-E714-86F302E939D6}"/>
+                <a16:creationId xmlns:a16="http://schemas.microsoft.com/office/drawing/2014/main" id="{0A6FC48F-D9D3-1BD4-C2CC-B19CD00AF9C5}"/>
               </a:ext>
             </a:extLst>
           </p:cNvPr>
@@ -11253,7 +11253,7 @@
           <p:cNvPr id="25" name="AutoShape 169">
             <a:extLst>
               <a:ext uri="{FF2B5EF4-FFF2-40B4-BE49-F238E27FC236}">
-                <a16:creationId xmlns:a16="http://schemas.microsoft.com/office/drawing/2014/main" id="{2C1AB71B-20FF-CD1F-D00F-FD685986DE08}"/>
+                <a16:creationId xmlns:a16="http://schemas.microsoft.com/office/drawing/2014/main" id="{ED622738-EAE3-CA2E-6D62-D8478B85F077}"/>
               </a:ext>
             </a:extLst>
           </p:cNvPr>
@@ -11301,7 +11301,7 @@
     </p:spTree>
     <p:extLst>
       <p:ext uri="{BB962C8B-B14F-4D97-AF65-F5344CB8AC3E}">
-        <p14:creationId xmlns:p14="http://schemas.microsoft.com/office/powerpoint/2010/main" val="13845736"/>
+        <p14:creationId xmlns:p14="http://schemas.microsoft.com/office/powerpoint/2010/main" val="103169648"/>
       </p:ext>
     </p:extLst>
   </p:cSld>
@@ -11333,7 +11333,7 @@
           <p:cNvPr id="2" name="AutoShape 170">
             <a:extLst>
               <a:ext uri="{FF2B5EF4-FFF2-40B4-BE49-F238E27FC236}">
-                <a16:creationId xmlns:a16="http://schemas.microsoft.com/office/drawing/2014/main" id="{58E05954-3206-B2AC-E5CB-98711810ADE3}"/>
+                <a16:creationId xmlns:a16="http://schemas.microsoft.com/office/drawing/2014/main" id="{70712C53-04EA-6512-633B-2AC93CA873F3}"/>
               </a:ext>
             </a:extLst>
           </p:cNvPr>
@@ -11383,7 +11383,7 @@
           <p:cNvPr id="3" name="AutoShape 171">
             <a:extLst>
               <a:ext uri="{FF2B5EF4-FFF2-40B4-BE49-F238E27FC236}">
-                <a16:creationId xmlns:a16="http://schemas.microsoft.com/office/drawing/2014/main" id="{CEC90CA9-C24B-EA43-C3C9-71BA61F0484C}"/>
+                <a16:creationId xmlns:a16="http://schemas.microsoft.com/office/drawing/2014/main" id="{8C13FC09-1E1F-5F1B-8DB2-2AB3DD94DDEB}"/>
               </a:ext>
             </a:extLst>
           </p:cNvPr>
@@ -11433,7 +11433,7 @@
           <p:cNvPr id="4" name="AutoShape 172">
             <a:extLst>
               <a:ext uri="{FF2B5EF4-FFF2-40B4-BE49-F238E27FC236}">
-                <a16:creationId xmlns:a16="http://schemas.microsoft.com/office/drawing/2014/main" id="{C1B19189-4FE1-C0C4-22C7-2B7BD3258D81}"/>
+                <a16:creationId xmlns:a16="http://schemas.microsoft.com/office/drawing/2014/main" id="{DE98545D-2298-68E6-4189-D92C68C29074}"/>
               </a:ext>
             </a:extLst>
           </p:cNvPr>
@@ -11479,7 +11479,7 @@
           <p:cNvPr id="5" name="AutoShape 173">
             <a:extLst>
               <a:ext uri="{FF2B5EF4-FFF2-40B4-BE49-F238E27FC236}">
-                <a16:creationId xmlns:a16="http://schemas.microsoft.com/office/drawing/2014/main" id="{9568392B-2F27-0491-5E50-AC212227521A}"/>
+                <a16:creationId xmlns:a16="http://schemas.microsoft.com/office/drawing/2014/main" id="{F7135D31-CD3D-28BE-2910-087187844389}"/>
               </a:ext>
             </a:extLst>
           </p:cNvPr>
@@ -11525,7 +11525,7 @@
           <p:cNvPr id="6" name="AutoShape 174">
             <a:extLst>
               <a:ext uri="{FF2B5EF4-FFF2-40B4-BE49-F238E27FC236}">
-                <a16:creationId xmlns:a16="http://schemas.microsoft.com/office/drawing/2014/main" id="{190A412F-6763-2FAB-100A-7DBA93BA12EF}"/>
+                <a16:creationId xmlns:a16="http://schemas.microsoft.com/office/drawing/2014/main" id="{A26187DA-039A-DF06-EDE9-DB63EEF3D8D7}"/>
               </a:ext>
             </a:extLst>
           </p:cNvPr>
@@ -11571,7 +11571,7 @@
           <p:cNvPr id="7" name="AutoShape 175">
             <a:extLst>
               <a:ext uri="{FF2B5EF4-FFF2-40B4-BE49-F238E27FC236}">
-                <a16:creationId xmlns:a16="http://schemas.microsoft.com/office/drawing/2014/main" id="{2DC79F6D-6425-D7D5-F7C3-957A22F3FA44}"/>
+                <a16:creationId xmlns:a16="http://schemas.microsoft.com/office/drawing/2014/main" id="{6D70CE5D-F8C8-0125-BFD2-A86F93981553}"/>
               </a:ext>
             </a:extLst>
           </p:cNvPr>
@@ -11617,7 +11617,7 @@
           <p:cNvPr id="8" name="AutoShape 176">
             <a:extLst>
               <a:ext uri="{FF2B5EF4-FFF2-40B4-BE49-F238E27FC236}">
-                <a16:creationId xmlns:a16="http://schemas.microsoft.com/office/drawing/2014/main" id="{F5EFC3C4-0438-4AC7-2B18-75D6545BF8B3}"/>
+                <a16:creationId xmlns:a16="http://schemas.microsoft.com/office/drawing/2014/main" id="{FB7D04D8-E615-5378-D791-1BCD45A5DEC2}"/>
               </a:ext>
             </a:extLst>
           </p:cNvPr>
@@ -11667,7 +11667,7 @@
           <p:cNvPr id="9" name="AutoShape 177">
             <a:extLst>
               <a:ext uri="{FF2B5EF4-FFF2-40B4-BE49-F238E27FC236}">
-                <a16:creationId xmlns:a16="http://schemas.microsoft.com/office/drawing/2014/main" id="{62546B80-5ECC-5DED-38EC-F0FA3B92E0F9}"/>
+                <a16:creationId xmlns:a16="http://schemas.microsoft.com/office/drawing/2014/main" id="{269AC92C-1562-71CD-B90B-B8E609C82959}"/>
               </a:ext>
             </a:extLst>
           </p:cNvPr>
@@ -11717,7 +11717,7 @@
           <p:cNvPr id="10" name="AutoShape 178">
             <a:extLst>
               <a:ext uri="{FF2B5EF4-FFF2-40B4-BE49-F238E27FC236}">
-                <a16:creationId xmlns:a16="http://schemas.microsoft.com/office/drawing/2014/main" id="{645A3EEA-5728-B91F-246C-3E8EC7AE424F}"/>
+                <a16:creationId xmlns:a16="http://schemas.microsoft.com/office/drawing/2014/main" id="{4A7FDF69-7CC7-ACB3-D2D5-CC2DFF5463F6}"/>
               </a:ext>
             </a:extLst>
           </p:cNvPr>
@@ -11767,7 +11767,7 @@
           <p:cNvPr id="11" name="AutoShape 179">
             <a:extLst>
               <a:ext uri="{FF2B5EF4-FFF2-40B4-BE49-F238E27FC236}">
-                <a16:creationId xmlns:a16="http://schemas.microsoft.com/office/drawing/2014/main" id="{EEF56B64-8178-67FE-3E3F-0F6B7A16EB40}"/>
+                <a16:creationId xmlns:a16="http://schemas.microsoft.com/office/drawing/2014/main" id="{F162067F-4370-C52B-5A74-B111CE32D7C2}"/>
               </a:ext>
             </a:extLst>
           </p:cNvPr>
@@ -11813,7 +11813,7 @@
           <p:cNvPr id="12" name="AutoShape 180">
             <a:extLst>
               <a:ext uri="{FF2B5EF4-FFF2-40B4-BE49-F238E27FC236}">
-                <a16:creationId xmlns:a16="http://schemas.microsoft.com/office/drawing/2014/main" id="{C366D821-40FC-F18C-CC04-C0B435D0B654}"/>
+                <a16:creationId xmlns:a16="http://schemas.microsoft.com/office/drawing/2014/main" id="{14C97163-CC97-7E30-8DAF-52F0E585CC19}"/>
               </a:ext>
             </a:extLst>
           </p:cNvPr>
@@ -11859,7 +11859,7 @@
           <p:cNvPr id="13" name="AutoShape 181">
             <a:extLst>
               <a:ext uri="{FF2B5EF4-FFF2-40B4-BE49-F238E27FC236}">
-                <a16:creationId xmlns:a16="http://schemas.microsoft.com/office/drawing/2014/main" id="{9B6360DE-EA17-4086-BDD2-B1E04EDBB288}"/>
+                <a16:creationId xmlns:a16="http://schemas.microsoft.com/office/drawing/2014/main" id="{ED7A9166-FF0E-EDFB-0D37-83F2473981AC}"/>
               </a:ext>
             </a:extLst>
           </p:cNvPr>
@@ -11905,7 +11905,7 @@
           <p:cNvPr id="14" name="AutoShape 182">
             <a:extLst>
               <a:ext uri="{FF2B5EF4-FFF2-40B4-BE49-F238E27FC236}">
-                <a16:creationId xmlns:a16="http://schemas.microsoft.com/office/drawing/2014/main" id="{F1C0F8A7-4883-9A74-B58C-C44890A0D896}"/>
+                <a16:creationId xmlns:a16="http://schemas.microsoft.com/office/drawing/2014/main" id="{04735546-C1BC-E929-8236-A329D20A8344}"/>
               </a:ext>
             </a:extLst>
           </p:cNvPr>
@@ -11951,7 +11951,7 @@
           <p:cNvPr id="15" name="AutoShape 183">
             <a:extLst>
               <a:ext uri="{FF2B5EF4-FFF2-40B4-BE49-F238E27FC236}">
-                <a16:creationId xmlns:a16="http://schemas.microsoft.com/office/drawing/2014/main" id="{C4F5FECF-7100-F326-46DC-48D268C7735A}"/>
+                <a16:creationId xmlns:a16="http://schemas.microsoft.com/office/drawing/2014/main" id="{4229F2FE-4179-10E2-43EA-E94BE0D64546}"/>
               </a:ext>
             </a:extLst>
           </p:cNvPr>
@@ -11993,7 +11993,7 @@
     </p:spTree>
     <p:extLst>
       <p:ext uri="{BB962C8B-B14F-4D97-AF65-F5344CB8AC3E}">
-        <p14:creationId xmlns:p14="http://schemas.microsoft.com/office/powerpoint/2010/main" val="3030896701"/>
+        <p14:creationId xmlns:p14="http://schemas.microsoft.com/office/powerpoint/2010/main" val="1997557279"/>
       </p:ext>
     </p:extLst>
   </p:cSld>
